--- a/PRIO_Plano_Trabalho_CAPEX_2027_ClusterSul.pptx
+++ b/PRIO_Plano_Trabalho_CAPEX_2027_ClusterSul.pptx
@@ -216,10 +216,10 @@
                 <c:formatCode>General</c:formatCode>
                 <c:ptCount val="2"/>
                 <c:pt idx="0">
-                  <c:v>13.98</c:v>
+                  <c:v>19.05</c:v>
                 </c:pt>
                 <c:pt idx="1">
-                  <c:v>4.28</c:v>
+                  <c:v>3.64</c:v>
                 </c:pt>
               </c:numCache>
             </c:numRef>
@@ -2186,7 +2186,7 @@
                 <a:ea typeface="Cambria" pitchFamily="34" charset="-122"/>
                 <a:cs typeface="Cambria" pitchFamily="34" charset="-120"/>
               </a:rPr>
-              <a:t>US$ 18,3 mi</a:t>
+              <a:t>US$ 22,7 mi</a:t>
             </a:r>
             <a:endParaRPr lang="en-US" sz="2600" dirty="0"/>
           </a:p>
@@ -2325,7 +2325,7 @@
                 <a:ea typeface="Cambria" pitchFamily="34" charset="-122"/>
                 <a:cs typeface="Cambria" pitchFamily="34" charset="-120"/>
               </a:rPr>
-              <a:t>94</a:t>
+              <a:t>97</a:t>
             </a:r>
             <a:endParaRPr lang="en-US" sz="2600" dirty="0"/>
           </a:p>
@@ -2891,7 +2891,7 @@
                             <a:srgbClr val="1C2B33"/>
                           </a:solidFill>
                         </a:rPr>
-                        <a:t>US$ 14,0 mi</a:t>
+                        <a:t>US$ 19,1 mi</a:t>
                       </a:r>
                       <a:endParaRPr lang="en-US" sz="1050" dirty="0"/>
                     </a:p>
@@ -2952,7 +2952,7 @@
                             <a:srgbClr val="1C2B33"/>
                           </a:solidFill>
                         </a:rPr>
-                        <a:t>59</a:t>
+                        <a:t>70</a:t>
                       </a:r>
                       <a:endParaRPr lang="en-US" sz="1050" dirty="0"/>
                     </a:p>
@@ -3076,7 +3076,7 @@
                             <a:srgbClr val="1C2B33"/>
                           </a:solidFill>
                         </a:rPr>
-                        <a:t>US$ 4,3 mi</a:t>
+                        <a:t>US$ 3,6 mi</a:t>
                       </a:r>
                       <a:endParaRPr lang="en-US" sz="1050" dirty="0"/>
                     </a:p>
@@ -3137,7 +3137,7 @@
                             <a:srgbClr val="1C2B33"/>
                           </a:solidFill>
                         </a:rPr>
-                        <a:t>35</a:t>
+                        <a:t>27</a:t>
                       </a:r>
                       <a:endParaRPr lang="en-US" sz="1050" dirty="0"/>
                     </a:p>
@@ -3261,7 +3261,7 @@
                             <a:srgbClr val="0B2A3D"/>
                           </a:solidFill>
                         </a:rPr>
-                        <a:t>US$ 18,3 mi</a:t>
+                        <a:t>US$ 22,7 mi</a:t>
                       </a:r>
                       <a:endParaRPr lang="en-US" sz="1050" dirty="0"/>
                     </a:p>
@@ -3322,7 +3322,7 @@
                             <a:srgbClr val="0B2A3D"/>
                           </a:solidFill>
                         </a:rPr>
-                        <a:t>94</a:t>
+                        <a:t>97</a:t>
                       </a:r>
                       <a:endParaRPr lang="en-US" sz="1050" dirty="0"/>
                     </a:p>
@@ -3894,7 +3894,7 @@
                 <a:ea typeface="Cambria" pitchFamily="34" charset="-122"/>
                 <a:cs typeface="Cambria" pitchFamily="34" charset="-120"/>
               </a:rPr>
-              <a:t>US$ 14,0 mi</a:t>
+              <a:t>US$ 19,1 mi</a:t>
             </a:r>
             <a:endParaRPr lang="en-US" sz="3300" dirty="0"/>
           </a:p>
@@ -4033,7 +4033,7 @@
                 <a:ea typeface="Cambria" pitchFamily="34" charset="-122"/>
                 <a:cs typeface="Cambria" pitchFamily="34" charset="-120"/>
               </a:rPr>
-              <a:t>US$ 9,0 mi</a:t>
+              <a:t>US$ 14,0 mi</a:t>
             </a:r>
             <a:endParaRPr lang="en-US" sz="1800" dirty="0"/>
           </a:p>
@@ -4233,7 +4233,7 @@
                 <a:ea typeface="Cambria" pitchFamily="34" charset="-122"/>
                 <a:cs typeface="Cambria" pitchFamily="34" charset="-120"/>
               </a:rPr>
-              <a:t>US$ 3,8 mi</a:t>
+              <a:t>US$ 6,0 mi</a:t>
             </a:r>
             <a:endParaRPr lang="en-US" sz="1800" dirty="0"/>
           </a:p>
@@ -4333,7 +4333,7 @@
                 <a:ea typeface="Cambria" pitchFamily="34" charset="-122"/>
                 <a:cs typeface="Cambria" pitchFamily="34" charset="-120"/>
               </a:rPr>
-              <a:t>US$ 10,2 mi</a:t>
+              <a:t>US$ 13,1 mi</a:t>
             </a:r>
             <a:endParaRPr lang="en-US" sz="1800" dirty="0"/>
           </a:p>
@@ -4512,7 +4512,7 @@
                 <a:ea typeface="Calibri" pitchFamily="34" charset="-122"/>
                 <a:cs typeface="Calibri" pitchFamily="34" charset="-120"/>
               </a:rPr>
-              <a:t>US$ 5,6 mi</a:t>
+              <a:t>US$ 8,6 mi</a:t>
             </a:r>
             <a:endParaRPr lang="en-US" sz="1100" dirty="0"/>
           </a:p>
@@ -4649,6 +4649,104 @@
                 <a:ea typeface="Calibri" pitchFamily="34" charset="-122"/>
                 <a:cs typeface="Calibri" pitchFamily="34" charset="-120"/>
               </a:rPr>
+              <a:t>P&amp;Q - Processos</a:t>
+            </a:r>
+            <a:endParaRPr lang="en-US" sz="1100" dirty="0"/>
+          </a:p>
+        </p:txBody>
+      </p:sp>
+      <p:sp>
+        <p:nvSpPr>
+          <p:cNvPr id="30" name="Text 28"/>
+          <p:cNvSpPr txBox="1"/>
+          <p:nvPr/>
+        </p:nvSpPr>
+        <p:spPr>
+          <a:xfrm>
+            <a:off x="3773729" y="4133088"/>
+            <a:ext cx="1815998" cy="365760"/>
+          </a:xfrm>
+          <a:prstGeom prst="rect">
+            <a:avLst/>
+          </a:prstGeom>
+          <a:noFill/>
+          <a:ln/>
+        </p:spPr>
+        <p:txBody>
+          <a:bodyPr wrap="square" lIns="0" tIns="0" rIns="0" bIns="0" rtlCol="0" anchor="ctr"/>
+          <a:lstStyle/>
+          <a:p>
+            <a:pPr algn="r" indent="0" marL="0">
+              <a:buNone/>
+            </a:pPr>
+            <a:r>
+              <a:rPr lang="en-US" sz="1100" b="1" dirty="0">
+                <a:solidFill>
+                  <a:srgbClr val="0B2A3D"/>
+                </a:solidFill>
+                <a:latin typeface="Calibri" pitchFamily="34" charset="0"/>
+                <a:ea typeface="Calibri" pitchFamily="34" charset="-122"/>
+                <a:cs typeface="Calibri" pitchFamily="34" charset="-120"/>
+              </a:rPr>
+              <a:t>US$ 2,1 mi</a:t>
+            </a:r>
+            <a:endParaRPr lang="en-US" sz="1100" dirty="0"/>
+          </a:p>
+        </p:txBody>
+      </p:sp>
+      <p:sp>
+        <p:nvSpPr>
+          <p:cNvPr id="31" name="Shape 29"/>
+          <p:cNvSpPr/>
+          <p:nvPr/>
+        </p:nvSpPr>
+        <p:spPr>
+          <a:xfrm>
+            <a:off x="457200" y="4498848"/>
+            <a:ext cx="5349240" cy="365760"/>
+          </a:xfrm>
+          <a:prstGeom prst="rect">
+            <a:avLst/>
+          </a:prstGeom>
+          <a:solidFill>
+            <a:srgbClr val="F0F4F5"/>
+          </a:solidFill>
+          <a:ln/>
+        </p:spPr>
+      </p:sp>
+      <p:sp>
+        <p:nvSpPr>
+          <p:cNvPr id="32" name="Text 30"/>
+          <p:cNvSpPr txBox="1"/>
+          <p:nvPr/>
+        </p:nvSpPr>
+        <p:spPr>
+          <a:xfrm>
+            <a:off x="566928" y="4498848"/>
+            <a:ext cx="3316529" cy="365760"/>
+          </a:xfrm>
+          <a:prstGeom prst="rect">
+            <a:avLst/>
+          </a:prstGeom>
+          <a:noFill/>
+          <a:ln/>
+        </p:spPr>
+        <p:txBody>
+          <a:bodyPr wrap="square" lIns="0" tIns="0" rIns="0" bIns="0" rtlCol="0" anchor="ctr"/>
+          <a:lstStyle/>
+          <a:p>
+            <a:pPr indent="0" marL="0">
+              <a:buNone/>
+            </a:pPr>
+            <a:r>
+              <a:rPr lang="en-US" sz="1100" dirty="0">
+                <a:solidFill>
+                  <a:srgbClr val="1C2B33"/>
+                </a:solidFill>
+                <a:latin typeface="Calibri" pitchFamily="34" charset="0"/>
+                <a:ea typeface="Calibri" pitchFamily="34" charset="-122"/>
+                <a:cs typeface="Calibri" pitchFamily="34" charset="-120"/>
+              </a:rPr>
               <a:t>Projetos</a:t>
             </a:r>
             <a:endParaRPr lang="en-US" sz="1100" dirty="0"/>
@@ -4657,13 +4755,13 @@
       </p:sp>
       <p:sp>
         <p:nvSpPr>
-          <p:cNvPr id="30" name="Text 28"/>
+          <p:cNvPr id="33" name="Text 31"/>
           <p:cNvSpPr txBox="1"/>
           <p:nvPr/>
         </p:nvSpPr>
         <p:spPr>
           <a:xfrm>
-            <a:off x="3773729" y="4133088"/>
+            <a:off x="3773729" y="4498848"/>
             <a:ext cx="1815998" cy="365760"/>
           </a:xfrm>
           <a:prstGeom prst="rect">
@@ -4696,33 +4794,13 @@
       </p:sp>
       <p:sp>
         <p:nvSpPr>
-          <p:cNvPr id="31" name="Shape 29"/>
-          <p:cNvSpPr/>
+          <p:cNvPr id="34" name="Text 32"/>
+          <p:cNvSpPr txBox="1"/>
           <p:nvPr/>
         </p:nvSpPr>
         <p:spPr>
           <a:xfrm>
-            <a:off x="457200" y="4498848"/>
-            <a:ext cx="5349240" cy="365760"/>
-          </a:xfrm>
-          <a:prstGeom prst="rect">
-            <a:avLst/>
-          </a:prstGeom>
-          <a:solidFill>
-            <a:srgbClr val="F0F4F5"/>
-          </a:solidFill>
-          <a:ln/>
-        </p:spPr>
-      </p:sp>
-      <p:sp>
-        <p:nvSpPr>
-          <p:cNvPr id="32" name="Text 30"/>
-          <p:cNvSpPr txBox="1"/>
-          <p:nvPr/>
-        </p:nvSpPr>
-        <p:spPr>
-          <a:xfrm>
-            <a:off x="566928" y="4498848"/>
+            <a:off x="566928" y="4864608"/>
             <a:ext cx="3316529" cy="365760"/>
           </a:xfrm>
           <a:prstGeom prst="rect">
@@ -4755,13 +4833,13 @@
       </p:sp>
       <p:sp>
         <p:nvSpPr>
-          <p:cNvPr id="33" name="Text 31"/>
+          <p:cNvPr id="35" name="Text 33"/>
           <p:cNvSpPr txBox="1"/>
           <p:nvPr/>
         </p:nvSpPr>
         <p:spPr>
           <a:xfrm>
-            <a:off x="3773729" y="4498848"/>
+            <a:off x="3773729" y="4864608"/>
             <a:ext cx="1815998" cy="365760"/>
           </a:xfrm>
           <a:prstGeom prst="rect">
@@ -4794,13 +4872,33 @@
       </p:sp>
       <p:sp>
         <p:nvSpPr>
-          <p:cNvPr id="34" name="Text 32"/>
+          <p:cNvPr id="36" name="Shape 34"/>
+          <p:cNvSpPr/>
+          <p:nvPr/>
+        </p:nvSpPr>
+        <p:spPr>
+          <a:xfrm>
+            <a:off x="457200" y="5230368"/>
+            <a:ext cx="5349240" cy="365760"/>
+          </a:xfrm>
+          <a:prstGeom prst="rect">
+            <a:avLst/>
+          </a:prstGeom>
+          <a:solidFill>
+            <a:srgbClr val="F0F4F5"/>
+          </a:solidFill>
+          <a:ln/>
+        </p:spPr>
+      </p:sp>
+      <p:sp>
+        <p:nvSpPr>
+          <p:cNvPr id="37" name="Text 35"/>
           <p:cNvSpPr txBox="1"/>
           <p:nvPr/>
         </p:nvSpPr>
         <p:spPr>
           <a:xfrm>
-            <a:off x="566928" y="4864608"/>
+            <a:off x="566928" y="5230368"/>
             <a:ext cx="3316529" cy="365760"/>
           </a:xfrm>
           <a:prstGeom prst="rect">
@@ -4833,13 +4931,13 @@
       </p:sp>
       <p:sp>
         <p:nvSpPr>
-          <p:cNvPr id="35" name="Text 33"/>
+          <p:cNvPr id="38" name="Text 36"/>
           <p:cNvSpPr txBox="1"/>
           <p:nvPr/>
         </p:nvSpPr>
         <p:spPr>
           <a:xfrm>
-            <a:off x="3773729" y="4864608"/>
+            <a:off x="3773729" y="5230368"/>
             <a:ext cx="1815998" cy="365760"/>
           </a:xfrm>
           <a:prstGeom prst="rect">
@@ -4872,33 +4970,13 @@
       </p:sp>
       <p:sp>
         <p:nvSpPr>
-          <p:cNvPr id="36" name="Shape 34"/>
-          <p:cNvSpPr/>
+          <p:cNvPr id="39" name="Text 37"/>
+          <p:cNvSpPr txBox="1"/>
           <p:nvPr/>
         </p:nvSpPr>
         <p:spPr>
           <a:xfrm>
-            <a:off x="457200" y="5230368"/>
-            <a:ext cx="5349240" cy="365760"/>
-          </a:xfrm>
-          <a:prstGeom prst="rect">
-            <a:avLst/>
-          </a:prstGeom>
-          <a:solidFill>
-            <a:srgbClr val="F0F4F5"/>
-          </a:solidFill>
-          <a:ln/>
-        </p:spPr>
-      </p:sp>
-      <p:sp>
-        <p:nvSpPr>
-          <p:cNvPr id="37" name="Text 35"/>
-          <p:cNvSpPr txBox="1"/>
-          <p:nvPr/>
-        </p:nvSpPr>
-        <p:spPr>
-          <a:xfrm>
-            <a:off x="566928" y="5230368"/>
+            <a:off x="566928" y="5596128"/>
             <a:ext cx="3316529" cy="365760"/>
           </a:xfrm>
           <a:prstGeom prst="rect">
@@ -4931,84 +5009,6 @@
       </p:sp>
       <p:sp>
         <p:nvSpPr>
-          <p:cNvPr id="38" name="Text 36"/>
-          <p:cNvSpPr txBox="1"/>
-          <p:nvPr/>
-        </p:nvSpPr>
-        <p:spPr>
-          <a:xfrm>
-            <a:off x="3773729" y="5230368"/>
-            <a:ext cx="1815998" cy="365760"/>
-          </a:xfrm>
-          <a:prstGeom prst="rect">
-            <a:avLst/>
-          </a:prstGeom>
-          <a:noFill/>
-          <a:ln/>
-        </p:spPr>
-        <p:txBody>
-          <a:bodyPr wrap="square" lIns="0" tIns="0" rIns="0" bIns="0" rtlCol="0" anchor="ctr"/>
-          <a:lstStyle/>
-          <a:p>
-            <a:pPr algn="r" indent="0" marL="0">
-              <a:buNone/>
-            </a:pPr>
-            <a:r>
-              <a:rPr lang="en-US" sz="1100" b="1" dirty="0">
-                <a:solidFill>
-                  <a:srgbClr val="0B2A3D"/>
-                </a:solidFill>
-                <a:latin typeface="Calibri" pitchFamily="34" charset="0"/>
-                <a:ea typeface="Calibri" pitchFamily="34" charset="-122"/>
-                <a:cs typeface="Calibri" pitchFamily="34" charset="-120"/>
-              </a:rPr>
-              <a:t>US$ 192,5 mil</a:t>
-            </a:r>
-            <a:endParaRPr lang="en-US" sz="1100" dirty="0"/>
-          </a:p>
-        </p:txBody>
-      </p:sp>
-      <p:sp>
-        <p:nvSpPr>
-          <p:cNvPr id="39" name="Text 37"/>
-          <p:cNvSpPr txBox="1"/>
-          <p:nvPr/>
-        </p:nvSpPr>
-        <p:spPr>
-          <a:xfrm>
-            <a:off x="566928" y="5596128"/>
-            <a:ext cx="3316529" cy="365760"/>
-          </a:xfrm>
-          <a:prstGeom prst="rect">
-            <a:avLst/>
-          </a:prstGeom>
-          <a:noFill/>
-          <a:ln/>
-        </p:spPr>
-        <p:txBody>
-          <a:bodyPr wrap="square" lIns="0" tIns="0" rIns="0" bIns="0" rtlCol="0" anchor="ctr"/>
-          <a:lstStyle/>
-          <a:p>
-            <a:pPr indent="0" marL="0">
-              <a:buNone/>
-            </a:pPr>
-            <a:r>
-              <a:rPr lang="en-US" sz="1100" dirty="0">
-                <a:solidFill>
-                  <a:srgbClr val="1C2B33"/>
-                </a:solidFill>
-                <a:latin typeface="Calibri" pitchFamily="34" charset="0"/>
-                <a:ea typeface="Calibri" pitchFamily="34" charset="-122"/>
-                <a:cs typeface="Calibri" pitchFamily="34" charset="-120"/>
-              </a:rPr>
-              <a:t>P&amp;Q - Processos</a:t>
-            </a:r>
-            <a:endParaRPr lang="en-US" sz="1100" dirty="0"/>
-          </a:p>
-        </p:txBody>
-      </p:sp>
-      <p:sp>
-        <p:nvSpPr>
           <p:cNvPr id="40" name="Text 38"/>
           <p:cNvSpPr txBox="1"/>
           <p:nvPr/>
@@ -5040,7 +5040,7 @@
                 <a:ea typeface="Calibri" pitchFamily="34" charset="-122"/>
                 <a:cs typeface="Calibri" pitchFamily="34" charset="-120"/>
               </a:rPr>
-              <a:t>US$ 113,7 mil</a:t>
+              <a:t>US$ 192,5 mil</a:t>
             </a:r>
             <a:endParaRPr lang="en-US" sz="1100" dirty="0"/>
           </a:p>
@@ -5141,7 +5141,7 @@
                 <a:ea typeface="Calibri" pitchFamily="34" charset="-122"/>
                 <a:cs typeface="Calibri" pitchFamily="34" charset="-120"/>
               </a:rPr>
-              <a:t>Eficiência de Produção</a:t>
+              <a:t>Rotina Operacional</a:t>
             </a:r>
             <a:endParaRPr lang="en-US" sz="1100" dirty="0"/>
           </a:p>
@@ -5180,7 +5180,7 @@
                 <a:ea typeface="Calibri" pitchFamily="34" charset="-122"/>
                 <a:cs typeface="Calibri" pitchFamily="34" charset="-120"/>
               </a:rPr>
-              <a:t>US$ 6,0 mi</a:t>
+              <a:t>US$ 8,5 mi</a:t>
             </a:r>
             <a:endParaRPr lang="en-US" sz="1100" dirty="0"/>
           </a:p>
@@ -5239,7 +5239,7 @@
                 <a:ea typeface="Calibri" pitchFamily="34" charset="-122"/>
                 <a:cs typeface="Calibri" pitchFamily="34" charset="-120"/>
               </a:rPr>
-              <a:t>Rotina Operacional</a:t>
+              <a:t>Eficiência de Produção</a:t>
             </a:r>
             <a:endParaRPr lang="en-US" sz="1100" dirty="0"/>
           </a:p>
@@ -5278,7 +5278,7 @@
                 <a:ea typeface="Calibri" pitchFamily="34" charset="-122"/>
                 <a:cs typeface="Calibri" pitchFamily="34" charset="-120"/>
               </a:rPr>
-              <a:t>US$ 5,6 mi</a:t>
+              <a:t>US$ 6,1 mi</a:t>
             </a:r>
             <a:endParaRPr lang="en-US" sz="1100" dirty="0"/>
           </a:p>
@@ -5356,7 +5356,7 @@
                 <a:ea typeface="Calibri" pitchFamily="34" charset="-122"/>
                 <a:cs typeface="Calibri" pitchFamily="34" charset="-120"/>
               </a:rPr>
-              <a:t>US$ 1,3 mi</a:t>
+              <a:t>US$ 3,3 mi</a:t>
             </a:r>
             <a:endParaRPr lang="en-US" sz="1100" dirty="0"/>
           </a:p>
@@ -5655,7 +5655,7 @@
                 <a:ea typeface="Calibri" pitchFamily="34" charset="-122"/>
                 <a:cs typeface="Calibri" pitchFamily="34" charset="-120"/>
               </a:rPr>
-              <a:t>Principais escopos por valor · 59 itens no total</a:t>
+              <a:t>Principais escopos por valor · 70 itens no total</a:t>
             </a:r>
             <a:endParaRPr lang="en-US" sz="1250" dirty="0"/>
           </a:p>
@@ -6255,6 +6255,280 @@
                           <a:ea typeface="Calibri" pitchFamily="34" charset="-122"/>
                           <a:cs typeface="Calibri" pitchFamily="34" charset="-120"/>
                         </a:rPr>
+                        <a:t>Upgrade metering de gás e Diesel- GTGs</a:t>
+                      </a:r>
+                      <a:endParaRPr lang="en-US" sz="1000" dirty="0">
+                        <a:latin typeface="Calibri" charset="0"/>
+                        <a:ea typeface="Calibri" charset="0"/>
+                        <a:cs typeface="Calibri" charset="0"/>
+                      </a:endParaRPr>
+                    </a:p>
+                  </a:txBody>
+                  <a:tcPr marL="91440" marR="91440" marT="45720" marB="45720" anchor="ctr">
+                    <a:lnL w="6350" cap="flat" cmpd="sng" algn="ctr">
+                      <a:solidFill>
+                        <a:srgbClr val="E3E8E9"/>
+                      </a:solidFill>
+                      <a:prstDash val="solid"/>
+                      <a:round/>
+                      <a:headEnd type="none" w="med" len="med"/>
+                      <a:tailEnd type="none" w="med" len="med"/>
+                    </a:lnL>
+                    <a:lnR w="6350" cap="flat" cmpd="sng" algn="ctr">
+                      <a:solidFill>
+                        <a:srgbClr val="E3E8E9"/>
+                      </a:solidFill>
+                      <a:prstDash val="solid"/>
+                      <a:round/>
+                      <a:headEnd type="none" w="med" len="med"/>
+                      <a:tailEnd type="none" w="med" len="med"/>
+                    </a:lnR>
+                    <a:lnT w="6350" cap="flat" cmpd="sng" algn="ctr">
+                      <a:solidFill>
+                        <a:srgbClr val="E3E8E9"/>
+                      </a:solidFill>
+                      <a:prstDash val="solid"/>
+                      <a:round/>
+                      <a:headEnd type="none" w="med" len="med"/>
+                      <a:tailEnd type="none" w="med" len="med"/>
+                    </a:lnT>
+                    <a:lnB w="6350" cap="flat" cmpd="sng" algn="ctr">
+                      <a:solidFill>
+                        <a:srgbClr val="E3E8E9"/>
+                      </a:solidFill>
+                      <a:prstDash val="solid"/>
+                      <a:round/>
+                      <a:headEnd type="none" w="med" len="med"/>
+                      <a:tailEnd type="none" w="med" len="med"/>
+                    </a:lnB>
+                    <a:solidFill>
+                      <a:srgbClr val="F0F4F5"/>
+                    </a:solidFill>
+                  </a:tcPr>
+                </a:tc>
+                <a:tc>
+                  <a:txBody>
+                    <a:bodyPr/>
+                    <a:lstStyle/>
+                    <a:p>
+                      <a:pPr indent="0" marL="0">
+                        <a:buNone/>
+                      </a:pPr>
+                      <a:r>
+                        <a:rPr lang="en-US" sz="950" dirty="0">
+                          <a:solidFill>
+                            <a:srgbClr val="5B6B73"/>
+                          </a:solidFill>
+                          <a:latin typeface="Calibri" pitchFamily="34" charset="0"/>
+                          <a:ea typeface="Calibri" pitchFamily="34" charset="-122"/>
+                          <a:cs typeface="Calibri" pitchFamily="34" charset="-120"/>
+                        </a:rPr>
+                        <a:t>Rotina Operacional</a:t>
+                      </a:r>
+                      <a:endParaRPr lang="en-US" sz="950" dirty="0">
+                        <a:latin typeface="Calibri" charset="0"/>
+                        <a:ea typeface="Calibri" charset="0"/>
+                        <a:cs typeface="Calibri" charset="0"/>
+                      </a:endParaRPr>
+                    </a:p>
+                  </a:txBody>
+                  <a:tcPr marL="91440" marR="91440" marT="45720" marB="45720" anchor="ctr">
+                    <a:lnL w="6350" cap="flat" cmpd="sng" algn="ctr">
+                      <a:solidFill>
+                        <a:srgbClr val="E3E8E9"/>
+                      </a:solidFill>
+                      <a:prstDash val="solid"/>
+                      <a:round/>
+                      <a:headEnd type="none" w="med" len="med"/>
+                      <a:tailEnd type="none" w="med" len="med"/>
+                    </a:lnL>
+                    <a:lnR w="6350" cap="flat" cmpd="sng" algn="ctr">
+                      <a:solidFill>
+                        <a:srgbClr val="E3E8E9"/>
+                      </a:solidFill>
+                      <a:prstDash val="solid"/>
+                      <a:round/>
+                      <a:headEnd type="none" w="med" len="med"/>
+                      <a:tailEnd type="none" w="med" len="med"/>
+                    </a:lnR>
+                    <a:lnT w="6350" cap="flat" cmpd="sng" algn="ctr">
+                      <a:solidFill>
+                        <a:srgbClr val="E3E8E9"/>
+                      </a:solidFill>
+                      <a:prstDash val="solid"/>
+                      <a:round/>
+                      <a:headEnd type="none" w="med" len="med"/>
+                      <a:tailEnd type="none" w="med" len="med"/>
+                    </a:lnT>
+                    <a:lnB w="6350" cap="flat" cmpd="sng" algn="ctr">
+                      <a:solidFill>
+                        <a:srgbClr val="E3E8E9"/>
+                      </a:solidFill>
+                      <a:prstDash val="solid"/>
+                      <a:round/>
+                      <a:headEnd type="none" w="med" len="med"/>
+                      <a:tailEnd type="none" w="med" len="med"/>
+                    </a:lnB>
+                    <a:solidFill>
+                      <a:srgbClr val="F0F4F5"/>
+                    </a:solidFill>
+                  </a:tcPr>
+                </a:tc>
+                <a:tc>
+                  <a:txBody>
+                    <a:bodyPr/>
+                    <a:lstStyle/>
+                    <a:p>
+                      <a:pPr indent="0" marL="0">
+                        <a:buNone/>
+                      </a:pPr>
+                      <a:r>
+                        <a:rPr lang="en-US" sz="950" dirty="0">
+                          <a:solidFill>
+                            <a:srgbClr val="5B6B73"/>
+                          </a:solidFill>
+                          <a:latin typeface="Calibri" pitchFamily="34" charset="0"/>
+                          <a:ea typeface="Calibri" pitchFamily="34" charset="-122"/>
+                          <a:cs typeface="Calibri" pitchFamily="34" charset="-120"/>
+                        </a:rPr>
+                        <a:t>EIM - Manutenção &amp; Integridade</a:t>
+                      </a:r>
+                      <a:endParaRPr lang="en-US" sz="950" dirty="0">
+                        <a:latin typeface="Calibri" charset="0"/>
+                        <a:ea typeface="Calibri" charset="0"/>
+                        <a:cs typeface="Calibri" charset="0"/>
+                      </a:endParaRPr>
+                    </a:p>
+                  </a:txBody>
+                  <a:tcPr marL="91440" marR="91440" marT="45720" marB="45720" anchor="ctr">
+                    <a:lnL w="6350" cap="flat" cmpd="sng" algn="ctr">
+                      <a:solidFill>
+                        <a:srgbClr val="E3E8E9"/>
+                      </a:solidFill>
+                      <a:prstDash val="solid"/>
+                      <a:round/>
+                      <a:headEnd type="none" w="med" len="med"/>
+                      <a:tailEnd type="none" w="med" len="med"/>
+                    </a:lnL>
+                    <a:lnR w="6350" cap="flat" cmpd="sng" algn="ctr">
+                      <a:solidFill>
+                        <a:srgbClr val="E3E8E9"/>
+                      </a:solidFill>
+                      <a:prstDash val="solid"/>
+                      <a:round/>
+                      <a:headEnd type="none" w="med" len="med"/>
+                      <a:tailEnd type="none" w="med" len="med"/>
+                    </a:lnR>
+                    <a:lnT w="6350" cap="flat" cmpd="sng" algn="ctr">
+                      <a:solidFill>
+                        <a:srgbClr val="E3E8E9"/>
+                      </a:solidFill>
+                      <a:prstDash val="solid"/>
+                      <a:round/>
+                      <a:headEnd type="none" w="med" len="med"/>
+                      <a:tailEnd type="none" w="med" len="med"/>
+                    </a:lnT>
+                    <a:lnB w="6350" cap="flat" cmpd="sng" algn="ctr">
+                      <a:solidFill>
+                        <a:srgbClr val="E3E8E9"/>
+                      </a:solidFill>
+                      <a:prstDash val="solid"/>
+                      <a:round/>
+                      <a:headEnd type="none" w="med" len="med"/>
+                      <a:tailEnd type="none" w="med" len="med"/>
+                    </a:lnB>
+                    <a:solidFill>
+                      <a:srgbClr val="F0F4F5"/>
+                    </a:solidFill>
+                  </a:tcPr>
+                </a:tc>
+                <a:tc>
+                  <a:txBody>
+                    <a:bodyPr/>
+                    <a:lstStyle/>
+                    <a:p>
+                      <a:pPr algn="r" indent="0" marL="0">
+                        <a:buNone/>
+                      </a:pPr>
+                      <a:r>
+                        <a:rPr lang="en-US" sz="1000" b="1" dirty="0">
+                          <a:solidFill>
+                            <a:srgbClr val="0B2A3D"/>
+                          </a:solidFill>
+                          <a:latin typeface="Calibri" pitchFamily="34" charset="0"/>
+                          <a:ea typeface="Calibri" pitchFamily="34" charset="-122"/>
+                          <a:cs typeface="Calibri" pitchFamily="34" charset="-120"/>
+                        </a:rPr>
+                        <a:t>US$ 1,7 mi</a:t>
+                      </a:r>
+                      <a:endParaRPr lang="en-US" sz="1000" dirty="0">
+                        <a:latin typeface="Calibri" charset="0"/>
+                        <a:ea typeface="Calibri" charset="0"/>
+                        <a:cs typeface="Calibri" charset="0"/>
+                      </a:endParaRPr>
+                    </a:p>
+                  </a:txBody>
+                  <a:tcPr marL="91440" marR="91440" marT="45720" marB="45720" anchor="ctr">
+                    <a:lnL w="6350" cap="flat" cmpd="sng" algn="ctr">
+                      <a:solidFill>
+                        <a:srgbClr val="E3E8E9"/>
+                      </a:solidFill>
+                      <a:prstDash val="solid"/>
+                      <a:round/>
+                      <a:headEnd type="none" w="med" len="med"/>
+                      <a:tailEnd type="none" w="med" len="med"/>
+                    </a:lnL>
+                    <a:lnR w="6350" cap="flat" cmpd="sng" algn="ctr">
+                      <a:solidFill>
+                        <a:srgbClr val="E3E8E9"/>
+                      </a:solidFill>
+                      <a:prstDash val="solid"/>
+                      <a:round/>
+                      <a:headEnd type="none" w="med" len="med"/>
+                      <a:tailEnd type="none" w="med" len="med"/>
+                    </a:lnR>
+                    <a:lnT w="6350" cap="flat" cmpd="sng" algn="ctr">
+                      <a:solidFill>
+                        <a:srgbClr val="E3E8E9"/>
+                      </a:solidFill>
+                      <a:prstDash val="solid"/>
+                      <a:round/>
+                      <a:headEnd type="none" w="med" len="med"/>
+                      <a:tailEnd type="none" w="med" len="med"/>
+                    </a:lnT>
+                    <a:lnB w="6350" cap="flat" cmpd="sng" algn="ctr">
+                      <a:solidFill>
+                        <a:srgbClr val="E3E8E9"/>
+                      </a:solidFill>
+                      <a:prstDash val="solid"/>
+                      <a:round/>
+                      <a:headEnd type="none" w="med" len="med"/>
+                      <a:tailEnd type="none" w="med" len="med"/>
+                    </a:lnB>
+                    <a:solidFill>
+                      <a:srgbClr val="F0F4F5"/>
+                    </a:solidFill>
+                  </a:tcPr>
+                </a:tc>
+              </a:tr>
+              <a:tr h="288036">
+                <a:tc>
+                  <a:txBody>
+                    <a:bodyPr/>
+                    <a:lstStyle/>
+                    <a:p>
+                      <a:pPr indent="0" marL="0">
+                        <a:buNone/>
+                      </a:pPr>
+                      <a:r>
+                        <a:rPr lang="en-US" sz="1000" dirty="0">
+                          <a:solidFill>
+                            <a:srgbClr val="1C2B33"/>
+                          </a:solidFill>
+                          <a:latin typeface="Calibri" pitchFamily="34" charset="0"/>
+                          <a:ea typeface="Calibri" pitchFamily="34" charset="-122"/>
+                          <a:cs typeface="Calibri" pitchFamily="34" charset="-120"/>
+                        </a:rPr>
                         <a:t>TA - Mecânica</a:t>
                       </a:r>
                       <a:endParaRPr lang="en-US" sz="1000" dirty="0">
@@ -6302,7 +6576,7 @@
                       <a:tailEnd type="none" w="med" len="med"/>
                     </a:lnB>
                     <a:solidFill>
-                      <a:srgbClr val="F0F4F5"/>
+                      <a:srgbClr val="FFFFFF"/>
                     </a:solidFill>
                   </a:tcPr>
                 </a:tc>
@@ -6370,7 +6644,7 @@
                       <a:tailEnd type="none" w="med" len="med"/>
                     </a:lnB>
                     <a:solidFill>
-                      <a:srgbClr val="F0F4F5"/>
+                      <a:srgbClr val="FFFFFF"/>
                     </a:solidFill>
                   </a:tcPr>
                 </a:tc>
@@ -6438,6 +6712,280 @@
                       <a:tailEnd type="none" w="med" len="med"/>
                     </a:lnB>
                     <a:solidFill>
+                      <a:srgbClr val="FFFFFF"/>
+                    </a:solidFill>
+                  </a:tcPr>
+                </a:tc>
+                <a:tc>
+                  <a:txBody>
+                    <a:bodyPr/>
+                    <a:lstStyle/>
+                    <a:p>
+                      <a:pPr algn="r" indent="0" marL="0">
+                        <a:buNone/>
+                      </a:pPr>
+                      <a:r>
+                        <a:rPr lang="en-US" sz="1000" b="1" dirty="0">
+                          <a:solidFill>
+                            <a:srgbClr val="0B2A3D"/>
+                          </a:solidFill>
+                          <a:latin typeface="Calibri" pitchFamily="34" charset="0"/>
+                          <a:ea typeface="Calibri" pitchFamily="34" charset="-122"/>
+                          <a:cs typeface="Calibri" pitchFamily="34" charset="-120"/>
+                        </a:rPr>
+                        <a:t>US$ 1,5 mi</a:t>
+                      </a:r>
+                      <a:endParaRPr lang="en-US" sz="1000" dirty="0">
+                        <a:latin typeface="Calibri" charset="0"/>
+                        <a:ea typeface="Calibri" charset="0"/>
+                        <a:cs typeface="Calibri" charset="0"/>
+                      </a:endParaRPr>
+                    </a:p>
+                  </a:txBody>
+                  <a:tcPr marL="91440" marR="91440" marT="45720" marB="45720" anchor="ctr">
+                    <a:lnL w="6350" cap="flat" cmpd="sng" algn="ctr">
+                      <a:solidFill>
+                        <a:srgbClr val="E3E8E9"/>
+                      </a:solidFill>
+                      <a:prstDash val="solid"/>
+                      <a:round/>
+                      <a:headEnd type="none" w="med" len="med"/>
+                      <a:tailEnd type="none" w="med" len="med"/>
+                    </a:lnL>
+                    <a:lnR w="6350" cap="flat" cmpd="sng" algn="ctr">
+                      <a:solidFill>
+                        <a:srgbClr val="E3E8E9"/>
+                      </a:solidFill>
+                      <a:prstDash val="solid"/>
+                      <a:round/>
+                      <a:headEnd type="none" w="med" len="med"/>
+                      <a:tailEnd type="none" w="med" len="med"/>
+                    </a:lnR>
+                    <a:lnT w="6350" cap="flat" cmpd="sng" algn="ctr">
+                      <a:solidFill>
+                        <a:srgbClr val="E3E8E9"/>
+                      </a:solidFill>
+                      <a:prstDash val="solid"/>
+                      <a:round/>
+                      <a:headEnd type="none" w="med" len="med"/>
+                      <a:tailEnd type="none" w="med" len="med"/>
+                    </a:lnT>
+                    <a:lnB w="6350" cap="flat" cmpd="sng" algn="ctr">
+                      <a:solidFill>
+                        <a:srgbClr val="E3E8E9"/>
+                      </a:solidFill>
+                      <a:prstDash val="solid"/>
+                      <a:round/>
+                      <a:headEnd type="none" w="med" len="med"/>
+                      <a:tailEnd type="none" w="med" len="med"/>
+                    </a:lnB>
+                    <a:solidFill>
+                      <a:srgbClr val="FFFFFF"/>
+                    </a:solidFill>
+                  </a:tcPr>
+                </a:tc>
+              </a:tr>
+              <a:tr h="288036">
+                <a:tc>
+                  <a:txBody>
+                    <a:bodyPr/>
+                    <a:lstStyle/>
+                    <a:p>
+                      <a:pPr indent="0" marL="0">
+                        <a:buNone/>
+                      </a:pPr>
+                      <a:r>
+                        <a:rPr lang="en-US" sz="1000" dirty="0">
+                          <a:solidFill>
+                            <a:srgbClr val="1C2B33"/>
+                          </a:solidFill>
+                          <a:latin typeface="Calibri" pitchFamily="34" charset="0"/>
+                          <a:ea typeface="Calibri" pitchFamily="34" charset="-122"/>
+                          <a:cs typeface="Calibri" pitchFamily="34" charset="-120"/>
+                        </a:rPr>
+                        <a:t>TA - Swivel - Pacote Hidráulico (OneSubsea)</a:t>
+                      </a:r>
+                      <a:endParaRPr lang="en-US" sz="1000" dirty="0">
+                        <a:latin typeface="Calibri" charset="0"/>
+                        <a:ea typeface="Calibri" charset="0"/>
+                        <a:cs typeface="Calibri" charset="0"/>
+                      </a:endParaRPr>
+                    </a:p>
+                  </a:txBody>
+                  <a:tcPr marL="91440" marR="91440" marT="45720" marB="45720" anchor="ctr">
+                    <a:lnL w="6350" cap="flat" cmpd="sng" algn="ctr">
+                      <a:solidFill>
+                        <a:srgbClr val="E3E8E9"/>
+                      </a:solidFill>
+                      <a:prstDash val="solid"/>
+                      <a:round/>
+                      <a:headEnd type="none" w="med" len="med"/>
+                      <a:tailEnd type="none" w="med" len="med"/>
+                    </a:lnL>
+                    <a:lnR w="6350" cap="flat" cmpd="sng" algn="ctr">
+                      <a:solidFill>
+                        <a:srgbClr val="E3E8E9"/>
+                      </a:solidFill>
+                      <a:prstDash val="solid"/>
+                      <a:round/>
+                      <a:headEnd type="none" w="med" len="med"/>
+                      <a:tailEnd type="none" w="med" len="med"/>
+                    </a:lnR>
+                    <a:lnT w="6350" cap="flat" cmpd="sng" algn="ctr">
+                      <a:solidFill>
+                        <a:srgbClr val="E3E8E9"/>
+                      </a:solidFill>
+                      <a:prstDash val="solid"/>
+                      <a:round/>
+                      <a:headEnd type="none" w="med" len="med"/>
+                      <a:tailEnd type="none" w="med" len="med"/>
+                    </a:lnT>
+                    <a:lnB w="6350" cap="flat" cmpd="sng" algn="ctr">
+                      <a:solidFill>
+                        <a:srgbClr val="E3E8E9"/>
+                      </a:solidFill>
+                      <a:prstDash val="solid"/>
+                      <a:round/>
+                      <a:headEnd type="none" w="med" len="med"/>
+                      <a:tailEnd type="none" w="med" len="med"/>
+                    </a:lnB>
+                    <a:solidFill>
+                      <a:srgbClr val="F0F4F5"/>
+                    </a:solidFill>
+                  </a:tcPr>
+                </a:tc>
+                <a:tc>
+                  <a:txBody>
+                    <a:bodyPr/>
+                    <a:lstStyle/>
+                    <a:p>
+                      <a:pPr indent="0" marL="0">
+                        <a:buNone/>
+                      </a:pPr>
+                      <a:r>
+                        <a:rPr lang="en-US" sz="950" dirty="0">
+                          <a:solidFill>
+                            <a:srgbClr val="5B6B73"/>
+                          </a:solidFill>
+                          <a:latin typeface="Calibri" pitchFamily="34" charset="0"/>
+                          <a:ea typeface="Calibri" pitchFamily="34" charset="-122"/>
+                          <a:cs typeface="Calibri" pitchFamily="34" charset="-120"/>
+                        </a:rPr>
+                        <a:t>Integridade e Regulatório</a:t>
+                      </a:r>
+                      <a:endParaRPr lang="en-US" sz="950" dirty="0">
+                        <a:latin typeface="Calibri" charset="0"/>
+                        <a:ea typeface="Calibri" charset="0"/>
+                        <a:cs typeface="Calibri" charset="0"/>
+                      </a:endParaRPr>
+                    </a:p>
+                  </a:txBody>
+                  <a:tcPr marL="91440" marR="91440" marT="45720" marB="45720" anchor="ctr">
+                    <a:lnL w="6350" cap="flat" cmpd="sng" algn="ctr">
+                      <a:solidFill>
+                        <a:srgbClr val="E3E8E9"/>
+                      </a:solidFill>
+                      <a:prstDash val="solid"/>
+                      <a:round/>
+                      <a:headEnd type="none" w="med" len="med"/>
+                      <a:tailEnd type="none" w="med" len="med"/>
+                    </a:lnL>
+                    <a:lnR w="6350" cap="flat" cmpd="sng" algn="ctr">
+                      <a:solidFill>
+                        <a:srgbClr val="E3E8E9"/>
+                      </a:solidFill>
+                      <a:prstDash val="solid"/>
+                      <a:round/>
+                      <a:headEnd type="none" w="med" len="med"/>
+                      <a:tailEnd type="none" w="med" len="med"/>
+                    </a:lnR>
+                    <a:lnT w="6350" cap="flat" cmpd="sng" algn="ctr">
+                      <a:solidFill>
+                        <a:srgbClr val="E3E8E9"/>
+                      </a:solidFill>
+                      <a:prstDash val="solid"/>
+                      <a:round/>
+                      <a:headEnd type="none" w="med" len="med"/>
+                      <a:tailEnd type="none" w="med" len="med"/>
+                    </a:lnT>
+                    <a:lnB w="6350" cap="flat" cmpd="sng" algn="ctr">
+                      <a:solidFill>
+                        <a:srgbClr val="E3E8E9"/>
+                      </a:solidFill>
+                      <a:prstDash val="solid"/>
+                      <a:round/>
+                      <a:headEnd type="none" w="med" len="med"/>
+                      <a:tailEnd type="none" w="med" len="med"/>
+                    </a:lnB>
+                    <a:solidFill>
+                      <a:srgbClr val="F0F4F5"/>
+                    </a:solidFill>
+                  </a:tcPr>
+                </a:tc>
+                <a:tc>
+                  <a:txBody>
+                    <a:bodyPr/>
+                    <a:lstStyle/>
+                    <a:p>
+                      <a:pPr indent="0" marL="0">
+                        <a:buNone/>
+                      </a:pPr>
+                      <a:r>
+                        <a:rPr lang="en-US" sz="950" dirty="0">
+                          <a:solidFill>
+                            <a:srgbClr val="5B6B73"/>
+                          </a:solidFill>
+                          <a:latin typeface="Calibri" pitchFamily="34" charset="0"/>
+                          <a:ea typeface="Calibri" pitchFamily="34" charset="-122"/>
+                          <a:cs typeface="Calibri" pitchFamily="34" charset="-120"/>
+                        </a:rPr>
+                        <a:t>P&amp;Q - Processos</a:t>
+                      </a:r>
+                      <a:endParaRPr lang="en-US" sz="950" dirty="0">
+                        <a:latin typeface="Calibri" charset="0"/>
+                        <a:ea typeface="Calibri" charset="0"/>
+                        <a:cs typeface="Calibri" charset="0"/>
+                      </a:endParaRPr>
+                    </a:p>
+                  </a:txBody>
+                  <a:tcPr marL="91440" marR="91440" marT="45720" marB="45720" anchor="ctr">
+                    <a:lnL w="6350" cap="flat" cmpd="sng" algn="ctr">
+                      <a:solidFill>
+                        <a:srgbClr val="E3E8E9"/>
+                      </a:solidFill>
+                      <a:prstDash val="solid"/>
+                      <a:round/>
+                      <a:headEnd type="none" w="med" len="med"/>
+                      <a:tailEnd type="none" w="med" len="med"/>
+                    </a:lnL>
+                    <a:lnR w="6350" cap="flat" cmpd="sng" algn="ctr">
+                      <a:solidFill>
+                        <a:srgbClr val="E3E8E9"/>
+                      </a:solidFill>
+                      <a:prstDash val="solid"/>
+                      <a:round/>
+                      <a:headEnd type="none" w="med" len="med"/>
+                      <a:tailEnd type="none" w="med" len="med"/>
+                    </a:lnR>
+                    <a:lnT w="6350" cap="flat" cmpd="sng" algn="ctr">
+                      <a:solidFill>
+                        <a:srgbClr val="E3E8E9"/>
+                      </a:solidFill>
+                      <a:prstDash val="solid"/>
+                      <a:round/>
+                      <a:headEnd type="none" w="med" len="med"/>
+                      <a:tailEnd type="none" w="med" len="med"/>
+                    </a:lnT>
+                    <a:lnB w="6350" cap="flat" cmpd="sng" algn="ctr">
+                      <a:solidFill>
+                        <a:srgbClr val="E3E8E9"/>
+                      </a:solidFill>
+                      <a:prstDash val="solid"/>
+                      <a:round/>
+                      <a:headEnd type="none" w="med" len="med"/>
+                      <a:tailEnd type="none" w="med" len="med"/>
+                    </a:lnB>
+                    <a:solidFill>
                       <a:srgbClr val="F0F4F5"/>
                     </a:solidFill>
                   </a:tcPr>
@@ -6459,7 +7007,7 @@
                           <a:ea typeface="Calibri" pitchFamily="34" charset="-122"/>
                           <a:cs typeface="Calibri" pitchFamily="34" charset="-120"/>
                         </a:rPr>
-                        <a:t>US$ 1,5 mi</a:t>
+                        <a:t>US$ 1,4 mi</a:t>
                       </a:r>
                       <a:endParaRPr lang="en-US" sz="1000" dirty="0">
                         <a:latin typeface="Calibri" charset="0"/>
@@ -7077,7 +7625,7 @@
                           <a:ea typeface="Calibri" pitchFamily="34" charset="-122"/>
                           <a:cs typeface="Calibri" pitchFamily="34" charset="-120"/>
                         </a:rPr>
-                        <a:t>INSTALAÇÃO DA CARGO PUMP</a:t>
+                        <a:t>REVAMP CARGO PUMP - Nº 2</a:t>
                       </a:r>
                       <a:endParaRPr lang="en-US" sz="1000" dirty="0">
                         <a:latin typeface="Calibri" charset="0"/>
@@ -7899,6 +8447,554 @@
                           <a:ea typeface="Calibri" pitchFamily="34" charset="-122"/>
                           <a:cs typeface="Calibri" pitchFamily="34" charset="-120"/>
                         </a:rPr>
+                        <a:t>TA - Ignitor do Flare</a:t>
+                      </a:r>
+                      <a:endParaRPr lang="en-US" sz="1000" dirty="0">
+                        <a:latin typeface="Calibri" charset="0"/>
+                        <a:ea typeface="Calibri" charset="0"/>
+                        <a:cs typeface="Calibri" charset="0"/>
+                      </a:endParaRPr>
+                    </a:p>
+                  </a:txBody>
+                  <a:tcPr marL="91440" marR="91440" marT="45720" marB="45720" anchor="ctr">
+                    <a:lnL w="6350" cap="flat" cmpd="sng" algn="ctr">
+                      <a:solidFill>
+                        <a:srgbClr val="E3E8E9"/>
+                      </a:solidFill>
+                      <a:prstDash val="solid"/>
+                      <a:round/>
+                      <a:headEnd type="none" w="med" len="med"/>
+                      <a:tailEnd type="none" w="med" len="med"/>
+                    </a:lnL>
+                    <a:lnR w="6350" cap="flat" cmpd="sng" algn="ctr">
+                      <a:solidFill>
+                        <a:srgbClr val="E3E8E9"/>
+                      </a:solidFill>
+                      <a:prstDash val="solid"/>
+                      <a:round/>
+                      <a:headEnd type="none" w="med" len="med"/>
+                      <a:tailEnd type="none" w="med" len="med"/>
+                    </a:lnR>
+                    <a:lnT w="6350" cap="flat" cmpd="sng" algn="ctr">
+                      <a:solidFill>
+                        <a:srgbClr val="E3E8E9"/>
+                      </a:solidFill>
+                      <a:prstDash val="solid"/>
+                      <a:round/>
+                      <a:headEnd type="none" w="med" len="med"/>
+                      <a:tailEnd type="none" w="med" len="med"/>
+                    </a:lnT>
+                    <a:lnB w="6350" cap="flat" cmpd="sng" algn="ctr">
+                      <a:solidFill>
+                        <a:srgbClr val="E3E8E9"/>
+                      </a:solidFill>
+                      <a:prstDash val="solid"/>
+                      <a:round/>
+                      <a:headEnd type="none" w="med" len="med"/>
+                      <a:tailEnd type="none" w="med" len="med"/>
+                    </a:lnB>
+                    <a:solidFill>
+                      <a:srgbClr val="F0F4F5"/>
+                    </a:solidFill>
+                  </a:tcPr>
+                </a:tc>
+                <a:tc>
+                  <a:txBody>
+                    <a:bodyPr/>
+                    <a:lstStyle/>
+                    <a:p>
+                      <a:pPr indent="0" marL="0">
+                        <a:buNone/>
+                      </a:pPr>
+                      <a:r>
+                        <a:rPr lang="en-US" sz="950" dirty="0">
+                          <a:solidFill>
+                            <a:srgbClr val="5B6B73"/>
+                          </a:solidFill>
+                          <a:latin typeface="Calibri" pitchFamily="34" charset="0"/>
+                          <a:ea typeface="Calibri" pitchFamily="34" charset="-122"/>
+                          <a:cs typeface="Calibri" pitchFamily="34" charset="-120"/>
+                        </a:rPr>
+                        <a:t>Integridade e Regulatório</a:t>
+                      </a:r>
+                      <a:endParaRPr lang="en-US" sz="950" dirty="0">
+                        <a:latin typeface="Calibri" charset="0"/>
+                        <a:ea typeface="Calibri" charset="0"/>
+                        <a:cs typeface="Calibri" charset="0"/>
+                      </a:endParaRPr>
+                    </a:p>
+                  </a:txBody>
+                  <a:tcPr marL="91440" marR="91440" marT="45720" marB="45720" anchor="ctr">
+                    <a:lnL w="6350" cap="flat" cmpd="sng" algn="ctr">
+                      <a:solidFill>
+                        <a:srgbClr val="E3E8E9"/>
+                      </a:solidFill>
+                      <a:prstDash val="solid"/>
+                      <a:round/>
+                      <a:headEnd type="none" w="med" len="med"/>
+                      <a:tailEnd type="none" w="med" len="med"/>
+                    </a:lnL>
+                    <a:lnR w="6350" cap="flat" cmpd="sng" algn="ctr">
+                      <a:solidFill>
+                        <a:srgbClr val="E3E8E9"/>
+                      </a:solidFill>
+                      <a:prstDash val="solid"/>
+                      <a:round/>
+                      <a:headEnd type="none" w="med" len="med"/>
+                      <a:tailEnd type="none" w="med" len="med"/>
+                    </a:lnR>
+                    <a:lnT w="6350" cap="flat" cmpd="sng" algn="ctr">
+                      <a:solidFill>
+                        <a:srgbClr val="E3E8E9"/>
+                      </a:solidFill>
+                      <a:prstDash val="solid"/>
+                      <a:round/>
+                      <a:headEnd type="none" w="med" len="med"/>
+                      <a:tailEnd type="none" w="med" len="med"/>
+                    </a:lnT>
+                    <a:lnB w="6350" cap="flat" cmpd="sng" algn="ctr">
+                      <a:solidFill>
+                        <a:srgbClr val="E3E8E9"/>
+                      </a:solidFill>
+                      <a:prstDash val="solid"/>
+                      <a:round/>
+                      <a:headEnd type="none" w="med" len="med"/>
+                      <a:tailEnd type="none" w="med" len="med"/>
+                    </a:lnB>
+                    <a:solidFill>
+                      <a:srgbClr val="F0F4F5"/>
+                    </a:solidFill>
+                  </a:tcPr>
+                </a:tc>
+                <a:tc>
+                  <a:txBody>
+                    <a:bodyPr/>
+                    <a:lstStyle/>
+                    <a:p>
+                      <a:pPr indent="0" marL="0">
+                        <a:buNone/>
+                      </a:pPr>
+                      <a:r>
+                        <a:rPr lang="en-US" sz="950" dirty="0">
+                          <a:solidFill>
+                            <a:srgbClr val="5B6B73"/>
+                          </a:solidFill>
+                          <a:latin typeface="Calibri" pitchFamily="34" charset="0"/>
+                          <a:ea typeface="Calibri" pitchFamily="34" charset="-122"/>
+                          <a:cs typeface="Calibri" pitchFamily="34" charset="-120"/>
+                        </a:rPr>
+                        <a:t>P&amp;Q - Processos</a:t>
+                      </a:r>
+                      <a:endParaRPr lang="en-US" sz="950" dirty="0">
+                        <a:latin typeface="Calibri" charset="0"/>
+                        <a:ea typeface="Calibri" charset="0"/>
+                        <a:cs typeface="Calibri" charset="0"/>
+                      </a:endParaRPr>
+                    </a:p>
+                  </a:txBody>
+                  <a:tcPr marL="91440" marR="91440" marT="45720" marB="45720" anchor="ctr">
+                    <a:lnL w="6350" cap="flat" cmpd="sng" algn="ctr">
+                      <a:solidFill>
+                        <a:srgbClr val="E3E8E9"/>
+                      </a:solidFill>
+                      <a:prstDash val="solid"/>
+                      <a:round/>
+                      <a:headEnd type="none" w="med" len="med"/>
+                      <a:tailEnd type="none" w="med" len="med"/>
+                    </a:lnL>
+                    <a:lnR w="6350" cap="flat" cmpd="sng" algn="ctr">
+                      <a:solidFill>
+                        <a:srgbClr val="E3E8E9"/>
+                      </a:solidFill>
+                      <a:prstDash val="solid"/>
+                      <a:round/>
+                      <a:headEnd type="none" w="med" len="med"/>
+                      <a:tailEnd type="none" w="med" len="med"/>
+                    </a:lnR>
+                    <a:lnT w="6350" cap="flat" cmpd="sng" algn="ctr">
+                      <a:solidFill>
+                        <a:srgbClr val="E3E8E9"/>
+                      </a:solidFill>
+                      <a:prstDash val="solid"/>
+                      <a:round/>
+                      <a:headEnd type="none" w="med" len="med"/>
+                      <a:tailEnd type="none" w="med" len="med"/>
+                    </a:lnT>
+                    <a:lnB w="6350" cap="flat" cmpd="sng" algn="ctr">
+                      <a:solidFill>
+                        <a:srgbClr val="E3E8E9"/>
+                      </a:solidFill>
+                      <a:prstDash val="solid"/>
+                      <a:round/>
+                      <a:headEnd type="none" w="med" len="med"/>
+                      <a:tailEnd type="none" w="med" len="med"/>
+                    </a:lnB>
+                    <a:solidFill>
+                      <a:srgbClr val="F0F4F5"/>
+                    </a:solidFill>
+                  </a:tcPr>
+                </a:tc>
+                <a:tc>
+                  <a:txBody>
+                    <a:bodyPr/>
+                    <a:lstStyle/>
+                    <a:p>
+                      <a:pPr algn="r" indent="0" marL="0">
+                        <a:buNone/>
+                      </a:pPr>
+                      <a:r>
+                        <a:rPr lang="en-US" sz="1000" b="1" dirty="0">
+                          <a:solidFill>
+                            <a:srgbClr val="0B2A3D"/>
+                          </a:solidFill>
+                          <a:latin typeface="Calibri" pitchFamily="34" charset="0"/>
+                          <a:ea typeface="Calibri" pitchFamily="34" charset="-122"/>
+                          <a:cs typeface="Calibri" pitchFamily="34" charset="-120"/>
+                        </a:rPr>
+                        <a:t>US$ 616,8 mil</a:t>
+                      </a:r>
+                      <a:endParaRPr lang="en-US" sz="1000" dirty="0">
+                        <a:latin typeface="Calibri" charset="0"/>
+                        <a:ea typeface="Calibri" charset="0"/>
+                        <a:cs typeface="Calibri" charset="0"/>
+                      </a:endParaRPr>
+                    </a:p>
+                  </a:txBody>
+                  <a:tcPr marL="91440" marR="91440" marT="45720" marB="45720" anchor="ctr">
+                    <a:lnL w="6350" cap="flat" cmpd="sng" algn="ctr">
+                      <a:solidFill>
+                        <a:srgbClr val="E3E8E9"/>
+                      </a:solidFill>
+                      <a:prstDash val="solid"/>
+                      <a:round/>
+                      <a:headEnd type="none" w="med" len="med"/>
+                      <a:tailEnd type="none" w="med" len="med"/>
+                    </a:lnL>
+                    <a:lnR w="6350" cap="flat" cmpd="sng" algn="ctr">
+                      <a:solidFill>
+                        <a:srgbClr val="E3E8E9"/>
+                      </a:solidFill>
+                      <a:prstDash val="solid"/>
+                      <a:round/>
+                      <a:headEnd type="none" w="med" len="med"/>
+                      <a:tailEnd type="none" w="med" len="med"/>
+                    </a:lnR>
+                    <a:lnT w="6350" cap="flat" cmpd="sng" algn="ctr">
+                      <a:solidFill>
+                        <a:srgbClr val="E3E8E9"/>
+                      </a:solidFill>
+                      <a:prstDash val="solid"/>
+                      <a:round/>
+                      <a:headEnd type="none" w="med" len="med"/>
+                      <a:tailEnd type="none" w="med" len="med"/>
+                    </a:lnT>
+                    <a:lnB w="6350" cap="flat" cmpd="sng" algn="ctr">
+                      <a:solidFill>
+                        <a:srgbClr val="E3E8E9"/>
+                      </a:solidFill>
+                      <a:prstDash val="solid"/>
+                      <a:round/>
+                      <a:headEnd type="none" w="med" len="med"/>
+                      <a:tailEnd type="none" w="med" len="med"/>
+                    </a:lnB>
+                    <a:solidFill>
+                      <a:srgbClr val="F0F4F5"/>
+                    </a:solidFill>
+                  </a:tcPr>
+                </a:tc>
+              </a:tr>
+              <a:tr h="288036">
+                <a:tc>
+                  <a:txBody>
+                    <a:bodyPr/>
+                    <a:lstStyle/>
+                    <a:p>
+                      <a:pPr indent="0" marL="0">
+                        <a:buNone/>
+                      </a:pPr>
+                      <a:r>
+                        <a:rPr lang="en-US" sz="1000" dirty="0">
+                          <a:solidFill>
+                            <a:srgbClr val="1C2B33"/>
+                          </a:solidFill>
+                          <a:latin typeface="Calibri" pitchFamily="34" charset="0"/>
+                          <a:ea typeface="Calibri" pitchFamily="34" charset="-122"/>
+                          <a:cs typeface="Calibri" pitchFamily="34" charset="-120"/>
+                        </a:rPr>
+                        <a:t>TA - Manutenção no Swivel elétrico</a:t>
+                      </a:r>
+                      <a:endParaRPr lang="en-US" sz="1000" dirty="0">
+                        <a:latin typeface="Calibri" charset="0"/>
+                        <a:ea typeface="Calibri" charset="0"/>
+                        <a:cs typeface="Calibri" charset="0"/>
+                      </a:endParaRPr>
+                    </a:p>
+                  </a:txBody>
+                  <a:tcPr marL="91440" marR="91440" marT="45720" marB="45720" anchor="ctr">
+                    <a:lnL w="6350" cap="flat" cmpd="sng" algn="ctr">
+                      <a:solidFill>
+                        <a:srgbClr val="E3E8E9"/>
+                      </a:solidFill>
+                      <a:prstDash val="solid"/>
+                      <a:round/>
+                      <a:headEnd type="none" w="med" len="med"/>
+                      <a:tailEnd type="none" w="med" len="med"/>
+                    </a:lnL>
+                    <a:lnR w="6350" cap="flat" cmpd="sng" algn="ctr">
+                      <a:solidFill>
+                        <a:srgbClr val="E3E8E9"/>
+                      </a:solidFill>
+                      <a:prstDash val="solid"/>
+                      <a:round/>
+                      <a:headEnd type="none" w="med" len="med"/>
+                      <a:tailEnd type="none" w="med" len="med"/>
+                    </a:lnR>
+                    <a:lnT w="6350" cap="flat" cmpd="sng" algn="ctr">
+                      <a:solidFill>
+                        <a:srgbClr val="E3E8E9"/>
+                      </a:solidFill>
+                      <a:prstDash val="solid"/>
+                      <a:round/>
+                      <a:headEnd type="none" w="med" len="med"/>
+                      <a:tailEnd type="none" w="med" len="med"/>
+                    </a:lnT>
+                    <a:lnB w="6350" cap="flat" cmpd="sng" algn="ctr">
+                      <a:solidFill>
+                        <a:srgbClr val="E3E8E9"/>
+                      </a:solidFill>
+                      <a:prstDash val="solid"/>
+                      <a:round/>
+                      <a:headEnd type="none" w="med" len="med"/>
+                      <a:tailEnd type="none" w="med" len="med"/>
+                    </a:lnB>
+                    <a:solidFill>
+                      <a:srgbClr val="FFFFFF"/>
+                    </a:solidFill>
+                  </a:tcPr>
+                </a:tc>
+                <a:tc>
+                  <a:txBody>
+                    <a:bodyPr/>
+                    <a:lstStyle/>
+                    <a:p>
+                      <a:pPr indent="0" marL="0">
+                        <a:buNone/>
+                      </a:pPr>
+                      <a:r>
+                        <a:rPr lang="en-US" sz="950" dirty="0">
+                          <a:solidFill>
+                            <a:srgbClr val="5B6B73"/>
+                          </a:solidFill>
+                          <a:latin typeface="Calibri" pitchFamily="34" charset="0"/>
+                          <a:ea typeface="Calibri" pitchFamily="34" charset="-122"/>
+                          <a:cs typeface="Calibri" pitchFamily="34" charset="-120"/>
+                        </a:rPr>
+                        <a:t>Rotina Operacional</a:t>
+                      </a:r>
+                      <a:endParaRPr lang="en-US" sz="950" dirty="0">
+                        <a:latin typeface="Calibri" charset="0"/>
+                        <a:ea typeface="Calibri" charset="0"/>
+                        <a:cs typeface="Calibri" charset="0"/>
+                      </a:endParaRPr>
+                    </a:p>
+                  </a:txBody>
+                  <a:tcPr marL="91440" marR="91440" marT="45720" marB="45720" anchor="ctr">
+                    <a:lnL w="6350" cap="flat" cmpd="sng" algn="ctr">
+                      <a:solidFill>
+                        <a:srgbClr val="E3E8E9"/>
+                      </a:solidFill>
+                      <a:prstDash val="solid"/>
+                      <a:round/>
+                      <a:headEnd type="none" w="med" len="med"/>
+                      <a:tailEnd type="none" w="med" len="med"/>
+                    </a:lnL>
+                    <a:lnR w="6350" cap="flat" cmpd="sng" algn="ctr">
+                      <a:solidFill>
+                        <a:srgbClr val="E3E8E9"/>
+                      </a:solidFill>
+                      <a:prstDash val="solid"/>
+                      <a:round/>
+                      <a:headEnd type="none" w="med" len="med"/>
+                      <a:tailEnd type="none" w="med" len="med"/>
+                    </a:lnR>
+                    <a:lnT w="6350" cap="flat" cmpd="sng" algn="ctr">
+                      <a:solidFill>
+                        <a:srgbClr val="E3E8E9"/>
+                      </a:solidFill>
+                      <a:prstDash val="solid"/>
+                      <a:round/>
+                      <a:headEnd type="none" w="med" len="med"/>
+                      <a:tailEnd type="none" w="med" len="med"/>
+                    </a:lnT>
+                    <a:lnB w="6350" cap="flat" cmpd="sng" algn="ctr">
+                      <a:solidFill>
+                        <a:srgbClr val="E3E8E9"/>
+                      </a:solidFill>
+                      <a:prstDash val="solid"/>
+                      <a:round/>
+                      <a:headEnd type="none" w="med" len="med"/>
+                      <a:tailEnd type="none" w="med" len="med"/>
+                    </a:lnB>
+                    <a:solidFill>
+                      <a:srgbClr val="FFFFFF"/>
+                    </a:solidFill>
+                  </a:tcPr>
+                </a:tc>
+                <a:tc>
+                  <a:txBody>
+                    <a:bodyPr/>
+                    <a:lstStyle/>
+                    <a:p>
+                      <a:pPr indent="0" marL="0">
+                        <a:buNone/>
+                      </a:pPr>
+                      <a:r>
+                        <a:rPr lang="en-US" sz="950" dirty="0">
+                          <a:solidFill>
+                            <a:srgbClr val="5B6B73"/>
+                          </a:solidFill>
+                          <a:latin typeface="Calibri" pitchFamily="34" charset="0"/>
+                          <a:ea typeface="Calibri" pitchFamily="34" charset="-122"/>
+                          <a:cs typeface="Calibri" pitchFamily="34" charset="-120"/>
+                        </a:rPr>
+                        <a:t>EIM - Manutenção &amp; Integridade</a:t>
+                      </a:r>
+                      <a:endParaRPr lang="en-US" sz="950" dirty="0">
+                        <a:latin typeface="Calibri" charset="0"/>
+                        <a:ea typeface="Calibri" charset="0"/>
+                        <a:cs typeface="Calibri" charset="0"/>
+                      </a:endParaRPr>
+                    </a:p>
+                  </a:txBody>
+                  <a:tcPr marL="91440" marR="91440" marT="45720" marB="45720" anchor="ctr">
+                    <a:lnL w="6350" cap="flat" cmpd="sng" algn="ctr">
+                      <a:solidFill>
+                        <a:srgbClr val="E3E8E9"/>
+                      </a:solidFill>
+                      <a:prstDash val="solid"/>
+                      <a:round/>
+                      <a:headEnd type="none" w="med" len="med"/>
+                      <a:tailEnd type="none" w="med" len="med"/>
+                    </a:lnL>
+                    <a:lnR w="6350" cap="flat" cmpd="sng" algn="ctr">
+                      <a:solidFill>
+                        <a:srgbClr val="E3E8E9"/>
+                      </a:solidFill>
+                      <a:prstDash val="solid"/>
+                      <a:round/>
+                      <a:headEnd type="none" w="med" len="med"/>
+                      <a:tailEnd type="none" w="med" len="med"/>
+                    </a:lnR>
+                    <a:lnT w="6350" cap="flat" cmpd="sng" algn="ctr">
+                      <a:solidFill>
+                        <a:srgbClr val="E3E8E9"/>
+                      </a:solidFill>
+                      <a:prstDash val="solid"/>
+                      <a:round/>
+                      <a:headEnd type="none" w="med" len="med"/>
+                      <a:tailEnd type="none" w="med" len="med"/>
+                    </a:lnT>
+                    <a:lnB w="6350" cap="flat" cmpd="sng" algn="ctr">
+                      <a:solidFill>
+                        <a:srgbClr val="E3E8E9"/>
+                      </a:solidFill>
+                      <a:prstDash val="solid"/>
+                      <a:round/>
+                      <a:headEnd type="none" w="med" len="med"/>
+                      <a:tailEnd type="none" w="med" len="med"/>
+                    </a:lnB>
+                    <a:solidFill>
+                      <a:srgbClr val="FFFFFF"/>
+                    </a:solidFill>
+                  </a:tcPr>
+                </a:tc>
+                <a:tc>
+                  <a:txBody>
+                    <a:bodyPr/>
+                    <a:lstStyle/>
+                    <a:p>
+                      <a:pPr algn="r" indent="0" marL="0">
+                        <a:buNone/>
+                      </a:pPr>
+                      <a:r>
+                        <a:rPr lang="en-US" sz="1000" b="1" dirty="0">
+                          <a:solidFill>
+                            <a:srgbClr val="0B2A3D"/>
+                          </a:solidFill>
+                          <a:latin typeface="Calibri" pitchFamily="34" charset="0"/>
+                          <a:ea typeface="Calibri" pitchFamily="34" charset="-122"/>
+                          <a:cs typeface="Calibri" pitchFamily="34" charset="-120"/>
+                        </a:rPr>
+                        <a:t>US$ 414,5 mil</a:t>
+                      </a:r>
+                      <a:endParaRPr lang="en-US" sz="1000" dirty="0">
+                        <a:latin typeface="Calibri" charset="0"/>
+                        <a:ea typeface="Calibri" charset="0"/>
+                        <a:cs typeface="Calibri" charset="0"/>
+                      </a:endParaRPr>
+                    </a:p>
+                  </a:txBody>
+                  <a:tcPr marL="91440" marR="91440" marT="45720" marB="45720" anchor="ctr">
+                    <a:lnL w="6350" cap="flat" cmpd="sng" algn="ctr">
+                      <a:solidFill>
+                        <a:srgbClr val="E3E8E9"/>
+                      </a:solidFill>
+                      <a:prstDash val="solid"/>
+                      <a:round/>
+                      <a:headEnd type="none" w="med" len="med"/>
+                      <a:tailEnd type="none" w="med" len="med"/>
+                    </a:lnL>
+                    <a:lnR w="6350" cap="flat" cmpd="sng" algn="ctr">
+                      <a:solidFill>
+                        <a:srgbClr val="E3E8E9"/>
+                      </a:solidFill>
+                      <a:prstDash val="solid"/>
+                      <a:round/>
+                      <a:headEnd type="none" w="med" len="med"/>
+                      <a:tailEnd type="none" w="med" len="med"/>
+                    </a:lnR>
+                    <a:lnT w="6350" cap="flat" cmpd="sng" algn="ctr">
+                      <a:solidFill>
+                        <a:srgbClr val="E3E8E9"/>
+                      </a:solidFill>
+                      <a:prstDash val="solid"/>
+                      <a:round/>
+                      <a:headEnd type="none" w="med" len="med"/>
+                      <a:tailEnd type="none" w="med" len="med"/>
+                    </a:lnT>
+                    <a:lnB w="6350" cap="flat" cmpd="sng" algn="ctr">
+                      <a:solidFill>
+                        <a:srgbClr val="E3E8E9"/>
+                      </a:solidFill>
+                      <a:prstDash val="solid"/>
+                      <a:round/>
+                      <a:headEnd type="none" w="med" len="med"/>
+                      <a:tailEnd type="none" w="med" len="med"/>
+                    </a:lnB>
+                    <a:solidFill>
+                      <a:srgbClr val="FFFFFF"/>
+                    </a:solidFill>
+                  </a:tcPr>
+                </a:tc>
+              </a:tr>
+              <a:tr h="288036">
+                <a:tc>
+                  <a:txBody>
+                    <a:bodyPr/>
+                    <a:lstStyle/>
+                    <a:p>
+                      <a:pPr indent="0" marL="0">
+                        <a:buNone/>
+                      </a:pPr>
+                      <a:r>
+                        <a:rPr lang="en-US" sz="1000" dirty="0">
+                          <a:solidFill>
+                            <a:srgbClr val="1C2B33"/>
+                          </a:solidFill>
+                          <a:latin typeface="Calibri" pitchFamily="34" charset="0"/>
+                          <a:ea typeface="Calibri" pitchFamily="34" charset="-122"/>
+                          <a:cs typeface="Calibri" pitchFamily="34" charset="-120"/>
+                        </a:rPr>
                         <a:t>Novas Destiladoras</a:t>
                       </a:r>
                       <a:endParaRPr lang="en-US" sz="1000" dirty="0">
@@ -8156,1102 +9252,6 @@
                 </a:tc>
               </a:tr>
               <a:tr h="288036">
-                <a:tc>
-                  <a:txBody>
-                    <a:bodyPr/>
-                    <a:lstStyle/>
-                    <a:p>
-                      <a:pPr indent="0" marL="0">
-                        <a:buNone/>
-                      </a:pPr>
-                      <a:r>
-                        <a:rPr lang="en-US" sz="1000" dirty="0">
-                          <a:solidFill>
-                            <a:srgbClr val="1C2B33"/>
-                          </a:solidFill>
-                          <a:latin typeface="Calibri" pitchFamily="34" charset="0"/>
-                          <a:ea typeface="Calibri" pitchFamily="34" charset="-122"/>
-                          <a:cs typeface="Calibri" pitchFamily="34" charset="-120"/>
-                        </a:rPr>
-                        <a:t>Instalação de Sensores de Hidrogênio nas Salas de Baterias</a:t>
-                      </a:r>
-                      <a:endParaRPr lang="en-US" sz="1000" dirty="0">
-                        <a:latin typeface="Calibri" charset="0"/>
-                        <a:ea typeface="Calibri" charset="0"/>
-                        <a:cs typeface="Calibri" charset="0"/>
-                      </a:endParaRPr>
-                    </a:p>
-                  </a:txBody>
-                  <a:tcPr marL="91440" marR="91440" marT="45720" marB="45720" anchor="ctr">
-                    <a:lnL w="6350" cap="flat" cmpd="sng" algn="ctr">
-                      <a:solidFill>
-                        <a:srgbClr val="E3E8E9"/>
-                      </a:solidFill>
-                      <a:prstDash val="solid"/>
-                      <a:round/>
-                      <a:headEnd type="none" w="med" len="med"/>
-                      <a:tailEnd type="none" w="med" len="med"/>
-                    </a:lnL>
-                    <a:lnR w="6350" cap="flat" cmpd="sng" algn="ctr">
-                      <a:solidFill>
-                        <a:srgbClr val="E3E8E9"/>
-                      </a:solidFill>
-                      <a:prstDash val="solid"/>
-                      <a:round/>
-                      <a:headEnd type="none" w="med" len="med"/>
-                      <a:tailEnd type="none" w="med" len="med"/>
-                    </a:lnR>
-                    <a:lnT w="6350" cap="flat" cmpd="sng" algn="ctr">
-                      <a:solidFill>
-                        <a:srgbClr val="E3E8E9"/>
-                      </a:solidFill>
-                      <a:prstDash val="solid"/>
-                      <a:round/>
-                      <a:headEnd type="none" w="med" len="med"/>
-                      <a:tailEnd type="none" w="med" len="med"/>
-                    </a:lnT>
-                    <a:lnB w="6350" cap="flat" cmpd="sng" algn="ctr">
-                      <a:solidFill>
-                        <a:srgbClr val="E3E8E9"/>
-                      </a:solidFill>
-                      <a:prstDash val="solid"/>
-                      <a:round/>
-                      <a:headEnd type="none" w="med" len="med"/>
-                      <a:tailEnd type="none" w="med" len="med"/>
-                    </a:lnB>
-                    <a:solidFill>
-                      <a:srgbClr val="FFFFFF"/>
-                    </a:solidFill>
-                  </a:tcPr>
-                </a:tc>
-                <a:tc>
-                  <a:txBody>
-                    <a:bodyPr/>
-                    <a:lstStyle/>
-                    <a:p>
-                      <a:pPr indent="0" marL="0">
-                        <a:buNone/>
-                      </a:pPr>
-                      <a:r>
-                        <a:rPr lang="en-US" sz="950" dirty="0">
-                          <a:solidFill>
-                            <a:srgbClr val="5B6B73"/>
-                          </a:solidFill>
-                          <a:latin typeface="Calibri" pitchFamily="34" charset="0"/>
-                          <a:ea typeface="Calibri" pitchFamily="34" charset="-122"/>
-                          <a:cs typeface="Calibri" pitchFamily="34" charset="-120"/>
-                        </a:rPr>
-                        <a:t>Integridade e Regulatório</a:t>
-                      </a:r>
-                      <a:endParaRPr lang="en-US" sz="950" dirty="0">
-                        <a:latin typeface="Calibri" charset="0"/>
-                        <a:ea typeface="Calibri" charset="0"/>
-                        <a:cs typeface="Calibri" charset="0"/>
-                      </a:endParaRPr>
-                    </a:p>
-                  </a:txBody>
-                  <a:tcPr marL="91440" marR="91440" marT="45720" marB="45720" anchor="ctr">
-                    <a:lnL w="6350" cap="flat" cmpd="sng" algn="ctr">
-                      <a:solidFill>
-                        <a:srgbClr val="E3E8E9"/>
-                      </a:solidFill>
-                      <a:prstDash val="solid"/>
-                      <a:round/>
-                      <a:headEnd type="none" w="med" len="med"/>
-                      <a:tailEnd type="none" w="med" len="med"/>
-                    </a:lnL>
-                    <a:lnR w="6350" cap="flat" cmpd="sng" algn="ctr">
-                      <a:solidFill>
-                        <a:srgbClr val="E3E8E9"/>
-                      </a:solidFill>
-                      <a:prstDash val="solid"/>
-                      <a:round/>
-                      <a:headEnd type="none" w="med" len="med"/>
-                      <a:tailEnd type="none" w="med" len="med"/>
-                    </a:lnR>
-                    <a:lnT w="6350" cap="flat" cmpd="sng" algn="ctr">
-                      <a:solidFill>
-                        <a:srgbClr val="E3E8E9"/>
-                      </a:solidFill>
-                      <a:prstDash val="solid"/>
-                      <a:round/>
-                      <a:headEnd type="none" w="med" len="med"/>
-                      <a:tailEnd type="none" w="med" len="med"/>
-                    </a:lnT>
-                    <a:lnB w="6350" cap="flat" cmpd="sng" algn="ctr">
-                      <a:solidFill>
-                        <a:srgbClr val="E3E8E9"/>
-                      </a:solidFill>
-                      <a:prstDash val="solid"/>
-                      <a:round/>
-                      <a:headEnd type="none" w="med" len="med"/>
-                      <a:tailEnd type="none" w="med" len="med"/>
-                    </a:lnB>
-                    <a:solidFill>
-                      <a:srgbClr val="FFFFFF"/>
-                    </a:solidFill>
-                  </a:tcPr>
-                </a:tc>
-                <a:tc>
-                  <a:txBody>
-                    <a:bodyPr/>
-                    <a:lstStyle/>
-                    <a:p>
-                      <a:pPr indent="0" marL="0">
-                        <a:buNone/>
-                      </a:pPr>
-                      <a:r>
-                        <a:rPr lang="en-US" sz="950" dirty="0">
-                          <a:solidFill>
-                            <a:srgbClr val="5B6B73"/>
-                          </a:solidFill>
-                          <a:latin typeface="Calibri" pitchFamily="34" charset="0"/>
-                          <a:ea typeface="Calibri" pitchFamily="34" charset="-122"/>
-                          <a:cs typeface="Calibri" pitchFamily="34" charset="-120"/>
-                        </a:rPr>
-                        <a:t>Projetos</a:t>
-                      </a:r>
-                      <a:endParaRPr lang="en-US" sz="950" dirty="0">
-                        <a:latin typeface="Calibri" charset="0"/>
-                        <a:ea typeface="Calibri" charset="0"/>
-                        <a:cs typeface="Calibri" charset="0"/>
-                      </a:endParaRPr>
-                    </a:p>
-                  </a:txBody>
-                  <a:tcPr marL="91440" marR="91440" marT="45720" marB="45720" anchor="ctr">
-                    <a:lnL w="6350" cap="flat" cmpd="sng" algn="ctr">
-                      <a:solidFill>
-                        <a:srgbClr val="E3E8E9"/>
-                      </a:solidFill>
-                      <a:prstDash val="solid"/>
-                      <a:round/>
-                      <a:headEnd type="none" w="med" len="med"/>
-                      <a:tailEnd type="none" w="med" len="med"/>
-                    </a:lnL>
-                    <a:lnR w="6350" cap="flat" cmpd="sng" algn="ctr">
-                      <a:solidFill>
-                        <a:srgbClr val="E3E8E9"/>
-                      </a:solidFill>
-                      <a:prstDash val="solid"/>
-                      <a:round/>
-                      <a:headEnd type="none" w="med" len="med"/>
-                      <a:tailEnd type="none" w="med" len="med"/>
-                    </a:lnR>
-                    <a:lnT w="6350" cap="flat" cmpd="sng" algn="ctr">
-                      <a:solidFill>
-                        <a:srgbClr val="E3E8E9"/>
-                      </a:solidFill>
-                      <a:prstDash val="solid"/>
-                      <a:round/>
-                      <a:headEnd type="none" w="med" len="med"/>
-                      <a:tailEnd type="none" w="med" len="med"/>
-                    </a:lnT>
-                    <a:lnB w="6350" cap="flat" cmpd="sng" algn="ctr">
-                      <a:solidFill>
-                        <a:srgbClr val="E3E8E9"/>
-                      </a:solidFill>
-                      <a:prstDash val="solid"/>
-                      <a:round/>
-                      <a:headEnd type="none" w="med" len="med"/>
-                      <a:tailEnd type="none" w="med" len="med"/>
-                    </a:lnB>
-                    <a:solidFill>
-                      <a:srgbClr val="FFFFFF"/>
-                    </a:solidFill>
-                  </a:tcPr>
-                </a:tc>
-                <a:tc>
-                  <a:txBody>
-                    <a:bodyPr/>
-                    <a:lstStyle/>
-                    <a:p>
-                      <a:pPr algn="r" indent="0" marL="0">
-                        <a:buNone/>
-                      </a:pPr>
-                      <a:r>
-                        <a:rPr lang="en-US" sz="1000" b="1" dirty="0">
-                          <a:solidFill>
-                            <a:srgbClr val="0B2A3D"/>
-                          </a:solidFill>
-                          <a:latin typeface="Calibri" pitchFamily="34" charset="0"/>
-                          <a:ea typeface="Calibri" pitchFamily="34" charset="-122"/>
-                          <a:cs typeface="Calibri" pitchFamily="34" charset="-120"/>
-                        </a:rPr>
-                        <a:t>US$ 281,8 mil</a:t>
-                      </a:r>
-                      <a:endParaRPr lang="en-US" sz="1000" dirty="0">
-                        <a:latin typeface="Calibri" charset="0"/>
-                        <a:ea typeface="Calibri" charset="0"/>
-                        <a:cs typeface="Calibri" charset="0"/>
-                      </a:endParaRPr>
-                    </a:p>
-                  </a:txBody>
-                  <a:tcPr marL="91440" marR="91440" marT="45720" marB="45720" anchor="ctr">
-                    <a:lnL w="6350" cap="flat" cmpd="sng" algn="ctr">
-                      <a:solidFill>
-                        <a:srgbClr val="E3E8E9"/>
-                      </a:solidFill>
-                      <a:prstDash val="solid"/>
-                      <a:round/>
-                      <a:headEnd type="none" w="med" len="med"/>
-                      <a:tailEnd type="none" w="med" len="med"/>
-                    </a:lnL>
-                    <a:lnR w="6350" cap="flat" cmpd="sng" algn="ctr">
-                      <a:solidFill>
-                        <a:srgbClr val="E3E8E9"/>
-                      </a:solidFill>
-                      <a:prstDash val="solid"/>
-                      <a:round/>
-                      <a:headEnd type="none" w="med" len="med"/>
-                      <a:tailEnd type="none" w="med" len="med"/>
-                    </a:lnR>
-                    <a:lnT w="6350" cap="flat" cmpd="sng" algn="ctr">
-                      <a:solidFill>
-                        <a:srgbClr val="E3E8E9"/>
-                      </a:solidFill>
-                      <a:prstDash val="solid"/>
-                      <a:round/>
-                      <a:headEnd type="none" w="med" len="med"/>
-                      <a:tailEnd type="none" w="med" len="med"/>
-                    </a:lnT>
-                    <a:lnB w="6350" cap="flat" cmpd="sng" algn="ctr">
-                      <a:solidFill>
-                        <a:srgbClr val="E3E8E9"/>
-                      </a:solidFill>
-                      <a:prstDash val="solid"/>
-                      <a:round/>
-                      <a:headEnd type="none" w="med" len="med"/>
-                      <a:tailEnd type="none" w="med" len="med"/>
-                    </a:lnB>
-                    <a:solidFill>
-                      <a:srgbClr val="FFFFFF"/>
-                    </a:solidFill>
-                  </a:tcPr>
-                </a:tc>
-              </a:tr>
-              <a:tr h="288036">
-                <a:tc>
-                  <a:txBody>
-                    <a:bodyPr/>
-                    <a:lstStyle/>
-                    <a:p>
-                      <a:pPr indent="0" marL="0">
-                        <a:buNone/>
-                      </a:pPr>
-                      <a:r>
-                        <a:rPr lang="en-US" sz="1000" dirty="0">
-                          <a:solidFill>
-                            <a:srgbClr val="1C2B33"/>
-                          </a:solidFill>
-                          <a:latin typeface="Calibri" pitchFamily="34" charset="0"/>
-                          <a:ea typeface="Calibri" pitchFamily="34" charset="-122"/>
-                          <a:cs typeface="Calibri" pitchFamily="34" charset="-120"/>
-                        </a:rPr>
-                        <a:t>Desmobilização TA</a:t>
-                      </a:r>
-                      <a:endParaRPr lang="en-US" sz="1000" dirty="0">
-                        <a:latin typeface="Calibri" charset="0"/>
-                        <a:ea typeface="Calibri" charset="0"/>
-                        <a:cs typeface="Calibri" charset="0"/>
-                      </a:endParaRPr>
-                    </a:p>
-                  </a:txBody>
-                  <a:tcPr marL="91440" marR="91440" marT="45720" marB="45720" anchor="ctr">
-                    <a:lnL w="6350" cap="flat" cmpd="sng" algn="ctr">
-                      <a:solidFill>
-                        <a:srgbClr val="E3E8E9"/>
-                      </a:solidFill>
-                      <a:prstDash val="solid"/>
-                      <a:round/>
-                      <a:headEnd type="none" w="med" len="med"/>
-                      <a:tailEnd type="none" w="med" len="med"/>
-                    </a:lnL>
-                    <a:lnR w="6350" cap="flat" cmpd="sng" algn="ctr">
-                      <a:solidFill>
-                        <a:srgbClr val="E3E8E9"/>
-                      </a:solidFill>
-                      <a:prstDash val="solid"/>
-                      <a:round/>
-                      <a:headEnd type="none" w="med" len="med"/>
-                      <a:tailEnd type="none" w="med" len="med"/>
-                    </a:lnR>
-                    <a:lnT w="6350" cap="flat" cmpd="sng" algn="ctr">
-                      <a:solidFill>
-                        <a:srgbClr val="E3E8E9"/>
-                      </a:solidFill>
-                      <a:prstDash val="solid"/>
-                      <a:round/>
-                      <a:headEnd type="none" w="med" len="med"/>
-                      <a:tailEnd type="none" w="med" len="med"/>
-                    </a:lnT>
-                    <a:lnB w="6350" cap="flat" cmpd="sng" algn="ctr">
-                      <a:solidFill>
-                        <a:srgbClr val="E3E8E9"/>
-                      </a:solidFill>
-                      <a:prstDash val="solid"/>
-                      <a:round/>
-                      <a:headEnd type="none" w="med" len="med"/>
-                      <a:tailEnd type="none" w="med" len="med"/>
-                    </a:lnB>
-                    <a:solidFill>
-                      <a:srgbClr val="F0F4F5"/>
-                    </a:solidFill>
-                  </a:tcPr>
-                </a:tc>
-                <a:tc>
-                  <a:txBody>
-                    <a:bodyPr/>
-                    <a:lstStyle/>
-                    <a:p>
-                      <a:pPr indent="0" marL="0">
-                        <a:buNone/>
-                      </a:pPr>
-                      <a:r>
-                        <a:rPr lang="en-US" sz="950" dirty="0">
-                          <a:solidFill>
-                            <a:srgbClr val="5B6B73"/>
-                          </a:solidFill>
-                          <a:latin typeface="Calibri" pitchFamily="34" charset="0"/>
-                          <a:ea typeface="Calibri" pitchFamily="34" charset="-122"/>
-                          <a:cs typeface="Calibri" pitchFamily="34" charset="-120"/>
-                        </a:rPr>
-                        <a:t>Eficiência de Produção</a:t>
-                      </a:r>
-                      <a:endParaRPr lang="en-US" sz="950" dirty="0">
-                        <a:latin typeface="Calibri" charset="0"/>
-                        <a:ea typeface="Calibri" charset="0"/>
-                        <a:cs typeface="Calibri" charset="0"/>
-                      </a:endParaRPr>
-                    </a:p>
-                  </a:txBody>
-                  <a:tcPr marL="91440" marR="91440" marT="45720" marB="45720" anchor="ctr">
-                    <a:lnL w="6350" cap="flat" cmpd="sng" algn="ctr">
-                      <a:solidFill>
-                        <a:srgbClr val="E3E8E9"/>
-                      </a:solidFill>
-                      <a:prstDash val="solid"/>
-                      <a:round/>
-                      <a:headEnd type="none" w="med" len="med"/>
-                      <a:tailEnd type="none" w="med" len="med"/>
-                    </a:lnL>
-                    <a:lnR w="6350" cap="flat" cmpd="sng" algn="ctr">
-                      <a:solidFill>
-                        <a:srgbClr val="E3E8E9"/>
-                      </a:solidFill>
-                      <a:prstDash val="solid"/>
-                      <a:round/>
-                      <a:headEnd type="none" w="med" len="med"/>
-                      <a:tailEnd type="none" w="med" len="med"/>
-                    </a:lnR>
-                    <a:lnT w="6350" cap="flat" cmpd="sng" algn="ctr">
-                      <a:solidFill>
-                        <a:srgbClr val="E3E8E9"/>
-                      </a:solidFill>
-                      <a:prstDash val="solid"/>
-                      <a:round/>
-                      <a:headEnd type="none" w="med" len="med"/>
-                      <a:tailEnd type="none" w="med" len="med"/>
-                    </a:lnT>
-                    <a:lnB w="6350" cap="flat" cmpd="sng" algn="ctr">
-                      <a:solidFill>
-                        <a:srgbClr val="E3E8E9"/>
-                      </a:solidFill>
-                      <a:prstDash val="solid"/>
-                      <a:round/>
-                      <a:headEnd type="none" w="med" len="med"/>
-                      <a:tailEnd type="none" w="med" len="med"/>
-                    </a:lnB>
-                    <a:solidFill>
-                      <a:srgbClr val="F0F4F5"/>
-                    </a:solidFill>
-                  </a:tcPr>
-                </a:tc>
-                <a:tc>
-                  <a:txBody>
-                    <a:bodyPr/>
-                    <a:lstStyle/>
-                    <a:p>
-                      <a:pPr indent="0" marL="0">
-                        <a:buNone/>
-                      </a:pPr>
-                      <a:r>
-                        <a:rPr lang="en-US" sz="950" dirty="0">
-                          <a:solidFill>
-                            <a:srgbClr val="5B6B73"/>
-                          </a:solidFill>
-                          <a:latin typeface="Calibri" pitchFamily="34" charset="0"/>
-                          <a:ea typeface="Calibri" pitchFamily="34" charset="-122"/>
-                          <a:cs typeface="Calibri" pitchFamily="34" charset="-120"/>
-                        </a:rPr>
-                        <a:t>TA - Parada Programada</a:t>
-                      </a:r>
-                      <a:endParaRPr lang="en-US" sz="950" dirty="0">
-                        <a:latin typeface="Calibri" charset="0"/>
-                        <a:ea typeface="Calibri" charset="0"/>
-                        <a:cs typeface="Calibri" charset="0"/>
-                      </a:endParaRPr>
-                    </a:p>
-                  </a:txBody>
-                  <a:tcPr marL="91440" marR="91440" marT="45720" marB="45720" anchor="ctr">
-                    <a:lnL w="6350" cap="flat" cmpd="sng" algn="ctr">
-                      <a:solidFill>
-                        <a:srgbClr val="E3E8E9"/>
-                      </a:solidFill>
-                      <a:prstDash val="solid"/>
-                      <a:round/>
-                      <a:headEnd type="none" w="med" len="med"/>
-                      <a:tailEnd type="none" w="med" len="med"/>
-                    </a:lnL>
-                    <a:lnR w="6350" cap="flat" cmpd="sng" algn="ctr">
-                      <a:solidFill>
-                        <a:srgbClr val="E3E8E9"/>
-                      </a:solidFill>
-                      <a:prstDash val="solid"/>
-                      <a:round/>
-                      <a:headEnd type="none" w="med" len="med"/>
-                      <a:tailEnd type="none" w="med" len="med"/>
-                    </a:lnR>
-                    <a:lnT w="6350" cap="flat" cmpd="sng" algn="ctr">
-                      <a:solidFill>
-                        <a:srgbClr val="E3E8E9"/>
-                      </a:solidFill>
-                      <a:prstDash val="solid"/>
-                      <a:round/>
-                      <a:headEnd type="none" w="med" len="med"/>
-                      <a:tailEnd type="none" w="med" len="med"/>
-                    </a:lnT>
-                    <a:lnB w="6350" cap="flat" cmpd="sng" algn="ctr">
-                      <a:solidFill>
-                        <a:srgbClr val="E3E8E9"/>
-                      </a:solidFill>
-                      <a:prstDash val="solid"/>
-                      <a:round/>
-                      <a:headEnd type="none" w="med" len="med"/>
-                      <a:tailEnd type="none" w="med" len="med"/>
-                    </a:lnB>
-                    <a:solidFill>
-                      <a:srgbClr val="F0F4F5"/>
-                    </a:solidFill>
-                  </a:tcPr>
-                </a:tc>
-                <a:tc>
-                  <a:txBody>
-                    <a:bodyPr/>
-                    <a:lstStyle/>
-                    <a:p>
-                      <a:pPr algn="r" indent="0" marL="0">
-                        <a:buNone/>
-                      </a:pPr>
-                      <a:r>
-                        <a:rPr lang="en-US" sz="1000" b="1" dirty="0">
-                          <a:solidFill>
-                            <a:srgbClr val="0B2A3D"/>
-                          </a:solidFill>
-                          <a:latin typeface="Calibri" pitchFamily="34" charset="0"/>
-                          <a:ea typeface="Calibri" pitchFamily="34" charset="-122"/>
-                          <a:cs typeface="Calibri" pitchFamily="34" charset="-120"/>
-                        </a:rPr>
-                        <a:t>US$ 247,6 mil</a:t>
-                      </a:r>
-                      <a:endParaRPr lang="en-US" sz="1000" dirty="0">
-                        <a:latin typeface="Calibri" charset="0"/>
-                        <a:ea typeface="Calibri" charset="0"/>
-                        <a:cs typeface="Calibri" charset="0"/>
-                      </a:endParaRPr>
-                    </a:p>
-                  </a:txBody>
-                  <a:tcPr marL="91440" marR="91440" marT="45720" marB="45720" anchor="ctr">
-                    <a:lnL w="6350" cap="flat" cmpd="sng" algn="ctr">
-                      <a:solidFill>
-                        <a:srgbClr val="E3E8E9"/>
-                      </a:solidFill>
-                      <a:prstDash val="solid"/>
-                      <a:round/>
-                      <a:headEnd type="none" w="med" len="med"/>
-                      <a:tailEnd type="none" w="med" len="med"/>
-                    </a:lnL>
-                    <a:lnR w="6350" cap="flat" cmpd="sng" algn="ctr">
-                      <a:solidFill>
-                        <a:srgbClr val="E3E8E9"/>
-                      </a:solidFill>
-                      <a:prstDash val="solid"/>
-                      <a:round/>
-                      <a:headEnd type="none" w="med" len="med"/>
-                      <a:tailEnd type="none" w="med" len="med"/>
-                    </a:lnR>
-                    <a:lnT w="6350" cap="flat" cmpd="sng" algn="ctr">
-                      <a:solidFill>
-                        <a:srgbClr val="E3E8E9"/>
-                      </a:solidFill>
-                      <a:prstDash val="solid"/>
-                      <a:round/>
-                      <a:headEnd type="none" w="med" len="med"/>
-                      <a:tailEnd type="none" w="med" len="med"/>
-                    </a:lnT>
-                    <a:lnB w="6350" cap="flat" cmpd="sng" algn="ctr">
-                      <a:solidFill>
-                        <a:srgbClr val="E3E8E9"/>
-                      </a:solidFill>
-                      <a:prstDash val="solid"/>
-                      <a:round/>
-                      <a:headEnd type="none" w="med" len="med"/>
-                      <a:tailEnd type="none" w="med" len="med"/>
-                    </a:lnB>
-                    <a:solidFill>
-                      <a:srgbClr val="F0F4F5"/>
-                    </a:solidFill>
-                  </a:tcPr>
-                </a:tc>
-              </a:tr>
-              <a:tr h="288036">
-                <a:tc>
-                  <a:txBody>
-                    <a:bodyPr/>
-                    <a:lstStyle/>
-                    <a:p>
-                      <a:pPr indent="0" marL="0">
-                        <a:buNone/>
-                      </a:pPr>
-                      <a:r>
-                        <a:rPr lang="en-US" sz="1000" dirty="0">
-                          <a:solidFill>
-                            <a:srgbClr val="1C2B33"/>
-                          </a:solidFill>
-                          <a:latin typeface="Calibri" pitchFamily="34" charset="0"/>
-                          <a:ea typeface="Calibri" pitchFamily="34" charset="-122"/>
-                          <a:cs typeface="Calibri" pitchFamily="34" charset="-120"/>
-                        </a:rPr>
-                        <a:t>Mobilização TA</a:t>
-                      </a:r>
-                      <a:endParaRPr lang="en-US" sz="1000" dirty="0">
-                        <a:latin typeface="Calibri" charset="0"/>
-                        <a:ea typeface="Calibri" charset="0"/>
-                        <a:cs typeface="Calibri" charset="0"/>
-                      </a:endParaRPr>
-                    </a:p>
-                  </a:txBody>
-                  <a:tcPr marL="91440" marR="91440" marT="45720" marB="45720" anchor="ctr">
-                    <a:lnL w="6350" cap="flat" cmpd="sng" algn="ctr">
-                      <a:solidFill>
-                        <a:srgbClr val="E3E8E9"/>
-                      </a:solidFill>
-                      <a:prstDash val="solid"/>
-                      <a:round/>
-                      <a:headEnd type="none" w="med" len="med"/>
-                      <a:tailEnd type="none" w="med" len="med"/>
-                    </a:lnL>
-                    <a:lnR w="6350" cap="flat" cmpd="sng" algn="ctr">
-                      <a:solidFill>
-                        <a:srgbClr val="E3E8E9"/>
-                      </a:solidFill>
-                      <a:prstDash val="solid"/>
-                      <a:round/>
-                      <a:headEnd type="none" w="med" len="med"/>
-                      <a:tailEnd type="none" w="med" len="med"/>
-                    </a:lnR>
-                    <a:lnT w="6350" cap="flat" cmpd="sng" algn="ctr">
-                      <a:solidFill>
-                        <a:srgbClr val="E3E8E9"/>
-                      </a:solidFill>
-                      <a:prstDash val="solid"/>
-                      <a:round/>
-                      <a:headEnd type="none" w="med" len="med"/>
-                      <a:tailEnd type="none" w="med" len="med"/>
-                    </a:lnT>
-                    <a:lnB w="6350" cap="flat" cmpd="sng" algn="ctr">
-                      <a:solidFill>
-                        <a:srgbClr val="E3E8E9"/>
-                      </a:solidFill>
-                      <a:prstDash val="solid"/>
-                      <a:round/>
-                      <a:headEnd type="none" w="med" len="med"/>
-                      <a:tailEnd type="none" w="med" len="med"/>
-                    </a:lnB>
-                    <a:solidFill>
-                      <a:srgbClr val="FFFFFF"/>
-                    </a:solidFill>
-                  </a:tcPr>
-                </a:tc>
-                <a:tc>
-                  <a:txBody>
-                    <a:bodyPr/>
-                    <a:lstStyle/>
-                    <a:p>
-                      <a:pPr indent="0" marL="0">
-                        <a:buNone/>
-                      </a:pPr>
-                      <a:r>
-                        <a:rPr lang="en-US" sz="950" dirty="0">
-                          <a:solidFill>
-                            <a:srgbClr val="5B6B73"/>
-                          </a:solidFill>
-                          <a:latin typeface="Calibri" pitchFamily="34" charset="0"/>
-                          <a:ea typeface="Calibri" pitchFamily="34" charset="-122"/>
-                          <a:cs typeface="Calibri" pitchFamily="34" charset="-120"/>
-                        </a:rPr>
-                        <a:t>Eficiência de Produção</a:t>
-                      </a:r>
-                      <a:endParaRPr lang="en-US" sz="950" dirty="0">
-                        <a:latin typeface="Calibri" charset="0"/>
-                        <a:ea typeface="Calibri" charset="0"/>
-                        <a:cs typeface="Calibri" charset="0"/>
-                      </a:endParaRPr>
-                    </a:p>
-                  </a:txBody>
-                  <a:tcPr marL="91440" marR="91440" marT="45720" marB="45720" anchor="ctr">
-                    <a:lnL w="6350" cap="flat" cmpd="sng" algn="ctr">
-                      <a:solidFill>
-                        <a:srgbClr val="E3E8E9"/>
-                      </a:solidFill>
-                      <a:prstDash val="solid"/>
-                      <a:round/>
-                      <a:headEnd type="none" w="med" len="med"/>
-                      <a:tailEnd type="none" w="med" len="med"/>
-                    </a:lnL>
-                    <a:lnR w="6350" cap="flat" cmpd="sng" algn="ctr">
-                      <a:solidFill>
-                        <a:srgbClr val="E3E8E9"/>
-                      </a:solidFill>
-                      <a:prstDash val="solid"/>
-                      <a:round/>
-                      <a:headEnd type="none" w="med" len="med"/>
-                      <a:tailEnd type="none" w="med" len="med"/>
-                    </a:lnR>
-                    <a:lnT w="6350" cap="flat" cmpd="sng" algn="ctr">
-                      <a:solidFill>
-                        <a:srgbClr val="E3E8E9"/>
-                      </a:solidFill>
-                      <a:prstDash val="solid"/>
-                      <a:round/>
-                      <a:headEnd type="none" w="med" len="med"/>
-                      <a:tailEnd type="none" w="med" len="med"/>
-                    </a:lnT>
-                    <a:lnB w="6350" cap="flat" cmpd="sng" algn="ctr">
-                      <a:solidFill>
-                        <a:srgbClr val="E3E8E9"/>
-                      </a:solidFill>
-                      <a:prstDash val="solid"/>
-                      <a:round/>
-                      <a:headEnd type="none" w="med" len="med"/>
-                      <a:tailEnd type="none" w="med" len="med"/>
-                    </a:lnB>
-                    <a:solidFill>
-                      <a:srgbClr val="FFFFFF"/>
-                    </a:solidFill>
-                  </a:tcPr>
-                </a:tc>
-                <a:tc>
-                  <a:txBody>
-                    <a:bodyPr/>
-                    <a:lstStyle/>
-                    <a:p>
-                      <a:pPr indent="0" marL="0">
-                        <a:buNone/>
-                      </a:pPr>
-                      <a:r>
-                        <a:rPr lang="en-US" sz="950" dirty="0">
-                          <a:solidFill>
-                            <a:srgbClr val="5B6B73"/>
-                          </a:solidFill>
-                          <a:latin typeface="Calibri" pitchFamily="34" charset="0"/>
-                          <a:ea typeface="Calibri" pitchFamily="34" charset="-122"/>
-                          <a:cs typeface="Calibri" pitchFamily="34" charset="-120"/>
-                        </a:rPr>
-                        <a:t>TA - Parada Programada</a:t>
-                      </a:r>
-                      <a:endParaRPr lang="en-US" sz="950" dirty="0">
-                        <a:latin typeface="Calibri" charset="0"/>
-                        <a:ea typeface="Calibri" charset="0"/>
-                        <a:cs typeface="Calibri" charset="0"/>
-                      </a:endParaRPr>
-                    </a:p>
-                  </a:txBody>
-                  <a:tcPr marL="91440" marR="91440" marT="45720" marB="45720" anchor="ctr">
-                    <a:lnL w="6350" cap="flat" cmpd="sng" algn="ctr">
-                      <a:solidFill>
-                        <a:srgbClr val="E3E8E9"/>
-                      </a:solidFill>
-                      <a:prstDash val="solid"/>
-                      <a:round/>
-                      <a:headEnd type="none" w="med" len="med"/>
-                      <a:tailEnd type="none" w="med" len="med"/>
-                    </a:lnL>
-                    <a:lnR w="6350" cap="flat" cmpd="sng" algn="ctr">
-                      <a:solidFill>
-                        <a:srgbClr val="E3E8E9"/>
-                      </a:solidFill>
-                      <a:prstDash val="solid"/>
-                      <a:round/>
-                      <a:headEnd type="none" w="med" len="med"/>
-                      <a:tailEnd type="none" w="med" len="med"/>
-                    </a:lnR>
-                    <a:lnT w="6350" cap="flat" cmpd="sng" algn="ctr">
-                      <a:solidFill>
-                        <a:srgbClr val="E3E8E9"/>
-                      </a:solidFill>
-                      <a:prstDash val="solid"/>
-                      <a:round/>
-                      <a:headEnd type="none" w="med" len="med"/>
-                      <a:tailEnd type="none" w="med" len="med"/>
-                    </a:lnT>
-                    <a:lnB w="6350" cap="flat" cmpd="sng" algn="ctr">
-                      <a:solidFill>
-                        <a:srgbClr val="E3E8E9"/>
-                      </a:solidFill>
-                      <a:prstDash val="solid"/>
-                      <a:round/>
-                      <a:headEnd type="none" w="med" len="med"/>
-                      <a:tailEnd type="none" w="med" len="med"/>
-                    </a:lnB>
-                    <a:solidFill>
-                      <a:srgbClr val="FFFFFF"/>
-                    </a:solidFill>
-                  </a:tcPr>
-                </a:tc>
-                <a:tc>
-                  <a:txBody>
-                    <a:bodyPr/>
-                    <a:lstStyle/>
-                    <a:p>
-                      <a:pPr algn="r" indent="0" marL="0">
-                        <a:buNone/>
-                      </a:pPr>
-                      <a:r>
-                        <a:rPr lang="en-US" sz="1000" b="1" dirty="0">
-                          <a:solidFill>
-                            <a:srgbClr val="0B2A3D"/>
-                          </a:solidFill>
-                          <a:latin typeface="Calibri" pitchFamily="34" charset="0"/>
-                          <a:ea typeface="Calibri" pitchFamily="34" charset="-122"/>
-                          <a:cs typeface="Calibri" pitchFamily="34" charset="-120"/>
-                        </a:rPr>
-                        <a:t>US$ 247,6 mil</a:t>
-                      </a:r>
-                      <a:endParaRPr lang="en-US" sz="1000" dirty="0">
-                        <a:latin typeface="Calibri" charset="0"/>
-                        <a:ea typeface="Calibri" charset="0"/>
-                        <a:cs typeface="Calibri" charset="0"/>
-                      </a:endParaRPr>
-                    </a:p>
-                  </a:txBody>
-                  <a:tcPr marL="91440" marR="91440" marT="45720" marB="45720" anchor="ctr">
-                    <a:lnL w="6350" cap="flat" cmpd="sng" algn="ctr">
-                      <a:solidFill>
-                        <a:srgbClr val="E3E8E9"/>
-                      </a:solidFill>
-                      <a:prstDash val="solid"/>
-                      <a:round/>
-                      <a:headEnd type="none" w="med" len="med"/>
-                      <a:tailEnd type="none" w="med" len="med"/>
-                    </a:lnL>
-                    <a:lnR w="6350" cap="flat" cmpd="sng" algn="ctr">
-                      <a:solidFill>
-                        <a:srgbClr val="E3E8E9"/>
-                      </a:solidFill>
-                      <a:prstDash val="solid"/>
-                      <a:round/>
-                      <a:headEnd type="none" w="med" len="med"/>
-                      <a:tailEnd type="none" w="med" len="med"/>
-                    </a:lnR>
-                    <a:lnT w="6350" cap="flat" cmpd="sng" algn="ctr">
-                      <a:solidFill>
-                        <a:srgbClr val="E3E8E9"/>
-                      </a:solidFill>
-                      <a:prstDash val="solid"/>
-                      <a:round/>
-                      <a:headEnd type="none" w="med" len="med"/>
-                      <a:tailEnd type="none" w="med" len="med"/>
-                    </a:lnT>
-                    <a:lnB w="6350" cap="flat" cmpd="sng" algn="ctr">
-                      <a:solidFill>
-                        <a:srgbClr val="E3E8E9"/>
-                      </a:solidFill>
-                      <a:prstDash val="solid"/>
-                      <a:round/>
-                      <a:headEnd type="none" w="med" len="med"/>
-                      <a:tailEnd type="none" w="med" len="med"/>
-                    </a:lnB>
-                    <a:solidFill>
-                      <a:srgbClr val="FFFFFF"/>
-                    </a:solidFill>
-                  </a:tcPr>
-                </a:tc>
-              </a:tr>
-              <a:tr h="288036">
-                <a:tc>
-                  <a:txBody>
-                    <a:bodyPr/>
-                    <a:lstStyle/>
-                    <a:p>
-                      <a:pPr indent="0" marL="0">
-                        <a:buNone/>
-                      </a:pPr>
-                      <a:r>
-                        <a:rPr lang="en-US" sz="1000" dirty="0">
-                          <a:solidFill>
-                            <a:srgbClr val="1C2B33"/>
-                          </a:solidFill>
-                          <a:latin typeface="Calibri" pitchFamily="34" charset="0"/>
-                          <a:ea typeface="Calibri" pitchFamily="34" charset="-122"/>
-                          <a:cs typeface="Calibri" pitchFamily="34" charset="-120"/>
-                        </a:rPr>
-                        <a:t>Comutação tanques de diesel (tanque e sedimentação e serviço)</a:t>
-                      </a:r>
-                      <a:endParaRPr lang="en-US" sz="1000" dirty="0">
-                        <a:latin typeface="Calibri" charset="0"/>
-                        <a:ea typeface="Calibri" charset="0"/>
-                        <a:cs typeface="Calibri" charset="0"/>
-                      </a:endParaRPr>
-                    </a:p>
-                  </a:txBody>
-                  <a:tcPr marL="91440" marR="91440" marT="45720" marB="45720" anchor="ctr">
-                    <a:lnL w="6350" cap="flat" cmpd="sng" algn="ctr">
-                      <a:solidFill>
-                        <a:srgbClr val="E3E8E9"/>
-                      </a:solidFill>
-                      <a:prstDash val="solid"/>
-                      <a:round/>
-                      <a:headEnd type="none" w="med" len="med"/>
-                      <a:tailEnd type="none" w="med" len="med"/>
-                    </a:lnL>
-                    <a:lnR w="6350" cap="flat" cmpd="sng" algn="ctr">
-                      <a:solidFill>
-                        <a:srgbClr val="E3E8E9"/>
-                      </a:solidFill>
-                      <a:prstDash val="solid"/>
-                      <a:round/>
-                      <a:headEnd type="none" w="med" len="med"/>
-                      <a:tailEnd type="none" w="med" len="med"/>
-                    </a:lnR>
-                    <a:lnT w="6350" cap="flat" cmpd="sng" algn="ctr">
-                      <a:solidFill>
-                        <a:srgbClr val="E3E8E9"/>
-                      </a:solidFill>
-                      <a:prstDash val="solid"/>
-                      <a:round/>
-                      <a:headEnd type="none" w="med" len="med"/>
-                      <a:tailEnd type="none" w="med" len="med"/>
-                    </a:lnT>
-                    <a:lnB w="6350" cap="flat" cmpd="sng" algn="ctr">
-                      <a:solidFill>
-                        <a:srgbClr val="E3E8E9"/>
-                      </a:solidFill>
-                      <a:prstDash val="solid"/>
-                      <a:round/>
-                      <a:headEnd type="none" w="med" len="med"/>
-                      <a:tailEnd type="none" w="med" len="med"/>
-                    </a:lnB>
-                    <a:solidFill>
-                      <a:srgbClr val="F0F4F5"/>
-                    </a:solidFill>
-                  </a:tcPr>
-                </a:tc>
-                <a:tc>
-                  <a:txBody>
-                    <a:bodyPr/>
-                    <a:lstStyle/>
-                    <a:p>
-                      <a:pPr indent="0" marL="0">
-                        <a:buNone/>
-                      </a:pPr>
-                      <a:r>
-                        <a:rPr lang="en-US" sz="950" dirty="0">
-                          <a:solidFill>
-                            <a:srgbClr val="5B6B73"/>
-                          </a:solidFill>
-                          <a:latin typeface="Calibri" pitchFamily="34" charset="0"/>
-                          <a:ea typeface="Calibri" pitchFamily="34" charset="-122"/>
-                          <a:cs typeface="Calibri" pitchFamily="34" charset="-120"/>
-                        </a:rPr>
-                        <a:t>Eficiência de Produção</a:t>
-                      </a:r>
-                      <a:endParaRPr lang="en-US" sz="950" dirty="0">
-                        <a:latin typeface="Calibri" charset="0"/>
-                        <a:ea typeface="Calibri" charset="0"/>
-                        <a:cs typeface="Calibri" charset="0"/>
-                      </a:endParaRPr>
-                    </a:p>
-                  </a:txBody>
-                  <a:tcPr marL="91440" marR="91440" marT="45720" marB="45720" anchor="ctr">
-                    <a:lnL w="6350" cap="flat" cmpd="sng" algn="ctr">
-                      <a:solidFill>
-                        <a:srgbClr val="E3E8E9"/>
-                      </a:solidFill>
-                      <a:prstDash val="solid"/>
-                      <a:round/>
-                      <a:headEnd type="none" w="med" len="med"/>
-                      <a:tailEnd type="none" w="med" len="med"/>
-                    </a:lnL>
-                    <a:lnR w="6350" cap="flat" cmpd="sng" algn="ctr">
-                      <a:solidFill>
-                        <a:srgbClr val="E3E8E9"/>
-                      </a:solidFill>
-                      <a:prstDash val="solid"/>
-                      <a:round/>
-                      <a:headEnd type="none" w="med" len="med"/>
-                      <a:tailEnd type="none" w="med" len="med"/>
-                    </a:lnR>
-                    <a:lnT w="6350" cap="flat" cmpd="sng" algn="ctr">
-                      <a:solidFill>
-                        <a:srgbClr val="E3E8E9"/>
-                      </a:solidFill>
-                      <a:prstDash val="solid"/>
-                      <a:round/>
-                      <a:headEnd type="none" w="med" len="med"/>
-                      <a:tailEnd type="none" w="med" len="med"/>
-                    </a:lnT>
-                    <a:lnB w="6350" cap="flat" cmpd="sng" algn="ctr">
-                      <a:solidFill>
-                        <a:srgbClr val="E3E8E9"/>
-                      </a:solidFill>
-                      <a:prstDash val="solid"/>
-                      <a:round/>
-                      <a:headEnd type="none" w="med" len="med"/>
-                      <a:tailEnd type="none" w="med" len="med"/>
-                    </a:lnB>
-                    <a:solidFill>
-                      <a:srgbClr val="F0F4F5"/>
-                    </a:solidFill>
-                  </a:tcPr>
-                </a:tc>
-                <a:tc>
-                  <a:txBody>
-                    <a:bodyPr/>
-                    <a:lstStyle/>
-                    <a:p>
-                      <a:pPr indent="0" marL="0">
-                        <a:buNone/>
-                      </a:pPr>
-                      <a:r>
-                        <a:rPr lang="en-US" sz="950" dirty="0">
-                          <a:solidFill>
-                            <a:srgbClr val="5B6B73"/>
-                          </a:solidFill>
-                          <a:latin typeface="Calibri" pitchFamily="34" charset="0"/>
-                          <a:ea typeface="Calibri" pitchFamily="34" charset="-122"/>
-                          <a:cs typeface="Calibri" pitchFamily="34" charset="-120"/>
-                        </a:rPr>
-                        <a:t>Projetos</a:t>
-                      </a:r>
-                      <a:endParaRPr lang="en-US" sz="950" dirty="0">
-                        <a:latin typeface="Calibri" charset="0"/>
-                        <a:ea typeface="Calibri" charset="0"/>
-                        <a:cs typeface="Calibri" charset="0"/>
-                      </a:endParaRPr>
-                    </a:p>
-                  </a:txBody>
-                  <a:tcPr marL="91440" marR="91440" marT="45720" marB="45720" anchor="ctr">
-                    <a:lnL w="6350" cap="flat" cmpd="sng" algn="ctr">
-                      <a:solidFill>
-                        <a:srgbClr val="E3E8E9"/>
-                      </a:solidFill>
-                      <a:prstDash val="solid"/>
-                      <a:round/>
-                      <a:headEnd type="none" w="med" len="med"/>
-                      <a:tailEnd type="none" w="med" len="med"/>
-                    </a:lnL>
-                    <a:lnR w="6350" cap="flat" cmpd="sng" algn="ctr">
-                      <a:solidFill>
-                        <a:srgbClr val="E3E8E9"/>
-                      </a:solidFill>
-                      <a:prstDash val="solid"/>
-                      <a:round/>
-                      <a:headEnd type="none" w="med" len="med"/>
-                      <a:tailEnd type="none" w="med" len="med"/>
-                    </a:lnR>
-                    <a:lnT w="6350" cap="flat" cmpd="sng" algn="ctr">
-                      <a:solidFill>
-                        <a:srgbClr val="E3E8E9"/>
-                      </a:solidFill>
-                      <a:prstDash val="solid"/>
-                      <a:round/>
-                      <a:headEnd type="none" w="med" len="med"/>
-                      <a:tailEnd type="none" w="med" len="med"/>
-                    </a:lnT>
-                    <a:lnB w="6350" cap="flat" cmpd="sng" algn="ctr">
-                      <a:solidFill>
-                        <a:srgbClr val="E3E8E9"/>
-                      </a:solidFill>
-                      <a:prstDash val="solid"/>
-                      <a:round/>
-                      <a:headEnd type="none" w="med" len="med"/>
-                      <a:tailEnd type="none" w="med" len="med"/>
-                    </a:lnB>
-                    <a:solidFill>
-                      <a:srgbClr val="F0F4F5"/>
-                    </a:solidFill>
-                  </a:tcPr>
-                </a:tc>
-                <a:tc>
-                  <a:txBody>
-                    <a:bodyPr/>
-                    <a:lstStyle/>
-                    <a:p>
-                      <a:pPr algn="r" indent="0" marL="0">
-                        <a:buNone/>
-                      </a:pPr>
-                      <a:r>
-                        <a:rPr lang="en-US" sz="1000" b="1" dirty="0">
-                          <a:solidFill>
-                            <a:srgbClr val="0B2A3D"/>
-                          </a:solidFill>
-                          <a:latin typeface="Calibri" pitchFamily="34" charset="0"/>
-                          <a:ea typeface="Calibri" pitchFamily="34" charset="-122"/>
-                          <a:cs typeface="Calibri" pitchFamily="34" charset="-120"/>
-                        </a:rPr>
-                        <a:t>US$ 236,6 mil</a:t>
-                      </a:r>
-                      <a:endParaRPr lang="en-US" sz="1000" dirty="0">
-                        <a:latin typeface="Calibri" charset="0"/>
-                        <a:ea typeface="Calibri" charset="0"/>
-                        <a:cs typeface="Calibri" charset="0"/>
-                      </a:endParaRPr>
-                    </a:p>
-                  </a:txBody>
-                  <a:tcPr marL="91440" marR="91440" marT="45720" marB="45720" anchor="ctr">
-                    <a:lnL w="6350" cap="flat" cmpd="sng" algn="ctr">
-                      <a:solidFill>
-                        <a:srgbClr val="E3E8E9"/>
-                      </a:solidFill>
-                      <a:prstDash val="solid"/>
-                      <a:round/>
-                      <a:headEnd type="none" w="med" len="med"/>
-                      <a:tailEnd type="none" w="med" len="med"/>
-                    </a:lnL>
-                    <a:lnR w="6350" cap="flat" cmpd="sng" algn="ctr">
-                      <a:solidFill>
-                        <a:srgbClr val="E3E8E9"/>
-                      </a:solidFill>
-                      <a:prstDash val="solid"/>
-                      <a:round/>
-                      <a:headEnd type="none" w="med" len="med"/>
-                      <a:tailEnd type="none" w="med" len="med"/>
-                    </a:lnR>
-                    <a:lnT w="6350" cap="flat" cmpd="sng" algn="ctr">
-                      <a:solidFill>
-                        <a:srgbClr val="E3E8E9"/>
-                      </a:solidFill>
-                      <a:prstDash val="solid"/>
-                      <a:round/>
-                      <a:headEnd type="none" w="med" len="med"/>
-                      <a:tailEnd type="none" w="med" len="med"/>
-                    </a:lnT>
-                    <a:lnB w="6350" cap="flat" cmpd="sng" algn="ctr">
-                      <a:solidFill>
-                        <a:srgbClr val="E3E8E9"/>
-                      </a:solidFill>
-                      <a:prstDash val="solid"/>
-                      <a:round/>
-                      <a:headEnd type="none" w="med" len="med"/>
-                      <a:tailEnd type="none" w="med" len="med"/>
-                    </a:lnB>
-                    <a:solidFill>
-                      <a:srgbClr val="F0F4F5"/>
-                    </a:solidFill>
-                  </a:tcPr>
-                </a:tc>
-              </a:tr>
-              <a:tr h="288036">
                 <a:tc gridSpan="3">
                   <a:txBody>
                     <a:bodyPr/>
@@ -9269,7 +9269,7 @@
                           <a:ea typeface="Calibri" pitchFamily="34" charset="-122"/>
                           <a:cs typeface="Calibri" pitchFamily="34" charset="-120"/>
                         </a:rPr>
-                        <a:t>Outros 47 escopos (itens de menor valor individual)</a:t>
+                        <a:t>Outros 58 escopos (itens de menor valor individual)</a:t>
                       </a:r>
                       <a:endParaRPr lang="en-US" sz="950" dirty="0">
                         <a:latin typeface="Calibri" charset="0"/>
@@ -9343,7 +9343,7 @@
                           <a:ea typeface="Calibri" pitchFamily="34" charset="-122"/>
                           <a:cs typeface="Calibri" pitchFamily="34" charset="-120"/>
                         </a:rPr>
-                        <a:t>US$ 2,4 mi</a:t>
+                        <a:t>US$ 4,3 mi</a:t>
                       </a:r>
                       <a:endParaRPr lang="en-US" sz="1000" dirty="0">
                         <a:latin typeface="Calibri" charset="0"/>
@@ -9919,7 +9919,7 @@
                 <a:ea typeface="Cambria" pitchFamily="34" charset="-122"/>
                 <a:cs typeface="Cambria" pitchFamily="34" charset="-120"/>
               </a:rPr>
-              <a:t>US$ 4,3 mi</a:t>
+              <a:t>US$ 3,6 mi</a:t>
             </a:r>
             <a:endParaRPr lang="en-US" sz="3300" dirty="0"/>
           </a:p>
@@ -10058,7 +10058,7 @@
                 <a:ea typeface="Cambria" pitchFamily="34" charset="-122"/>
                 <a:cs typeface="Cambria" pitchFamily="34" charset="-120"/>
               </a:rPr>
-              <a:t>US$ 2,7 mi</a:t>
+              <a:t>US$ 3,0 mi</a:t>
             </a:r>
             <a:endParaRPr lang="en-US" sz="1800" dirty="0"/>
           </a:p>
@@ -10158,7 +10158,7 @@
                 <a:ea typeface="Cambria" pitchFamily="34" charset="-122"/>
                 <a:cs typeface="Cambria" pitchFamily="34" charset="-120"/>
               </a:rPr>
-              <a:t>US$ 1,6 mi</a:t>
+              <a:t>US$ 592,3 mil</a:t>
             </a:r>
             <a:endParaRPr lang="en-US" sz="1800" dirty="0"/>
           </a:p>
@@ -10258,7 +10258,7 @@
                 <a:ea typeface="Cambria" pitchFamily="34" charset="-122"/>
                 <a:cs typeface="Cambria" pitchFamily="34" charset="-120"/>
               </a:rPr>
-              <a:t>US$ 2,3 mi</a:t>
+              <a:t>US$ 2,5 mi</a:t>
             </a:r>
             <a:endParaRPr lang="en-US" sz="1800" dirty="0"/>
           </a:p>
@@ -10358,7 +10358,7 @@
                 <a:ea typeface="Cambria" pitchFamily="34" charset="-122"/>
                 <a:cs typeface="Cambria" pitchFamily="34" charset="-120"/>
               </a:rPr>
-              <a:t>US$ 2,0 mi</a:t>
+              <a:t>US$ 1,1 mi</a:t>
             </a:r>
             <a:endParaRPr lang="en-US" sz="1800" dirty="0"/>
           </a:p>
@@ -10537,7 +10537,7 @@
                 <a:ea typeface="Calibri" pitchFamily="34" charset="-122"/>
                 <a:cs typeface="Calibri" pitchFamily="34" charset="-120"/>
               </a:rPr>
-              <a:t>US$ 2,4 mi</a:t>
+              <a:t>US$ 2,2 mi</a:t>
             </a:r>
             <a:endParaRPr lang="en-US" sz="1100" dirty="0"/>
           </a:p>
@@ -10635,7 +10635,7 @@
                 <a:ea typeface="Calibri" pitchFamily="34" charset="-122"/>
                 <a:cs typeface="Calibri" pitchFamily="34" charset="-120"/>
               </a:rPr>
-              <a:t>US$ 1,6 mi</a:t>
+              <a:t>US$ 592,3 mil</a:t>
             </a:r>
             <a:endParaRPr lang="en-US" sz="1100" dirty="0"/>
           </a:p>
@@ -10650,6 +10650,104 @@
         <p:spPr>
           <a:xfrm>
             <a:off x="566928" y="4133088"/>
+            <a:ext cx="3316529" cy="365760"/>
+          </a:xfrm>
+          <a:prstGeom prst="rect">
+            <a:avLst/>
+          </a:prstGeom>
+          <a:noFill/>
+          <a:ln/>
+        </p:spPr>
+        <p:txBody>
+          <a:bodyPr wrap="square" lIns="0" tIns="0" rIns="0" bIns="0" rtlCol="0" anchor="ctr"/>
+          <a:lstStyle/>
+          <a:p>
+            <a:pPr indent="0" marL="0">
+              <a:buNone/>
+            </a:pPr>
+            <a:r>
+              <a:rPr lang="en-US" sz="1100" dirty="0">
+                <a:solidFill>
+                  <a:srgbClr val="1C2B33"/>
+                </a:solidFill>
+                <a:latin typeface="Calibri" pitchFamily="34" charset="0"/>
+                <a:ea typeface="Calibri" pitchFamily="34" charset="-122"/>
+                <a:cs typeface="Calibri" pitchFamily="34" charset="-120"/>
+              </a:rPr>
+              <a:t>EIM - Manutenção &amp; Integridade</a:t>
+            </a:r>
+            <a:endParaRPr lang="en-US" sz="1100" dirty="0"/>
+          </a:p>
+        </p:txBody>
+      </p:sp>
+      <p:sp>
+        <p:nvSpPr>
+          <p:cNvPr id="30" name="Text 28"/>
+          <p:cNvSpPr txBox="1"/>
+          <p:nvPr/>
+        </p:nvSpPr>
+        <p:spPr>
+          <a:xfrm>
+            <a:off x="3773729" y="4133088"/>
+            <a:ext cx="1815998" cy="365760"/>
+          </a:xfrm>
+          <a:prstGeom prst="rect">
+            <a:avLst/>
+          </a:prstGeom>
+          <a:noFill/>
+          <a:ln/>
+        </p:spPr>
+        <p:txBody>
+          <a:bodyPr wrap="square" lIns="0" tIns="0" rIns="0" bIns="0" rtlCol="0" anchor="ctr"/>
+          <a:lstStyle/>
+          <a:p>
+            <a:pPr algn="r" indent="0" marL="0">
+              <a:buNone/>
+            </a:pPr>
+            <a:r>
+              <a:rPr lang="en-US" sz="1100" b="1" dirty="0">
+                <a:solidFill>
+                  <a:srgbClr val="0B2A3D"/>
+                </a:solidFill>
+                <a:latin typeface="Calibri" pitchFamily="34" charset="0"/>
+                <a:ea typeface="Calibri" pitchFamily="34" charset="-122"/>
+                <a:cs typeface="Calibri" pitchFamily="34" charset="-120"/>
+              </a:rPr>
+              <a:t>US$ 519,2 mil</a:t>
+            </a:r>
+            <a:endParaRPr lang="en-US" sz="1100" dirty="0"/>
+          </a:p>
+        </p:txBody>
+      </p:sp>
+      <p:sp>
+        <p:nvSpPr>
+          <p:cNvPr id="31" name="Shape 29"/>
+          <p:cNvSpPr/>
+          <p:nvPr/>
+        </p:nvSpPr>
+        <p:spPr>
+          <a:xfrm>
+            <a:off x="457200" y="4498848"/>
+            <a:ext cx="5349240" cy="365760"/>
+          </a:xfrm>
+          <a:prstGeom prst="rect">
+            <a:avLst/>
+          </a:prstGeom>
+          <a:solidFill>
+            <a:srgbClr val="F0F4F5"/>
+          </a:solidFill>
+          <a:ln/>
+        </p:spPr>
+      </p:sp>
+      <p:sp>
+        <p:nvSpPr>
+          <p:cNvPr id="32" name="Text 30"/>
+          <p:cNvSpPr txBox="1"/>
+          <p:nvPr/>
+        </p:nvSpPr>
+        <p:spPr>
+          <a:xfrm>
+            <a:off x="566928" y="4498848"/>
             <a:ext cx="3316529" cy="365760"/>
           </a:xfrm>
           <a:prstGeom prst="rect">
@@ -10682,13 +10780,13 @@
       </p:sp>
       <p:sp>
         <p:nvSpPr>
-          <p:cNvPr id="30" name="Text 28"/>
+          <p:cNvPr id="33" name="Text 31"/>
           <p:cNvSpPr txBox="1"/>
           <p:nvPr/>
         </p:nvSpPr>
         <p:spPr>
           <a:xfrm>
-            <a:off x="3773729" y="4133088"/>
+            <a:off x="3773729" y="4498848"/>
             <a:ext cx="1815998" cy="365760"/>
           </a:xfrm>
           <a:prstGeom prst="rect">
@@ -10721,33 +10819,13 @@
       </p:sp>
       <p:sp>
         <p:nvSpPr>
-          <p:cNvPr id="31" name="Shape 29"/>
-          <p:cNvSpPr/>
+          <p:cNvPr id="34" name="Text 32"/>
+          <p:cNvSpPr txBox="1"/>
           <p:nvPr/>
         </p:nvSpPr>
         <p:spPr>
           <a:xfrm>
-            <a:off x="457200" y="4498848"/>
-            <a:ext cx="5349240" cy="365760"/>
-          </a:xfrm>
-          <a:prstGeom prst="rect">
-            <a:avLst/>
-          </a:prstGeom>
-          <a:solidFill>
-            <a:srgbClr val="F0F4F5"/>
-          </a:solidFill>
-          <a:ln/>
-        </p:spPr>
-      </p:sp>
-      <p:sp>
-        <p:nvSpPr>
-          <p:cNvPr id="32" name="Text 30"/>
-          <p:cNvSpPr txBox="1"/>
-          <p:nvPr/>
-        </p:nvSpPr>
-        <p:spPr>
-          <a:xfrm>
-            <a:off x="566928" y="4498848"/>
+            <a:off x="566928" y="4864608"/>
             <a:ext cx="3316529" cy="365760"/>
           </a:xfrm>
           <a:prstGeom prst="rect">
@@ -10780,13 +10858,13 @@
       </p:sp>
       <p:sp>
         <p:nvSpPr>
-          <p:cNvPr id="33" name="Text 31"/>
+          <p:cNvPr id="35" name="Text 33"/>
           <p:cNvSpPr txBox="1"/>
           <p:nvPr/>
         </p:nvSpPr>
         <p:spPr>
           <a:xfrm>
-            <a:off x="3773729" y="4498848"/>
+            <a:off x="3773729" y="4864608"/>
             <a:ext cx="1815998" cy="365760"/>
           </a:xfrm>
           <a:prstGeom prst="rect">
@@ -10819,7 +10897,7 @@
       </p:sp>
       <p:sp>
         <p:nvSpPr>
-          <p:cNvPr id="34" name="Text 32"/>
+          <p:cNvPr id="36" name="Text 34"/>
           <p:cNvSpPr txBox="1"/>
           <p:nvPr/>
         </p:nvSpPr>
@@ -10858,7 +10936,7 @@
       </p:sp>
       <p:sp>
         <p:nvSpPr>
-          <p:cNvPr id="35" name="Shape 33"/>
+          <p:cNvPr id="37" name="Shape 35"/>
           <p:cNvSpPr/>
           <p:nvPr/>
         </p:nvSpPr>
@@ -10881,7 +10959,7 @@
       </p:sp>
       <p:sp>
         <p:nvSpPr>
-          <p:cNvPr id="36" name="Text 34"/>
+          <p:cNvPr id="38" name="Text 36"/>
           <p:cNvSpPr txBox="1"/>
           <p:nvPr/>
         </p:nvSpPr>
@@ -10920,7 +10998,7 @@
       </p:sp>
       <p:sp>
         <p:nvSpPr>
-          <p:cNvPr id="37" name="Text 35"/>
+          <p:cNvPr id="39" name="Text 37"/>
           <p:cNvSpPr txBox="1"/>
           <p:nvPr/>
         </p:nvSpPr>
@@ -10951,7 +11029,7 @@
                 <a:ea typeface="Calibri" pitchFamily="34" charset="-122"/>
                 <a:cs typeface="Calibri" pitchFamily="34" charset="-120"/>
               </a:rPr>
-              <a:t>US$ 2,5 mi</a:t>
+              <a:t>US$ 1,5 mi</a:t>
             </a:r>
             <a:endParaRPr lang="en-US" sz="1100" dirty="0"/>
           </a:p>
@@ -10959,7 +11037,7 @@
       </p:sp>
       <p:sp>
         <p:nvSpPr>
-          <p:cNvPr id="38" name="Shape 36"/>
+          <p:cNvPr id="40" name="Shape 38"/>
           <p:cNvSpPr/>
           <p:nvPr/>
         </p:nvSpPr>
@@ -10979,7 +11057,7 @@
       </p:sp>
       <p:sp>
         <p:nvSpPr>
-          <p:cNvPr id="39" name="Text 37"/>
+          <p:cNvPr id="41" name="Text 39"/>
           <p:cNvSpPr txBox="1"/>
           <p:nvPr/>
         </p:nvSpPr>
@@ -11018,7 +11096,7 @@
       </p:sp>
       <p:sp>
         <p:nvSpPr>
-          <p:cNvPr id="40" name="Text 38"/>
+          <p:cNvPr id="42" name="Text 40"/>
           <p:cNvSpPr txBox="1"/>
           <p:nvPr/>
         </p:nvSpPr>
@@ -11049,7 +11127,7 @@
                 <a:ea typeface="Calibri" pitchFamily="34" charset="-122"/>
                 <a:cs typeface="Calibri" pitchFamily="34" charset="-120"/>
               </a:rPr>
-              <a:t>US$ 1,6 mi</a:t>
+              <a:t>US$ 1,4 mi</a:t>
             </a:r>
             <a:endParaRPr lang="en-US" sz="1100" dirty="0"/>
           </a:p>
@@ -11057,13 +11135,111 @@
       </p:sp>
       <p:sp>
         <p:nvSpPr>
-          <p:cNvPr id="41" name="Text 39"/>
+          <p:cNvPr id="43" name="Text 41"/>
           <p:cNvSpPr txBox="1"/>
           <p:nvPr/>
         </p:nvSpPr>
         <p:spPr>
           <a:xfrm>
             <a:off x="6464808" y="4133088"/>
+            <a:ext cx="3316529" cy="365760"/>
+          </a:xfrm>
+          <a:prstGeom prst="rect">
+            <a:avLst/>
+          </a:prstGeom>
+          <a:noFill/>
+          <a:ln/>
+        </p:spPr>
+        <p:txBody>
+          <a:bodyPr wrap="square" lIns="0" tIns="0" rIns="0" bIns="0" rtlCol="0" anchor="ctr"/>
+          <a:lstStyle/>
+          <a:p>
+            <a:pPr indent="0" marL="0">
+              <a:buNone/>
+            </a:pPr>
+            <a:r>
+              <a:rPr lang="en-US" sz="1100" dirty="0">
+                <a:solidFill>
+                  <a:srgbClr val="1C2B33"/>
+                </a:solidFill>
+                <a:latin typeface="Calibri" pitchFamily="34" charset="0"/>
+                <a:ea typeface="Calibri" pitchFamily="34" charset="-122"/>
+                <a:cs typeface="Calibri" pitchFamily="34" charset="-120"/>
+              </a:rPr>
+              <a:t>Rotina Operacional</a:t>
+            </a:r>
+            <a:endParaRPr lang="en-US" sz="1100" dirty="0"/>
+          </a:p>
+        </p:txBody>
+      </p:sp>
+      <p:sp>
+        <p:nvSpPr>
+          <p:cNvPr id="44" name="Text 42"/>
+          <p:cNvSpPr txBox="1"/>
+          <p:nvPr/>
+        </p:nvSpPr>
+        <p:spPr>
+          <a:xfrm>
+            <a:off x="9671609" y="4133088"/>
+            <a:ext cx="1815998" cy="365760"/>
+          </a:xfrm>
+          <a:prstGeom prst="rect">
+            <a:avLst/>
+          </a:prstGeom>
+          <a:noFill/>
+          <a:ln/>
+        </p:spPr>
+        <p:txBody>
+          <a:bodyPr wrap="square" lIns="0" tIns="0" rIns="0" bIns="0" rtlCol="0" anchor="ctr"/>
+          <a:lstStyle/>
+          <a:p>
+            <a:pPr algn="r" indent="0" marL="0">
+              <a:buNone/>
+            </a:pPr>
+            <a:r>
+              <a:rPr lang="en-US" sz="1100" b="1" dirty="0">
+                <a:solidFill>
+                  <a:srgbClr val="0B2A3D"/>
+                </a:solidFill>
+                <a:latin typeface="Calibri" pitchFamily="34" charset="0"/>
+                <a:ea typeface="Calibri" pitchFamily="34" charset="-122"/>
+                <a:cs typeface="Calibri" pitchFamily="34" charset="-120"/>
+              </a:rPr>
+              <a:t>US$ 519,2 mil</a:t>
+            </a:r>
+            <a:endParaRPr lang="en-US" sz="1100" dirty="0"/>
+          </a:p>
+        </p:txBody>
+      </p:sp>
+      <p:sp>
+        <p:nvSpPr>
+          <p:cNvPr id="45" name="Shape 43"/>
+          <p:cNvSpPr/>
+          <p:nvPr/>
+        </p:nvSpPr>
+        <p:spPr>
+          <a:xfrm>
+            <a:off x="6355080" y="4498848"/>
+            <a:ext cx="5349240" cy="365760"/>
+          </a:xfrm>
+          <a:prstGeom prst="rect">
+            <a:avLst/>
+          </a:prstGeom>
+          <a:solidFill>
+            <a:srgbClr val="F0F4F5"/>
+          </a:solidFill>
+          <a:ln/>
+        </p:spPr>
+      </p:sp>
+      <p:sp>
+        <p:nvSpPr>
+          <p:cNvPr id="46" name="Text 44"/>
+          <p:cNvSpPr txBox="1"/>
+          <p:nvPr/>
+        </p:nvSpPr>
+        <p:spPr>
+          <a:xfrm>
+            <a:off x="6464808" y="4498848"/>
             <a:ext cx="3316529" cy="365760"/>
           </a:xfrm>
           <a:prstGeom prst="rect">
@@ -11096,13 +11272,13 @@
       </p:sp>
       <p:sp>
         <p:nvSpPr>
-          <p:cNvPr id="42" name="Text 40"/>
+          <p:cNvPr id="47" name="Text 45"/>
           <p:cNvSpPr txBox="1"/>
           <p:nvPr/>
         </p:nvSpPr>
         <p:spPr>
           <a:xfrm>
-            <a:off x="9671609" y="4133088"/>
+            <a:off x="9671609" y="4498848"/>
             <a:ext cx="1815998" cy="365760"/>
           </a:xfrm>
           <a:prstGeom prst="rect">
@@ -11135,7 +11311,7 @@
       </p:sp>
       <p:sp>
         <p:nvSpPr>
-          <p:cNvPr id="43" name="Text 41"/>
+          <p:cNvPr id="48" name="Text 46"/>
           <p:cNvSpPr txBox="1"/>
           <p:nvPr/>
         </p:nvSpPr>
@@ -11328,7 +11504,7 @@
                 <a:ea typeface="Calibri" pitchFamily="34" charset="-122"/>
                 <a:cs typeface="Calibri" pitchFamily="34" charset="-120"/>
               </a:rPr>
-              <a:t>Principais escopos por valor · 35 itens no total</a:t>
+              <a:t>Principais escopos por valor · 27 itens no total</a:t>
             </a:r>
             <a:endParaRPr lang="en-US" sz="1250" dirty="0"/>
           </a:p>
@@ -12202,7 +12378,7 @@
                           <a:ea typeface="Calibri" pitchFamily="34" charset="-122"/>
                           <a:cs typeface="Calibri" pitchFamily="34" charset="-120"/>
                         </a:rPr>
-                        <a:t>TA - Caldeiraria</a:t>
+                        <a:t>MPP - Adequação do sistema de Selagem Multifásica</a:t>
                       </a:r>
                       <a:endParaRPr lang="en-US" sz="1000" dirty="0">
                         <a:latin typeface="Calibri" charset="0"/>
@@ -12270,7 +12446,7 @@
                           <a:ea typeface="Calibri" pitchFamily="34" charset="-122"/>
                           <a:cs typeface="Calibri" pitchFamily="34" charset="-120"/>
                         </a:rPr>
-                        <a:t>Eficiência de Produção</a:t>
+                        <a:t>Rotina Operacional</a:t>
                       </a:r>
                       <a:endParaRPr lang="en-US" sz="950" dirty="0">
                         <a:latin typeface="Calibri" charset="0"/>
@@ -12338,7 +12514,7 @@
                           <a:ea typeface="Calibri" pitchFamily="34" charset="-122"/>
                           <a:cs typeface="Calibri" pitchFamily="34" charset="-120"/>
                         </a:rPr>
-                        <a:t>TA - Parada Programada</a:t>
+                        <a:t>EIM - Manutenção &amp; Integridade</a:t>
                       </a:r>
                       <a:endParaRPr lang="en-US" sz="950" dirty="0">
                         <a:latin typeface="Calibri" charset="0"/>
@@ -12406,7 +12582,7 @@
                           <a:ea typeface="Calibri" pitchFamily="34" charset="-122"/>
                           <a:cs typeface="Calibri" pitchFamily="34" charset="-120"/>
                         </a:rPr>
-                        <a:t>US$ 484,9 mil</a:t>
+                        <a:t>US$ 519,2 mil</a:t>
                       </a:r>
                       <a:endParaRPr lang="en-US" sz="1000" dirty="0">
                         <a:latin typeface="Calibri" charset="0"/>
@@ -13024,7 +13200,7 @@
                           <a:ea typeface="Calibri" pitchFamily="34" charset="-122"/>
                           <a:cs typeface="Calibri" pitchFamily="34" charset="-120"/>
                         </a:rPr>
-                        <a:t>TA - NR13</a:t>
+                        <a:t>Mobilização TA</a:t>
                       </a:r>
                       <a:endParaRPr lang="en-US" sz="1000" dirty="0">
                         <a:latin typeface="Calibri" charset="0"/>
@@ -13228,7 +13404,7 @@
                           <a:ea typeface="Calibri" pitchFamily="34" charset="-122"/>
                           <a:cs typeface="Calibri" pitchFamily="34" charset="-120"/>
                         </a:rPr>
-                        <a:t>US$ 173,2 mil</a:t>
+                        <a:t>US$ 162,1 mil</a:t>
                       </a:r>
                       <a:endParaRPr lang="en-US" sz="1000" dirty="0">
                         <a:latin typeface="Calibri" charset="0"/>
@@ -13298,7 +13474,7 @@
                           <a:ea typeface="Calibri" pitchFamily="34" charset="-122"/>
                           <a:cs typeface="Calibri" pitchFamily="34" charset="-120"/>
                         </a:rPr>
-                        <a:t>Troca da Estação Meteorológica</a:t>
+                        <a:t>Implantação do projeto 'Muster Digital'</a:t>
                       </a:r>
                       <a:endParaRPr lang="en-US" sz="1000" dirty="0">
                         <a:latin typeface="Calibri" charset="0"/>
@@ -13366,7 +13542,7 @@
                           <a:ea typeface="Calibri" pitchFamily="34" charset="-122"/>
                           <a:cs typeface="Calibri" pitchFamily="34" charset="-120"/>
                         </a:rPr>
-                        <a:t>Integridade e Regulatório</a:t>
+                        <a:t>Bem Estar/Segurança</a:t>
                       </a:r>
                       <a:endParaRPr lang="en-US" sz="950" dirty="0">
                         <a:latin typeface="Calibri" charset="0"/>
@@ -13434,7 +13610,7 @@
                           <a:ea typeface="Calibri" pitchFamily="34" charset="-122"/>
                           <a:cs typeface="Calibri" pitchFamily="34" charset="-120"/>
                         </a:rPr>
-                        <a:t>Projetos</a:t>
+                        <a:t>Saúde e Segurança Ocupacional</a:t>
                       </a:r>
                       <a:endParaRPr lang="en-US" sz="950" dirty="0">
                         <a:latin typeface="Calibri" charset="0"/>
@@ -13502,7 +13678,7 @@
                           <a:ea typeface="Calibri" pitchFamily="34" charset="-122"/>
                           <a:cs typeface="Calibri" pitchFamily="34" charset="-120"/>
                         </a:rPr>
-                        <a:t>US$ 169,1 mil</a:t>
+                        <a:t>US$ 150,0 mil</a:t>
                       </a:r>
                       <a:endParaRPr lang="en-US" sz="1000" dirty="0">
                         <a:latin typeface="Calibri" charset="0"/>
@@ -13572,7 +13748,7 @@
                           <a:ea typeface="Calibri" pitchFamily="34" charset="-122"/>
                           <a:cs typeface="Calibri" pitchFamily="34" charset="-120"/>
                         </a:rPr>
-                        <a:t>Desmobilização TA</a:t>
+                        <a:t>PÓS TA - NR13</a:t>
                       </a:r>
                       <a:endParaRPr lang="en-US" sz="1000" dirty="0">
                         <a:latin typeface="Calibri" charset="0"/>
@@ -13776,7 +13952,7 @@
                           <a:ea typeface="Calibri" pitchFamily="34" charset="-122"/>
                           <a:cs typeface="Calibri" pitchFamily="34" charset="-120"/>
                         </a:rPr>
-                        <a:t>US$ 162,1 mil</a:t>
+                        <a:t>US$ 135,6 mil</a:t>
                       </a:r>
                       <a:endParaRPr lang="en-US" sz="1000" dirty="0">
                         <a:latin typeface="Calibri" charset="0"/>
@@ -13846,7 +14022,7 @@
                           <a:ea typeface="Calibri" pitchFamily="34" charset="-122"/>
                           <a:cs typeface="Calibri" pitchFamily="34" charset="-120"/>
                         </a:rPr>
-                        <a:t>Mobilização TA</a:t>
+                        <a:t>PRÉ TA - Caldeiraria</a:t>
                       </a:r>
                       <a:endParaRPr lang="en-US" sz="1000" dirty="0">
                         <a:latin typeface="Calibri" charset="0"/>
@@ -14050,7 +14226,7 @@
                           <a:ea typeface="Calibri" pitchFamily="34" charset="-122"/>
                           <a:cs typeface="Calibri" pitchFamily="34" charset="-120"/>
                         </a:rPr>
-                        <a:t>US$ 162,1 mil</a:t>
+                        <a:t>US$ 132,9 mil</a:t>
                       </a:r>
                       <a:endParaRPr lang="en-US" sz="1000" dirty="0">
                         <a:latin typeface="Calibri" charset="0"/>
@@ -14120,7 +14296,7 @@
                           <a:ea typeface="Calibri" pitchFamily="34" charset="-122"/>
                           <a:cs typeface="Calibri" pitchFamily="34" charset="-120"/>
                         </a:rPr>
-                        <a:t>Implantação do projeto 'Muster Digital'</a:t>
+                        <a:t>ESTUDO DE ENGENHARIA</a:t>
                       </a:r>
                       <a:endParaRPr lang="en-US" sz="1000" dirty="0">
                         <a:latin typeface="Calibri" charset="0"/>
@@ -14188,7 +14364,7 @@
                           <a:ea typeface="Calibri" pitchFamily="34" charset="-122"/>
                           <a:cs typeface="Calibri" pitchFamily="34" charset="-120"/>
                         </a:rPr>
-                        <a:t>Bem Estar/Segurança</a:t>
+                        <a:t>Eficiência de Produção</a:t>
                       </a:r>
                       <a:endParaRPr lang="en-US" sz="950" dirty="0">
                         <a:latin typeface="Calibri" charset="0"/>
@@ -14256,7 +14432,7 @@
                           <a:ea typeface="Calibri" pitchFamily="34" charset="-122"/>
                           <a:cs typeface="Calibri" pitchFamily="34" charset="-120"/>
                         </a:rPr>
-                        <a:t>Saúde e Segurança Ocupacional</a:t>
+                        <a:t>Projetos</a:t>
                       </a:r>
                       <a:endParaRPr lang="en-US" sz="950" dirty="0">
                         <a:latin typeface="Calibri" charset="0"/>
@@ -14324,7 +14500,7 @@
                           <a:ea typeface="Calibri" pitchFamily="34" charset="-122"/>
                           <a:cs typeface="Calibri" pitchFamily="34" charset="-120"/>
                         </a:rPr>
-                        <a:t>US$ 150,0 mil</a:t>
+                        <a:t>US$ 120,0 mil</a:t>
                       </a:r>
                       <a:endParaRPr lang="en-US" sz="1000" dirty="0">
                         <a:latin typeface="Calibri" charset="0"/>
@@ -14394,7 +14570,7 @@
                           <a:ea typeface="Calibri" pitchFamily="34" charset="-122"/>
                           <a:cs typeface="Calibri" pitchFamily="34" charset="-120"/>
                         </a:rPr>
-                        <a:t>PÓS TA - NR13</a:t>
+                        <a:t>PRÉ TA - NR13</a:t>
                       </a:r>
                       <a:endParaRPr lang="en-US" sz="1000" dirty="0">
                         <a:latin typeface="Calibri" charset="0"/>
@@ -14598,7 +14774,7 @@
                           <a:ea typeface="Calibri" pitchFamily="34" charset="-122"/>
                           <a:cs typeface="Calibri" pitchFamily="34" charset="-120"/>
                         </a:rPr>
-                        <a:t>US$ 135,6 mil</a:t>
+                        <a:t>US$ 65,1 mil</a:t>
                       </a:r>
                       <a:endParaRPr lang="en-US" sz="1000" dirty="0">
                         <a:latin typeface="Calibri" charset="0"/>
@@ -14668,7 +14844,7 @@
                           <a:ea typeface="Calibri" pitchFamily="34" charset="-122"/>
                           <a:cs typeface="Calibri" pitchFamily="34" charset="-120"/>
                         </a:rPr>
-                        <a:t>PRÉ TA - Caldeiraria</a:t>
+                        <a:t>Obstrução Sistema de Águas Cinzas</a:t>
                       </a:r>
                       <a:endParaRPr lang="en-US" sz="1000" dirty="0">
                         <a:latin typeface="Calibri" charset="0"/>
@@ -14736,7 +14912,7 @@
                           <a:ea typeface="Calibri" pitchFamily="34" charset="-122"/>
                           <a:cs typeface="Calibri" pitchFamily="34" charset="-120"/>
                         </a:rPr>
-                        <a:t>Eficiência de Produção</a:t>
+                        <a:t>Integridade e Regulatório</a:t>
                       </a:r>
                       <a:endParaRPr lang="en-US" sz="950" dirty="0">
                         <a:latin typeface="Calibri" charset="0"/>
@@ -14804,7 +14980,7 @@
                           <a:ea typeface="Calibri" pitchFamily="34" charset="-122"/>
                           <a:cs typeface="Calibri" pitchFamily="34" charset="-120"/>
                         </a:rPr>
-                        <a:t>TA - Parada Programada</a:t>
+                        <a:t>Projetos</a:t>
                       </a:r>
                       <a:endParaRPr lang="en-US" sz="950" dirty="0">
                         <a:latin typeface="Calibri" charset="0"/>
@@ -14872,7 +15048,7 @@
                           <a:ea typeface="Calibri" pitchFamily="34" charset="-122"/>
                           <a:cs typeface="Calibri" pitchFamily="34" charset="-120"/>
                         </a:rPr>
-                        <a:t>US$ 132,9 mil</a:t>
+                        <a:t>US$ 50,9 mil</a:t>
                       </a:r>
                       <a:endParaRPr lang="en-US" sz="1000" dirty="0">
                         <a:latin typeface="Calibri" charset="0"/>
@@ -14942,7 +15118,7 @@
                           <a:ea typeface="Calibri" pitchFamily="34" charset="-122"/>
                           <a:cs typeface="Calibri" pitchFamily="34" charset="-120"/>
                         </a:rPr>
-                        <a:t>Outros 23 escopos (itens de menor valor individual)</a:t>
+                        <a:t>Outros 15 escopos (itens de menor valor individual)</a:t>
                       </a:r>
                       <a:endParaRPr lang="en-US" sz="950" dirty="0">
                         <a:latin typeface="Calibri" charset="0"/>
@@ -15016,7 +15192,7 @@
                           <a:ea typeface="Calibri" pitchFamily="34" charset="-122"/>
                           <a:cs typeface="Calibri" pitchFamily="34" charset="-120"/>
                         </a:rPr>
-                        <a:t>US$ 640,4 mil</a:t>
+                        <a:t>US$ 228,0 mil</a:t>
                       </a:r>
                       <a:endParaRPr lang="en-US" sz="1000" dirty="0">
                         <a:latin typeface="Calibri" charset="0"/>

--- a/PRIO_Plano_Trabalho_CAPEX_2027_ClusterSul.pptx
+++ b/PRIO_Plano_Trabalho_CAPEX_2027_ClusterSul.pptx
@@ -216,10 +216,10 @@
                 <c:formatCode>General</c:formatCode>
                 <c:ptCount val="2"/>
                 <c:pt idx="0">
-                  <c:v>19.05</c:v>
+                  <c:v>18.82</c:v>
                 </c:pt>
                 <c:pt idx="1">
-                  <c:v>3.64</c:v>
+                  <c:v>5.12</c:v>
                 </c:pt>
               </c:numCache>
             </c:numRef>
@@ -2186,7 +2186,7 @@
                 <a:ea typeface="Cambria" pitchFamily="34" charset="-122"/>
                 <a:cs typeface="Cambria" pitchFamily="34" charset="-120"/>
               </a:rPr>
-              <a:t>US$ 22,7 mi</a:t>
+              <a:t>US$ 23,9 mi</a:t>
             </a:r>
             <a:endParaRPr lang="en-US" sz="2600" dirty="0"/>
           </a:p>
@@ -2325,7 +2325,7 @@
                 <a:ea typeface="Cambria" pitchFamily="34" charset="-122"/>
                 <a:cs typeface="Cambria" pitchFamily="34" charset="-120"/>
               </a:rPr>
-              <a:t>97</a:t>
+              <a:t>107</a:t>
             </a:r>
             <a:endParaRPr lang="en-US" sz="2600" dirty="0"/>
           </a:p>
@@ -2891,7 +2891,7 @@
                             <a:srgbClr val="1C2B33"/>
                           </a:solidFill>
                         </a:rPr>
-                        <a:t>US$ 19,1 mi</a:t>
+                        <a:t>US$ 18,8 mi</a:t>
                       </a:r>
                       <a:endParaRPr lang="en-US" sz="1050" dirty="0"/>
                     </a:p>
@@ -2952,7 +2952,7 @@
                             <a:srgbClr val="1C2B33"/>
                           </a:solidFill>
                         </a:rPr>
-                        <a:t>70</a:t>
+                        <a:t>69</a:t>
                       </a:r>
                       <a:endParaRPr lang="en-US" sz="1050" dirty="0"/>
                     </a:p>
@@ -3076,7 +3076,7 @@
                             <a:srgbClr val="1C2B33"/>
                           </a:solidFill>
                         </a:rPr>
-                        <a:t>US$ 3,6 mi</a:t>
+                        <a:t>US$ 5,1 mi</a:t>
                       </a:r>
                       <a:endParaRPr lang="en-US" sz="1050" dirty="0"/>
                     </a:p>
@@ -3137,7 +3137,7 @@
                             <a:srgbClr val="1C2B33"/>
                           </a:solidFill>
                         </a:rPr>
-                        <a:t>27</a:t>
+                        <a:t>38</a:t>
                       </a:r>
                       <a:endParaRPr lang="en-US" sz="1050" dirty="0"/>
                     </a:p>
@@ -3261,7 +3261,7 @@
                             <a:srgbClr val="0B2A3D"/>
                           </a:solidFill>
                         </a:rPr>
-                        <a:t>US$ 22,7 mi</a:t>
+                        <a:t>US$ 23,9 mi</a:t>
                       </a:r>
                       <a:endParaRPr lang="en-US" sz="1050" dirty="0"/>
                     </a:p>
@@ -3322,7 +3322,7 @@
                             <a:srgbClr val="0B2A3D"/>
                           </a:solidFill>
                         </a:rPr>
-                        <a:t>97</a:t>
+                        <a:t>107</a:t>
                       </a:r>
                       <a:endParaRPr lang="en-US" sz="1050" dirty="0"/>
                     </a:p>
@@ -3894,7 +3894,7 @@
                 <a:ea typeface="Cambria" pitchFamily="34" charset="-122"/>
                 <a:cs typeface="Cambria" pitchFamily="34" charset="-120"/>
               </a:rPr>
-              <a:t>US$ 19,1 mi</a:t>
+              <a:t>US$ 18,8 mi</a:t>
             </a:r>
             <a:endParaRPr lang="en-US" sz="3300" dirty="0"/>
           </a:p>
@@ -4033,7 +4033,7 @@
                 <a:ea typeface="Cambria" pitchFamily="34" charset="-122"/>
                 <a:cs typeface="Cambria" pitchFamily="34" charset="-120"/>
               </a:rPr>
-              <a:t>US$ 14,0 mi</a:t>
+              <a:t>US$ 13,8 mi</a:t>
             </a:r>
             <a:endParaRPr lang="en-US" sz="1800" dirty="0"/>
           </a:p>
@@ -4233,7 +4233,7 @@
                 <a:ea typeface="Cambria" pitchFamily="34" charset="-122"/>
                 <a:cs typeface="Cambria" pitchFamily="34" charset="-120"/>
               </a:rPr>
-              <a:t>US$ 6,0 mi</a:t>
+              <a:t>US$ 5,8 mi</a:t>
             </a:r>
             <a:endParaRPr lang="en-US" sz="1800" dirty="0"/>
           </a:p>
@@ -4333,7 +4333,7 @@
                 <a:ea typeface="Cambria" pitchFamily="34" charset="-122"/>
                 <a:cs typeface="Cambria" pitchFamily="34" charset="-120"/>
               </a:rPr>
-              <a:t>US$ 13,1 mi</a:t>
+              <a:t>US$ 13,0 mi</a:t>
             </a:r>
             <a:endParaRPr lang="en-US" sz="1800" dirty="0"/>
           </a:p>
@@ -4747,84 +4747,6 @@
                 <a:ea typeface="Calibri" pitchFamily="34" charset="-122"/>
                 <a:cs typeface="Calibri" pitchFamily="34" charset="-120"/>
               </a:rPr>
-              <a:t>Projetos</a:t>
-            </a:r>
-            <a:endParaRPr lang="en-US" sz="1100" dirty="0"/>
-          </a:p>
-        </p:txBody>
-      </p:sp>
-      <p:sp>
-        <p:nvSpPr>
-          <p:cNvPr id="33" name="Text 31"/>
-          <p:cNvSpPr txBox="1"/>
-          <p:nvPr/>
-        </p:nvSpPr>
-        <p:spPr>
-          <a:xfrm>
-            <a:off x="3773729" y="4498848"/>
-            <a:ext cx="1815998" cy="365760"/>
-          </a:xfrm>
-          <a:prstGeom prst="rect">
-            <a:avLst/>
-          </a:prstGeom>
-          <a:noFill/>
-          <a:ln/>
-        </p:spPr>
-        <p:txBody>
-          <a:bodyPr wrap="square" lIns="0" tIns="0" rIns="0" bIns="0" rtlCol="0" anchor="ctr"/>
-          <a:lstStyle/>
-          <a:p>
-            <a:pPr algn="r" indent="0" marL="0">
-              <a:buNone/>
-            </a:pPr>
-            <a:r>
-              <a:rPr lang="en-US" sz="1100" b="1" dirty="0">
-                <a:solidFill>
-                  <a:srgbClr val="0B2A3D"/>
-                </a:solidFill>
-                <a:latin typeface="Calibri" pitchFamily="34" charset="0"/>
-                <a:ea typeface="Calibri" pitchFamily="34" charset="-122"/>
-                <a:cs typeface="Calibri" pitchFamily="34" charset="-120"/>
-              </a:rPr>
-              <a:t>US$ 1,2 mi</a:t>
-            </a:r>
-            <a:endParaRPr lang="en-US" sz="1100" dirty="0"/>
-          </a:p>
-        </p:txBody>
-      </p:sp>
-      <p:sp>
-        <p:nvSpPr>
-          <p:cNvPr id="34" name="Text 32"/>
-          <p:cNvSpPr txBox="1"/>
-          <p:nvPr/>
-        </p:nvSpPr>
-        <p:spPr>
-          <a:xfrm>
-            <a:off x="566928" y="4864608"/>
-            <a:ext cx="3316529" cy="365760"/>
-          </a:xfrm>
-          <a:prstGeom prst="rect">
-            <a:avLst/>
-          </a:prstGeom>
-          <a:noFill/>
-          <a:ln/>
-        </p:spPr>
-        <p:txBody>
-          <a:bodyPr wrap="square" lIns="0" tIns="0" rIns="0" bIns="0" rtlCol="0" anchor="ctr"/>
-          <a:lstStyle/>
-          <a:p>
-            <a:pPr indent="0" marL="0">
-              <a:buNone/>
-            </a:pPr>
-            <a:r>
-              <a:rPr lang="en-US" sz="1100" dirty="0">
-                <a:solidFill>
-                  <a:srgbClr val="1C2B33"/>
-                </a:solidFill>
-                <a:latin typeface="Calibri" pitchFamily="34" charset="0"/>
-                <a:ea typeface="Calibri" pitchFamily="34" charset="-122"/>
-                <a:cs typeface="Calibri" pitchFamily="34" charset="-120"/>
-              </a:rPr>
               <a:t>Saúde e Segurança Ocupacional</a:t>
             </a:r>
             <a:endParaRPr lang="en-US" sz="1100" dirty="0"/>
@@ -4833,13 +4755,13 @@
       </p:sp>
       <p:sp>
         <p:nvSpPr>
-          <p:cNvPr id="35" name="Text 33"/>
+          <p:cNvPr id="33" name="Text 31"/>
           <p:cNvSpPr txBox="1"/>
           <p:nvPr/>
         </p:nvSpPr>
         <p:spPr>
           <a:xfrm>
-            <a:off x="3773729" y="4864608"/>
+            <a:off x="3773729" y="4498848"/>
             <a:ext cx="1815998" cy="365760"/>
           </a:xfrm>
           <a:prstGeom prst="rect">
@@ -4872,33 +4794,13 @@
       </p:sp>
       <p:sp>
         <p:nvSpPr>
-          <p:cNvPr id="36" name="Shape 34"/>
-          <p:cNvSpPr/>
+          <p:cNvPr id="34" name="Text 32"/>
+          <p:cNvSpPr txBox="1"/>
           <p:nvPr/>
         </p:nvSpPr>
         <p:spPr>
           <a:xfrm>
-            <a:off x="457200" y="5230368"/>
-            <a:ext cx="5349240" cy="365760"/>
-          </a:xfrm>
-          <a:prstGeom prst="rect">
-            <a:avLst/>
-          </a:prstGeom>
-          <a:solidFill>
-            <a:srgbClr val="F0F4F5"/>
-          </a:solidFill>
-          <a:ln/>
-        </p:spPr>
-      </p:sp>
-      <p:sp>
-        <p:nvSpPr>
-          <p:cNvPr id="37" name="Text 35"/>
-          <p:cNvSpPr txBox="1"/>
-          <p:nvPr/>
-        </p:nvSpPr>
-        <p:spPr>
-          <a:xfrm>
-            <a:off x="566928" y="5230368"/>
+            <a:off x="566928" y="4864608"/>
             <a:ext cx="3316529" cy="365760"/>
           </a:xfrm>
           <a:prstGeom prst="rect">
@@ -4931,6 +4833,104 @@
       </p:sp>
       <p:sp>
         <p:nvSpPr>
+          <p:cNvPr id="35" name="Text 33"/>
+          <p:cNvSpPr txBox="1"/>
+          <p:nvPr/>
+        </p:nvSpPr>
+        <p:spPr>
+          <a:xfrm>
+            <a:off x="3773729" y="4864608"/>
+            <a:ext cx="1815998" cy="365760"/>
+          </a:xfrm>
+          <a:prstGeom prst="rect">
+            <a:avLst/>
+          </a:prstGeom>
+          <a:noFill/>
+          <a:ln/>
+        </p:spPr>
+        <p:txBody>
+          <a:bodyPr wrap="square" lIns="0" tIns="0" rIns="0" bIns="0" rtlCol="0" anchor="ctr"/>
+          <a:lstStyle/>
+          <a:p>
+            <a:pPr algn="r" indent="0" marL="0">
+              <a:buNone/>
+            </a:pPr>
+            <a:r>
+              <a:rPr lang="en-US" sz="1100" b="1" dirty="0">
+                <a:solidFill>
+                  <a:srgbClr val="0B2A3D"/>
+                </a:solidFill>
+                <a:latin typeface="Calibri" pitchFamily="34" charset="0"/>
+                <a:ea typeface="Calibri" pitchFamily="34" charset="-122"/>
+                <a:cs typeface="Calibri" pitchFamily="34" charset="-120"/>
+              </a:rPr>
+              <a:t>US$ 955,5 mil</a:t>
+            </a:r>
+            <a:endParaRPr lang="en-US" sz="1100" dirty="0"/>
+          </a:p>
+        </p:txBody>
+      </p:sp>
+      <p:sp>
+        <p:nvSpPr>
+          <p:cNvPr id="36" name="Shape 34"/>
+          <p:cNvSpPr/>
+          <p:nvPr/>
+        </p:nvSpPr>
+        <p:spPr>
+          <a:xfrm>
+            <a:off x="457200" y="5230368"/>
+            <a:ext cx="5349240" cy="365760"/>
+          </a:xfrm>
+          <a:prstGeom prst="rect">
+            <a:avLst/>
+          </a:prstGeom>
+          <a:solidFill>
+            <a:srgbClr val="F0F4F5"/>
+          </a:solidFill>
+          <a:ln/>
+        </p:spPr>
+      </p:sp>
+      <p:sp>
+        <p:nvSpPr>
+          <p:cNvPr id="37" name="Text 35"/>
+          <p:cNvSpPr txBox="1"/>
+          <p:nvPr/>
+        </p:nvSpPr>
+        <p:spPr>
+          <a:xfrm>
+            <a:off x="566928" y="5230368"/>
+            <a:ext cx="3316529" cy="365760"/>
+          </a:xfrm>
+          <a:prstGeom prst="rect">
+            <a:avLst/>
+          </a:prstGeom>
+          <a:noFill/>
+          <a:ln/>
+        </p:spPr>
+        <p:txBody>
+          <a:bodyPr wrap="square" lIns="0" tIns="0" rIns="0" bIns="0" rtlCol="0" anchor="ctr"/>
+          <a:lstStyle/>
+          <a:p>
+            <a:pPr indent="0" marL="0">
+              <a:buNone/>
+            </a:pPr>
+            <a:r>
+              <a:rPr lang="en-US" sz="1100" dirty="0">
+                <a:solidFill>
+                  <a:srgbClr val="1C2B33"/>
+                </a:solidFill>
+                <a:latin typeface="Calibri" pitchFamily="34" charset="0"/>
+                <a:ea typeface="Calibri" pitchFamily="34" charset="-122"/>
+                <a:cs typeface="Calibri" pitchFamily="34" charset="-120"/>
+              </a:rPr>
+              <a:t>Projetos</a:t>
+            </a:r>
+            <a:endParaRPr lang="en-US" sz="1100" dirty="0"/>
+          </a:p>
+        </p:txBody>
+      </p:sp>
+      <p:sp>
+        <p:nvSpPr>
           <p:cNvPr id="38" name="Text 36"/>
           <p:cNvSpPr txBox="1"/>
           <p:nvPr/>
@@ -4962,7 +4962,7 @@
                 <a:ea typeface="Calibri" pitchFamily="34" charset="-122"/>
                 <a:cs typeface="Calibri" pitchFamily="34" charset="-120"/>
               </a:rPr>
-              <a:t>US$ 955,5 mil</a:t>
+              <a:t>US$ 926,4 mil</a:t>
             </a:r>
             <a:endParaRPr lang="en-US" sz="1100" dirty="0"/>
           </a:p>
@@ -5278,7 +5278,7 @@
                 <a:ea typeface="Calibri" pitchFamily="34" charset="-122"/>
                 <a:cs typeface="Calibri" pitchFamily="34" charset="-120"/>
               </a:rPr>
-              <a:t>US$ 6,1 mi</a:t>
+              <a:t>US$ 5,9 mi</a:t>
             </a:r>
             <a:endParaRPr lang="en-US" sz="1100" dirty="0"/>
           </a:p>
@@ -5655,7 +5655,7 @@
                 <a:ea typeface="Calibri" pitchFamily="34" charset="-122"/>
                 <a:cs typeface="Calibri" pitchFamily="34" charset="-120"/>
               </a:rPr>
-              <a:t>Principais escopos por valor · 70 itens no total</a:t>
+              <a:t>Principais escopos por valor · 69 itens no total</a:t>
             </a:r>
             <a:endParaRPr lang="en-US" sz="1250" dirty="0"/>
           </a:p>
@@ -9269,7 +9269,7 @@
                           <a:ea typeface="Calibri" pitchFamily="34" charset="-122"/>
                           <a:cs typeface="Calibri" pitchFamily="34" charset="-120"/>
                         </a:rPr>
-                        <a:t>Outros 58 escopos (itens de menor valor individual)</a:t>
+                        <a:t>Outros 57 escopos (itens de menor valor individual)</a:t>
                       </a:r>
                       <a:endParaRPr lang="en-US" sz="950" dirty="0">
                         <a:latin typeface="Calibri" charset="0"/>
@@ -9343,7 +9343,7 @@
                           <a:ea typeface="Calibri" pitchFamily="34" charset="-122"/>
                           <a:cs typeface="Calibri" pitchFamily="34" charset="-120"/>
                         </a:rPr>
-                        <a:t>US$ 4,3 mi</a:t>
+                        <a:t>US$ 4,1 mi</a:t>
                       </a:r>
                       <a:endParaRPr lang="en-US" sz="1000" dirty="0">
                         <a:latin typeface="Calibri" charset="0"/>
@@ -9919,7 +9919,7 @@
                 <a:ea typeface="Cambria" pitchFamily="34" charset="-122"/>
                 <a:cs typeface="Cambria" pitchFamily="34" charset="-120"/>
               </a:rPr>
-              <a:t>US$ 3,6 mi</a:t>
+              <a:t>US$ 5,1 mi</a:t>
             </a:r>
             <a:endParaRPr lang="en-US" sz="3300" dirty="0"/>
           </a:p>
@@ -10058,7 +10058,7 @@
                 <a:ea typeface="Cambria" pitchFamily="34" charset="-122"/>
                 <a:cs typeface="Cambria" pitchFamily="34" charset="-120"/>
               </a:rPr>
-              <a:t>US$ 3,0 mi</a:t>
+              <a:t>US$ 3,5 mi</a:t>
             </a:r>
             <a:endParaRPr lang="en-US" sz="1800" dirty="0"/>
           </a:p>
@@ -10158,7 +10158,7 @@
                 <a:ea typeface="Cambria" pitchFamily="34" charset="-122"/>
                 <a:cs typeface="Cambria" pitchFamily="34" charset="-120"/>
               </a:rPr>
-              <a:t>US$ 592,3 mil</a:t>
+              <a:t>US$ 1,6 mi</a:t>
             </a:r>
             <a:endParaRPr lang="en-US" sz="1800" dirty="0"/>
           </a:p>
@@ -10258,7 +10258,7 @@
                 <a:ea typeface="Cambria" pitchFamily="34" charset="-122"/>
                 <a:cs typeface="Cambria" pitchFamily="34" charset="-120"/>
               </a:rPr>
-              <a:t>US$ 2,5 mi</a:t>
+              <a:t>US$ 3,1 mi</a:t>
             </a:r>
             <a:endParaRPr lang="en-US" sz="1800" dirty="0"/>
           </a:p>
@@ -10358,7 +10358,7 @@
                 <a:ea typeface="Cambria" pitchFamily="34" charset="-122"/>
                 <a:cs typeface="Cambria" pitchFamily="34" charset="-120"/>
               </a:rPr>
-              <a:t>US$ 1,1 mi</a:t>
+              <a:t>US$ 2,0 mi</a:t>
             </a:r>
             <a:endParaRPr lang="en-US" sz="1800" dirty="0"/>
           </a:p>
@@ -10537,7 +10537,7 @@
                 <a:ea typeface="Calibri" pitchFamily="34" charset="-122"/>
                 <a:cs typeface="Calibri" pitchFamily="34" charset="-120"/>
               </a:rPr>
-              <a:t>US$ 2,2 mi</a:t>
+              <a:t>US$ 2,4 mi</a:t>
             </a:r>
             <a:endParaRPr lang="en-US" sz="1100" dirty="0"/>
           </a:p>
@@ -10635,7 +10635,7 @@
                 <a:ea typeface="Calibri" pitchFamily="34" charset="-122"/>
                 <a:cs typeface="Calibri" pitchFamily="34" charset="-120"/>
               </a:rPr>
-              <a:t>US$ 592,3 mil</a:t>
+              <a:t>US$ 1,6 mi</a:t>
             </a:r>
             <a:endParaRPr lang="en-US" sz="1100" dirty="0"/>
           </a:p>
@@ -10713,7 +10713,7 @@
                 <a:ea typeface="Calibri" pitchFamily="34" charset="-122"/>
                 <a:cs typeface="Calibri" pitchFamily="34" charset="-120"/>
               </a:rPr>
-              <a:t>US$ 519,2 mil</a:t>
+              <a:t>US$ 634,0 mil</a:t>
             </a:r>
             <a:endParaRPr lang="en-US" sz="1100" dirty="0"/>
           </a:p>
@@ -10748,6 +10748,84 @@
         <p:spPr>
           <a:xfrm>
             <a:off x="566928" y="4498848"/>
+            <a:ext cx="3316529" cy="365760"/>
+          </a:xfrm>
+          <a:prstGeom prst="rect">
+            <a:avLst/>
+          </a:prstGeom>
+          <a:noFill/>
+          <a:ln/>
+        </p:spPr>
+        <p:txBody>
+          <a:bodyPr wrap="square" lIns="0" tIns="0" rIns="0" bIns="0" rtlCol="0" anchor="ctr"/>
+          <a:lstStyle/>
+          <a:p>
+            <a:pPr indent="0" marL="0">
+              <a:buNone/>
+            </a:pPr>
+            <a:r>
+              <a:rPr lang="en-US" sz="1100" dirty="0">
+                <a:solidFill>
+                  <a:srgbClr val="1C2B33"/>
+                </a:solidFill>
+                <a:latin typeface="Calibri" pitchFamily="34" charset="0"/>
+                <a:ea typeface="Calibri" pitchFamily="34" charset="-122"/>
+                <a:cs typeface="Calibri" pitchFamily="34" charset="-120"/>
+              </a:rPr>
+              <a:t>P&amp;Q - Processos</a:t>
+            </a:r>
+            <a:endParaRPr lang="en-US" sz="1100" dirty="0"/>
+          </a:p>
+        </p:txBody>
+      </p:sp>
+      <p:sp>
+        <p:nvSpPr>
+          <p:cNvPr id="33" name="Text 31"/>
+          <p:cNvSpPr txBox="1"/>
+          <p:nvPr/>
+        </p:nvSpPr>
+        <p:spPr>
+          <a:xfrm>
+            <a:off x="3773729" y="4498848"/>
+            <a:ext cx="1815998" cy="365760"/>
+          </a:xfrm>
+          <a:prstGeom prst="rect">
+            <a:avLst/>
+          </a:prstGeom>
+          <a:noFill/>
+          <a:ln/>
+        </p:spPr>
+        <p:txBody>
+          <a:bodyPr wrap="square" lIns="0" tIns="0" rIns="0" bIns="0" rtlCol="0" anchor="ctr"/>
+          <a:lstStyle/>
+          <a:p>
+            <a:pPr algn="r" indent="0" marL="0">
+              <a:buNone/>
+            </a:pPr>
+            <a:r>
+              <a:rPr lang="en-US" sz="1100" b="1" dirty="0">
+                <a:solidFill>
+                  <a:srgbClr val="0B2A3D"/>
+                </a:solidFill>
+                <a:latin typeface="Calibri" pitchFamily="34" charset="0"/>
+                <a:ea typeface="Calibri" pitchFamily="34" charset="-122"/>
+                <a:cs typeface="Calibri" pitchFamily="34" charset="-120"/>
+              </a:rPr>
+              <a:t>US$ 206,8 mil</a:t>
+            </a:r>
+            <a:endParaRPr lang="en-US" sz="1100" dirty="0"/>
+          </a:p>
+        </p:txBody>
+      </p:sp>
+      <p:sp>
+        <p:nvSpPr>
+          <p:cNvPr id="34" name="Text 32"/>
+          <p:cNvSpPr txBox="1"/>
+          <p:nvPr/>
+        </p:nvSpPr>
+        <p:spPr>
+          <a:xfrm>
+            <a:off x="566928" y="4864608"/>
             <a:ext cx="3316529" cy="365760"/>
           </a:xfrm>
           <a:prstGeom prst="rect">
@@ -10780,13 +10858,13 @@
       </p:sp>
       <p:sp>
         <p:nvSpPr>
-          <p:cNvPr id="33" name="Text 31"/>
+          <p:cNvPr id="35" name="Text 33"/>
           <p:cNvSpPr txBox="1"/>
           <p:nvPr/>
         </p:nvSpPr>
         <p:spPr>
           <a:xfrm>
-            <a:off x="3773729" y="4498848"/>
+            <a:off x="3773729" y="4864608"/>
             <a:ext cx="1815998" cy="365760"/>
           </a:xfrm>
           <a:prstGeom prst="rect">
@@ -10819,13 +10897,33 @@
       </p:sp>
       <p:sp>
         <p:nvSpPr>
-          <p:cNvPr id="34" name="Text 32"/>
+          <p:cNvPr id="36" name="Shape 34"/>
+          <p:cNvSpPr/>
+          <p:nvPr/>
+        </p:nvSpPr>
+        <p:spPr>
+          <a:xfrm>
+            <a:off x="457200" y="5230368"/>
+            <a:ext cx="5349240" cy="365760"/>
+          </a:xfrm>
+          <a:prstGeom prst="rect">
+            <a:avLst/>
+          </a:prstGeom>
+          <a:solidFill>
+            <a:srgbClr val="F0F4F5"/>
+          </a:solidFill>
+          <a:ln/>
+        </p:spPr>
+      </p:sp>
+      <p:sp>
+        <p:nvSpPr>
+          <p:cNvPr id="37" name="Text 35"/>
           <p:cNvSpPr txBox="1"/>
           <p:nvPr/>
         </p:nvSpPr>
         <p:spPr>
           <a:xfrm>
-            <a:off x="566928" y="4864608"/>
+            <a:off x="566928" y="5230368"/>
             <a:ext cx="3316529" cy="365760"/>
           </a:xfrm>
           <a:prstGeom prst="rect">
@@ -10858,13 +10956,13 @@
       </p:sp>
       <p:sp>
         <p:nvSpPr>
-          <p:cNvPr id="35" name="Text 33"/>
+          <p:cNvPr id="38" name="Text 36"/>
           <p:cNvSpPr txBox="1"/>
           <p:nvPr/>
         </p:nvSpPr>
         <p:spPr>
           <a:xfrm>
-            <a:off x="3773729" y="4864608"/>
+            <a:off x="3773729" y="5230368"/>
             <a:ext cx="1815998" cy="365760"/>
           </a:xfrm>
           <a:prstGeom prst="rect">
@@ -10897,7 +10995,7 @@
       </p:sp>
       <p:sp>
         <p:nvSpPr>
-          <p:cNvPr id="36" name="Text 34"/>
+          <p:cNvPr id="39" name="Text 37"/>
           <p:cNvSpPr txBox="1"/>
           <p:nvPr/>
         </p:nvSpPr>
@@ -10936,7 +11034,7 @@
       </p:sp>
       <p:sp>
         <p:nvSpPr>
-          <p:cNvPr id="37" name="Shape 35"/>
+          <p:cNvPr id="40" name="Shape 38"/>
           <p:cNvSpPr/>
           <p:nvPr/>
         </p:nvSpPr>
@@ -10959,7 +11057,7 @@
       </p:sp>
       <p:sp>
         <p:nvSpPr>
-          <p:cNvPr id="38" name="Text 36"/>
+          <p:cNvPr id="41" name="Text 39"/>
           <p:cNvSpPr txBox="1"/>
           <p:nvPr/>
         </p:nvSpPr>
@@ -10998,7 +11096,7 @@
       </p:sp>
       <p:sp>
         <p:nvSpPr>
-          <p:cNvPr id="39" name="Text 37"/>
+          <p:cNvPr id="42" name="Text 40"/>
           <p:cNvSpPr txBox="1"/>
           <p:nvPr/>
         </p:nvSpPr>
@@ -11029,7 +11127,7 @@
                 <a:ea typeface="Calibri" pitchFamily="34" charset="-122"/>
                 <a:cs typeface="Calibri" pitchFamily="34" charset="-120"/>
               </a:rPr>
-              <a:t>US$ 1,5 mi</a:t>
+              <a:t>US$ 2,5 mi</a:t>
             </a:r>
             <a:endParaRPr lang="en-US" sz="1100" dirty="0"/>
           </a:p>
@@ -11037,7 +11135,7 @@
       </p:sp>
       <p:sp>
         <p:nvSpPr>
-          <p:cNvPr id="40" name="Shape 38"/>
+          <p:cNvPr id="43" name="Shape 41"/>
           <p:cNvSpPr/>
           <p:nvPr/>
         </p:nvSpPr>
@@ -11057,7 +11155,7 @@
       </p:sp>
       <p:sp>
         <p:nvSpPr>
-          <p:cNvPr id="41" name="Text 39"/>
+          <p:cNvPr id="44" name="Text 42"/>
           <p:cNvSpPr txBox="1"/>
           <p:nvPr/>
         </p:nvSpPr>
@@ -11096,7 +11194,7 @@
       </p:sp>
       <p:sp>
         <p:nvSpPr>
-          <p:cNvPr id="42" name="Text 40"/>
+          <p:cNvPr id="45" name="Text 43"/>
           <p:cNvSpPr txBox="1"/>
           <p:nvPr/>
         </p:nvSpPr>
@@ -11127,7 +11225,7 @@
                 <a:ea typeface="Calibri" pitchFamily="34" charset="-122"/>
                 <a:cs typeface="Calibri" pitchFamily="34" charset="-120"/>
               </a:rPr>
-              <a:t>US$ 1,4 mi</a:t>
+              <a:t>US$ 1,8 mi</a:t>
             </a:r>
             <a:endParaRPr lang="en-US" sz="1100" dirty="0"/>
           </a:p>
@@ -11135,7 +11233,7 @@
       </p:sp>
       <p:sp>
         <p:nvSpPr>
-          <p:cNvPr id="43" name="Text 41"/>
+          <p:cNvPr id="46" name="Text 44"/>
           <p:cNvSpPr txBox="1"/>
           <p:nvPr/>
         </p:nvSpPr>
@@ -11174,7 +11272,7 @@
       </p:sp>
       <p:sp>
         <p:nvSpPr>
-          <p:cNvPr id="44" name="Text 42"/>
+          <p:cNvPr id="47" name="Text 45"/>
           <p:cNvSpPr txBox="1"/>
           <p:nvPr/>
         </p:nvSpPr>
@@ -11205,7 +11303,7 @@
                 <a:ea typeface="Calibri" pitchFamily="34" charset="-122"/>
                 <a:cs typeface="Calibri" pitchFamily="34" charset="-120"/>
               </a:rPr>
-              <a:t>US$ 519,2 mil</a:t>
+              <a:t>US$ 634,0 mil</a:t>
             </a:r>
             <a:endParaRPr lang="en-US" sz="1100" dirty="0"/>
           </a:p>
@@ -11213,7 +11311,7 @@
       </p:sp>
       <p:sp>
         <p:nvSpPr>
-          <p:cNvPr id="45" name="Shape 43"/>
+          <p:cNvPr id="48" name="Shape 46"/>
           <p:cNvSpPr/>
           <p:nvPr/>
         </p:nvSpPr>
@@ -11233,7 +11331,7 @@
       </p:sp>
       <p:sp>
         <p:nvSpPr>
-          <p:cNvPr id="46" name="Text 44"/>
+          <p:cNvPr id="49" name="Text 47"/>
           <p:cNvSpPr txBox="1"/>
           <p:nvPr/>
         </p:nvSpPr>
@@ -11272,7 +11370,7 @@
       </p:sp>
       <p:sp>
         <p:nvSpPr>
-          <p:cNvPr id="47" name="Text 45"/>
+          <p:cNvPr id="50" name="Text 48"/>
           <p:cNvSpPr txBox="1"/>
           <p:nvPr/>
         </p:nvSpPr>
@@ -11311,7 +11409,7 @@
       </p:sp>
       <p:sp>
         <p:nvSpPr>
-          <p:cNvPr id="48" name="Text 46"/>
+          <p:cNvPr id="51" name="Text 49"/>
           <p:cNvSpPr txBox="1"/>
           <p:nvPr/>
         </p:nvSpPr>
@@ -11504,7 +11602,7 @@
                 <a:ea typeface="Calibri" pitchFamily="34" charset="-122"/>
                 <a:cs typeface="Calibri" pitchFamily="34" charset="-120"/>
               </a:rPr>
-              <a:t>Principais escopos por valor · 27 itens no total</a:t>
+              <a:t>Principais escopos por valor · 38 itens no total</a:t>
             </a:r>
             <a:endParaRPr lang="en-US" sz="1250" dirty="0"/>
           </a:p>
@@ -12652,7 +12750,7 @@
                           <a:ea typeface="Calibri" pitchFamily="34" charset="-122"/>
                           <a:cs typeface="Calibri" pitchFamily="34" charset="-120"/>
                         </a:rPr>
-                        <a:t>Instalação de novos Detectores de Gás</a:t>
+                        <a:t>TA - Caldeiraria</a:t>
                       </a:r>
                       <a:endParaRPr lang="en-US" sz="1000" dirty="0">
                         <a:latin typeface="Calibri" charset="0"/>
@@ -12720,7 +12818,555 @@
                           <a:ea typeface="Calibri" pitchFamily="34" charset="-122"/>
                           <a:cs typeface="Calibri" pitchFamily="34" charset="-120"/>
                         </a:rPr>
+                        <a:t>Eficiência de Produção</a:t>
+                      </a:r>
+                      <a:endParaRPr lang="en-US" sz="950" dirty="0">
+                        <a:latin typeface="Calibri" charset="0"/>
+                        <a:ea typeface="Calibri" charset="0"/>
+                        <a:cs typeface="Calibri" charset="0"/>
+                      </a:endParaRPr>
+                    </a:p>
+                  </a:txBody>
+                  <a:tcPr marL="91440" marR="91440" marT="45720" marB="45720" anchor="ctr">
+                    <a:lnL w="6350" cap="flat" cmpd="sng" algn="ctr">
+                      <a:solidFill>
+                        <a:srgbClr val="E3E8E9"/>
+                      </a:solidFill>
+                      <a:prstDash val="solid"/>
+                      <a:round/>
+                      <a:headEnd type="none" w="med" len="med"/>
+                      <a:tailEnd type="none" w="med" len="med"/>
+                    </a:lnL>
+                    <a:lnR w="6350" cap="flat" cmpd="sng" algn="ctr">
+                      <a:solidFill>
+                        <a:srgbClr val="E3E8E9"/>
+                      </a:solidFill>
+                      <a:prstDash val="solid"/>
+                      <a:round/>
+                      <a:headEnd type="none" w="med" len="med"/>
+                      <a:tailEnd type="none" w="med" len="med"/>
+                    </a:lnR>
+                    <a:lnT w="6350" cap="flat" cmpd="sng" algn="ctr">
+                      <a:solidFill>
+                        <a:srgbClr val="E3E8E9"/>
+                      </a:solidFill>
+                      <a:prstDash val="solid"/>
+                      <a:round/>
+                      <a:headEnd type="none" w="med" len="med"/>
+                      <a:tailEnd type="none" w="med" len="med"/>
+                    </a:lnT>
+                    <a:lnB w="6350" cap="flat" cmpd="sng" algn="ctr">
+                      <a:solidFill>
+                        <a:srgbClr val="E3E8E9"/>
+                      </a:solidFill>
+                      <a:prstDash val="solid"/>
+                      <a:round/>
+                      <a:headEnd type="none" w="med" len="med"/>
+                      <a:tailEnd type="none" w="med" len="med"/>
+                    </a:lnB>
+                    <a:solidFill>
+                      <a:srgbClr val="F0F4F5"/>
+                    </a:solidFill>
+                  </a:tcPr>
+                </a:tc>
+                <a:tc>
+                  <a:txBody>
+                    <a:bodyPr/>
+                    <a:lstStyle/>
+                    <a:p>
+                      <a:pPr indent="0" marL="0">
+                        <a:buNone/>
+                      </a:pPr>
+                      <a:r>
+                        <a:rPr lang="en-US" sz="950" dirty="0">
+                          <a:solidFill>
+                            <a:srgbClr val="5B6B73"/>
+                          </a:solidFill>
+                          <a:latin typeface="Calibri" pitchFamily="34" charset="0"/>
+                          <a:ea typeface="Calibri" pitchFamily="34" charset="-122"/>
+                          <a:cs typeface="Calibri" pitchFamily="34" charset="-120"/>
+                        </a:rPr>
+                        <a:t>TA - Parada Programada</a:t>
+                      </a:r>
+                      <a:endParaRPr lang="en-US" sz="950" dirty="0">
+                        <a:latin typeface="Calibri" charset="0"/>
+                        <a:ea typeface="Calibri" charset="0"/>
+                        <a:cs typeface="Calibri" charset="0"/>
+                      </a:endParaRPr>
+                    </a:p>
+                  </a:txBody>
+                  <a:tcPr marL="91440" marR="91440" marT="45720" marB="45720" anchor="ctr">
+                    <a:lnL w="6350" cap="flat" cmpd="sng" algn="ctr">
+                      <a:solidFill>
+                        <a:srgbClr val="E3E8E9"/>
+                      </a:solidFill>
+                      <a:prstDash val="solid"/>
+                      <a:round/>
+                      <a:headEnd type="none" w="med" len="med"/>
+                      <a:tailEnd type="none" w="med" len="med"/>
+                    </a:lnL>
+                    <a:lnR w="6350" cap="flat" cmpd="sng" algn="ctr">
+                      <a:solidFill>
+                        <a:srgbClr val="E3E8E9"/>
+                      </a:solidFill>
+                      <a:prstDash val="solid"/>
+                      <a:round/>
+                      <a:headEnd type="none" w="med" len="med"/>
+                      <a:tailEnd type="none" w="med" len="med"/>
+                    </a:lnR>
+                    <a:lnT w="6350" cap="flat" cmpd="sng" algn="ctr">
+                      <a:solidFill>
+                        <a:srgbClr val="E3E8E9"/>
+                      </a:solidFill>
+                      <a:prstDash val="solid"/>
+                      <a:round/>
+                      <a:headEnd type="none" w="med" len="med"/>
+                      <a:tailEnd type="none" w="med" len="med"/>
+                    </a:lnT>
+                    <a:lnB w="6350" cap="flat" cmpd="sng" algn="ctr">
+                      <a:solidFill>
+                        <a:srgbClr val="E3E8E9"/>
+                      </a:solidFill>
+                      <a:prstDash val="solid"/>
+                      <a:round/>
+                      <a:headEnd type="none" w="med" len="med"/>
+                      <a:tailEnd type="none" w="med" len="med"/>
+                    </a:lnB>
+                    <a:solidFill>
+                      <a:srgbClr val="F0F4F5"/>
+                    </a:solidFill>
+                  </a:tcPr>
+                </a:tc>
+                <a:tc>
+                  <a:txBody>
+                    <a:bodyPr/>
+                    <a:lstStyle/>
+                    <a:p>
+                      <a:pPr algn="r" indent="0" marL="0">
+                        <a:buNone/>
+                      </a:pPr>
+                      <a:r>
+                        <a:rPr lang="en-US" sz="1000" b="1" dirty="0">
+                          <a:solidFill>
+                            <a:srgbClr val="0B2A3D"/>
+                          </a:solidFill>
+                          <a:latin typeface="Calibri" pitchFamily="34" charset="0"/>
+                          <a:ea typeface="Calibri" pitchFamily="34" charset="-122"/>
+                          <a:cs typeface="Calibri" pitchFamily="34" charset="-120"/>
+                        </a:rPr>
+                        <a:t>US$ 484,9 mil</a:t>
+                      </a:r>
+                      <a:endParaRPr lang="en-US" sz="1000" dirty="0">
+                        <a:latin typeface="Calibri" charset="0"/>
+                        <a:ea typeface="Calibri" charset="0"/>
+                        <a:cs typeface="Calibri" charset="0"/>
+                      </a:endParaRPr>
+                    </a:p>
+                  </a:txBody>
+                  <a:tcPr marL="91440" marR="91440" marT="45720" marB="45720" anchor="ctr">
+                    <a:lnL w="6350" cap="flat" cmpd="sng" algn="ctr">
+                      <a:solidFill>
+                        <a:srgbClr val="E3E8E9"/>
+                      </a:solidFill>
+                      <a:prstDash val="solid"/>
+                      <a:round/>
+                      <a:headEnd type="none" w="med" len="med"/>
+                      <a:tailEnd type="none" w="med" len="med"/>
+                    </a:lnL>
+                    <a:lnR w="6350" cap="flat" cmpd="sng" algn="ctr">
+                      <a:solidFill>
+                        <a:srgbClr val="E3E8E9"/>
+                      </a:solidFill>
+                      <a:prstDash val="solid"/>
+                      <a:round/>
+                      <a:headEnd type="none" w="med" len="med"/>
+                      <a:tailEnd type="none" w="med" len="med"/>
+                    </a:lnR>
+                    <a:lnT w="6350" cap="flat" cmpd="sng" algn="ctr">
+                      <a:solidFill>
+                        <a:srgbClr val="E3E8E9"/>
+                      </a:solidFill>
+                      <a:prstDash val="solid"/>
+                      <a:round/>
+                      <a:headEnd type="none" w="med" len="med"/>
+                      <a:tailEnd type="none" w="med" len="med"/>
+                    </a:lnT>
+                    <a:lnB w="6350" cap="flat" cmpd="sng" algn="ctr">
+                      <a:solidFill>
+                        <a:srgbClr val="E3E8E9"/>
+                      </a:solidFill>
+                      <a:prstDash val="solid"/>
+                      <a:round/>
+                      <a:headEnd type="none" w="med" len="med"/>
+                      <a:tailEnd type="none" w="med" len="med"/>
+                    </a:lnB>
+                    <a:solidFill>
+                      <a:srgbClr val="F0F4F5"/>
+                    </a:solidFill>
+                  </a:tcPr>
+                </a:tc>
+              </a:tr>
+              <a:tr h="288036">
+                <a:tc>
+                  <a:txBody>
+                    <a:bodyPr/>
+                    <a:lstStyle/>
+                    <a:p>
+                      <a:pPr indent="0" marL="0">
+                        <a:buNone/>
+                      </a:pPr>
+                      <a:r>
+                        <a:rPr lang="en-US" sz="1000" dirty="0">
+                          <a:solidFill>
+                            <a:srgbClr val="1C2B33"/>
+                          </a:solidFill>
+                          <a:latin typeface="Calibri" pitchFamily="34" charset="0"/>
+                          <a:ea typeface="Calibri" pitchFamily="34" charset="-122"/>
+                          <a:cs typeface="Calibri" pitchFamily="34" charset="-120"/>
+                        </a:rPr>
+                        <a:t>Instalação de novos Detectores de Gás</a:t>
+                      </a:r>
+                      <a:endParaRPr lang="en-US" sz="1000" dirty="0">
+                        <a:latin typeface="Calibri" charset="0"/>
+                        <a:ea typeface="Calibri" charset="0"/>
+                        <a:cs typeface="Calibri" charset="0"/>
+                      </a:endParaRPr>
+                    </a:p>
+                  </a:txBody>
+                  <a:tcPr marL="91440" marR="91440" marT="45720" marB="45720" anchor="ctr">
+                    <a:lnL w="6350" cap="flat" cmpd="sng" algn="ctr">
+                      <a:solidFill>
+                        <a:srgbClr val="E3E8E9"/>
+                      </a:solidFill>
+                      <a:prstDash val="solid"/>
+                      <a:round/>
+                      <a:headEnd type="none" w="med" len="med"/>
+                      <a:tailEnd type="none" w="med" len="med"/>
+                    </a:lnL>
+                    <a:lnR w="6350" cap="flat" cmpd="sng" algn="ctr">
+                      <a:solidFill>
+                        <a:srgbClr val="E3E8E9"/>
+                      </a:solidFill>
+                      <a:prstDash val="solid"/>
+                      <a:round/>
+                      <a:headEnd type="none" w="med" len="med"/>
+                      <a:tailEnd type="none" w="med" len="med"/>
+                    </a:lnR>
+                    <a:lnT w="6350" cap="flat" cmpd="sng" algn="ctr">
+                      <a:solidFill>
+                        <a:srgbClr val="E3E8E9"/>
+                      </a:solidFill>
+                      <a:prstDash val="solid"/>
+                      <a:round/>
+                      <a:headEnd type="none" w="med" len="med"/>
+                      <a:tailEnd type="none" w="med" len="med"/>
+                    </a:lnT>
+                    <a:lnB w="6350" cap="flat" cmpd="sng" algn="ctr">
+                      <a:solidFill>
+                        <a:srgbClr val="E3E8E9"/>
+                      </a:solidFill>
+                      <a:prstDash val="solid"/>
+                      <a:round/>
+                      <a:headEnd type="none" w="med" len="med"/>
+                      <a:tailEnd type="none" w="med" len="med"/>
+                    </a:lnB>
+                    <a:solidFill>
+                      <a:srgbClr val="FFFFFF"/>
+                    </a:solidFill>
+                  </a:tcPr>
+                </a:tc>
+                <a:tc>
+                  <a:txBody>
+                    <a:bodyPr/>
+                    <a:lstStyle/>
+                    <a:p>
+                      <a:pPr indent="0" marL="0">
+                        <a:buNone/>
+                      </a:pPr>
+                      <a:r>
+                        <a:rPr lang="en-US" sz="950" dirty="0">
+                          <a:solidFill>
+                            <a:srgbClr val="5B6B73"/>
+                          </a:solidFill>
+                          <a:latin typeface="Calibri" pitchFamily="34" charset="0"/>
+                          <a:ea typeface="Calibri" pitchFamily="34" charset="-122"/>
+                          <a:cs typeface="Calibri" pitchFamily="34" charset="-120"/>
+                        </a:rPr>
                         <a:t>Integridade e Regulatório</a:t>
+                      </a:r>
+                      <a:endParaRPr lang="en-US" sz="950" dirty="0">
+                        <a:latin typeface="Calibri" charset="0"/>
+                        <a:ea typeface="Calibri" charset="0"/>
+                        <a:cs typeface="Calibri" charset="0"/>
+                      </a:endParaRPr>
+                    </a:p>
+                  </a:txBody>
+                  <a:tcPr marL="91440" marR="91440" marT="45720" marB="45720" anchor="ctr">
+                    <a:lnL w="6350" cap="flat" cmpd="sng" algn="ctr">
+                      <a:solidFill>
+                        <a:srgbClr val="E3E8E9"/>
+                      </a:solidFill>
+                      <a:prstDash val="solid"/>
+                      <a:round/>
+                      <a:headEnd type="none" w="med" len="med"/>
+                      <a:tailEnd type="none" w="med" len="med"/>
+                    </a:lnL>
+                    <a:lnR w="6350" cap="flat" cmpd="sng" algn="ctr">
+                      <a:solidFill>
+                        <a:srgbClr val="E3E8E9"/>
+                      </a:solidFill>
+                      <a:prstDash val="solid"/>
+                      <a:round/>
+                      <a:headEnd type="none" w="med" len="med"/>
+                      <a:tailEnd type="none" w="med" len="med"/>
+                    </a:lnR>
+                    <a:lnT w="6350" cap="flat" cmpd="sng" algn="ctr">
+                      <a:solidFill>
+                        <a:srgbClr val="E3E8E9"/>
+                      </a:solidFill>
+                      <a:prstDash val="solid"/>
+                      <a:round/>
+                      <a:headEnd type="none" w="med" len="med"/>
+                      <a:tailEnd type="none" w="med" len="med"/>
+                    </a:lnT>
+                    <a:lnB w="6350" cap="flat" cmpd="sng" algn="ctr">
+                      <a:solidFill>
+                        <a:srgbClr val="E3E8E9"/>
+                      </a:solidFill>
+                      <a:prstDash val="solid"/>
+                      <a:round/>
+                      <a:headEnd type="none" w="med" len="med"/>
+                      <a:tailEnd type="none" w="med" len="med"/>
+                    </a:lnB>
+                    <a:solidFill>
+                      <a:srgbClr val="FFFFFF"/>
+                    </a:solidFill>
+                  </a:tcPr>
+                </a:tc>
+                <a:tc>
+                  <a:txBody>
+                    <a:bodyPr/>
+                    <a:lstStyle/>
+                    <a:p>
+                      <a:pPr indent="0" marL="0">
+                        <a:buNone/>
+                      </a:pPr>
+                      <a:r>
+                        <a:rPr lang="en-US" sz="950" dirty="0">
+                          <a:solidFill>
+                            <a:srgbClr val="5B6B73"/>
+                          </a:solidFill>
+                          <a:latin typeface="Calibri" pitchFamily="34" charset="0"/>
+                          <a:ea typeface="Calibri" pitchFamily="34" charset="-122"/>
+                          <a:cs typeface="Calibri" pitchFamily="34" charset="-120"/>
+                        </a:rPr>
+                        <a:t>Projetos</a:t>
+                      </a:r>
+                      <a:endParaRPr lang="en-US" sz="950" dirty="0">
+                        <a:latin typeface="Calibri" charset="0"/>
+                        <a:ea typeface="Calibri" charset="0"/>
+                        <a:cs typeface="Calibri" charset="0"/>
+                      </a:endParaRPr>
+                    </a:p>
+                  </a:txBody>
+                  <a:tcPr marL="91440" marR="91440" marT="45720" marB="45720" anchor="ctr">
+                    <a:lnL w="6350" cap="flat" cmpd="sng" algn="ctr">
+                      <a:solidFill>
+                        <a:srgbClr val="E3E8E9"/>
+                      </a:solidFill>
+                      <a:prstDash val="solid"/>
+                      <a:round/>
+                      <a:headEnd type="none" w="med" len="med"/>
+                      <a:tailEnd type="none" w="med" len="med"/>
+                    </a:lnL>
+                    <a:lnR w="6350" cap="flat" cmpd="sng" algn="ctr">
+                      <a:solidFill>
+                        <a:srgbClr val="E3E8E9"/>
+                      </a:solidFill>
+                      <a:prstDash val="solid"/>
+                      <a:round/>
+                      <a:headEnd type="none" w="med" len="med"/>
+                      <a:tailEnd type="none" w="med" len="med"/>
+                    </a:lnR>
+                    <a:lnT w="6350" cap="flat" cmpd="sng" algn="ctr">
+                      <a:solidFill>
+                        <a:srgbClr val="E3E8E9"/>
+                      </a:solidFill>
+                      <a:prstDash val="solid"/>
+                      <a:round/>
+                      <a:headEnd type="none" w="med" len="med"/>
+                      <a:tailEnd type="none" w="med" len="med"/>
+                    </a:lnT>
+                    <a:lnB w="6350" cap="flat" cmpd="sng" algn="ctr">
+                      <a:solidFill>
+                        <a:srgbClr val="E3E8E9"/>
+                      </a:solidFill>
+                      <a:prstDash val="solid"/>
+                      <a:round/>
+                      <a:headEnd type="none" w="med" len="med"/>
+                      <a:tailEnd type="none" w="med" len="med"/>
+                    </a:lnB>
+                    <a:solidFill>
+                      <a:srgbClr val="FFFFFF"/>
+                    </a:solidFill>
+                  </a:tcPr>
+                </a:tc>
+                <a:tc>
+                  <a:txBody>
+                    <a:bodyPr/>
+                    <a:lstStyle/>
+                    <a:p>
+                      <a:pPr algn="r" indent="0" marL="0">
+                        <a:buNone/>
+                      </a:pPr>
+                      <a:r>
+                        <a:rPr lang="en-US" sz="1000" b="1" dirty="0">
+                          <a:solidFill>
+                            <a:srgbClr val="0B2A3D"/>
+                          </a:solidFill>
+                          <a:latin typeface="Calibri" pitchFamily="34" charset="0"/>
+                          <a:ea typeface="Calibri" pitchFamily="34" charset="-122"/>
+                          <a:cs typeface="Calibri" pitchFamily="34" charset="-120"/>
+                        </a:rPr>
+                        <a:t>US$ 447,3 mil</a:t>
+                      </a:r>
+                      <a:endParaRPr lang="en-US" sz="1000" dirty="0">
+                        <a:latin typeface="Calibri" charset="0"/>
+                        <a:ea typeface="Calibri" charset="0"/>
+                        <a:cs typeface="Calibri" charset="0"/>
+                      </a:endParaRPr>
+                    </a:p>
+                  </a:txBody>
+                  <a:tcPr marL="91440" marR="91440" marT="45720" marB="45720" anchor="ctr">
+                    <a:lnL w="6350" cap="flat" cmpd="sng" algn="ctr">
+                      <a:solidFill>
+                        <a:srgbClr val="E3E8E9"/>
+                      </a:solidFill>
+                      <a:prstDash val="solid"/>
+                      <a:round/>
+                      <a:headEnd type="none" w="med" len="med"/>
+                      <a:tailEnd type="none" w="med" len="med"/>
+                    </a:lnL>
+                    <a:lnR w="6350" cap="flat" cmpd="sng" algn="ctr">
+                      <a:solidFill>
+                        <a:srgbClr val="E3E8E9"/>
+                      </a:solidFill>
+                      <a:prstDash val="solid"/>
+                      <a:round/>
+                      <a:headEnd type="none" w="med" len="med"/>
+                      <a:tailEnd type="none" w="med" len="med"/>
+                    </a:lnR>
+                    <a:lnT w="6350" cap="flat" cmpd="sng" algn="ctr">
+                      <a:solidFill>
+                        <a:srgbClr val="E3E8E9"/>
+                      </a:solidFill>
+                      <a:prstDash val="solid"/>
+                      <a:round/>
+                      <a:headEnd type="none" w="med" len="med"/>
+                      <a:tailEnd type="none" w="med" len="med"/>
+                    </a:lnT>
+                    <a:lnB w="6350" cap="flat" cmpd="sng" algn="ctr">
+                      <a:solidFill>
+                        <a:srgbClr val="E3E8E9"/>
+                      </a:solidFill>
+                      <a:prstDash val="solid"/>
+                      <a:round/>
+                      <a:headEnd type="none" w="med" len="med"/>
+                      <a:tailEnd type="none" w="med" len="med"/>
+                    </a:lnB>
+                    <a:solidFill>
+                      <a:srgbClr val="FFFFFF"/>
+                    </a:solidFill>
+                  </a:tcPr>
+                </a:tc>
+              </a:tr>
+              <a:tr h="288036">
+                <a:tc>
+                  <a:txBody>
+                    <a:bodyPr/>
+                    <a:lstStyle/>
+                    <a:p>
+                      <a:pPr indent="0" marL="0">
+                        <a:buNone/>
+                      </a:pPr>
+                      <a:r>
+                        <a:rPr lang="en-US" sz="1000" dirty="0">
+                          <a:solidFill>
+                            <a:srgbClr val="1C2B33"/>
+                          </a:solidFill>
+                          <a:latin typeface="Calibri" pitchFamily="34" charset="0"/>
+                          <a:ea typeface="Calibri" pitchFamily="34" charset="-122"/>
+                          <a:cs typeface="Calibri" pitchFamily="34" charset="-120"/>
+                        </a:rPr>
+                        <a:t>Repetidoras de Rádio</a:t>
+                      </a:r>
+                      <a:endParaRPr lang="en-US" sz="1000" dirty="0">
+                        <a:latin typeface="Calibri" charset="0"/>
+                        <a:ea typeface="Calibri" charset="0"/>
+                        <a:cs typeface="Calibri" charset="0"/>
+                      </a:endParaRPr>
+                    </a:p>
+                  </a:txBody>
+                  <a:tcPr marL="91440" marR="91440" marT="45720" marB="45720" anchor="ctr">
+                    <a:lnL w="6350" cap="flat" cmpd="sng" algn="ctr">
+                      <a:solidFill>
+                        <a:srgbClr val="E3E8E9"/>
+                      </a:solidFill>
+                      <a:prstDash val="solid"/>
+                      <a:round/>
+                      <a:headEnd type="none" w="med" len="med"/>
+                      <a:tailEnd type="none" w="med" len="med"/>
+                    </a:lnL>
+                    <a:lnR w="6350" cap="flat" cmpd="sng" algn="ctr">
+                      <a:solidFill>
+                        <a:srgbClr val="E3E8E9"/>
+                      </a:solidFill>
+                      <a:prstDash val="solid"/>
+                      <a:round/>
+                      <a:headEnd type="none" w="med" len="med"/>
+                      <a:tailEnd type="none" w="med" len="med"/>
+                    </a:lnR>
+                    <a:lnT w="6350" cap="flat" cmpd="sng" algn="ctr">
+                      <a:solidFill>
+                        <a:srgbClr val="E3E8E9"/>
+                      </a:solidFill>
+                      <a:prstDash val="solid"/>
+                      <a:round/>
+                      <a:headEnd type="none" w="med" len="med"/>
+                      <a:tailEnd type="none" w="med" len="med"/>
+                    </a:lnT>
+                    <a:lnB w="6350" cap="flat" cmpd="sng" algn="ctr">
+                      <a:solidFill>
+                        <a:srgbClr val="E3E8E9"/>
+                      </a:solidFill>
+                      <a:prstDash val="solid"/>
+                      <a:round/>
+                      <a:headEnd type="none" w="med" len="med"/>
+                      <a:tailEnd type="none" w="med" len="med"/>
+                    </a:lnB>
+                    <a:solidFill>
+                      <a:srgbClr val="F0F4F5"/>
+                    </a:solidFill>
+                  </a:tcPr>
+                </a:tc>
+                <a:tc>
+                  <a:txBody>
+                    <a:bodyPr/>
+                    <a:lstStyle/>
+                    <a:p>
+                      <a:pPr indent="0" marL="0">
+                        <a:buNone/>
+                      </a:pPr>
+                      <a:r>
+                        <a:rPr lang="en-US" sz="950" dirty="0">
+                          <a:solidFill>
+                            <a:srgbClr val="5B6B73"/>
+                          </a:solidFill>
+                          <a:latin typeface="Calibri" pitchFamily="34" charset="0"/>
+                          <a:ea typeface="Calibri" pitchFamily="34" charset="-122"/>
+                          <a:cs typeface="Calibri" pitchFamily="34" charset="-120"/>
+                        </a:rPr>
+                        <a:t>Eficiência de Produção</a:t>
                       </a:r>
                       <a:endParaRPr lang="en-US" sz="950" dirty="0">
                         <a:latin typeface="Calibri" charset="0"/>
@@ -12856,7 +13502,7 @@
                           <a:ea typeface="Calibri" pitchFamily="34" charset="-122"/>
                           <a:cs typeface="Calibri" pitchFamily="34" charset="-120"/>
                         </a:rPr>
-                        <a:t>US$ 447,3 mil</a:t>
+                        <a:t>US$ 217,9 mil</a:t>
                       </a:r>
                       <a:endParaRPr lang="en-US" sz="1000" dirty="0">
                         <a:latin typeface="Calibri" charset="0"/>
@@ -12926,7 +13572,7 @@
                           <a:ea typeface="Calibri" pitchFamily="34" charset="-122"/>
                           <a:cs typeface="Calibri" pitchFamily="34" charset="-120"/>
                         </a:rPr>
-                        <a:t>Repetidoras de Rádio</a:t>
+                        <a:t>TA - Flowline - Passagem de PIG</a:t>
                       </a:r>
                       <a:endParaRPr lang="en-US" sz="1000" dirty="0">
                         <a:latin typeface="Calibri" charset="0"/>
@@ -12994,7 +13640,555 @@
                           <a:ea typeface="Calibri" pitchFamily="34" charset="-122"/>
                           <a:cs typeface="Calibri" pitchFamily="34" charset="-120"/>
                         </a:rPr>
+                        <a:t>Integridade e Regulatório</a:t>
+                      </a:r>
+                      <a:endParaRPr lang="en-US" sz="950" dirty="0">
+                        <a:latin typeface="Calibri" charset="0"/>
+                        <a:ea typeface="Calibri" charset="0"/>
+                        <a:cs typeface="Calibri" charset="0"/>
+                      </a:endParaRPr>
+                    </a:p>
+                  </a:txBody>
+                  <a:tcPr marL="91440" marR="91440" marT="45720" marB="45720" anchor="ctr">
+                    <a:lnL w="6350" cap="flat" cmpd="sng" algn="ctr">
+                      <a:solidFill>
+                        <a:srgbClr val="E3E8E9"/>
+                      </a:solidFill>
+                      <a:prstDash val="solid"/>
+                      <a:round/>
+                      <a:headEnd type="none" w="med" len="med"/>
+                      <a:tailEnd type="none" w="med" len="med"/>
+                    </a:lnL>
+                    <a:lnR w="6350" cap="flat" cmpd="sng" algn="ctr">
+                      <a:solidFill>
+                        <a:srgbClr val="E3E8E9"/>
+                      </a:solidFill>
+                      <a:prstDash val="solid"/>
+                      <a:round/>
+                      <a:headEnd type="none" w="med" len="med"/>
+                      <a:tailEnd type="none" w="med" len="med"/>
+                    </a:lnR>
+                    <a:lnT w="6350" cap="flat" cmpd="sng" algn="ctr">
+                      <a:solidFill>
+                        <a:srgbClr val="E3E8E9"/>
+                      </a:solidFill>
+                      <a:prstDash val="solid"/>
+                      <a:round/>
+                      <a:headEnd type="none" w="med" len="med"/>
+                      <a:tailEnd type="none" w="med" len="med"/>
+                    </a:lnT>
+                    <a:lnB w="6350" cap="flat" cmpd="sng" algn="ctr">
+                      <a:solidFill>
+                        <a:srgbClr val="E3E8E9"/>
+                      </a:solidFill>
+                      <a:prstDash val="solid"/>
+                      <a:round/>
+                      <a:headEnd type="none" w="med" len="med"/>
+                      <a:tailEnd type="none" w="med" len="med"/>
+                    </a:lnB>
+                    <a:solidFill>
+                      <a:srgbClr val="FFFFFF"/>
+                    </a:solidFill>
+                  </a:tcPr>
+                </a:tc>
+                <a:tc>
+                  <a:txBody>
+                    <a:bodyPr/>
+                    <a:lstStyle/>
+                    <a:p>
+                      <a:pPr indent="0" marL="0">
+                        <a:buNone/>
+                      </a:pPr>
+                      <a:r>
+                        <a:rPr lang="en-US" sz="950" dirty="0">
+                          <a:solidFill>
+                            <a:srgbClr val="5B6B73"/>
+                          </a:solidFill>
+                          <a:latin typeface="Calibri" pitchFamily="34" charset="0"/>
+                          <a:ea typeface="Calibri" pitchFamily="34" charset="-122"/>
+                          <a:cs typeface="Calibri" pitchFamily="34" charset="-120"/>
+                        </a:rPr>
+                        <a:t>P&amp;Q - Processos</a:t>
+                      </a:r>
+                      <a:endParaRPr lang="en-US" sz="950" dirty="0">
+                        <a:latin typeface="Calibri" charset="0"/>
+                        <a:ea typeface="Calibri" charset="0"/>
+                        <a:cs typeface="Calibri" charset="0"/>
+                      </a:endParaRPr>
+                    </a:p>
+                  </a:txBody>
+                  <a:tcPr marL="91440" marR="91440" marT="45720" marB="45720" anchor="ctr">
+                    <a:lnL w="6350" cap="flat" cmpd="sng" algn="ctr">
+                      <a:solidFill>
+                        <a:srgbClr val="E3E8E9"/>
+                      </a:solidFill>
+                      <a:prstDash val="solid"/>
+                      <a:round/>
+                      <a:headEnd type="none" w="med" len="med"/>
+                      <a:tailEnd type="none" w="med" len="med"/>
+                    </a:lnL>
+                    <a:lnR w="6350" cap="flat" cmpd="sng" algn="ctr">
+                      <a:solidFill>
+                        <a:srgbClr val="E3E8E9"/>
+                      </a:solidFill>
+                      <a:prstDash val="solid"/>
+                      <a:round/>
+                      <a:headEnd type="none" w="med" len="med"/>
+                      <a:tailEnd type="none" w="med" len="med"/>
+                    </a:lnR>
+                    <a:lnT w="6350" cap="flat" cmpd="sng" algn="ctr">
+                      <a:solidFill>
+                        <a:srgbClr val="E3E8E9"/>
+                      </a:solidFill>
+                      <a:prstDash val="solid"/>
+                      <a:round/>
+                      <a:headEnd type="none" w="med" len="med"/>
+                      <a:tailEnd type="none" w="med" len="med"/>
+                    </a:lnT>
+                    <a:lnB w="6350" cap="flat" cmpd="sng" algn="ctr">
+                      <a:solidFill>
+                        <a:srgbClr val="E3E8E9"/>
+                      </a:solidFill>
+                      <a:prstDash val="solid"/>
+                      <a:round/>
+                      <a:headEnd type="none" w="med" len="med"/>
+                      <a:tailEnd type="none" w="med" len="med"/>
+                    </a:lnB>
+                    <a:solidFill>
+                      <a:srgbClr val="FFFFFF"/>
+                    </a:solidFill>
+                  </a:tcPr>
+                </a:tc>
+                <a:tc>
+                  <a:txBody>
+                    <a:bodyPr/>
+                    <a:lstStyle/>
+                    <a:p>
+                      <a:pPr algn="r" indent="0" marL="0">
+                        <a:buNone/>
+                      </a:pPr>
+                      <a:r>
+                        <a:rPr lang="en-US" sz="1000" b="1" dirty="0">
+                          <a:solidFill>
+                            <a:srgbClr val="0B2A3D"/>
+                          </a:solidFill>
+                          <a:latin typeface="Calibri" pitchFamily="34" charset="0"/>
+                          <a:ea typeface="Calibri" pitchFamily="34" charset="-122"/>
+                          <a:cs typeface="Calibri" pitchFamily="34" charset="-120"/>
+                        </a:rPr>
+                        <a:t>US$ 206,8 mil</a:t>
+                      </a:r>
+                      <a:endParaRPr lang="en-US" sz="1000" dirty="0">
+                        <a:latin typeface="Calibri" charset="0"/>
+                        <a:ea typeface="Calibri" charset="0"/>
+                        <a:cs typeface="Calibri" charset="0"/>
+                      </a:endParaRPr>
+                    </a:p>
+                  </a:txBody>
+                  <a:tcPr marL="91440" marR="91440" marT="45720" marB="45720" anchor="ctr">
+                    <a:lnL w="6350" cap="flat" cmpd="sng" algn="ctr">
+                      <a:solidFill>
+                        <a:srgbClr val="E3E8E9"/>
+                      </a:solidFill>
+                      <a:prstDash val="solid"/>
+                      <a:round/>
+                      <a:headEnd type="none" w="med" len="med"/>
+                      <a:tailEnd type="none" w="med" len="med"/>
+                    </a:lnL>
+                    <a:lnR w="6350" cap="flat" cmpd="sng" algn="ctr">
+                      <a:solidFill>
+                        <a:srgbClr val="E3E8E9"/>
+                      </a:solidFill>
+                      <a:prstDash val="solid"/>
+                      <a:round/>
+                      <a:headEnd type="none" w="med" len="med"/>
+                      <a:tailEnd type="none" w="med" len="med"/>
+                    </a:lnR>
+                    <a:lnT w="6350" cap="flat" cmpd="sng" algn="ctr">
+                      <a:solidFill>
+                        <a:srgbClr val="E3E8E9"/>
+                      </a:solidFill>
+                      <a:prstDash val="solid"/>
+                      <a:round/>
+                      <a:headEnd type="none" w="med" len="med"/>
+                      <a:tailEnd type="none" w="med" len="med"/>
+                    </a:lnT>
+                    <a:lnB w="6350" cap="flat" cmpd="sng" algn="ctr">
+                      <a:solidFill>
+                        <a:srgbClr val="E3E8E9"/>
+                      </a:solidFill>
+                      <a:prstDash val="solid"/>
+                      <a:round/>
+                      <a:headEnd type="none" w="med" len="med"/>
+                      <a:tailEnd type="none" w="med" len="med"/>
+                    </a:lnB>
+                    <a:solidFill>
+                      <a:srgbClr val="FFFFFF"/>
+                    </a:solidFill>
+                  </a:tcPr>
+                </a:tc>
+              </a:tr>
+              <a:tr h="288036">
+                <a:tc>
+                  <a:txBody>
+                    <a:bodyPr/>
+                    <a:lstStyle/>
+                    <a:p>
+                      <a:pPr indent="0" marL="0">
+                        <a:buNone/>
+                      </a:pPr>
+                      <a:r>
+                        <a:rPr lang="en-US" sz="1000" dirty="0">
+                          <a:solidFill>
+                            <a:srgbClr val="1C2B33"/>
+                          </a:solidFill>
+                          <a:latin typeface="Calibri" pitchFamily="34" charset="0"/>
+                          <a:ea typeface="Calibri" pitchFamily="34" charset="-122"/>
+                          <a:cs typeface="Calibri" pitchFamily="34" charset="-120"/>
+                        </a:rPr>
+                        <a:t>TA - NR13</a:t>
+                      </a:r>
+                      <a:endParaRPr lang="en-US" sz="1000" dirty="0">
+                        <a:latin typeface="Calibri" charset="0"/>
+                        <a:ea typeface="Calibri" charset="0"/>
+                        <a:cs typeface="Calibri" charset="0"/>
+                      </a:endParaRPr>
+                    </a:p>
+                  </a:txBody>
+                  <a:tcPr marL="91440" marR="91440" marT="45720" marB="45720" anchor="ctr">
+                    <a:lnL w="6350" cap="flat" cmpd="sng" algn="ctr">
+                      <a:solidFill>
+                        <a:srgbClr val="E3E8E9"/>
+                      </a:solidFill>
+                      <a:prstDash val="solid"/>
+                      <a:round/>
+                      <a:headEnd type="none" w="med" len="med"/>
+                      <a:tailEnd type="none" w="med" len="med"/>
+                    </a:lnL>
+                    <a:lnR w="6350" cap="flat" cmpd="sng" algn="ctr">
+                      <a:solidFill>
+                        <a:srgbClr val="E3E8E9"/>
+                      </a:solidFill>
+                      <a:prstDash val="solid"/>
+                      <a:round/>
+                      <a:headEnd type="none" w="med" len="med"/>
+                      <a:tailEnd type="none" w="med" len="med"/>
+                    </a:lnR>
+                    <a:lnT w="6350" cap="flat" cmpd="sng" algn="ctr">
+                      <a:solidFill>
+                        <a:srgbClr val="E3E8E9"/>
+                      </a:solidFill>
+                      <a:prstDash val="solid"/>
+                      <a:round/>
+                      <a:headEnd type="none" w="med" len="med"/>
+                      <a:tailEnd type="none" w="med" len="med"/>
+                    </a:lnT>
+                    <a:lnB w="6350" cap="flat" cmpd="sng" algn="ctr">
+                      <a:solidFill>
+                        <a:srgbClr val="E3E8E9"/>
+                      </a:solidFill>
+                      <a:prstDash val="solid"/>
+                      <a:round/>
+                      <a:headEnd type="none" w="med" len="med"/>
+                      <a:tailEnd type="none" w="med" len="med"/>
+                    </a:lnB>
+                    <a:solidFill>
+                      <a:srgbClr val="F0F4F5"/>
+                    </a:solidFill>
+                  </a:tcPr>
+                </a:tc>
+                <a:tc>
+                  <a:txBody>
+                    <a:bodyPr/>
+                    <a:lstStyle/>
+                    <a:p>
+                      <a:pPr indent="0" marL="0">
+                        <a:buNone/>
+                      </a:pPr>
+                      <a:r>
+                        <a:rPr lang="en-US" sz="950" dirty="0">
+                          <a:solidFill>
+                            <a:srgbClr val="5B6B73"/>
+                          </a:solidFill>
+                          <a:latin typeface="Calibri" pitchFamily="34" charset="0"/>
+                          <a:ea typeface="Calibri" pitchFamily="34" charset="-122"/>
+                          <a:cs typeface="Calibri" pitchFamily="34" charset="-120"/>
+                        </a:rPr>
                         <a:t>Eficiência de Produção</a:t>
+                      </a:r>
+                      <a:endParaRPr lang="en-US" sz="950" dirty="0">
+                        <a:latin typeface="Calibri" charset="0"/>
+                        <a:ea typeface="Calibri" charset="0"/>
+                        <a:cs typeface="Calibri" charset="0"/>
+                      </a:endParaRPr>
+                    </a:p>
+                  </a:txBody>
+                  <a:tcPr marL="91440" marR="91440" marT="45720" marB="45720" anchor="ctr">
+                    <a:lnL w="6350" cap="flat" cmpd="sng" algn="ctr">
+                      <a:solidFill>
+                        <a:srgbClr val="E3E8E9"/>
+                      </a:solidFill>
+                      <a:prstDash val="solid"/>
+                      <a:round/>
+                      <a:headEnd type="none" w="med" len="med"/>
+                      <a:tailEnd type="none" w="med" len="med"/>
+                    </a:lnL>
+                    <a:lnR w="6350" cap="flat" cmpd="sng" algn="ctr">
+                      <a:solidFill>
+                        <a:srgbClr val="E3E8E9"/>
+                      </a:solidFill>
+                      <a:prstDash val="solid"/>
+                      <a:round/>
+                      <a:headEnd type="none" w="med" len="med"/>
+                      <a:tailEnd type="none" w="med" len="med"/>
+                    </a:lnR>
+                    <a:lnT w="6350" cap="flat" cmpd="sng" algn="ctr">
+                      <a:solidFill>
+                        <a:srgbClr val="E3E8E9"/>
+                      </a:solidFill>
+                      <a:prstDash val="solid"/>
+                      <a:round/>
+                      <a:headEnd type="none" w="med" len="med"/>
+                      <a:tailEnd type="none" w="med" len="med"/>
+                    </a:lnT>
+                    <a:lnB w="6350" cap="flat" cmpd="sng" algn="ctr">
+                      <a:solidFill>
+                        <a:srgbClr val="E3E8E9"/>
+                      </a:solidFill>
+                      <a:prstDash val="solid"/>
+                      <a:round/>
+                      <a:headEnd type="none" w="med" len="med"/>
+                      <a:tailEnd type="none" w="med" len="med"/>
+                    </a:lnB>
+                    <a:solidFill>
+                      <a:srgbClr val="F0F4F5"/>
+                    </a:solidFill>
+                  </a:tcPr>
+                </a:tc>
+                <a:tc>
+                  <a:txBody>
+                    <a:bodyPr/>
+                    <a:lstStyle/>
+                    <a:p>
+                      <a:pPr indent="0" marL="0">
+                        <a:buNone/>
+                      </a:pPr>
+                      <a:r>
+                        <a:rPr lang="en-US" sz="950" dirty="0">
+                          <a:solidFill>
+                            <a:srgbClr val="5B6B73"/>
+                          </a:solidFill>
+                          <a:latin typeface="Calibri" pitchFamily="34" charset="0"/>
+                          <a:ea typeface="Calibri" pitchFamily="34" charset="-122"/>
+                          <a:cs typeface="Calibri" pitchFamily="34" charset="-120"/>
+                        </a:rPr>
+                        <a:t>TA - Parada Programada</a:t>
+                      </a:r>
+                      <a:endParaRPr lang="en-US" sz="950" dirty="0">
+                        <a:latin typeface="Calibri" charset="0"/>
+                        <a:ea typeface="Calibri" charset="0"/>
+                        <a:cs typeface="Calibri" charset="0"/>
+                      </a:endParaRPr>
+                    </a:p>
+                  </a:txBody>
+                  <a:tcPr marL="91440" marR="91440" marT="45720" marB="45720" anchor="ctr">
+                    <a:lnL w="6350" cap="flat" cmpd="sng" algn="ctr">
+                      <a:solidFill>
+                        <a:srgbClr val="E3E8E9"/>
+                      </a:solidFill>
+                      <a:prstDash val="solid"/>
+                      <a:round/>
+                      <a:headEnd type="none" w="med" len="med"/>
+                      <a:tailEnd type="none" w="med" len="med"/>
+                    </a:lnL>
+                    <a:lnR w="6350" cap="flat" cmpd="sng" algn="ctr">
+                      <a:solidFill>
+                        <a:srgbClr val="E3E8E9"/>
+                      </a:solidFill>
+                      <a:prstDash val="solid"/>
+                      <a:round/>
+                      <a:headEnd type="none" w="med" len="med"/>
+                      <a:tailEnd type="none" w="med" len="med"/>
+                    </a:lnR>
+                    <a:lnT w="6350" cap="flat" cmpd="sng" algn="ctr">
+                      <a:solidFill>
+                        <a:srgbClr val="E3E8E9"/>
+                      </a:solidFill>
+                      <a:prstDash val="solid"/>
+                      <a:round/>
+                      <a:headEnd type="none" w="med" len="med"/>
+                      <a:tailEnd type="none" w="med" len="med"/>
+                    </a:lnT>
+                    <a:lnB w="6350" cap="flat" cmpd="sng" algn="ctr">
+                      <a:solidFill>
+                        <a:srgbClr val="E3E8E9"/>
+                      </a:solidFill>
+                      <a:prstDash val="solid"/>
+                      <a:round/>
+                      <a:headEnd type="none" w="med" len="med"/>
+                      <a:tailEnd type="none" w="med" len="med"/>
+                    </a:lnB>
+                    <a:solidFill>
+                      <a:srgbClr val="F0F4F5"/>
+                    </a:solidFill>
+                  </a:tcPr>
+                </a:tc>
+                <a:tc>
+                  <a:txBody>
+                    <a:bodyPr/>
+                    <a:lstStyle/>
+                    <a:p>
+                      <a:pPr algn="r" indent="0" marL="0">
+                        <a:buNone/>
+                      </a:pPr>
+                      <a:r>
+                        <a:rPr lang="en-US" sz="1000" b="1" dirty="0">
+                          <a:solidFill>
+                            <a:srgbClr val="0B2A3D"/>
+                          </a:solidFill>
+                          <a:latin typeface="Calibri" pitchFamily="34" charset="0"/>
+                          <a:ea typeface="Calibri" pitchFamily="34" charset="-122"/>
+                          <a:cs typeface="Calibri" pitchFamily="34" charset="-120"/>
+                        </a:rPr>
+                        <a:t>US$ 173,2 mil</a:t>
+                      </a:r>
+                      <a:endParaRPr lang="en-US" sz="1000" dirty="0">
+                        <a:latin typeface="Calibri" charset="0"/>
+                        <a:ea typeface="Calibri" charset="0"/>
+                        <a:cs typeface="Calibri" charset="0"/>
+                      </a:endParaRPr>
+                    </a:p>
+                  </a:txBody>
+                  <a:tcPr marL="91440" marR="91440" marT="45720" marB="45720" anchor="ctr">
+                    <a:lnL w="6350" cap="flat" cmpd="sng" algn="ctr">
+                      <a:solidFill>
+                        <a:srgbClr val="E3E8E9"/>
+                      </a:solidFill>
+                      <a:prstDash val="solid"/>
+                      <a:round/>
+                      <a:headEnd type="none" w="med" len="med"/>
+                      <a:tailEnd type="none" w="med" len="med"/>
+                    </a:lnL>
+                    <a:lnR w="6350" cap="flat" cmpd="sng" algn="ctr">
+                      <a:solidFill>
+                        <a:srgbClr val="E3E8E9"/>
+                      </a:solidFill>
+                      <a:prstDash val="solid"/>
+                      <a:round/>
+                      <a:headEnd type="none" w="med" len="med"/>
+                      <a:tailEnd type="none" w="med" len="med"/>
+                    </a:lnR>
+                    <a:lnT w="6350" cap="flat" cmpd="sng" algn="ctr">
+                      <a:solidFill>
+                        <a:srgbClr val="E3E8E9"/>
+                      </a:solidFill>
+                      <a:prstDash val="solid"/>
+                      <a:round/>
+                      <a:headEnd type="none" w="med" len="med"/>
+                      <a:tailEnd type="none" w="med" len="med"/>
+                    </a:lnT>
+                    <a:lnB w="6350" cap="flat" cmpd="sng" algn="ctr">
+                      <a:solidFill>
+                        <a:srgbClr val="E3E8E9"/>
+                      </a:solidFill>
+                      <a:prstDash val="solid"/>
+                      <a:round/>
+                      <a:headEnd type="none" w="med" len="med"/>
+                      <a:tailEnd type="none" w="med" len="med"/>
+                    </a:lnB>
+                    <a:solidFill>
+                      <a:srgbClr val="F0F4F5"/>
+                    </a:solidFill>
+                  </a:tcPr>
+                </a:tc>
+              </a:tr>
+              <a:tr h="288036">
+                <a:tc>
+                  <a:txBody>
+                    <a:bodyPr/>
+                    <a:lstStyle/>
+                    <a:p>
+                      <a:pPr indent="0" marL="0">
+                        <a:buNone/>
+                      </a:pPr>
+                      <a:r>
+                        <a:rPr lang="en-US" sz="1000" dirty="0">
+                          <a:solidFill>
+                            <a:srgbClr val="1C2B33"/>
+                          </a:solidFill>
+                          <a:latin typeface="Calibri" pitchFamily="34" charset="0"/>
+                          <a:ea typeface="Calibri" pitchFamily="34" charset="-122"/>
+                          <a:cs typeface="Calibri" pitchFamily="34" charset="-120"/>
+                        </a:rPr>
+                        <a:t>Troca da Estação Meteorológica</a:t>
+                      </a:r>
+                      <a:endParaRPr lang="en-US" sz="1000" dirty="0">
+                        <a:latin typeface="Calibri" charset="0"/>
+                        <a:ea typeface="Calibri" charset="0"/>
+                        <a:cs typeface="Calibri" charset="0"/>
+                      </a:endParaRPr>
+                    </a:p>
+                  </a:txBody>
+                  <a:tcPr marL="91440" marR="91440" marT="45720" marB="45720" anchor="ctr">
+                    <a:lnL w="6350" cap="flat" cmpd="sng" algn="ctr">
+                      <a:solidFill>
+                        <a:srgbClr val="E3E8E9"/>
+                      </a:solidFill>
+                      <a:prstDash val="solid"/>
+                      <a:round/>
+                      <a:headEnd type="none" w="med" len="med"/>
+                      <a:tailEnd type="none" w="med" len="med"/>
+                    </a:lnL>
+                    <a:lnR w="6350" cap="flat" cmpd="sng" algn="ctr">
+                      <a:solidFill>
+                        <a:srgbClr val="E3E8E9"/>
+                      </a:solidFill>
+                      <a:prstDash val="solid"/>
+                      <a:round/>
+                      <a:headEnd type="none" w="med" len="med"/>
+                      <a:tailEnd type="none" w="med" len="med"/>
+                    </a:lnR>
+                    <a:lnT w="6350" cap="flat" cmpd="sng" algn="ctr">
+                      <a:solidFill>
+                        <a:srgbClr val="E3E8E9"/>
+                      </a:solidFill>
+                      <a:prstDash val="solid"/>
+                      <a:round/>
+                      <a:headEnd type="none" w="med" len="med"/>
+                      <a:tailEnd type="none" w="med" len="med"/>
+                    </a:lnT>
+                    <a:lnB w="6350" cap="flat" cmpd="sng" algn="ctr">
+                      <a:solidFill>
+                        <a:srgbClr val="E3E8E9"/>
+                      </a:solidFill>
+                      <a:prstDash val="solid"/>
+                      <a:round/>
+                      <a:headEnd type="none" w="med" len="med"/>
+                      <a:tailEnd type="none" w="med" len="med"/>
+                    </a:lnB>
+                    <a:solidFill>
+                      <a:srgbClr val="FFFFFF"/>
+                    </a:solidFill>
+                  </a:tcPr>
+                </a:tc>
+                <a:tc>
+                  <a:txBody>
+                    <a:bodyPr/>
+                    <a:lstStyle/>
+                    <a:p>
+                      <a:pPr indent="0" marL="0">
+                        <a:buNone/>
+                      </a:pPr>
+                      <a:r>
+                        <a:rPr lang="en-US" sz="950" dirty="0">
+                          <a:solidFill>
+                            <a:srgbClr val="5B6B73"/>
+                          </a:solidFill>
+                          <a:latin typeface="Calibri" pitchFamily="34" charset="0"/>
+                          <a:ea typeface="Calibri" pitchFamily="34" charset="-122"/>
+                          <a:cs typeface="Calibri" pitchFamily="34" charset="-120"/>
+                        </a:rPr>
+                        <a:t>Integridade e Regulatório</a:t>
                       </a:r>
                       <a:endParaRPr lang="en-US" sz="950" dirty="0">
                         <a:latin typeface="Calibri" charset="0"/>
@@ -13130,7 +14324,7 @@
                           <a:ea typeface="Calibri" pitchFamily="34" charset="-122"/>
                           <a:cs typeface="Calibri" pitchFamily="34" charset="-120"/>
                         </a:rPr>
-                        <a:t>US$ 217,9 mil</a:t>
+                        <a:t>US$ 169,1 mil</a:t>
                       </a:r>
                       <a:endParaRPr lang="en-US" sz="1000" dirty="0">
                         <a:latin typeface="Calibri" charset="0"/>
@@ -13474,555 +14668,7 @@
                           <a:ea typeface="Calibri" pitchFamily="34" charset="-122"/>
                           <a:cs typeface="Calibri" pitchFamily="34" charset="-120"/>
                         </a:rPr>
-                        <a:t>Implantação do projeto 'Muster Digital'</a:t>
-                      </a:r>
-                      <a:endParaRPr lang="en-US" sz="1000" dirty="0">
-                        <a:latin typeface="Calibri" charset="0"/>
-                        <a:ea typeface="Calibri" charset="0"/>
-                        <a:cs typeface="Calibri" charset="0"/>
-                      </a:endParaRPr>
-                    </a:p>
-                  </a:txBody>
-                  <a:tcPr marL="91440" marR="91440" marT="45720" marB="45720" anchor="ctr">
-                    <a:lnL w="6350" cap="flat" cmpd="sng" algn="ctr">
-                      <a:solidFill>
-                        <a:srgbClr val="E3E8E9"/>
-                      </a:solidFill>
-                      <a:prstDash val="solid"/>
-                      <a:round/>
-                      <a:headEnd type="none" w="med" len="med"/>
-                      <a:tailEnd type="none" w="med" len="med"/>
-                    </a:lnL>
-                    <a:lnR w="6350" cap="flat" cmpd="sng" algn="ctr">
-                      <a:solidFill>
-                        <a:srgbClr val="E3E8E9"/>
-                      </a:solidFill>
-                      <a:prstDash val="solid"/>
-                      <a:round/>
-                      <a:headEnd type="none" w="med" len="med"/>
-                      <a:tailEnd type="none" w="med" len="med"/>
-                    </a:lnR>
-                    <a:lnT w="6350" cap="flat" cmpd="sng" algn="ctr">
-                      <a:solidFill>
-                        <a:srgbClr val="E3E8E9"/>
-                      </a:solidFill>
-                      <a:prstDash val="solid"/>
-                      <a:round/>
-                      <a:headEnd type="none" w="med" len="med"/>
-                      <a:tailEnd type="none" w="med" len="med"/>
-                    </a:lnT>
-                    <a:lnB w="6350" cap="flat" cmpd="sng" algn="ctr">
-                      <a:solidFill>
-                        <a:srgbClr val="E3E8E9"/>
-                      </a:solidFill>
-                      <a:prstDash val="solid"/>
-                      <a:round/>
-                      <a:headEnd type="none" w="med" len="med"/>
-                      <a:tailEnd type="none" w="med" len="med"/>
-                    </a:lnB>
-                    <a:solidFill>
-                      <a:srgbClr val="FFFFFF"/>
-                    </a:solidFill>
-                  </a:tcPr>
-                </a:tc>
-                <a:tc>
-                  <a:txBody>
-                    <a:bodyPr/>
-                    <a:lstStyle/>
-                    <a:p>
-                      <a:pPr indent="0" marL="0">
-                        <a:buNone/>
-                      </a:pPr>
-                      <a:r>
-                        <a:rPr lang="en-US" sz="950" dirty="0">
-                          <a:solidFill>
-                            <a:srgbClr val="5B6B73"/>
-                          </a:solidFill>
-                          <a:latin typeface="Calibri" pitchFamily="34" charset="0"/>
-                          <a:ea typeface="Calibri" pitchFamily="34" charset="-122"/>
-                          <a:cs typeface="Calibri" pitchFamily="34" charset="-120"/>
-                        </a:rPr>
-                        <a:t>Bem Estar/Segurança</a:t>
-                      </a:r>
-                      <a:endParaRPr lang="en-US" sz="950" dirty="0">
-                        <a:latin typeface="Calibri" charset="0"/>
-                        <a:ea typeface="Calibri" charset="0"/>
-                        <a:cs typeface="Calibri" charset="0"/>
-                      </a:endParaRPr>
-                    </a:p>
-                  </a:txBody>
-                  <a:tcPr marL="91440" marR="91440" marT="45720" marB="45720" anchor="ctr">
-                    <a:lnL w="6350" cap="flat" cmpd="sng" algn="ctr">
-                      <a:solidFill>
-                        <a:srgbClr val="E3E8E9"/>
-                      </a:solidFill>
-                      <a:prstDash val="solid"/>
-                      <a:round/>
-                      <a:headEnd type="none" w="med" len="med"/>
-                      <a:tailEnd type="none" w="med" len="med"/>
-                    </a:lnL>
-                    <a:lnR w="6350" cap="flat" cmpd="sng" algn="ctr">
-                      <a:solidFill>
-                        <a:srgbClr val="E3E8E9"/>
-                      </a:solidFill>
-                      <a:prstDash val="solid"/>
-                      <a:round/>
-                      <a:headEnd type="none" w="med" len="med"/>
-                      <a:tailEnd type="none" w="med" len="med"/>
-                    </a:lnR>
-                    <a:lnT w="6350" cap="flat" cmpd="sng" algn="ctr">
-                      <a:solidFill>
-                        <a:srgbClr val="E3E8E9"/>
-                      </a:solidFill>
-                      <a:prstDash val="solid"/>
-                      <a:round/>
-                      <a:headEnd type="none" w="med" len="med"/>
-                      <a:tailEnd type="none" w="med" len="med"/>
-                    </a:lnT>
-                    <a:lnB w="6350" cap="flat" cmpd="sng" algn="ctr">
-                      <a:solidFill>
-                        <a:srgbClr val="E3E8E9"/>
-                      </a:solidFill>
-                      <a:prstDash val="solid"/>
-                      <a:round/>
-                      <a:headEnd type="none" w="med" len="med"/>
-                      <a:tailEnd type="none" w="med" len="med"/>
-                    </a:lnB>
-                    <a:solidFill>
-                      <a:srgbClr val="FFFFFF"/>
-                    </a:solidFill>
-                  </a:tcPr>
-                </a:tc>
-                <a:tc>
-                  <a:txBody>
-                    <a:bodyPr/>
-                    <a:lstStyle/>
-                    <a:p>
-                      <a:pPr indent="0" marL="0">
-                        <a:buNone/>
-                      </a:pPr>
-                      <a:r>
-                        <a:rPr lang="en-US" sz="950" dirty="0">
-                          <a:solidFill>
-                            <a:srgbClr val="5B6B73"/>
-                          </a:solidFill>
-                          <a:latin typeface="Calibri" pitchFamily="34" charset="0"/>
-                          <a:ea typeface="Calibri" pitchFamily="34" charset="-122"/>
-                          <a:cs typeface="Calibri" pitchFamily="34" charset="-120"/>
-                        </a:rPr>
-                        <a:t>Saúde e Segurança Ocupacional</a:t>
-                      </a:r>
-                      <a:endParaRPr lang="en-US" sz="950" dirty="0">
-                        <a:latin typeface="Calibri" charset="0"/>
-                        <a:ea typeface="Calibri" charset="0"/>
-                        <a:cs typeface="Calibri" charset="0"/>
-                      </a:endParaRPr>
-                    </a:p>
-                  </a:txBody>
-                  <a:tcPr marL="91440" marR="91440" marT="45720" marB="45720" anchor="ctr">
-                    <a:lnL w="6350" cap="flat" cmpd="sng" algn="ctr">
-                      <a:solidFill>
-                        <a:srgbClr val="E3E8E9"/>
-                      </a:solidFill>
-                      <a:prstDash val="solid"/>
-                      <a:round/>
-                      <a:headEnd type="none" w="med" len="med"/>
-                      <a:tailEnd type="none" w="med" len="med"/>
-                    </a:lnL>
-                    <a:lnR w="6350" cap="flat" cmpd="sng" algn="ctr">
-                      <a:solidFill>
-                        <a:srgbClr val="E3E8E9"/>
-                      </a:solidFill>
-                      <a:prstDash val="solid"/>
-                      <a:round/>
-                      <a:headEnd type="none" w="med" len="med"/>
-                      <a:tailEnd type="none" w="med" len="med"/>
-                    </a:lnR>
-                    <a:lnT w="6350" cap="flat" cmpd="sng" algn="ctr">
-                      <a:solidFill>
-                        <a:srgbClr val="E3E8E9"/>
-                      </a:solidFill>
-                      <a:prstDash val="solid"/>
-                      <a:round/>
-                      <a:headEnd type="none" w="med" len="med"/>
-                      <a:tailEnd type="none" w="med" len="med"/>
-                    </a:lnT>
-                    <a:lnB w="6350" cap="flat" cmpd="sng" algn="ctr">
-                      <a:solidFill>
-                        <a:srgbClr val="E3E8E9"/>
-                      </a:solidFill>
-                      <a:prstDash val="solid"/>
-                      <a:round/>
-                      <a:headEnd type="none" w="med" len="med"/>
-                      <a:tailEnd type="none" w="med" len="med"/>
-                    </a:lnB>
-                    <a:solidFill>
-                      <a:srgbClr val="FFFFFF"/>
-                    </a:solidFill>
-                  </a:tcPr>
-                </a:tc>
-                <a:tc>
-                  <a:txBody>
-                    <a:bodyPr/>
-                    <a:lstStyle/>
-                    <a:p>
-                      <a:pPr algn="r" indent="0" marL="0">
-                        <a:buNone/>
-                      </a:pPr>
-                      <a:r>
-                        <a:rPr lang="en-US" sz="1000" b="1" dirty="0">
-                          <a:solidFill>
-                            <a:srgbClr val="0B2A3D"/>
-                          </a:solidFill>
-                          <a:latin typeface="Calibri" pitchFamily="34" charset="0"/>
-                          <a:ea typeface="Calibri" pitchFamily="34" charset="-122"/>
-                          <a:cs typeface="Calibri" pitchFamily="34" charset="-120"/>
-                        </a:rPr>
-                        <a:t>US$ 150,0 mil</a:t>
-                      </a:r>
-                      <a:endParaRPr lang="en-US" sz="1000" dirty="0">
-                        <a:latin typeface="Calibri" charset="0"/>
-                        <a:ea typeface="Calibri" charset="0"/>
-                        <a:cs typeface="Calibri" charset="0"/>
-                      </a:endParaRPr>
-                    </a:p>
-                  </a:txBody>
-                  <a:tcPr marL="91440" marR="91440" marT="45720" marB="45720" anchor="ctr">
-                    <a:lnL w="6350" cap="flat" cmpd="sng" algn="ctr">
-                      <a:solidFill>
-                        <a:srgbClr val="E3E8E9"/>
-                      </a:solidFill>
-                      <a:prstDash val="solid"/>
-                      <a:round/>
-                      <a:headEnd type="none" w="med" len="med"/>
-                      <a:tailEnd type="none" w="med" len="med"/>
-                    </a:lnL>
-                    <a:lnR w="6350" cap="flat" cmpd="sng" algn="ctr">
-                      <a:solidFill>
-                        <a:srgbClr val="E3E8E9"/>
-                      </a:solidFill>
-                      <a:prstDash val="solid"/>
-                      <a:round/>
-                      <a:headEnd type="none" w="med" len="med"/>
-                      <a:tailEnd type="none" w="med" len="med"/>
-                    </a:lnR>
-                    <a:lnT w="6350" cap="flat" cmpd="sng" algn="ctr">
-                      <a:solidFill>
-                        <a:srgbClr val="E3E8E9"/>
-                      </a:solidFill>
-                      <a:prstDash val="solid"/>
-                      <a:round/>
-                      <a:headEnd type="none" w="med" len="med"/>
-                      <a:tailEnd type="none" w="med" len="med"/>
-                    </a:lnT>
-                    <a:lnB w="6350" cap="flat" cmpd="sng" algn="ctr">
-                      <a:solidFill>
-                        <a:srgbClr val="E3E8E9"/>
-                      </a:solidFill>
-                      <a:prstDash val="solid"/>
-                      <a:round/>
-                      <a:headEnd type="none" w="med" len="med"/>
-                      <a:tailEnd type="none" w="med" len="med"/>
-                    </a:lnB>
-                    <a:solidFill>
-                      <a:srgbClr val="FFFFFF"/>
-                    </a:solidFill>
-                  </a:tcPr>
-                </a:tc>
-              </a:tr>
-              <a:tr h="288036">
-                <a:tc>
-                  <a:txBody>
-                    <a:bodyPr/>
-                    <a:lstStyle/>
-                    <a:p>
-                      <a:pPr indent="0" marL="0">
-                        <a:buNone/>
-                      </a:pPr>
-                      <a:r>
-                        <a:rPr lang="en-US" sz="1000" dirty="0">
-                          <a:solidFill>
-                            <a:srgbClr val="1C2B33"/>
-                          </a:solidFill>
-                          <a:latin typeface="Calibri" pitchFamily="34" charset="0"/>
-                          <a:ea typeface="Calibri" pitchFamily="34" charset="-122"/>
-                          <a:cs typeface="Calibri" pitchFamily="34" charset="-120"/>
-                        </a:rPr>
-                        <a:t>PÓS TA - NR13</a:t>
-                      </a:r>
-                      <a:endParaRPr lang="en-US" sz="1000" dirty="0">
-                        <a:latin typeface="Calibri" charset="0"/>
-                        <a:ea typeface="Calibri" charset="0"/>
-                        <a:cs typeface="Calibri" charset="0"/>
-                      </a:endParaRPr>
-                    </a:p>
-                  </a:txBody>
-                  <a:tcPr marL="91440" marR="91440" marT="45720" marB="45720" anchor="ctr">
-                    <a:lnL w="6350" cap="flat" cmpd="sng" algn="ctr">
-                      <a:solidFill>
-                        <a:srgbClr val="E3E8E9"/>
-                      </a:solidFill>
-                      <a:prstDash val="solid"/>
-                      <a:round/>
-                      <a:headEnd type="none" w="med" len="med"/>
-                      <a:tailEnd type="none" w="med" len="med"/>
-                    </a:lnL>
-                    <a:lnR w="6350" cap="flat" cmpd="sng" algn="ctr">
-                      <a:solidFill>
-                        <a:srgbClr val="E3E8E9"/>
-                      </a:solidFill>
-                      <a:prstDash val="solid"/>
-                      <a:round/>
-                      <a:headEnd type="none" w="med" len="med"/>
-                      <a:tailEnd type="none" w="med" len="med"/>
-                    </a:lnR>
-                    <a:lnT w="6350" cap="flat" cmpd="sng" algn="ctr">
-                      <a:solidFill>
-                        <a:srgbClr val="E3E8E9"/>
-                      </a:solidFill>
-                      <a:prstDash val="solid"/>
-                      <a:round/>
-                      <a:headEnd type="none" w="med" len="med"/>
-                      <a:tailEnd type="none" w="med" len="med"/>
-                    </a:lnT>
-                    <a:lnB w="6350" cap="flat" cmpd="sng" algn="ctr">
-                      <a:solidFill>
-                        <a:srgbClr val="E3E8E9"/>
-                      </a:solidFill>
-                      <a:prstDash val="solid"/>
-                      <a:round/>
-                      <a:headEnd type="none" w="med" len="med"/>
-                      <a:tailEnd type="none" w="med" len="med"/>
-                    </a:lnB>
-                    <a:solidFill>
-                      <a:srgbClr val="F0F4F5"/>
-                    </a:solidFill>
-                  </a:tcPr>
-                </a:tc>
-                <a:tc>
-                  <a:txBody>
-                    <a:bodyPr/>
-                    <a:lstStyle/>
-                    <a:p>
-                      <a:pPr indent="0" marL="0">
-                        <a:buNone/>
-                      </a:pPr>
-                      <a:r>
-                        <a:rPr lang="en-US" sz="950" dirty="0">
-                          <a:solidFill>
-                            <a:srgbClr val="5B6B73"/>
-                          </a:solidFill>
-                          <a:latin typeface="Calibri" pitchFamily="34" charset="0"/>
-                          <a:ea typeface="Calibri" pitchFamily="34" charset="-122"/>
-                          <a:cs typeface="Calibri" pitchFamily="34" charset="-120"/>
-                        </a:rPr>
-                        <a:t>Eficiência de Produção</a:t>
-                      </a:r>
-                      <a:endParaRPr lang="en-US" sz="950" dirty="0">
-                        <a:latin typeface="Calibri" charset="0"/>
-                        <a:ea typeface="Calibri" charset="0"/>
-                        <a:cs typeface="Calibri" charset="0"/>
-                      </a:endParaRPr>
-                    </a:p>
-                  </a:txBody>
-                  <a:tcPr marL="91440" marR="91440" marT="45720" marB="45720" anchor="ctr">
-                    <a:lnL w="6350" cap="flat" cmpd="sng" algn="ctr">
-                      <a:solidFill>
-                        <a:srgbClr val="E3E8E9"/>
-                      </a:solidFill>
-                      <a:prstDash val="solid"/>
-                      <a:round/>
-                      <a:headEnd type="none" w="med" len="med"/>
-                      <a:tailEnd type="none" w="med" len="med"/>
-                    </a:lnL>
-                    <a:lnR w="6350" cap="flat" cmpd="sng" algn="ctr">
-                      <a:solidFill>
-                        <a:srgbClr val="E3E8E9"/>
-                      </a:solidFill>
-                      <a:prstDash val="solid"/>
-                      <a:round/>
-                      <a:headEnd type="none" w="med" len="med"/>
-                      <a:tailEnd type="none" w="med" len="med"/>
-                    </a:lnR>
-                    <a:lnT w="6350" cap="flat" cmpd="sng" algn="ctr">
-                      <a:solidFill>
-                        <a:srgbClr val="E3E8E9"/>
-                      </a:solidFill>
-                      <a:prstDash val="solid"/>
-                      <a:round/>
-                      <a:headEnd type="none" w="med" len="med"/>
-                      <a:tailEnd type="none" w="med" len="med"/>
-                    </a:lnT>
-                    <a:lnB w="6350" cap="flat" cmpd="sng" algn="ctr">
-                      <a:solidFill>
-                        <a:srgbClr val="E3E8E9"/>
-                      </a:solidFill>
-                      <a:prstDash val="solid"/>
-                      <a:round/>
-                      <a:headEnd type="none" w="med" len="med"/>
-                      <a:tailEnd type="none" w="med" len="med"/>
-                    </a:lnB>
-                    <a:solidFill>
-                      <a:srgbClr val="F0F4F5"/>
-                    </a:solidFill>
-                  </a:tcPr>
-                </a:tc>
-                <a:tc>
-                  <a:txBody>
-                    <a:bodyPr/>
-                    <a:lstStyle/>
-                    <a:p>
-                      <a:pPr indent="0" marL="0">
-                        <a:buNone/>
-                      </a:pPr>
-                      <a:r>
-                        <a:rPr lang="en-US" sz="950" dirty="0">
-                          <a:solidFill>
-                            <a:srgbClr val="5B6B73"/>
-                          </a:solidFill>
-                          <a:latin typeface="Calibri" pitchFamily="34" charset="0"/>
-                          <a:ea typeface="Calibri" pitchFamily="34" charset="-122"/>
-                          <a:cs typeface="Calibri" pitchFamily="34" charset="-120"/>
-                        </a:rPr>
-                        <a:t>TA - Parada Programada</a:t>
-                      </a:r>
-                      <a:endParaRPr lang="en-US" sz="950" dirty="0">
-                        <a:latin typeface="Calibri" charset="0"/>
-                        <a:ea typeface="Calibri" charset="0"/>
-                        <a:cs typeface="Calibri" charset="0"/>
-                      </a:endParaRPr>
-                    </a:p>
-                  </a:txBody>
-                  <a:tcPr marL="91440" marR="91440" marT="45720" marB="45720" anchor="ctr">
-                    <a:lnL w="6350" cap="flat" cmpd="sng" algn="ctr">
-                      <a:solidFill>
-                        <a:srgbClr val="E3E8E9"/>
-                      </a:solidFill>
-                      <a:prstDash val="solid"/>
-                      <a:round/>
-                      <a:headEnd type="none" w="med" len="med"/>
-                      <a:tailEnd type="none" w="med" len="med"/>
-                    </a:lnL>
-                    <a:lnR w="6350" cap="flat" cmpd="sng" algn="ctr">
-                      <a:solidFill>
-                        <a:srgbClr val="E3E8E9"/>
-                      </a:solidFill>
-                      <a:prstDash val="solid"/>
-                      <a:round/>
-                      <a:headEnd type="none" w="med" len="med"/>
-                      <a:tailEnd type="none" w="med" len="med"/>
-                    </a:lnR>
-                    <a:lnT w="6350" cap="flat" cmpd="sng" algn="ctr">
-                      <a:solidFill>
-                        <a:srgbClr val="E3E8E9"/>
-                      </a:solidFill>
-                      <a:prstDash val="solid"/>
-                      <a:round/>
-                      <a:headEnd type="none" w="med" len="med"/>
-                      <a:tailEnd type="none" w="med" len="med"/>
-                    </a:lnT>
-                    <a:lnB w="6350" cap="flat" cmpd="sng" algn="ctr">
-                      <a:solidFill>
-                        <a:srgbClr val="E3E8E9"/>
-                      </a:solidFill>
-                      <a:prstDash val="solid"/>
-                      <a:round/>
-                      <a:headEnd type="none" w="med" len="med"/>
-                      <a:tailEnd type="none" w="med" len="med"/>
-                    </a:lnB>
-                    <a:solidFill>
-                      <a:srgbClr val="F0F4F5"/>
-                    </a:solidFill>
-                  </a:tcPr>
-                </a:tc>
-                <a:tc>
-                  <a:txBody>
-                    <a:bodyPr/>
-                    <a:lstStyle/>
-                    <a:p>
-                      <a:pPr algn="r" indent="0" marL="0">
-                        <a:buNone/>
-                      </a:pPr>
-                      <a:r>
-                        <a:rPr lang="en-US" sz="1000" b="1" dirty="0">
-                          <a:solidFill>
-                            <a:srgbClr val="0B2A3D"/>
-                          </a:solidFill>
-                          <a:latin typeface="Calibri" pitchFamily="34" charset="0"/>
-                          <a:ea typeface="Calibri" pitchFamily="34" charset="-122"/>
-                          <a:cs typeface="Calibri" pitchFamily="34" charset="-120"/>
-                        </a:rPr>
-                        <a:t>US$ 135,6 mil</a:t>
-                      </a:r>
-                      <a:endParaRPr lang="en-US" sz="1000" dirty="0">
-                        <a:latin typeface="Calibri" charset="0"/>
-                        <a:ea typeface="Calibri" charset="0"/>
-                        <a:cs typeface="Calibri" charset="0"/>
-                      </a:endParaRPr>
-                    </a:p>
-                  </a:txBody>
-                  <a:tcPr marL="91440" marR="91440" marT="45720" marB="45720" anchor="ctr">
-                    <a:lnL w="6350" cap="flat" cmpd="sng" algn="ctr">
-                      <a:solidFill>
-                        <a:srgbClr val="E3E8E9"/>
-                      </a:solidFill>
-                      <a:prstDash val="solid"/>
-                      <a:round/>
-                      <a:headEnd type="none" w="med" len="med"/>
-                      <a:tailEnd type="none" w="med" len="med"/>
-                    </a:lnL>
-                    <a:lnR w="6350" cap="flat" cmpd="sng" algn="ctr">
-                      <a:solidFill>
-                        <a:srgbClr val="E3E8E9"/>
-                      </a:solidFill>
-                      <a:prstDash val="solid"/>
-                      <a:round/>
-                      <a:headEnd type="none" w="med" len="med"/>
-                      <a:tailEnd type="none" w="med" len="med"/>
-                    </a:lnR>
-                    <a:lnT w="6350" cap="flat" cmpd="sng" algn="ctr">
-                      <a:solidFill>
-                        <a:srgbClr val="E3E8E9"/>
-                      </a:solidFill>
-                      <a:prstDash val="solid"/>
-                      <a:round/>
-                      <a:headEnd type="none" w="med" len="med"/>
-                      <a:tailEnd type="none" w="med" len="med"/>
-                    </a:lnT>
-                    <a:lnB w="6350" cap="flat" cmpd="sng" algn="ctr">
-                      <a:solidFill>
-                        <a:srgbClr val="E3E8E9"/>
-                      </a:solidFill>
-                      <a:prstDash val="solid"/>
-                      <a:round/>
-                      <a:headEnd type="none" w="med" len="med"/>
-                      <a:tailEnd type="none" w="med" len="med"/>
-                    </a:lnB>
-                    <a:solidFill>
-                      <a:srgbClr val="F0F4F5"/>
-                    </a:solidFill>
-                  </a:tcPr>
-                </a:tc>
-              </a:tr>
-              <a:tr h="288036">
-                <a:tc>
-                  <a:txBody>
-                    <a:bodyPr/>
-                    <a:lstStyle/>
-                    <a:p>
-                      <a:pPr indent="0" marL="0">
-                        <a:buNone/>
-                      </a:pPr>
-                      <a:r>
-                        <a:rPr lang="en-US" sz="1000" dirty="0">
-                          <a:solidFill>
-                            <a:srgbClr val="1C2B33"/>
-                          </a:solidFill>
-                          <a:latin typeface="Calibri" pitchFamily="34" charset="0"/>
-                          <a:ea typeface="Calibri" pitchFamily="34" charset="-122"/>
-                          <a:cs typeface="Calibri" pitchFamily="34" charset="-120"/>
-                        </a:rPr>
-                        <a:t>PRÉ TA - Caldeiraria</a:t>
+                        <a:t>TA - Desmobilização</a:t>
                       </a:r>
                       <a:endParaRPr lang="en-US" sz="1000" dirty="0">
                         <a:latin typeface="Calibri" charset="0"/>
@@ -14226,7 +14872,7 @@
                           <a:ea typeface="Calibri" pitchFamily="34" charset="-122"/>
                           <a:cs typeface="Calibri" pitchFamily="34" charset="-120"/>
                         </a:rPr>
-                        <a:t>US$ 132,9 mil</a:t>
+                        <a:t>US$ 162,1 mil</a:t>
                       </a:r>
                       <a:endParaRPr lang="en-US" sz="1000" dirty="0">
                         <a:latin typeface="Calibri" charset="0"/>
@@ -14296,7 +14942,7 @@
                           <a:ea typeface="Calibri" pitchFamily="34" charset="-122"/>
                           <a:cs typeface="Calibri" pitchFamily="34" charset="-120"/>
                         </a:rPr>
-                        <a:t>ESTUDO DE ENGENHARIA</a:t>
+                        <a:t>Implantação do projeto 'Muster Digital'</a:t>
                       </a:r>
                       <a:endParaRPr lang="en-US" sz="1000" dirty="0">
                         <a:latin typeface="Calibri" charset="0"/>
@@ -14364,7 +15010,7 @@
                           <a:ea typeface="Calibri" pitchFamily="34" charset="-122"/>
                           <a:cs typeface="Calibri" pitchFamily="34" charset="-120"/>
                         </a:rPr>
-                        <a:t>Eficiência de Produção</a:t>
+                        <a:t>Bem Estar/Segurança</a:t>
                       </a:r>
                       <a:endParaRPr lang="en-US" sz="950" dirty="0">
                         <a:latin typeface="Calibri" charset="0"/>
@@ -14432,7 +15078,7 @@
                           <a:ea typeface="Calibri" pitchFamily="34" charset="-122"/>
                           <a:cs typeface="Calibri" pitchFamily="34" charset="-120"/>
                         </a:rPr>
-                        <a:t>Projetos</a:t>
+                        <a:t>Saúde e Segurança Ocupacional</a:t>
                       </a:r>
                       <a:endParaRPr lang="en-US" sz="950" dirty="0">
                         <a:latin typeface="Calibri" charset="0"/>
@@ -14500,555 +15146,7 @@
                           <a:ea typeface="Calibri" pitchFamily="34" charset="-122"/>
                           <a:cs typeface="Calibri" pitchFamily="34" charset="-120"/>
                         </a:rPr>
-                        <a:t>US$ 120,0 mil</a:t>
-                      </a:r>
-                      <a:endParaRPr lang="en-US" sz="1000" dirty="0">
-                        <a:latin typeface="Calibri" charset="0"/>
-                        <a:ea typeface="Calibri" charset="0"/>
-                        <a:cs typeface="Calibri" charset="0"/>
-                      </a:endParaRPr>
-                    </a:p>
-                  </a:txBody>
-                  <a:tcPr marL="91440" marR="91440" marT="45720" marB="45720" anchor="ctr">
-                    <a:lnL w="6350" cap="flat" cmpd="sng" algn="ctr">
-                      <a:solidFill>
-                        <a:srgbClr val="E3E8E9"/>
-                      </a:solidFill>
-                      <a:prstDash val="solid"/>
-                      <a:round/>
-                      <a:headEnd type="none" w="med" len="med"/>
-                      <a:tailEnd type="none" w="med" len="med"/>
-                    </a:lnL>
-                    <a:lnR w="6350" cap="flat" cmpd="sng" algn="ctr">
-                      <a:solidFill>
-                        <a:srgbClr val="E3E8E9"/>
-                      </a:solidFill>
-                      <a:prstDash val="solid"/>
-                      <a:round/>
-                      <a:headEnd type="none" w="med" len="med"/>
-                      <a:tailEnd type="none" w="med" len="med"/>
-                    </a:lnR>
-                    <a:lnT w="6350" cap="flat" cmpd="sng" algn="ctr">
-                      <a:solidFill>
-                        <a:srgbClr val="E3E8E9"/>
-                      </a:solidFill>
-                      <a:prstDash val="solid"/>
-                      <a:round/>
-                      <a:headEnd type="none" w="med" len="med"/>
-                      <a:tailEnd type="none" w="med" len="med"/>
-                    </a:lnT>
-                    <a:lnB w="6350" cap="flat" cmpd="sng" algn="ctr">
-                      <a:solidFill>
-                        <a:srgbClr val="E3E8E9"/>
-                      </a:solidFill>
-                      <a:prstDash val="solid"/>
-                      <a:round/>
-                      <a:headEnd type="none" w="med" len="med"/>
-                      <a:tailEnd type="none" w="med" len="med"/>
-                    </a:lnB>
-                    <a:solidFill>
-                      <a:srgbClr val="F0F4F5"/>
-                    </a:solidFill>
-                  </a:tcPr>
-                </a:tc>
-              </a:tr>
-              <a:tr h="288036">
-                <a:tc>
-                  <a:txBody>
-                    <a:bodyPr/>
-                    <a:lstStyle/>
-                    <a:p>
-                      <a:pPr indent="0" marL="0">
-                        <a:buNone/>
-                      </a:pPr>
-                      <a:r>
-                        <a:rPr lang="en-US" sz="1000" dirty="0">
-                          <a:solidFill>
-                            <a:srgbClr val="1C2B33"/>
-                          </a:solidFill>
-                          <a:latin typeface="Calibri" pitchFamily="34" charset="0"/>
-                          <a:ea typeface="Calibri" pitchFamily="34" charset="-122"/>
-                          <a:cs typeface="Calibri" pitchFamily="34" charset="-120"/>
-                        </a:rPr>
-                        <a:t>PRÉ TA - NR13</a:t>
-                      </a:r>
-                      <a:endParaRPr lang="en-US" sz="1000" dirty="0">
-                        <a:latin typeface="Calibri" charset="0"/>
-                        <a:ea typeface="Calibri" charset="0"/>
-                        <a:cs typeface="Calibri" charset="0"/>
-                      </a:endParaRPr>
-                    </a:p>
-                  </a:txBody>
-                  <a:tcPr marL="91440" marR="91440" marT="45720" marB="45720" anchor="ctr">
-                    <a:lnL w="6350" cap="flat" cmpd="sng" algn="ctr">
-                      <a:solidFill>
-                        <a:srgbClr val="E3E8E9"/>
-                      </a:solidFill>
-                      <a:prstDash val="solid"/>
-                      <a:round/>
-                      <a:headEnd type="none" w="med" len="med"/>
-                      <a:tailEnd type="none" w="med" len="med"/>
-                    </a:lnL>
-                    <a:lnR w="6350" cap="flat" cmpd="sng" algn="ctr">
-                      <a:solidFill>
-                        <a:srgbClr val="E3E8E9"/>
-                      </a:solidFill>
-                      <a:prstDash val="solid"/>
-                      <a:round/>
-                      <a:headEnd type="none" w="med" len="med"/>
-                      <a:tailEnd type="none" w="med" len="med"/>
-                    </a:lnR>
-                    <a:lnT w="6350" cap="flat" cmpd="sng" algn="ctr">
-                      <a:solidFill>
-                        <a:srgbClr val="E3E8E9"/>
-                      </a:solidFill>
-                      <a:prstDash val="solid"/>
-                      <a:round/>
-                      <a:headEnd type="none" w="med" len="med"/>
-                      <a:tailEnd type="none" w="med" len="med"/>
-                    </a:lnT>
-                    <a:lnB w="6350" cap="flat" cmpd="sng" algn="ctr">
-                      <a:solidFill>
-                        <a:srgbClr val="E3E8E9"/>
-                      </a:solidFill>
-                      <a:prstDash val="solid"/>
-                      <a:round/>
-                      <a:headEnd type="none" w="med" len="med"/>
-                      <a:tailEnd type="none" w="med" len="med"/>
-                    </a:lnB>
-                    <a:solidFill>
-                      <a:srgbClr val="FFFFFF"/>
-                    </a:solidFill>
-                  </a:tcPr>
-                </a:tc>
-                <a:tc>
-                  <a:txBody>
-                    <a:bodyPr/>
-                    <a:lstStyle/>
-                    <a:p>
-                      <a:pPr indent="0" marL="0">
-                        <a:buNone/>
-                      </a:pPr>
-                      <a:r>
-                        <a:rPr lang="en-US" sz="950" dirty="0">
-                          <a:solidFill>
-                            <a:srgbClr val="5B6B73"/>
-                          </a:solidFill>
-                          <a:latin typeface="Calibri" pitchFamily="34" charset="0"/>
-                          <a:ea typeface="Calibri" pitchFamily="34" charset="-122"/>
-                          <a:cs typeface="Calibri" pitchFamily="34" charset="-120"/>
-                        </a:rPr>
-                        <a:t>Eficiência de Produção</a:t>
-                      </a:r>
-                      <a:endParaRPr lang="en-US" sz="950" dirty="0">
-                        <a:latin typeface="Calibri" charset="0"/>
-                        <a:ea typeface="Calibri" charset="0"/>
-                        <a:cs typeface="Calibri" charset="0"/>
-                      </a:endParaRPr>
-                    </a:p>
-                  </a:txBody>
-                  <a:tcPr marL="91440" marR="91440" marT="45720" marB="45720" anchor="ctr">
-                    <a:lnL w="6350" cap="flat" cmpd="sng" algn="ctr">
-                      <a:solidFill>
-                        <a:srgbClr val="E3E8E9"/>
-                      </a:solidFill>
-                      <a:prstDash val="solid"/>
-                      <a:round/>
-                      <a:headEnd type="none" w="med" len="med"/>
-                      <a:tailEnd type="none" w="med" len="med"/>
-                    </a:lnL>
-                    <a:lnR w="6350" cap="flat" cmpd="sng" algn="ctr">
-                      <a:solidFill>
-                        <a:srgbClr val="E3E8E9"/>
-                      </a:solidFill>
-                      <a:prstDash val="solid"/>
-                      <a:round/>
-                      <a:headEnd type="none" w="med" len="med"/>
-                      <a:tailEnd type="none" w="med" len="med"/>
-                    </a:lnR>
-                    <a:lnT w="6350" cap="flat" cmpd="sng" algn="ctr">
-                      <a:solidFill>
-                        <a:srgbClr val="E3E8E9"/>
-                      </a:solidFill>
-                      <a:prstDash val="solid"/>
-                      <a:round/>
-                      <a:headEnd type="none" w="med" len="med"/>
-                      <a:tailEnd type="none" w="med" len="med"/>
-                    </a:lnT>
-                    <a:lnB w="6350" cap="flat" cmpd="sng" algn="ctr">
-                      <a:solidFill>
-                        <a:srgbClr val="E3E8E9"/>
-                      </a:solidFill>
-                      <a:prstDash val="solid"/>
-                      <a:round/>
-                      <a:headEnd type="none" w="med" len="med"/>
-                      <a:tailEnd type="none" w="med" len="med"/>
-                    </a:lnB>
-                    <a:solidFill>
-                      <a:srgbClr val="FFFFFF"/>
-                    </a:solidFill>
-                  </a:tcPr>
-                </a:tc>
-                <a:tc>
-                  <a:txBody>
-                    <a:bodyPr/>
-                    <a:lstStyle/>
-                    <a:p>
-                      <a:pPr indent="0" marL="0">
-                        <a:buNone/>
-                      </a:pPr>
-                      <a:r>
-                        <a:rPr lang="en-US" sz="950" dirty="0">
-                          <a:solidFill>
-                            <a:srgbClr val="5B6B73"/>
-                          </a:solidFill>
-                          <a:latin typeface="Calibri" pitchFamily="34" charset="0"/>
-                          <a:ea typeface="Calibri" pitchFamily="34" charset="-122"/>
-                          <a:cs typeface="Calibri" pitchFamily="34" charset="-120"/>
-                        </a:rPr>
-                        <a:t>TA - Parada Programada</a:t>
-                      </a:r>
-                      <a:endParaRPr lang="en-US" sz="950" dirty="0">
-                        <a:latin typeface="Calibri" charset="0"/>
-                        <a:ea typeface="Calibri" charset="0"/>
-                        <a:cs typeface="Calibri" charset="0"/>
-                      </a:endParaRPr>
-                    </a:p>
-                  </a:txBody>
-                  <a:tcPr marL="91440" marR="91440" marT="45720" marB="45720" anchor="ctr">
-                    <a:lnL w="6350" cap="flat" cmpd="sng" algn="ctr">
-                      <a:solidFill>
-                        <a:srgbClr val="E3E8E9"/>
-                      </a:solidFill>
-                      <a:prstDash val="solid"/>
-                      <a:round/>
-                      <a:headEnd type="none" w="med" len="med"/>
-                      <a:tailEnd type="none" w="med" len="med"/>
-                    </a:lnL>
-                    <a:lnR w="6350" cap="flat" cmpd="sng" algn="ctr">
-                      <a:solidFill>
-                        <a:srgbClr val="E3E8E9"/>
-                      </a:solidFill>
-                      <a:prstDash val="solid"/>
-                      <a:round/>
-                      <a:headEnd type="none" w="med" len="med"/>
-                      <a:tailEnd type="none" w="med" len="med"/>
-                    </a:lnR>
-                    <a:lnT w="6350" cap="flat" cmpd="sng" algn="ctr">
-                      <a:solidFill>
-                        <a:srgbClr val="E3E8E9"/>
-                      </a:solidFill>
-                      <a:prstDash val="solid"/>
-                      <a:round/>
-                      <a:headEnd type="none" w="med" len="med"/>
-                      <a:tailEnd type="none" w="med" len="med"/>
-                    </a:lnT>
-                    <a:lnB w="6350" cap="flat" cmpd="sng" algn="ctr">
-                      <a:solidFill>
-                        <a:srgbClr val="E3E8E9"/>
-                      </a:solidFill>
-                      <a:prstDash val="solid"/>
-                      <a:round/>
-                      <a:headEnd type="none" w="med" len="med"/>
-                      <a:tailEnd type="none" w="med" len="med"/>
-                    </a:lnB>
-                    <a:solidFill>
-                      <a:srgbClr val="FFFFFF"/>
-                    </a:solidFill>
-                  </a:tcPr>
-                </a:tc>
-                <a:tc>
-                  <a:txBody>
-                    <a:bodyPr/>
-                    <a:lstStyle/>
-                    <a:p>
-                      <a:pPr algn="r" indent="0" marL="0">
-                        <a:buNone/>
-                      </a:pPr>
-                      <a:r>
-                        <a:rPr lang="en-US" sz="1000" b="1" dirty="0">
-                          <a:solidFill>
-                            <a:srgbClr val="0B2A3D"/>
-                          </a:solidFill>
-                          <a:latin typeface="Calibri" pitchFamily="34" charset="0"/>
-                          <a:ea typeface="Calibri" pitchFamily="34" charset="-122"/>
-                          <a:cs typeface="Calibri" pitchFamily="34" charset="-120"/>
-                        </a:rPr>
-                        <a:t>US$ 65,1 mil</a:t>
-                      </a:r>
-                      <a:endParaRPr lang="en-US" sz="1000" dirty="0">
-                        <a:latin typeface="Calibri" charset="0"/>
-                        <a:ea typeface="Calibri" charset="0"/>
-                        <a:cs typeface="Calibri" charset="0"/>
-                      </a:endParaRPr>
-                    </a:p>
-                  </a:txBody>
-                  <a:tcPr marL="91440" marR="91440" marT="45720" marB="45720" anchor="ctr">
-                    <a:lnL w="6350" cap="flat" cmpd="sng" algn="ctr">
-                      <a:solidFill>
-                        <a:srgbClr val="E3E8E9"/>
-                      </a:solidFill>
-                      <a:prstDash val="solid"/>
-                      <a:round/>
-                      <a:headEnd type="none" w="med" len="med"/>
-                      <a:tailEnd type="none" w="med" len="med"/>
-                    </a:lnL>
-                    <a:lnR w="6350" cap="flat" cmpd="sng" algn="ctr">
-                      <a:solidFill>
-                        <a:srgbClr val="E3E8E9"/>
-                      </a:solidFill>
-                      <a:prstDash val="solid"/>
-                      <a:round/>
-                      <a:headEnd type="none" w="med" len="med"/>
-                      <a:tailEnd type="none" w="med" len="med"/>
-                    </a:lnR>
-                    <a:lnT w="6350" cap="flat" cmpd="sng" algn="ctr">
-                      <a:solidFill>
-                        <a:srgbClr val="E3E8E9"/>
-                      </a:solidFill>
-                      <a:prstDash val="solid"/>
-                      <a:round/>
-                      <a:headEnd type="none" w="med" len="med"/>
-                      <a:tailEnd type="none" w="med" len="med"/>
-                    </a:lnT>
-                    <a:lnB w="6350" cap="flat" cmpd="sng" algn="ctr">
-                      <a:solidFill>
-                        <a:srgbClr val="E3E8E9"/>
-                      </a:solidFill>
-                      <a:prstDash val="solid"/>
-                      <a:round/>
-                      <a:headEnd type="none" w="med" len="med"/>
-                      <a:tailEnd type="none" w="med" len="med"/>
-                    </a:lnB>
-                    <a:solidFill>
-                      <a:srgbClr val="FFFFFF"/>
-                    </a:solidFill>
-                  </a:tcPr>
-                </a:tc>
-              </a:tr>
-              <a:tr h="288036">
-                <a:tc>
-                  <a:txBody>
-                    <a:bodyPr/>
-                    <a:lstStyle/>
-                    <a:p>
-                      <a:pPr indent="0" marL="0">
-                        <a:buNone/>
-                      </a:pPr>
-                      <a:r>
-                        <a:rPr lang="en-US" sz="1000" dirty="0">
-                          <a:solidFill>
-                            <a:srgbClr val="1C2B33"/>
-                          </a:solidFill>
-                          <a:latin typeface="Calibri" pitchFamily="34" charset="0"/>
-                          <a:ea typeface="Calibri" pitchFamily="34" charset="-122"/>
-                          <a:cs typeface="Calibri" pitchFamily="34" charset="-120"/>
-                        </a:rPr>
-                        <a:t>Obstrução Sistema de Águas Cinzas</a:t>
-                      </a:r>
-                      <a:endParaRPr lang="en-US" sz="1000" dirty="0">
-                        <a:latin typeface="Calibri" charset="0"/>
-                        <a:ea typeface="Calibri" charset="0"/>
-                        <a:cs typeface="Calibri" charset="0"/>
-                      </a:endParaRPr>
-                    </a:p>
-                  </a:txBody>
-                  <a:tcPr marL="91440" marR="91440" marT="45720" marB="45720" anchor="ctr">
-                    <a:lnL w="6350" cap="flat" cmpd="sng" algn="ctr">
-                      <a:solidFill>
-                        <a:srgbClr val="E3E8E9"/>
-                      </a:solidFill>
-                      <a:prstDash val="solid"/>
-                      <a:round/>
-                      <a:headEnd type="none" w="med" len="med"/>
-                      <a:tailEnd type="none" w="med" len="med"/>
-                    </a:lnL>
-                    <a:lnR w="6350" cap="flat" cmpd="sng" algn="ctr">
-                      <a:solidFill>
-                        <a:srgbClr val="E3E8E9"/>
-                      </a:solidFill>
-                      <a:prstDash val="solid"/>
-                      <a:round/>
-                      <a:headEnd type="none" w="med" len="med"/>
-                      <a:tailEnd type="none" w="med" len="med"/>
-                    </a:lnR>
-                    <a:lnT w="6350" cap="flat" cmpd="sng" algn="ctr">
-                      <a:solidFill>
-                        <a:srgbClr val="E3E8E9"/>
-                      </a:solidFill>
-                      <a:prstDash val="solid"/>
-                      <a:round/>
-                      <a:headEnd type="none" w="med" len="med"/>
-                      <a:tailEnd type="none" w="med" len="med"/>
-                    </a:lnT>
-                    <a:lnB w="6350" cap="flat" cmpd="sng" algn="ctr">
-                      <a:solidFill>
-                        <a:srgbClr val="E3E8E9"/>
-                      </a:solidFill>
-                      <a:prstDash val="solid"/>
-                      <a:round/>
-                      <a:headEnd type="none" w="med" len="med"/>
-                      <a:tailEnd type="none" w="med" len="med"/>
-                    </a:lnB>
-                    <a:solidFill>
-                      <a:srgbClr val="F0F4F5"/>
-                    </a:solidFill>
-                  </a:tcPr>
-                </a:tc>
-                <a:tc>
-                  <a:txBody>
-                    <a:bodyPr/>
-                    <a:lstStyle/>
-                    <a:p>
-                      <a:pPr indent="0" marL="0">
-                        <a:buNone/>
-                      </a:pPr>
-                      <a:r>
-                        <a:rPr lang="en-US" sz="950" dirty="0">
-                          <a:solidFill>
-                            <a:srgbClr val="5B6B73"/>
-                          </a:solidFill>
-                          <a:latin typeface="Calibri" pitchFamily="34" charset="0"/>
-                          <a:ea typeface="Calibri" pitchFamily="34" charset="-122"/>
-                          <a:cs typeface="Calibri" pitchFamily="34" charset="-120"/>
-                        </a:rPr>
-                        <a:t>Integridade e Regulatório</a:t>
-                      </a:r>
-                      <a:endParaRPr lang="en-US" sz="950" dirty="0">
-                        <a:latin typeface="Calibri" charset="0"/>
-                        <a:ea typeface="Calibri" charset="0"/>
-                        <a:cs typeface="Calibri" charset="0"/>
-                      </a:endParaRPr>
-                    </a:p>
-                  </a:txBody>
-                  <a:tcPr marL="91440" marR="91440" marT="45720" marB="45720" anchor="ctr">
-                    <a:lnL w="6350" cap="flat" cmpd="sng" algn="ctr">
-                      <a:solidFill>
-                        <a:srgbClr val="E3E8E9"/>
-                      </a:solidFill>
-                      <a:prstDash val="solid"/>
-                      <a:round/>
-                      <a:headEnd type="none" w="med" len="med"/>
-                      <a:tailEnd type="none" w="med" len="med"/>
-                    </a:lnL>
-                    <a:lnR w="6350" cap="flat" cmpd="sng" algn="ctr">
-                      <a:solidFill>
-                        <a:srgbClr val="E3E8E9"/>
-                      </a:solidFill>
-                      <a:prstDash val="solid"/>
-                      <a:round/>
-                      <a:headEnd type="none" w="med" len="med"/>
-                      <a:tailEnd type="none" w="med" len="med"/>
-                    </a:lnR>
-                    <a:lnT w="6350" cap="flat" cmpd="sng" algn="ctr">
-                      <a:solidFill>
-                        <a:srgbClr val="E3E8E9"/>
-                      </a:solidFill>
-                      <a:prstDash val="solid"/>
-                      <a:round/>
-                      <a:headEnd type="none" w="med" len="med"/>
-                      <a:tailEnd type="none" w="med" len="med"/>
-                    </a:lnT>
-                    <a:lnB w="6350" cap="flat" cmpd="sng" algn="ctr">
-                      <a:solidFill>
-                        <a:srgbClr val="E3E8E9"/>
-                      </a:solidFill>
-                      <a:prstDash val="solid"/>
-                      <a:round/>
-                      <a:headEnd type="none" w="med" len="med"/>
-                      <a:tailEnd type="none" w="med" len="med"/>
-                    </a:lnB>
-                    <a:solidFill>
-                      <a:srgbClr val="F0F4F5"/>
-                    </a:solidFill>
-                  </a:tcPr>
-                </a:tc>
-                <a:tc>
-                  <a:txBody>
-                    <a:bodyPr/>
-                    <a:lstStyle/>
-                    <a:p>
-                      <a:pPr indent="0" marL="0">
-                        <a:buNone/>
-                      </a:pPr>
-                      <a:r>
-                        <a:rPr lang="en-US" sz="950" dirty="0">
-                          <a:solidFill>
-                            <a:srgbClr val="5B6B73"/>
-                          </a:solidFill>
-                          <a:latin typeface="Calibri" pitchFamily="34" charset="0"/>
-                          <a:ea typeface="Calibri" pitchFamily="34" charset="-122"/>
-                          <a:cs typeface="Calibri" pitchFamily="34" charset="-120"/>
-                        </a:rPr>
-                        <a:t>Projetos</a:t>
-                      </a:r>
-                      <a:endParaRPr lang="en-US" sz="950" dirty="0">
-                        <a:latin typeface="Calibri" charset="0"/>
-                        <a:ea typeface="Calibri" charset="0"/>
-                        <a:cs typeface="Calibri" charset="0"/>
-                      </a:endParaRPr>
-                    </a:p>
-                  </a:txBody>
-                  <a:tcPr marL="91440" marR="91440" marT="45720" marB="45720" anchor="ctr">
-                    <a:lnL w="6350" cap="flat" cmpd="sng" algn="ctr">
-                      <a:solidFill>
-                        <a:srgbClr val="E3E8E9"/>
-                      </a:solidFill>
-                      <a:prstDash val="solid"/>
-                      <a:round/>
-                      <a:headEnd type="none" w="med" len="med"/>
-                      <a:tailEnd type="none" w="med" len="med"/>
-                    </a:lnL>
-                    <a:lnR w="6350" cap="flat" cmpd="sng" algn="ctr">
-                      <a:solidFill>
-                        <a:srgbClr val="E3E8E9"/>
-                      </a:solidFill>
-                      <a:prstDash val="solid"/>
-                      <a:round/>
-                      <a:headEnd type="none" w="med" len="med"/>
-                      <a:tailEnd type="none" w="med" len="med"/>
-                    </a:lnR>
-                    <a:lnT w="6350" cap="flat" cmpd="sng" algn="ctr">
-                      <a:solidFill>
-                        <a:srgbClr val="E3E8E9"/>
-                      </a:solidFill>
-                      <a:prstDash val="solid"/>
-                      <a:round/>
-                      <a:headEnd type="none" w="med" len="med"/>
-                      <a:tailEnd type="none" w="med" len="med"/>
-                    </a:lnT>
-                    <a:lnB w="6350" cap="flat" cmpd="sng" algn="ctr">
-                      <a:solidFill>
-                        <a:srgbClr val="E3E8E9"/>
-                      </a:solidFill>
-                      <a:prstDash val="solid"/>
-                      <a:round/>
-                      <a:headEnd type="none" w="med" len="med"/>
-                      <a:tailEnd type="none" w="med" len="med"/>
-                    </a:lnB>
-                    <a:solidFill>
-                      <a:srgbClr val="F0F4F5"/>
-                    </a:solidFill>
-                  </a:tcPr>
-                </a:tc>
-                <a:tc>
-                  <a:txBody>
-                    <a:bodyPr/>
-                    <a:lstStyle/>
-                    <a:p>
-                      <a:pPr algn="r" indent="0" marL="0">
-                        <a:buNone/>
-                      </a:pPr>
-                      <a:r>
-                        <a:rPr lang="en-US" sz="1000" b="1" dirty="0">
-                          <a:solidFill>
-                            <a:srgbClr val="0B2A3D"/>
-                          </a:solidFill>
-                          <a:latin typeface="Calibri" pitchFamily="34" charset="0"/>
-                          <a:ea typeface="Calibri" pitchFamily="34" charset="-122"/>
-                          <a:cs typeface="Calibri" pitchFamily="34" charset="-120"/>
-                        </a:rPr>
-                        <a:t>US$ 50,9 mil</a:t>
+                        <a:t>US$ 150,0 mil</a:t>
                       </a:r>
                       <a:endParaRPr lang="en-US" sz="1000" dirty="0">
                         <a:latin typeface="Calibri" charset="0"/>
@@ -15118,7 +15216,7 @@
                           <a:ea typeface="Calibri" pitchFamily="34" charset="-122"/>
                           <a:cs typeface="Calibri" pitchFamily="34" charset="-120"/>
                         </a:rPr>
-                        <a:t>Outros 15 escopos (itens de menor valor individual)</a:t>
+                        <a:t>Outros 26 escopos (itens de menor valor individual)</a:t>
                       </a:r>
                       <a:endParaRPr lang="en-US" sz="950" dirty="0">
                         <a:latin typeface="Calibri" charset="0"/>
@@ -15192,7 +15290,7 @@
                           <a:ea typeface="Calibri" pitchFamily="34" charset="-122"/>
                           <a:cs typeface="Calibri" pitchFamily="34" charset="-120"/>
                         </a:rPr>
-                        <a:t>US$ 228,0 mil</a:t>
+                        <a:t>US$ 1,0 mi</a:t>
                       </a:r>
                       <a:endParaRPr lang="en-US" sz="1000" dirty="0">
                         <a:latin typeface="Calibri" charset="0"/>

--- a/PRIO_Plano_Trabalho_CAPEX_2027_ClusterSul.pptx
+++ b/PRIO_Plano_Trabalho_CAPEX_2027_ClusterSul.pptx
@@ -216,10 +216,10 @@
                 <c:formatCode>General</c:formatCode>
                 <c:ptCount val="2"/>
                 <c:pt idx="0">
-                  <c:v>18.82</c:v>
+                  <c:v>16.04</c:v>
                 </c:pt>
                 <c:pt idx="1">
-                  <c:v>5.12</c:v>
+                  <c:v>5.91</c:v>
                 </c:pt>
               </c:numCache>
             </c:numRef>
@@ -2186,7 +2186,7 @@
                 <a:ea typeface="Cambria" pitchFamily="34" charset="-122"/>
                 <a:cs typeface="Cambria" pitchFamily="34" charset="-120"/>
               </a:rPr>
-              <a:t>US$ 23,9 mi</a:t>
+              <a:t>US$ 21,9 mi</a:t>
             </a:r>
             <a:endParaRPr lang="en-US" sz="2600" dirty="0"/>
           </a:p>
@@ -2325,7 +2325,7 @@
                 <a:ea typeface="Cambria" pitchFamily="34" charset="-122"/>
                 <a:cs typeface="Cambria" pitchFamily="34" charset="-120"/>
               </a:rPr>
-              <a:t>107</a:t>
+              <a:t>100</a:t>
             </a:r>
             <a:endParaRPr lang="en-US" sz="2600" dirty="0"/>
           </a:p>
@@ -2891,7 +2891,7 @@
                             <a:srgbClr val="1C2B33"/>
                           </a:solidFill>
                         </a:rPr>
-                        <a:t>US$ 18,8 mi</a:t>
+                        <a:t>US$ 16,0 mi</a:t>
                       </a:r>
                       <a:endParaRPr lang="en-US" sz="1050" dirty="0"/>
                     </a:p>
@@ -2952,7 +2952,7 @@
                             <a:srgbClr val="1C2B33"/>
                           </a:solidFill>
                         </a:rPr>
-                        <a:t>69</a:t>
+                        <a:t>63</a:t>
                       </a:r>
                       <a:endParaRPr lang="en-US" sz="1050" dirty="0"/>
                     </a:p>
@@ -3076,7 +3076,7 @@
                             <a:srgbClr val="1C2B33"/>
                           </a:solidFill>
                         </a:rPr>
-                        <a:t>US$ 5,1 mi</a:t>
+                        <a:t>US$ 5,9 mi</a:t>
                       </a:r>
                       <a:endParaRPr lang="en-US" sz="1050" dirty="0"/>
                     </a:p>
@@ -3137,7 +3137,7 @@
                             <a:srgbClr val="1C2B33"/>
                           </a:solidFill>
                         </a:rPr>
-                        <a:t>38</a:t>
+                        <a:t>37</a:t>
                       </a:r>
                       <a:endParaRPr lang="en-US" sz="1050" dirty="0"/>
                     </a:p>
@@ -3261,7 +3261,7 @@
                             <a:srgbClr val="0B2A3D"/>
                           </a:solidFill>
                         </a:rPr>
-                        <a:t>US$ 23,9 mi</a:t>
+                        <a:t>US$ 21,9 mi</a:t>
                       </a:r>
                       <a:endParaRPr lang="en-US" sz="1050" dirty="0"/>
                     </a:p>
@@ -3322,7 +3322,7 @@
                             <a:srgbClr val="0B2A3D"/>
                           </a:solidFill>
                         </a:rPr>
-                        <a:t>107</a:t>
+                        <a:t>100</a:t>
                       </a:r>
                       <a:endParaRPr lang="en-US" sz="1050" dirty="0"/>
                     </a:p>
@@ -3894,7 +3894,7 @@
                 <a:ea typeface="Cambria" pitchFamily="34" charset="-122"/>
                 <a:cs typeface="Cambria" pitchFamily="34" charset="-120"/>
               </a:rPr>
-              <a:t>US$ 18,8 mi</a:t>
+              <a:t>US$ 16,0 mi</a:t>
             </a:r>
             <a:endParaRPr lang="en-US" sz="3300" dirty="0"/>
           </a:p>
@@ -4033,7 +4033,7 @@
                 <a:ea typeface="Cambria" pitchFamily="34" charset="-122"/>
                 <a:cs typeface="Cambria" pitchFamily="34" charset="-120"/>
               </a:rPr>
-              <a:t>US$ 13,8 mi</a:t>
+              <a:t>US$ 11,0 mi</a:t>
             </a:r>
             <a:endParaRPr lang="en-US" sz="1800" dirty="0"/>
           </a:p>
@@ -4233,7 +4233,7 @@
                 <a:ea typeface="Cambria" pitchFamily="34" charset="-122"/>
                 <a:cs typeface="Cambria" pitchFamily="34" charset="-120"/>
               </a:rPr>
-              <a:t>US$ 5,8 mi</a:t>
+              <a:t>US$ 5,3 mi</a:t>
             </a:r>
             <a:endParaRPr lang="en-US" sz="1800" dirty="0"/>
           </a:p>
@@ -4333,7 +4333,7 @@
                 <a:ea typeface="Cambria" pitchFamily="34" charset="-122"/>
                 <a:cs typeface="Cambria" pitchFamily="34" charset="-120"/>
               </a:rPr>
-              <a:t>US$ 13,0 mi</a:t>
+              <a:t>US$ 10,7 mi</a:t>
             </a:r>
             <a:endParaRPr lang="en-US" sz="1800" dirty="0"/>
           </a:p>
@@ -4449,7 +4449,7 @@
         <p:spPr>
           <a:xfrm>
             <a:off x="566928" y="3401568"/>
-            <a:ext cx="3316529" cy="365760"/>
+            <a:ext cx="3316529" cy="352044"/>
           </a:xfrm>
           <a:prstGeom prst="rect">
             <a:avLst/>
@@ -4488,7 +4488,7 @@
         <p:spPr>
           <a:xfrm>
             <a:off x="3773729" y="3401568"/>
-            <a:ext cx="1815998" cy="365760"/>
+            <a:ext cx="1815998" cy="352044"/>
           </a:xfrm>
           <a:prstGeom prst="rect">
             <a:avLst/>
@@ -4512,7 +4512,7 @@
                 <a:ea typeface="Calibri" pitchFamily="34" charset="-122"/>
                 <a:cs typeface="Calibri" pitchFamily="34" charset="-120"/>
               </a:rPr>
-              <a:t>US$ 8,6 mi</a:t>
+              <a:t>US$ 6,4 mi</a:t>
             </a:r>
             <a:endParaRPr lang="en-US" sz="1100" dirty="0"/>
           </a:p>
@@ -4526,8 +4526,8 @@
         </p:nvSpPr>
         <p:spPr>
           <a:xfrm>
-            <a:off x="457200" y="3767328"/>
-            <a:ext cx="5349240" cy="365760"/>
+            <a:off x="457200" y="3753612"/>
+            <a:ext cx="5349240" cy="352044"/>
           </a:xfrm>
           <a:prstGeom prst="rect">
             <a:avLst/>
@@ -4546,8 +4546,8 @@
         </p:nvSpPr>
         <p:spPr>
           <a:xfrm>
-            <a:off x="566928" y="3767328"/>
-            <a:ext cx="3316529" cy="365760"/>
+            <a:off x="566928" y="3753612"/>
+            <a:ext cx="3316529" cy="352044"/>
           </a:xfrm>
           <a:prstGeom prst="rect">
             <a:avLst/>
@@ -4585,8 +4585,8 @@
         </p:nvSpPr>
         <p:spPr>
           <a:xfrm>
-            <a:off x="3773729" y="3767328"/>
-            <a:ext cx="1815998" cy="365760"/>
+            <a:off x="3773729" y="3753612"/>
+            <a:ext cx="1815998" cy="352044"/>
           </a:xfrm>
           <a:prstGeom prst="rect">
             <a:avLst/>
@@ -4624,8 +4624,8 @@
         </p:nvSpPr>
         <p:spPr>
           <a:xfrm>
-            <a:off x="566928" y="4133088"/>
-            <a:ext cx="3316529" cy="365760"/>
+            <a:off x="566928" y="4105656"/>
+            <a:ext cx="3316529" cy="352044"/>
           </a:xfrm>
           <a:prstGeom prst="rect">
             <a:avLst/>
@@ -4663,8 +4663,8 @@
         </p:nvSpPr>
         <p:spPr>
           <a:xfrm>
-            <a:off x="3773729" y="4133088"/>
-            <a:ext cx="1815998" cy="365760"/>
+            <a:off x="3773729" y="4105656"/>
+            <a:ext cx="1815998" cy="352044"/>
           </a:xfrm>
           <a:prstGeom prst="rect">
             <a:avLst/>
@@ -4688,7 +4688,7 @@
                 <a:ea typeface="Calibri" pitchFamily="34" charset="-122"/>
                 <a:cs typeface="Calibri" pitchFamily="34" charset="-120"/>
               </a:rPr>
-              <a:t>US$ 2,1 mi</a:t>
+              <a:t>US$ 1,8 mi</a:t>
             </a:r>
             <a:endParaRPr lang="en-US" sz="1100" dirty="0"/>
           </a:p>
@@ -4702,8 +4702,8 @@
         </p:nvSpPr>
         <p:spPr>
           <a:xfrm>
-            <a:off x="457200" y="4498848"/>
-            <a:ext cx="5349240" cy="365760"/>
+            <a:off x="457200" y="4457700"/>
+            <a:ext cx="5349240" cy="352044"/>
           </a:xfrm>
           <a:prstGeom prst="rect">
             <a:avLst/>
@@ -4722,8 +4722,184 @@
         </p:nvSpPr>
         <p:spPr>
           <a:xfrm>
-            <a:off x="566928" y="4498848"/>
-            <a:ext cx="3316529" cy="365760"/>
+            <a:off x="566928" y="4457700"/>
+            <a:ext cx="3316529" cy="352044"/>
+          </a:xfrm>
+          <a:prstGeom prst="rect">
+            <a:avLst/>
+          </a:prstGeom>
+          <a:noFill/>
+          <a:ln/>
+        </p:spPr>
+        <p:txBody>
+          <a:bodyPr wrap="square" lIns="0" tIns="0" rIns="0" bIns="0" rtlCol="0" anchor="ctr"/>
+          <a:lstStyle/>
+          <a:p>
+            <a:pPr indent="0" marL="0">
+              <a:buNone/>
+            </a:pPr>
+            <a:r>
+              <a:rPr lang="en-US" sz="1100" dirty="0">
+                <a:solidFill>
+                  <a:srgbClr val="1C2B33"/>
+                </a:solidFill>
+                <a:latin typeface="Calibri" pitchFamily="34" charset="0"/>
+                <a:ea typeface="Calibri" pitchFamily="34" charset="-122"/>
+                <a:cs typeface="Calibri" pitchFamily="34" charset="-120"/>
+              </a:rPr>
+              <a:t>MET – Medição</a:t>
+            </a:r>
+            <a:endParaRPr lang="en-US" sz="1100" dirty="0"/>
+          </a:p>
+        </p:txBody>
+      </p:sp>
+      <p:sp>
+        <p:nvSpPr>
+          <p:cNvPr id="33" name="Text 31"/>
+          <p:cNvSpPr txBox="1"/>
+          <p:nvPr/>
+        </p:nvSpPr>
+        <p:spPr>
+          <a:xfrm>
+            <a:off x="3773729" y="4457700"/>
+            <a:ext cx="1815998" cy="352044"/>
+          </a:xfrm>
+          <a:prstGeom prst="rect">
+            <a:avLst/>
+          </a:prstGeom>
+          <a:noFill/>
+          <a:ln/>
+        </p:spPr>
+        <p:txBody>
+          <a:bodyPr wrap="square" lIns="0" tIns="0" rIns="0" bIns="0" rtlCol="0" anchor="ctr"/>
+          <a:lstStyle/>
+          <a:p>
+            <a:pPr algn="r" indent="0" marL="0">
+              <a:buNone/>
+            </a:pPr>
+            <a:r>
+              <a:rPr lang="en-US" sz="1100" b="1" dirty="0">
+                <a:solidFill>
+                  <a:srgbClr val="0B2A3D"/>
+                </a:solidFill>
+                <a:latin typeface="Calibri" pitchFamily="34" charset="0"/>
+                <a:ea typeface="Calibri" pitchFamily="34" charset="-122"/>
+                <a:cs typeface="Calibri" pitchFamily="34" charset="-120"/>
+              </a:rPr>
+              <a:t>US$ 955,5 mil</a:t>
+            </a:r>
+            <a:endParaRPr lang="en-US" sz="1100" dirty="0"/>
+          </a:p>
+        </p:txBody>
+      </p:sp>
+      <p:sp>
+        <p:nvSpPr>
+          <p:cNvPr id="34" name="Text 32"/>
+          <p:cNvSpPr txBox="1"/>
+          <p:nvPr/>
+        </p:nvSpPr>
+        <p:spPr>
+          <a:xfrm>
+            <a:off x="566928" y="4809744"/>
+            <a:ext cx="3316529" cy="352044"/>
+          </a:xfrm>
+          <a:prstGeom prst="rect">
+            <a:avLst/>
+          </a:prstGeom>
+          <a:noFill/>
+          <a:ln/>
+        </p:spPr>
+        <p:txBody>
+          <a:bodyPr wrap="square" lIns="0" tIns="0" rIns="0" bIns="0" rtlCol="0" anchor="ctr"/>
+          <a:lstStyle/>
+          <a:p>
+            <a:pPr indent="0" marL="0">
+              <a:buNone/>
+            </a:pPr>
+            <a:r>
+              <a:rPr lang="en-US" sz="1100" dirty="0">
+                <a:solidFill>
+                  <a:srgbClr val="1C2B33"/>
+                </a:solidFill>
+                <a:latin typeface="Calibri" pitchFamily="34" charset="0"/>
+                <a:ea typeface="Calibri" pitchFamily="34" charset="-122"/>
+                <a:cs typeface="Calibri" pitchFamily="34" charset="-120"/>
+              </a:rPr>
+              <a:t>Projetos</a:t>
+            </a:r>
+            <a:endParaRPr lang="en-US" sz="1100" dirty="0"/>
+          </a:p>
+        </p:txBody>
+      </p:sp>
+      <p:sp>
+        <p:nvSpPr>
+          <p:cNvPr id="35" name="Text 33"/>
+          <p:cNvSpPr txBox="1"/>
+          <p:nvPr/>
+        </p:nvSpPr>
+        <p:spPr>
+          <a:xfrm>
+            <a:off x="3773729" y="4809744"/>
+            <a:ext cx="1815998" cy="352044"/>
+          </a:xfrm>
+          <a:prstGeom prst="rect">
+            <a:avLst/>
+          </a:prstGeom>
+          <a:noFill/>
+          <a:ln/>
+        </p:spPr>
+        <p:txBody>
+          <a:bodyPr wrap="square" lIns="0" tIns="0" rIns="0" bIns="0" rtlCol="0" anchor="ctr"/>
+          <a:lstStyle/>
+          <a:p>
+            <a:pPr algn="r" indent="0" marL="0">
+              <a:buNone/>
+            </a:pPr>
+            <a:r>
+              <a:rPr lang="en-US" sz="1100" b="1" dirty="0">
+                <a:solidFill>
+                  <a:srgbClr val="0B2A3D"/>
+                </a:solidFill>
+                <a:latin typeface="Calibri" pitchFamily="34" charset="0"/>
+                <a:ea typeface="Calibri" pitchFamily="34" charset="-122"/>
+                <a:cs typeface="Calibri" pitchFamily="34" charset="-120"/>
+              </a:rPr>
+              <a:t>US$ 915,5 mil</a:t>
+            </a:r>
+            <a:endParaRPr lang="en-US" sz="1100" dirty="0"/>
+          </a:p>
+        </p:txBody>
+      </p:sp>
+      <p:sp>
+        <p:nvSpPr>
+          <p:cNvPr id="36" name="Shape 34"/>
+          <p:cNvSpPr/>
+          <p:nvPr/>
+        </p:nvSpPr>
+        <p:spPr>
+          <a:xfrm>
+            <a:off x="457200" y="5161788"/>
+            <a:ext cx="5349240" cy="352044"/>
+          </a:xfrm>
+          <a:prstGeom prst="rect">
+            <a:avLst/>
+          </a:prstGeom>
+          <a:solidFill>
+            <a:srgbClr val="F0F4F5"/>
+          </a:solidFill>
+          <a:ln/>
+        </p:spPr>
+      </p:sp>
+      <p:sp>
+        <p:nvSpPr>
+          <p:cNvPr id="37" name="Text 35"/>
+          <p:cNvSpPr txBox="1"/>
+          <p:nvPr/>
+        </p:nvSpPr>
+        <p:spPr>
+          <a:xfrm>
+            <a:off x="566928" y="5161788"/>
+            <a:ext cx="3316529" cy="352044"/>
           </a:xfrm>
           <a:prstGeom prst="rect">
             <a:avLst/>
@@ -4755,14 +4931,14 @@
       </p:sp>
       <p:sp>
         <p:nvSpPr>
-          <p:cNvPr id="33" name="Text 31"/>
+          <p:cNvPr id="38" name="Text 36"/>
           <p:cNvSpPr txBox="1"/>
           <p:nvPr/>
         </p:nvSpPr>
         <p:spPr>
           <a:xfrm>
-            <a:off x="3773729" y="4498848"/>
-            <a:ext cx="1815998" cy="365760"/>
+            <a:off x="3773729" y="5161788"/>
+            <a:ext cx="1815998" cy="352044"/>
           </a:xfrm>
           <a:prstGeom prst="rect">
             <a:avLst/>
@@ -4786,7 +4962,7 @@
                 <a:ea typeface="Calibri" pitchFamily="34" charset="-122"/>
                 <a:cs typeface="Calibri" pitchFamily="34" charset="-120"/>
               </a:rPr>
-              <a:t>US$ 960,0 mil</a:t>
+              <a:t>US$ 670,0 mil</a:t>
             </a:r>
             <a:endParaRPr lang="en-US" sz="1100" dirty="0"/>
           </a:p>
@@ -4794,190 +4970,14 @@
       </p:sp>
       <p:sp>
         <p:nvSpPr>
-          <p:cNvPr id="34" name="Text 32"/>
-          <p:cNvSpPr txBox="1"/>
-          <p:nvPr/>
-        </p:nvSpPr>
-        <p:spPr>
-          <a:xfrm>
-            <a:off x="566928" y="4864608"/>
-            <a:ext cx="3316529" cy="365760"/>
-          </a:xfrm>
-          <a:prstGeom prst="rect">
-            <a:avLst/>
-          </a:prstGeom>
-          <a:noFill/>
-          <a:ln/>
-        </p:spPr>
-        <p:txBody>
-          <a:bodyPr wrap="square" lIns="0" tIns="0" rIns="0" bIns="0" rtlCol="0" anchor="ctr"/>
-          <a:lstStyle/>
-          <a:p>
-            <a:pPr indent="0" marL="0">
-              <a:buNone/>
-            </a:pPr>
-            <a:r>
-              <a:rPr lang="en-US" sz="1100" dirty="0">
-                <a:solidFill>
-                  <a:srgbClr val="1C2B33"/>
-                </a:solidFill>
-                <a:latin typeface="Calibri" pitchFamily="34" charset="0"/>
-                <a:ea typeface="Calibri" pitchFamily="34" charset="-122"/>
-                <a:cs typeface="Calibri" pitchFamily="34" charset="-120"/>
-              </a:rPr>
-              <a:t>MET – Medição</a:t>
-            </a:r>
-            <a:endParaRPr lang="en-US" sz="1100" dirty="0"/>
-          </a:p>
-        </p:txBody>
-      </p:sp>
-      <p:sp>
-        <p:nvSpPr>
-          <p:cNvPr id="35" name="Text 33"/>
-          <p:cNvSpPr txBox="1"/>
-          <p:nvPr/>
-        </p:nvSpPr>
-        <p:spPr>
-          <a:xfrm>
-            <a:off x="3773729" y="4864608"/>
-            <a:ext cx="1815998" cy="365760"/>
-          </a:xfrm>
-          <a:prstGeom prst="rect">
-            <a:avLst/>
-          </a:prstGeom>
-          <a:noFill/>
-          <a:ln/>
-        </p:spPr>
-        <p:txBody>
-          <a:bodyPr wrap="square" lIns="0" tIns="0" rIns="0" bIns="0" rtlCol="0" anchor="ctr"/>
-          <a:lstStyle/>
-          <a:p>
-            <a:pPr algn="r" indent="0" marL="0">
-              <a:buNone/>
-            </a:pPr>
-            <a:r>
-              <a:rPr lang="en-US" sz="1100" b="1" dirty="0">
-                <a:solidFill>
-                  <a:srgbClr val="0B2A3D"/>
-                </a:solidFill>
-                <a:latin typeface="Calibri" pitchFamily="34" charset="0"/>
-                <a:ea typeface="Calibri" pitchFamily="34" charset="-122"/>
-                <a:cs typeface="Calibri" pitchFamily="34" charset="-120"/>
-              </a:rPr>
-              <a:t>US$ 955,5 mil</a:t>
-            </a:r>
-            <a:endParaRPr lang="en-US" sz="1100" dirty="0"/>
-          </a:p>
-        </p:txBody>
-      </p:sp>
-      <p:sp>
-        <p:nvSpPr>
-          <p:cNvPr id="36" name="Shape 34"/>
-          <p:cNvSpPr/>
-          <p:nvPr/>
-        </p:nvSpPr>
-        <p:spPr>
-          <a:xfrm>
-            <a:off x="457200" y="5230368"/>
-            <a:ext cx="5349240" cy="365760"/>
-          </a:xfrm>
-          <a:prstGeom prst="rect">
-            <a:avLst/>
-          </a:prstGeom>
-          <a:solidFill>
-            <a:srgbClr val="F0F4F5"/>
-          </a:solidFill>
-          <a:ln/>
-        </p:spPr>
-      </p:sp>
-      <p:sp>
-        <p:nvSpPr>
-          <p:cNvPr id="37" name="Text 35"/>
-          <p:cNvSpPr txBox="1"/>
-          <p:nvPr/>
-        </p:nvSpPr>
-        <p:spPr>
-          <a:xfrm>
-            <a:off x="566928" y="5230368"/>
-            <a:ext cx="3316529" cy="365760"/>
-          </a:xfrm>
-          <a:prstGeom prst="rect">
-            <a:avLst/>
-          </a:prstGeom>
-          <a:noFill/>
-          <a:ln/>
-        </p:spPr>
-        <p:txBody>
-          <a:bodyPr wrap="square" lIns="0" tIns="0" rIns="0" bIns="0" rtlCol="0" anchor="ctr"/>
-          <a:lstStyle/>
-          <a:p>
-            <a:pPr indent="0" marL="0">
-              <a:buNone/>
-            </a:pPr>
-            <a:r>
-              <a:rPr lang="en-US" sz="1100" dirty="0">
-                <a:solidFill>
-                  <a:srgbClr val="1C2B33"/>
-                </a:solidFill>
-                <a:latin typeface="Calibri" pitchFamily="34" charset="0"/>
-                <a:ea typeface="Calibri" pitchFamily="34" charset="-122"/>
-                <a:cs typeface="Calibri" pitchFamily="34" charset="-120"/>
-              </a:rPr>
-              <a:t>Projetos</a:t>
-            </a:r>
-            <a:endParaRPr lang="en-US" sz="1100" dirty="0"/>
-          </a:p>
-        </p:txBody>
-      </p:sp>
-      <p:sp>
-        <p:nvSpPr>
-          <p:cNvPr id="38" name="Text 36"/>
-          <p:cNvSpPr txBox="1"/>
-          <p:nvPr/>
-        </p:nvSpPr>
-        <p:spPr>
-          <a:xfrm>
-            <a:off x="3773729" y="5230368"/>
-            <a:ext cx="1815998" cy="365760"/>
-          </a:xfrm>
-          <a:prstGeom prst="rect">
-            <a:avLst/>
-          </a:prstGeom>
-          <a:noFill/>
-          <a:ln/>
-        </p:spPr>
-        <p:txBody>
-          <a:bodyPr wrap="square" lIns="0" tIns="0" rIns="0" bIns="0" rtlCol="0" anchor="ctr"/>
-          <a:lstStyle/>
-          <a:p>
-            <a:pPr algn="r" indent="0" marL="0">
-              <a:buNone/>
-            </a:pPr>
-            <a:r>
-              <a:rPr lang="en-US" sz="1100" b="1" dirty="0">
-                <a:solidFill>
-                  <a:srgbClr val="0B2A3D"/>
-                </a:solidFill>
-                <a:latin typeface="Calibri" pitchFamily="34" charset="0"/>
-                <a:ea typeface="Calibri" pitchFamily="34" charset="-122"/>
-                <a:cs typeface="Calibri" pitchFamily="34" charset="-120"/>
-              </a:rPr>
-              <a:t>US$ 926,4 mil</a:t>
-            </a:r>
-            <a:endParaRPr lang="en-US" sz="1100" dirty="0"/>
-          </a:p>
-        </p:txBody>
-      </p:sp>
-      <p:sp>
-        <p:nvSpPr>
           <p:cNvPr id="39" name="Text 37"/>
           <p:cNvSpPr txBox="1"/>
           <p:nvPr/>
         </p:nvSpPr>
         <p:spPr>
           <a:xfrm>
-            <a:off x="566928" y="5596128"/>
-            <a:ext cx="3316529" cy="365760"/>
+            <a:off x="566928" y="5513832"/>
+            <a:ext cx="3316529" cy="352044"/>
           </a:xfrm>
           <a:prstGeom prst="rect">
             <a:avLst/>
@@ -5015,8 +5015,8 @@
         </p:nvSpPr>
         <p:spPr>
           <a:xfrm>
-            <a:off x="3773729" y="5596128"/>
-            <a:ext cx="1815998" cy="365760"/>
+            <a:off x="3773729" y="5513832"/>
+            <a:ext cx="1815998" cy="352044"/>
           </a:xfrm>
           <a:prstGeom prst="rect">
             <a:avLst/>
@@ -5048,7 +5048,105 @@
       </p:sp>
       <p:sp>
         <p:nvSpPr>
-          <p:cNvPr id="41" name="Text 39"/>
+          <p:cNvPr id="41" name="Shape 39"/>
+          <p:cNvSpPr/>
+          <p:nvPr/>
+        </p:nvSpPr>
+        <p:spPr>
+          <a:xfrm>
+            <a:off x="457200" y="5865876"/>
+            <a:ext cx="5349240" cy="352044"/>
+          </a:xfrm>
+          <a:prstGeom prst="rect">
+            <a:avLst/>
+          </a:prstGeom>
+          <a:solidFill>
+            <a:srgbClr val="F0F4F5"/>
+          </a:solidFill>
+          <a:ln/>
+        </p:spPr>
+      </p:sp>
+      <p:sp>
+        <p:nvSpPr>
+          <p:cNvPr id="42" name="Text 40"/>
+          <p:cNvSpPr txBox="1"/>
+          <p:nvPr/>
+        </p:nvSpPr>
+        <p:spPr>
+          <a:xfrm>
+            <a:off x="566928" y="5865876"/>
+            <a:ext cx="3316529" cy="352044"/>
+          </a:xfrm>
+          <a:prstGeom prst="rect">
+            <a:avLst/>
+          </a:prstGeom>
+          <a:noFill/>
+          <a:ln/>
+        </p:spPr>
+        <p:txBody>
+          <a:bodyPr wrap="square" lIns="0" tIns="0" rIns="0" bIns="0" rtlCol="0" anchor="ctr"/>
+          <a:lstStyle/>
+          <a:p>
+            <a:pPr indent="0" marL="0">
+              <a:buNone/>
+            </a:pPr>
+            <a:r>
+              <a:rPr lang="en-US" sz="1100" dirty="0">
+                <a:solidFill>
+                  <a:srgbClr val="1C2B33"/>
+                </a:solidFill>
+                <a:latin typeface="Calibri" pitchFamily="34" charset="0"/>
+                <a:ea typeface="Calibri" pitchFamily="34" charset="-122"/>
+                <a:cs typeface="Calibri" pitchFamily="34" charset="-120"/>
+              </a:rPr>
+              <a:t>INT - Integridade</a:t>
+            </a:r>
+            <a:endParaRPr lang="en-US" sz="1100" dirty="0"/>
+          </a:p>
+        </p:txBody>
+      </p:sp>
+      <p:sp>
+        <p:nvSpPr>
+          <p:cNvPr id="43" name="Text 41"/>
+          <p:cNvSpPr txBox="1"/>
+          <p:nvPr/>
+        </p:nvSpPr>
+        <p:spPr>
+          <a:xfrm>
+            <a:off x="3773729" y="5865876"/>
+            <a:ext cx="1815998" cy="352044"/>
+          </a:xfrm>
+          <a:prstGeom prst="rect">
+            <a:avLst/>
+          </a:prstGeom>
+          <a:noFill/>
+          <a:ln/>
+        </p:spPr>
+        <p:txBody>
+          <a:bodyPr wrap="square" lIns="0" tIns="0" rIns="0" bIns="0" rtlCol="0" anchor="ctr"/>
+          <a:lstStyle/>
+          <a:p>
+            <a:pPr algn="r" indent="0" marL="0">
+              <a:buNone/>
+            </a:pPr>
+            <a:r>
+              <a:rPr lang="en-US" sz="1100" b="1" dirty="0">
+                <a:solidFill>
+                  <a:srgbClr val="0B2A3D"/>
+                </a:solidFill>
+                <a:latin typeface="Calibri" pitchFamily="34" charset="0"/>
+                <a:ea typeface="Calibri" pitchFamily="34" charset="-122"/>
+                <a:cs typeface="Calibri" pitchFamily="34" charset="-120"/>
+              </a:rPr>
+              <a:t>US$ 107,3 mil</a:t>
+            </a:r>
+            <a:endParaRPr lang="en-US" sz="1100" dirty="0"/>
+          </a:p>
+        </p:txBody>
+      </p:sp>
+      <p:sp>
+        <p:nvSpPr>
+          <p:cNvPr id="44" name="Text 42"/>
           <p:cNvSpPr txBox="1"/>
           <p:nvPr/>
         </p:nvSpPr>
@@ -5087,7 +5185,7 @@
       </p:sp>
       <p:sp>
         <p:nvSpPr>
-          <p:cNvPr id="42" name="Shape 40"/>
+          <p:cNvPr id="45" name="Shape 43"/>
           <p:cNvSpPr/>
           <p:nvPr/>
         </p:nvSpPr>
@@ -5110,14 +5208,14 @@
       </p:sp>
       <p:sp>
         <p:nvSpPr>
-          <p:cNvPr id="43" name="Text 41"/>
+          <p:cNvPr id="46" name="Text 44"/>
           <p:cNvSpPr txBox="1"/>
           <p:nvPr/>
         </p:nvSpPr>
         <p:spPr>
           <a:xfrm>
             <a:off x="6464808" y="3401568"/>
-            <a:ext cx="3316529" cy="365760"/>
+            <a:ext cx="3316529" cy="352044"/>
           </a:xfrm>
           <a:prstGeom prst="rect">
             <a:avLst/>
@@ -5149,14 +5247,14 @@
       </p:sp>
       <p:sp>
         <p:nvSpPr>
-          <p:cNvPr id="44" name="Text 42"/>
+          <p:cNvPr id="47" name="Text 45"/>
           <p:cNvSpPr txBox="1"/>
           <p:nvPr/>
         </p:nvSpPr>
         <p:spPr>
           <a:xfrm>
             <a:off x="9671609" y="3401568"/>
-            <a:ext cx="1815998" cy="365760"/>
+            <a:ext cx="1815998" cy="352044"/>
           </a:xfrm>
           <a:prstGeom prst="rect">
             <a:avLst/>
@@ -5180,7 +5278,7 @@
                 <a:ea typeface="Calibri" pitchFamily="34" charset="-122"/>
                 <a:cs typeface="Calibri" pitchFamily="34" charset="-120"/>
               </a:rPr>
-              <a:t>US$ 8,5 mi</a:t>
+              <a:t>US$ 6,4 mi</a:t>
             </a:r>
             <a:endParaRPr lang="en-US" sz="1100" dirty="0"/>
           </a:p>
@@ -5188,14 +5286,14 @@
       </p:sp>
       <p:sp>
         <p:nvSpPr>
-          <p:cNvPr id="45" name="Shape 43"/>
+          <p:cNvPr id="48" name="Shape 46"/>
           <p:cNvSpPr/>
           <p:nvPr/>
         </p:nvSpPr>
         <p:spPr>
           <a:xfrm>
-            <a:off x="6355080" y="3767328"/>
-            <a:ext cx="5349240" cy="365760"/>
+            <a:off x="6355080" y="3753612"/>
+            <a:ext cx="5349240" cy="352044"/>
           </a:xfrm>
           <a:prstGeom prst="rect">
             <a:avLst/>
@@ -5208,14 +5306,14 @@
       </p:sp>
       <p:sp>
         <p:nvSpPr>
-          <p:cNvPr id="46" name="Text 44"/>
+          <p:cNvPr id="49" name="Text 47"/>
           <p:cNvSpPr txBox="1"/>
           <p:nvPr/>
         </p:nvSpPr>
         <p:spPr>
           <a:xfrm>
-            <a:off x="6464808" y="3767328"/>
-            <a:ext cx="3316529" cy="365760"/>
+            <a:off x="6464808" y="3753612"/>
+            <a:ext cx="3316529" cy="352044"/>
           </a:xfrm>
           <a:prstGeom prst="rect">
             <a:avLst/>
@@ -5247,14 +5345,14 @@
       </p:sp>
       <p:sp>
         <p:nvSpPr>
-          <p:cNvPr id="47" name="Text 45"/>
+          <p:cNvPr id="50" name="Text 48"/>
           <p:cNvSpPr txBox="1"/>
           <p:nvPr/>
         </p:nvSpPr>
         <p:spPr>
           <a:xfrm>
-            <a:off x="9671609" y="3767328"/>
-            <a:ext cx="1815998" cy="365760"/>
+            <a:off x="9671609" y="3753612"/>
+            <a:ext cx="1815998" cy="352044"/>
           </a:xfrm>
           <a:prstGeom prst="rect">
             <a:avLst/>
@@ -5278,7 +5376,7 @@
                 <a:ea typeface="Calibri" pitchFamily="34" charset="-122"/>
                 <a:cs typeface="Calibri" pitchFamily="34" charset="-120"/>
               </a:rPr>
-              <a:t>US$ 5,9 mi</a:t>
+              <a:t>US$ 6,0 mi</a:t>
             </a:r>
             <a:endParaRPr lang="en-US" sz="1100" dirty="0"/>
           </a:p>
@@ -5286,14 +5384,14 @@
       </p:sp>
       <p:sp>
         <p:nvSpPr>
-          <p:cNvPr id="48" name="Text 46"/>
+          <p:cNvPr id="51" name="Text 49"/>
           <p:cNvSpPr txBox="1"/>
           <p:nvPr/>
         </p:nvSpPr>
         <p:spPr>
           <a:xfrm>
-            <a:off x="6464808" y="4133088"/>
-            <a:ext cx="3316529" cy="365760"/>
+            <a:off x="6464808" y="4105656"/>
+            <a:ext cx="3316529" cy="352044"/>
           </a:xfrm>
           <a:prstGeom prst="rect">
             <a:avLst/>
@@ -5325,14 +5423,14 @@
       </p:sp>
       <p:sp>
         <p:nvSpPr>
-          <p:cNvPr id="49" name="Text 47"/>
+          <p:cNvPr id="52" name="Text 50"/>
           <p:cNvSpPr txBox="1"/>
           <p:nvPr/>
         </p:nvSpPr>
         <p:spPr>
           <a:xfrm>
-            <a:off x="9671609" y="4133088"/>
-            <a:ext cx="1815998" cy="365760"/>
+            <a:off x="9671609" y="4105656"/>
+            <a:ext cx="1815998" cy="352044"/>
           </a:xfrm>
           <a:prstGeom prst="rect">
             <a:avLst/>
@@ -5356,7 +5454,7 @@
                 <a:ea typeface="Calibri" pitchFamily="34" charset="-122"/>
                 <a:cs typeface="Calibri" pitchFamily="34" charset="-120"/>
               </a:rPr>
-              <a:t>US$ 3,3 mi</a:t>
+              <a:t>US$ 2,8 mi</a:t>
             </a:r>
             <a:endParaRPr lang="en-US" sz="1100" dirty="0"/>
           </a:p>
@@ -5364,14 +5462,14 @@
       </p:sp>
       <p:sp>
         <p:nvSpPr>
-          <p:cNvPr id="50" name="Shape 48"/>
+          <p:cNvPr id="53" name="Shape 51"/>
           <p:cNvSpPr/>
           <p:nvPr/>
         </p:nvSpPr>
         <p:spPr>
           <a:xfrm>
-            <a:off x="6355080" y="4498848"/>
-            <a:ext cx="5349240" cy="365760"/>
+            <a:off x="6355080" y="4457700"/>
+            <a:ext cx="5349240" cy="352044"/>
           </a:xfrm>
           <a:prstGeom prst="rect">
             <a:avLst/>
@@ -5384,14 +5482,14 @@
       </p:sp>
       <p:sp>
         <p:nvSpPr>
-          <p:cNvPr id="51" name="Text 49"/>
+          <p:cNvPr id="54" name="Text 52"/>
           <p:cNvSpPr txBox="1"/>
           <p:nvPr/>
         </p:nvSpPr>
         <p:spPr>
           <a:xfrm>
-            <a:off x="6464808" y="4498848"/>
-            <a:ext cx="3316529" cy="365760"/>
+            <a:off x="6464808" y="4457700"/>
+            <a:ext cx="3316529" cy="352044"/>
           </a:xfrm>
           <a:prstGeom prst="rect">
             <a:avLst/>
@@ -5423,14 +5521,14 @@
       </p:sp>
       <p:sp>
         <p:nvSpPr>
-          <p:cNvPr id="52" name="Text 50"/>
+          <p:cNvPr id="55" name="Text 53"/>
           <p:cNvSpPr txBox="1"/>
           <p:nvPr/>
         </p:nvSpPr>
         <p:spPr>
           <a:xfrm>
-            <a:off x="9671609" y="4498848"/>
-            <a:ext cx="1815998" cy="365760"/>
+            <a:off x="9671609" y="4457700"/>
+            <a:ext cx="1815998" cy="352044"/>
           </a:xfrm>
           <a:prstGeom prst="rect">
             <a:avLst/>
@@ -5454,7 +5552,7 @@
                 <a:ea typeface="Calibri" pitchFamily="34" charset="-122"/>
                 <a:cs typeface="Calibri" pitchFamily="34" charset="-120"/>
               </a:rPr>
-              <a:t>US$ 1,2 mi</a:t>
+              <a:t>US$ 862,4 mil</a:t>
             </a:r>
             <a:endParaRPr lang="en-US" sz="1100" dirty="0"/>
           </a:p>
@@ -5462,7 +5560,7 @@
       </p:sp>
       <p:sp>
         <p:nvSpPr>
-          <p:cNvPr id="53" name="Text 51"/>
+          <p:cNvPr id="56" name="Text 54"/>
           <p:cNvSpPr txBox="1"/>
           <p:nvPr/>
         </p:nvSpPr>
@@ -5655,7 +5753,7 @@
                 <a:ea typeface="Calibri" pitchFamily="34" charset="-122"/>
                 <a:cs typeface="Calibri" pitchFamily="34" charset="-120"/>
               </a:rPr>
-              <a:t>Principais escopos por valor · 69 itens no total</a:t>
+              <a:t>Principais escopos por valor · 63 itens no total</a:t>
             </a:r>
             <a:endParaRPr lang="en-US" sz="1250" dirty="0"/>
           </a:p>
@@ -6255,7 +6353,1103 @@
                           <a:ea typeface="Calibri" pitchFamily="34" charset="-122"/>
                           <a:cs typeface="Calibri" pitchFamily="34" charset="-120"/>
                         </a:rPr>
-                        <a:t>Upgrade metering de gás e Diesel- GTGs</a:t>
+                        <a:t>TA - Mecânica</a:t>
+                      </a:r>
+                      <a:endParaRPr lang="en-US" sz="1000" dirty="0">
+                        <a:latin typeface="Calibri" charset="0"/>
+                        <a:ea typeface="Calibri" charset="0"/>
+                        <a:cs typeface="Calibri" charset="0"/>
+                      </a:endParaRPr>
+                    </a:p>
+                  </a:txBody>
+                  <a:tcPr marL="91440" marR="91440" marT="45720" marB="45720" anchor="ctr">
+                    <a:lnL w="6350" cap="flat" cmpd="sng" algn="ctr">
+                      <a:solidFill>
+                        <a:srgbClr val="E3E8E9"/>
+                      </a:solidFill>
+                      <a:prstDash val="solid"/>
+                      <a:round/>
+                      <a:headEnd type="none" w="med" len="med"/>
+                      <a:tailEnd type="none" w="med" len="med"/>
+                    </a:lnL>
+                    <a:lnR w="6350" cap="flat" cmpd="sng" algn="ctr">
+                      <a:solidFill>
+                        <a:srgbClr val="E3E8E9"/>
+                      </a:solidFill>
+                      <a:prstDash val="solid"/>
+                      <a:round/>
+                      <a:headEnd type="none" w="med" len="med"/>
+                      <a:tailEnd type="none" w="med" len="med"/>
+                    </a:lnR>
+                    <a:lnT w="6350" cap="flat" cmpd="sng" algn="ctr">
+                      <a:solidFill>
+                        <a:srgbClr val="E3E8E9"/>
+                      </a:solidFill>
+                      <a:prstDash val="solid"/>
+                      <a:round/>
+                      <a:headEnd type="none" w="med" len="med"/>
+                      <a:tailEnd type="none" w="med" len="med"/>
+                    </a:lnT>
+                    <a:lnB w="6350" cap="flat" cmpd="sng" algn="ctr">
+                      <a:solidFill>
+                        <a:srgbClr val="E3E8E9"/>
+                      </a:solidFill>
+                      <a:prstDash val="solid"/>
+                      <a:round/>
+                      <a:headEnd type="none" w="med" len="med"/>
+                      <a:tailEnd type="none" w="med" len="med"/>
+                    </a:lnB>
+                    <a:solidFill>
+                      <a:srgbClr val="F0F4F5"/>
+                    </a:solidFill>
+                  </a:tcPr>
+                </a:tc>
+                <a:tc>
+                  <a:txBody>
+                    <a:bodyPr/>
+                    <a:lstStyle/>
+                    <a:p>
+                      <a:pPr indent="0" marL="0">
+                        <a:buNone/>
+                      </a:pPr>
+                      <a:r>
+                        <a:rPr lang="en-US" sz="950" dirty="0">
+                          <a:solidFill>
+                            <a:srgbClr val="5B6B73"/>
+                          </a:solidFill>
+                          <a:latin typeface="Calibri" pitchFamily="34" charset="0"/>
+                          <a:ea typeface="Calibri" pitchFamily="34" charset="-122"/>
+                          <a:cs typeface="Calibri" pitchFamily="34" charset="-120"/>
+                        </a:rPr>
+                        <a:t>Eficiência de Produção</a:t>
+                      </a:r>
+                      <a:endParaRPr lang="en-US" sz="950" dirty="0">
+                        <a:latin typeface="Calibri" charset="0"/>
+                        <a:ea typeface="Calibri" charset="0"/>
+                        <a:cs typeface="Calibri" charset="0"/>
+                      </a:endParaRPr>
+                    </a:p>
+                  </a:txBody>
+                  <a:tcPr marL="91440" marR="91440" marT="45720" marB="45720" anchor="ctr">
+                    <a:lnL w="6350" cap="flat" cmpd="sng" algn="ctr">
+                      <a:solidFill>
+                        <a:srgbClr val="E3E8E9"/>
+                      </a:solidFill>
+                      <a:prstDash val="solid"/>
+                      <a:round/>
+                      <a:headEnd type="none" w="med" len="med"/>
+                      <a:tailEnd type="none" w="med" len="med"/>
+                    </a:lnL>
+                    <a:lnR w="6350" cap="flat" cmpd="sng" algn="ctr">
+                      <a:solidFill>
+                        <a:srgbClr val="E3E8E9"/>
+                      </a:solidFill>
+                      <a:prstDash val="solid"/>
+                      <a:round/>
+                      <a:headEnd type="none" w="med" len="med"/>
+                      <a:tailEnd type="none" w="med" len="med"/>
+                    </a:lnR>
+                    <a:lnT w="6350" cap="flat" cmpd="sng" algn="ctr">
+                      <a:solidFill>
+                        <a:srgbClr val="E3E8E9"/>
+                      </a:solidFill>
+                      <a:prstDash val="solid"/>
+                      <a:round/>
+                      <a:headEnd type="none" w="med" len="med"/>
+                      <a:tailEnd type="none" w="med" len="med"/>
+                    </a:lnT>
+                    <a:lnB w="6350" cap="flat" cmpd="sng" algn="ctr">
+                      <a:solidFill>
+                        <a:srgbClr val="E3E8E9"/>
+                      </a:solidFill>
+                      <a:prstDash val="solid"/>
+                      <a:round/>
+                      <a:headEnd type="none" w="med" len="med"/>
+                      <a:tailEnd type="none" w="med" len="med"/>
+                    </a:lnB>
+                    <a:solidFill>
+                      <a:srgbClr val="F0F4F5"/>
+                    </a:solidFill>
+                  </a:tcPr>
+                </a:tc>
+                <a:tc>
+                  <a:txBody>
+                    <a:bodyPr/>
+                    <a:lstStyle/>
+                    <a:p>
+                      <a:pPr indent="0" marL="0">
+                        <a:buNone/>
+                      </a:pPr>
+                      <a:r>
+                        <a:rPr lang="en-US" sz="950" dirty="0">
+                          <a:solidFill>
+                            <a:srgbClr val="5B6B73"/>
+                          </a:solidFill>
+                          <a:latin typeface="Calibri" pitchFamily="34" charset="0"/>
+                          <a:ea typeface="Calibri" pitchFamily="34" charset="-122"/>
+                          <a:cs typeface="Calibri" pitchFamily="34" charset="-120"/>
+                        </a:rPr>
+                        <a:t>TA - Parada Programada</a:t>
+                      </a:r>
+                      <a:endParaRPr lang="en-US" sz="950" dirty="0">
+                        <a:latin typeface="Calibri" charset="0"/>
+                        <a:ea typeface="Calibri" charset="0"/>
+                        <a:cs typeface="Calibri" charset="0"/>
+                      </a:endParaRPr>
+                    </a:p>
+                  </a:txBody>
+                  <a:tcPr marL="91440" marR="91440" marT="45720" marB="45720" anchor="ctr">
+                    <a:lnL w="6350" cap="flat" cmpd="sng" algn="ctr">
+                      <a:solidFill>
+                        <a:srgbClr val="E3E8E9"/>
+                      </a:solidFill>
+                      <a:prstDash val="solid"/>
+                      <a:round/>
+                      <a:headEnd type="none" w="med" len="med"/>
+                      <a:tailEnd type="none" w="med" len="med"/>
+                    </a:lnL>
+                    <a:lnR w="6350" cap="flat" cmpd="sng" algn="ctr">
+                      <a:solidFill>
+                        <a:srgbClr val="E3E8E9"/>
+                      </a:solidFill>
+                      <a:prstDash val="solid"/>
+                      <a:round/>
+                      <a:headEnd type="none" w="med" len="med"/>
+                      <a:tailEnd type="none" w="med" len="med"/>
+                    </a:lnR>
+                    <a:lnT w="6350" cap="flat" cmpd="sng" algn="ctr">
+                      <a:solidFill>
+                        <a:srgbClr val="E3E8E9"/>
+                      </a:solidFill>
+                      <a:prstDash val="solid"/>
+                      <a:round/>
+                      <a:headEnd type="none" w="med" len="med"/>
+                      <a:tailEnd type="none" w="med" len="med"/>
+                    </a:lnT>
+                    <a:lnB w="6350" cap="flat" cmpd="sng" algn="ctr">
+                      <a:solidFill>
+                        <a:srgbClr val="E3E8E9"/>
+                      </a:solidFill>
+                      <a:prstDash val="solid"/>
+                      <a:round/>
+                      <a:headEnd type="none" w="med" len="med"/>
+                      <a:tailEnd type="none" w="med" len="med"/>
+                    </a:lnB>
+                    <a:solidFill>
+                      <a:srgbClr val="F0F4F5"/>
+                    </a:solidFill>
+                  </a:tcPr>
+                </a:tc>
+                <a:tc>
+                  <a:txBody>
+                    <a:bodyPr/>
+                    <a:lstStyle/>
+                    <a:p>
+                      <a:pPr algn="r" indent="0" marL="0">
+                        <a:buNone/>
+                      </a:pPr>
+                      <a:r>
+                        <a:rPr lang="en-US" sz="1000" b="1" dirty="0">
+                          <a:solidFill>
+                            <a:srgbClr val="0B2A3D"/>
+                          </a:solidFill>
+                          <a:latin typeface="Calibri" pitchFamily="34" charset="0"/>
+                          <a:ea typeface="Calibri" pitchFamily="34" charset="-122"/>
+                          <a:cs typeface="Calibri" pitchFamily="34" charset="-120"/>
+                        </a:rPr>
+                        <a:t>US$ 1,5 mi</a:t>
+                      </a:r>
+                      <a:endParaRPr lang="en-US" sz="1000" dirty="0">
+                        <a:latin typeface="Calibri" charset="0"/>
+                        <a:ea typeface="Calibri" charset="0"/>
+                        <a:cs typeface="Calibri" charset="0"/>
+                      </a:endParaRPr>
+                    </a:p>
+                  </a:txBody>
+                  <a:tcPr marL="91440" marR="91440" marT="45720" marB="45720" anchor="ctr">
+                    <a:lnL w="6350" cap="flat" cmpd="sng" algn="ctr">
+                      <a:solidFill>
+                        <a:srgbClr val="E3E8E9"/>
+                      </a:solidFill>
+                      <a:prstDash val="solid"/>
+                      <a:round/>
+                      <a:headEnd type="none" w="med" len="med"/>
+                      <a:tailEnd type="none" w="med" len="med"/>
+                    </a:lnL>
+                    <a:lnR w="6350" cap="flat" cmpd="sng" algn="ctr">
+                      <a:solidFill>
+                        <a:srgbClr val="E3E8E9"/>
+                      </a:solidFill>
+                      <a:prstDash val="solid"/>
+                      <a:round/>
+                      <a:headEnd type="none" w="med" len="med"/>
+                      <a:tailEnd type="none" w="med" len="med"/>
+                    </a:lnR>
+                    <a:lnT w="6350" cap="flat" cmpd="sng" algn="ctr">
+                      <a:solidFill>
+                        <a:srgbClr val="E3E8E9"/>
+                      </a:solidFill>
+                      <a:prstDash val="solid"/>
+                      <a:round/>
+                      <a:headEnd type="none" w="med" len="med"/>
+                      <a:tailEnd type="none" w="med" len="med"/>
+                    </a:lnT>
+                    <a:lnB w="6350" cap="flat" cmpd="sng" algn="ctr">
+                      <a:solidFill>
+                        <a:srgbClr val="E3E8E9"/>
+                      </a:solidFill>
+                      <a:prstDash val="solid"/>
+                      <a:round/>
+                      <a:headEnd type="none" w="med" len="med"/>
+                      <a:tailEnd type="none" w="med" len="med"/>
+                    </a:lnB>
+                    <a:solidFill>
+                      <a:srgbClr val="F0F4F5"/>
+                    </a:solidFill>
+                  </a:tcPr>
+                </a:tc>
+              </a:tr>
+              <a:tr h="288036">
+                <a:tc>
+                  <a:txBody>
+                    <a:bodyPr/>
+                    <a:lstStyle/>
+                    <a:p>
+                      <a:pPr indent="0" marL="0">
+                        <a:buNone/>
+                      </a:pPr>
+                      <a:r>
+                        <a:rPr lang="en-US" sz="1000" dirty="0">
+                          <a:solidFill>
+                            <a:srgbClr val="1C2B33"/>
+                          </a:solidFill>
+                          <a:latin typeface="Calibri" pitchFamily="34" charset="0"/>
+                          <a:ea typeface="Calibri" pitchFamily="34" charset="-122"/>
+                          <a:cs typeface="Calibri" pitchFamily="34" charset="-120"/>
+                        </a:rPr>
+                        <a:t>TA - Swivel - Pacote Hidráulico (OneSubsea)</a:t>
+                      </a:r>
+                      <a:endParaRPr lang="en-US" sz="1000" dirty="0">
+                        <a:latin typeface="Calibri" charset="0"/>
+                        <a:ea typeface="Calibri" charset="0"/>
+                        <a:cs typeface="Calibri" charset="0"/>
+                      </a:endParaRPr>
+                    </a:p>
+                  </a:txBody>
+                  <a:tcPr marL="91440" marR="91440" marT="45720" marB="45720" anchor="ctr">
+                    <a:lnL w="6350" cap="flat" cmpd="sng" algn="ctr">
+                      <a:solidFill>
+                        <a:srgbClr val="E3E8E9"/>
+                      </a:solidFill>
+                      <a:prstDash val="solid"/>
+                      <a:round/>
+                      <a:headEnd type="none" w="med" len="med"/>
+                      <a:tailEnd type="none" w="med" len="med"/>
+                    </a:lnL>
+                    <a:lnR w="6350" cap="flat" cmpd="sng" algn="ctr">
+                      <a:solidFill>
+                        <a:srgbClr val="E3E8E9"/>
+                      </a:solidFill>
+                      <a:prstDash val="solid"/>
+                      <a:round/>
+                      <a:headEnd type="none" w="med" len="med"/>
+                      <a:tailEnd type="none" w="med" len="med"/>
+                    </a:lnR>
+                    <a:lnT w="6350" cap="flat" cmpd="sng" algn="ctr">
+                      <a:solidFill>
+                        <a:srgbClr val="E3E8E9"/>
+                      </a:solidFill>
+                      <a:prstDash val="solid"/>
+                      <a:round/>
+                      <a:headEnd type="none" w="med" len="med"/>
+                      <a:tailEnd type="none" w="med" len="med"/>
+                    </a:lnT>
+                    <a:lnB w="6350" cap="flat" cmpd="sng" algn="ctr">
+                      <a:solidFill>
+                        <a:srgbClr val="E3E8E9"/>
+                      </a:solidFill>
+                      <a:prstDash val="solid"/>
+                      <a:round/>
+                      <a:headEnd type="none" w="med" len="med"/>
+                      <a:tailEnd type="none" w="med" len="med"/>
+                    </a:lnB>
+                    <a:solidFill>
+                      <a:srgbClr val="FFFFFF"/>
+                    </a:solidFill>
+                  </a:tcPr>
+                </a:tc>
+                <a:tc>
+                  <a:txBody>
+                    <a:bodyPr/>
+                    <a:lstStyle/>
+                    <a:p>
+                      <a:pPr indent="0" marL="0">
+                        <a:buNone/>
+                      </a:pPr>
+                      <a:r>
+                        <a:rPr lang="en-US" sz="950" dirty="0">
+                          <a:solidFill>
+                            <a:srgbClr val="5B6B73"/>
+                          </a:solidFill>
+                          <a:latin typeface="Calibri" pitchFamily="34" charset="0"/>
+                          <a:ea typeface="Calibri" pitchFamily="34" charset="-122"/>
+                          <a:cs typeface="Calibri" pitchFamily="34" charset="-120"/>
+                        </a:rPr>
+                        <a:t>Integridade e Regulatório</a:t>
+                      </a:r>
+                      <a:endParaRPr lang="en-US" sz="950" dirty="0">
+                        <a:latin typeface="Calibri" charset="0"/>
+                        <a:ea typeface="Calibri" charset="0"/>
+                        <a:cs typeface="Calibri" charset="0"/>
+                      </a:endParaRPr>
+                    </a:p>
+                  </a:txBody>
+                  <a:tcPr marL="91440" marR="91440" marT="45720" marB="45720" anchor="ctr">
+                    <a:lnL w="6350" cap="flat" cmpd="sng" algn="ctr">
+                      <a:solidFill>
+                        <a:srgbClr val="E3E8E9"/>
+                      </a:solidFill>
+                      <a:prstDash val="solid"/>
+                      <a:round/>
+                      <a:headEnd type="none" w="med" len="med"/>
+                      <a:tailEnd type="none" w="med" len="med"/>
+                    </a:lnL>
+                    <a:lnR w="6350" cap="flat" cmpd="sng" algn="ctr">
+                      <a:solidFill>
+                        <a:srgbClr val="E3E8E9"/>
+                      </a:solidFill>
+                      <a:prstDash val="solid"/>
+                      <a:round/>
+                      <a:headEnd type="none" w="med" len="med"/>
+                      <a:tailEnd type="none" w="med" len="med"/>
+                    </a:lnR>
+                    <a:lnT w="6350" cap="flat" cmpd="sng" algn="ctr">
+                      <a:solidFill>
+                        <a:srgbClr val="E3E8E9"/>
+                      </a:solidFill>
+                      <a:prstDash val="solid"/>
+                      <a:round/>
+                      <a:headEnd type="none" w="med" len="med"/>
+                      <a:tailEnd type="none" w="med" len="med"/>
+                    </a:lnT>
+                    <a:lnB w="6350" cap="flat" cmpd="sng" algn="ctr">
+                      <a:solidFill>
+                        <a:srgbClr val="E3E8E9"/>
+                      </a:solidFill>
+                      <a:prstDash val="solid"/>
+                      <a:round/>
+                      <a:headEnd type="none" w="med" len="med"/>
+                      <a:tailEnd type="none" w="med" len="med"/>
+                    </a:lnB>
+                    <a:solidFill>
+                      <a:srgbClr val="FFFFFF"/>
+                    </a:solidFill>
+                  </a:tcPr>
+                </a:tc>
+                <a:tc>
+                  <a:txBody>
+                    <a:bodyPr/>
+                    <a:lstStyle/>
+                    <a:p>
+                      <a:pPr indent="0" marL="0">
+                        <a:buNone/>
+                      </a:pPr>
+                      <a:r>
+                        <a:rPr lang="en-US" sz="950" dirty="0">
+                          <a:solidFill>
+                            <a:srgbClr val="5B6B73"/>
+                          </a:solidFill>
+                          <a:latin typeface="Calibri" pitchFamily="34" charset="0"/>
+                          <a:ea typeface="Calibri" pitchFamily="34" charset="-122"/>
+                          <a:cs typeface="Calibri" pitchFamily="34" charset="-120"/>
+                        </a:rPr>
+                        <a:t>P&amp;Q - Processos</a:t>
+                      </a:r>
+                      <a:endParaRPr lang="en-US" sz="950" dirty="0">
+                        <a:latin typeface="Calibri" charset="0"/>
+                        <a:ea typeface="Calibri" charset="0"/>
+                        <a:cs typeface="Calibri" charset="0"/>
+                      </a:endParaRPr>
+                    </a:p>
+                  </a:txBody>
+                  <a:tcPr marL="91440" marR="91440" marT="45720" marB="45720" anchor="ctr">
+                    <a:lnL w="6350" cap="flat" cmpd="sng" algn="ctr">
+                      <a:solidFill>
+                        <a:srgbClr val="E3E8E9"/>
+                      </a:solidFill>
+                      <a:prstDash val="solid"/>
+                      <a:round/>
+                      <a:headEnd type="none" w="med" len="med"/>
+                      <a:tailEnd type="none" w="med" len="med"/>
+                    </a:lnL>
+                    <a:lnR w="6350" cap="flat" cmpd="sng" algn="ctr">
+                      <a:solidFill>
+                        <a:srgbClr val="E3E8E9"/>
+                      </a:solidFill>
+                      <a:prstDash val="solid"/>
+                      <a:round/>
+                      <a:headEnd type="none" w="med" len="med"/>
+                      <a:tailEnd type="none" w="med" len="med"/>
+                    </a:lnR>
+                    <a:lnT w="6350" cap="flat" cmpd="sng" algn="ctr">
+                      <a:solidFill>
+                        <a:srgbClr val="E3E8E9"/>
+                      </a:solidFill>
+                      <a:prstDash val="solid"/>
+                      <a:round/>
+                      <a:headEnd type="none" w="med" len="med"/>
+                      <a:tailEnd type="none" w="med" len="med"/>
+                    </a:lnT>
+                    <a:lnB w="6350" cap="flat" cmpd="sng" algn="ctr">
+                      <a:solidFill>
+                        <a:srgbClr val="E3E8E9"/>
+                      </a:solidFill>
+                      <a:prstDash val="solid"/>
+                      <a:round/>
+                      <a:headEnd type="none" w="med" len="med"/>
+                      <a:tailEnd type="none" w="med" len="med"/>
+                    </a:lnB>
+                    <a:solidFill>
+                      <a:srgbClr val="FFFFFF"/>
+                    </a:solidFill>
+                  </a:tcPr>
+                </a:tc>
+                <a:tc>
+                  <a:txBody>
+                    <a:bodyPr/>
+                    <a:lstStyle/>
+                    <a:p>
+                      <a:pPr algn="r" indent="0" marL="0">
+                        <a:buNone/>
+                      </a:pPr>
+                      <a:r>
+                        <a:rPr lang="en-US" sz="1000" b="1" dirty="0">
+                          <a:solidFill>
+                            <a:srgbClr val="0B2A3D"/>
+                          </a:solidFill>
+                          <a:latin typeface="Calibri" pitchFamily="34" charset="0"/>
+                          <a:ea typeface="Calibri" pitchFamily="34" charset="-122"/>
+                          <a:cs typeface="Calibri" pitchFamily="34" charset="-120"/>
+                        </a:rPr>
+                        <a:t>US$ 1,4 mi</a:t>
+                      </a:r>
+                      <a:endParaRPr lang="en-US" sz="1000" dirty="0">
+                        <a:latin typeface="Calibri" charset="0"/>
+                        <a:ea typeface="Calibri" charset="0"/>
+                        <a:cs typeface="Calibri" charset="0"/>
+                      </a:endParaRPr>
+                    </a:p>
+                  </a:txBody>
+                  <a:tcPr marL="91440" marR="91440" marT="45720" marB="45720" anchor="ctr">
+                    <a:lnL w="6350" cap="flat" cmpd="sng" algn="ctr">
+                      <a:solidFill>
+                        <a:srgbClr val="E3E8E9"/>
+                      </a:solidFill>
+                      <a:prstDash val="solid"/>
+                      <a:round/>
+                      <a:headEnd type="none" w="med" len="med"/>
+                      <a:tailEnd type="none" w="med" len="med"/>
+                    </a:lnL>
+                    <a:lnR w="6350" cap="flat" cmpd="sng" algn="ctr">
+                      <a:solidFill>
+                        <a:srgbClr val="E3E8E9"/>
+                      </a:solidFill>
+                      <a:prstDash val="solid"/>
+                      <a:round/>
+                      <a:headEnd type="none" w="med" len="med"/>
+                      <a:tailEnd type="none" w="med" len="med"/>
+                    </a:lnR>
+                    <a:lnT w="6350" cap="flat" cmpd="sng" algn="ctr">
+                      <a:solidFill>
+                        <a:srgbClr val="E3E8E9"/>
+                      </a:solidFill>
+                      <a:prstDash val="solid"/>
+                      <a:round/>
+                      <a:headEnd type="none" w="med" len="med"/>
+                      <a:tailEnd type="none" w="med" len="med"/>
+                    </a:lnT>
+                    <a:lnB w="6350" cap="flat" cmpd="sng" algn="ctr">
+                      <a:solidFill>
+                        <a:srgbClr val="E3E8E9"/>
+                      </a:solidFill>
+                      <a:prstDash val="solid"/>
+                      <a:round/>
+                      <a:headEnd type="none" w="med" len="med"/>
+                      <a:tailEnd type="none" w="med" len="med"/>
+                    </a:lnB>
+                    <a:solidFill>
+                      <a:srgbClr val="FFFFFF"/>
+                    </a:solidFill>
+                  </a:tcPr>
+                </a:tc>
+              </a:tr>
+              <a:tr h="288036">
+                <a:tc>
+                  <a:txBody>
+                    <a:bodyPr/>
+                    <a:lstStyle/>
+                    <a:p>
+                      <a:pPr indent="0" marL="0">
+                        <a:buNone/>
+                      </a:pPr>
+                      <a:r>
+                        <a:rPr lang="en-US" sz="1000" dirty="0">
+                          <a:solidFill>
+                            <a:srgbClr val="1C2B33"/>
+                          </a:solidFill>
+                          <a:latin typeface="Calibri" pitchFamily="34" charset="0"/>
+                          <a:ea typeface="Calibri" pitchFamily="34" charset="-122"/>
+                          <a:cs typeface="Calibri" pitchFamily="34" charset="-120"/>
+                        </a:rPr>
+                        <a:t>TA - Elétrica</a:t>
+                      </a:r>
+                      <a:endParaRPr lang="en-US" sz="1000" dirty="0">
+                        <a:latin typeface="Calibri" charset="0"/>
+                        <a:ea typeface="Calibri" charset="0"/>
+                        <a:cs typeface="Calibri" charset="0"/>
+                      </a:endParaRPr>
+                    </a:p>
+                  </a:txBody>
+                  <a:tcPr marL="91440" marR="91440" marT="45720" marB="45720" anchor="ctr">
+                    <a:lnL w="6350" cap="flat" cmpd="sng" algn="ctr">
+                      <a:solidFill>
+                        <a:srgbClr val="E3E8E9"/>
+                      </a:solidFill>
+                      <a:prstDash val="solid"/>
+                      <a:round/>
+                      <a:headEnd type="none" w="med" len="med"/>
+                      <a:tailEnd type="none" w="med" len="med"/>
+                    </a:lnL>
+                    <a:lnR w="6350" cap="flat" cmpd="sng" algn="ctr">
+                      <a:solidFill>
+                        <a:srgbClr val="E3E8E9"/>
+                      </a:solidFill>
+                      <a:prstDash val="solid"/>
+                      <a:round/>
+                      <a:headEnd type="none" w="med" len="med"/>
+                      <a:tailEnd type="none" w="med" len="med"/>
+                    </a:lnR>
+                    <a:lnT w="6350" cap="flat" cmpd="sng" algn="ctr">
+                      <a:solidFill>
+                        <a:srgbClr val="E3E8E9"/>
+                      </a:solidFill>
+                      <a:prstDash val="solid"/>
+                      <a:round/>
+                      <a:headEnd type="none" w="med" len="med"/>
+                      <a:tailEnd type="none" w="med" len="med"/>
+                    </a:lnT>
+                    <a:lnB w="6350" cap="flat" cmpd="sng" algn="ctr">
+                      <a:solidFill>
+                        <a:srgbClr val="E3E8E9"/>
+                      </a:solidFill>
+                      <a:prstDash val="solid"/>
+                      <a:round/>
+                      <a:headEnd type="none" w="med" len="med"/>
+                      <a:tailEnd type="none" w="med" len="med"/>
+                    </a:lnB>
+                    <a:solidFill>
+                      <a:srgbClr val="F0F4F5"/>
+                    </a:solidFill>
+                  </a:tcPr>
+                </a:tc>
+                <a:tc>
+                  <a:txBody>
+                    <a:bodyPr/>
+                    <a:lstStyle/>
+                    <a:p>
+                      <a:pPr indent="0" marL="0">
+                        <a:buNone/>
+                      </a:pPr>
+                      <a:r>
+                        <a:rPr lang="en-US" sz="950" dirty="0">
+                          <a:solidFill>
+                            <a:srgbClr val="5B6B73"/>
+                          </a:solidFill>
+                          <a:latin typeface="Calibri" pitchFamily="34" charset="0"/>
+                          <a:ea typeface="Calibri" pitchFamily="34" charset="-122"/>
+                          <a:cs typeface="Calibri" pitchFamily="34" charset="-120"/>
+                        </a:rPr>
+                        <a:t>Eficiência de Produção</a:t>
+                      </a:r>
+                      <a:endParaRPr lang="en-US" sz="950" dirty="0">
+                        <a:latin typeface="Calibri" charset="0"/>
+                        <a:ea typeface="Calibri" charset="0"/>
+                        <a:cs typeface="Calibri" charset="0"/>
+                      </a:endParaRPr>
+                    </a:p>
+                  </a:txBody>
+                  <a:tcPr marL="91440" marR="91440" marT="45720" marB="45720" anchor="ctr">
+                    <a:lnL w="6350" cap="flat" cmpd="sng" algn="ctr">
+                      <a:solidFill>
+                        <a:srgbClr val="E3E8E9"/>
+                      </a:solidFill>
+                      <a:prstDash val="solid"/>
+                      <a:round/>
+                      <a:headEnd type="none" w="med" len="med"/>
+                      <a:tailEnd type="none" w="med" len="med"/>
+                    </a:lnL>
+                    <a:lnR w="6350" cap="flat" cmpd="sng" algn="ctr">
+                      <a:solidFill>
+                        <a:srgbClr val="E3E8E9"/>
+                      </a:solidFill>
+                      <a:prstDash val="solid"/>
+                      <a:round/>
+                      <a:headEnd type="none" w="med" len="med"/>
+                      <a:tailEnd type="none" w="med" len="med"/>
+                    </a:lnR>
+                    <a:lnT w="6350" cap="flat" cmpd="sng" algn="ctr">
+                      <a:solidFill>
+                        <a:srgbClr val="E3E8E9"/>
+                      </a:solidFill>
+                      <a:prstDash val="solid"/>
+                      <a:round/>
+                      <a:headEnd type="none" w="med" len="med"/>
+                      <a:tailEnd type="none" w="med" len="med"/>
+                    </a:lnT>
+                    <a:lnB w="6350" cap="flat" cmpd="sng" algn="ctr">
+                      <a:solidFill>
+                        <a:srgbClr val="E3E8E9"/>
+                      </a:solidFill>
+                      <a:prstDash val="solid"/>
+                      <a:round/>
+                      <a:headEnd type="none" w="med" len="med"/>
+                      <a:tailEnd type="none" w="med" len="med"/>
+                    </a:lnB>
+                    <a:solidFill>
+                      <a:srgbClr val="F0F4F5"/>
+                    </a:solidFill>
+                  </a:tcPr>
+                </a:tc>
+                <a:tc>
+                  <a:txBody>
+                    <a:bodyPr/>
+                    <a:lstStyle/>
+                    <a:p>
+                      <a:pPr indent="0" marL="0">
+                        <a:buNone/>
+                      </a:pPr>
+                      <a:r>
+                        <a:rPr lang="en-US" sz="950" dirty="0">
+                          <a:solidFill>
+                            <a:srgbClr val="5B6B73"/>
+                          </a:solidFill>
+                          <a:latin typeface="Calibri" pitchFamily="34" charset="0"/>
+                          <a:ea typeface="Calibri" pitchFamily="34" charset="-122"/>
+                          <a:cs typeface="Calibri" pitchFamily="34" charset="-120"/>
+                        </a:rPr>
+                        <a:t>TA - Parada Programada</a:t>
+                      </a:r>
+                      <a:endParaRPr lang="en-US" sz="950" dirty="0">
+                        <a:latin typeface="Calibri" charset="0"/>
+                        <a:ea typeface="Calibri" charset="0"/>
+                        <a:cs typeface="Calibri" charset="0"/>
+                      </a:endParaRPr>
+                    </a:p>
+                  </a:txBody>
+                  <a:tcPr marL="91440" marR="91440" marT="45720" marB="45720" anchor="ctr">
+                    <a:lnL w="6350" cap="flat" cmpd="sng" algn="ctr">
+                      <a:solidFill>
+                        <a:srgbClr val="E3E8E9"/>
+                      </a:solidFill>
+                      <a:prstDash val="solid"/>
+                      <a:round/>
+                      <a:headEnd type="none" w="med" len="med"/>
+                      <a:tailEnd type="none" w="med" len="med"/>
+                    </a:lnL>
+                    <a:lnR w="6350" cap="flat" cmpd="sng" algn="ctr">
+                      <a:solidFill>
+                        <a:srgbClr val="E3E8E9"/>
+                      </a:solidFill>
+                      <a:prstDash val="solid"/>
+                      <a:round/>
+                      <a:headEnd type="none" w="med" len="med"/>
+                      <a:tailEnd type="none" w="med" len="med"/>
+                    </a:lnR>
+                    <a:lnT w="6350" cap="flat" cmpd="sng" algn="ctr">
+                      <a:solidFill>
+                        <a:srgbClr val="E3E8E9"/>
+                      </a:solidFill>
+                      <a:prstDash val="solid"/>
+                      <a:round/>
+                      <a:headEnd type="none" w="med" len="med"/>
+                      <a:tailEnd type="none" w="med" len="med"/>
+                    </a:lnT>
+                    <a:lnB w="6350" cap="flat" cmpd="sng" algn="ctr">
+                      <a:solidFill>
+                        <a:srgbClr val="E3E8E9"/>
+                      </a:solidFill>
+                      <a:prstDash val="solid"/>
+                      <a:round/>
+                      <a:headEnd type="none" w="med" len="med"/>
+                      <a:tailEnd type="none" w="med" len="med"/>
+                    </a:lnB>
+                    <a:solidFill>
+                      <a:srgbClr val="F0F4F5"/>
+                    </a:solidFill>
+                  </a:tcPr>
+                </a:tc>
+                <a:tc>
+                  <a:txBody>
+                    <a:bodyPr/>
+                    <a:lstStyle/>
+                    <a:p>
+                      <a:pPr algn="r" indent="0" marL="0">
+                        <a:buNone/>
+                      </a:pPr>
+                      <a:r>
+                        <a:rPr lang="en-US" sz="1000" b="1" dirty="0">
+                          <a:solidFill>
+                            <a:srgbClr val="0B2A3D"/>
+                          </a:solidFill>
+                          <a:latin typeface="Calibri" pitchFamily="34" charset="0"/>
+                          <a:ea typeface="Calibri" pitchFamily="34" charset="-122"/>
+                          <a:cs typeface="Calibri" pitchFamily="34" charset="-120"/>
+                        </a:rPr>
+                        <a:t>US$ 982,4 mil</a:t>
+                      </a:r>
+                      <a:endParaRPr lang="en-US" sz="1000" dirty="0">
+                        <a:latin typeface="Calibri" charset="0"/>
+                        <a:ea typeface="Calibri" charset="0"/>
+                        <a:cs typeface="Calibri" charset="0"/>
+                      </a:endParaRPr>
+                    </a:p>
+                  </a:txBody>
+                  <a:tcPr marL="91440" marR="91440" marT="45720" marB="45720" anchor="ctr">
+                    <a:lnL w="6350" cap="flat" cmpd="sng" algn="ctr">
+                      <a:solidFill>
+                        <a:srgbClr val="E3E8E9"/>
+                      </a:solidFill>
+                      <a:prstDash val="solid"/>
+                      <a:round/>
+                      <a:headEnd type="none" w="med" len="med"/>
+                      <a:tailEnd type="none" w="med" len="med"/>
+                    </a:lnL>
+                    <a:lnR w="6350" cap="flat" cmpd="sng" algn="ctr">
+                      <a:solidFill>
+                        <a:srgbClr val="E3E8E9"/>
+                      </a:solidFill>
+                      <a:prstDash val="solid"/>
+                      <a:round/>
+                      <a:headEnd type="none" w="med" len="med"/>
+                      <a:tailEnd type="none" w="med" len="med"/>
+                    </a:lnR>
+                    <a:lnT w="6350" cap="flat" cmpd="sng" algn="ctr">
+                      <a:solidFill>
+                        <a:srgbClr val="E3E8E9"/>
+                      </a:solidFill>
+                      <a:prstDash val="solid"/>
+                      <a:round/>
+                      <a:headEnd type="none" w="med" len="med"/>
+                      <a:tailEnd type="none" w="med" len="med"/>
+                    </a:lnT>
+                    <a:lnB w="6350" cap="flat" cmpd="sng" algn="ctr">
+                      <a:solidFill>
+                        <a:srgbClr val="E3E8E9"/>
+                      </a:solidFill>
+                      <a:prstDash val="solid"/>
+                      <a:round/>
+                      <a:headEnd type="none" w="med" len="med"/>
+                      <a:tailEnd type="none" w="med" len="med"/>
+                    </a:lnB>
+                    <a:solidFill>
+                      <a:srgbClr val="F0F4F5"/>
+                    </a:solidFill>
+                  </a:tcPr>
+                </a:tc>
+              </a:tr>
+              <a:tr h="288036">
+                <a:tc>
+                  <a:txBody>
+                    <a:bodyPr/>
+                    <a:lstStyle/>
+                    <a:p>
+                      <a:pPr indent="0" marL="0">
+                        <a:buNone/>
+                      </a:pPr>
+                      <a:r>
+                        <a:rPr lang="en-US" sz="1000" dirty="0">
+                          <a:solidFill>
+                            <a:srgbClr val="1C2B33"/>
+                          </a:solidFill>
+                          <a:latin typeface="Calibri" pitchFamily="34" charset="0"/>
+                          <a:ea typeface="Calibri" pitchFamily="34" charset="-122"/>
+                          <a:cs typeface="Calibri" pitchFamily="34" charset="-120"/>
+                        </a:rPr>
+                        <a:t>TA - Caldeiraria</a:t>
+                      </a:r>
+                      <a:endParaRPr lang="en-US" sz="1000" dirty="0">
+                        <a:latin typeface="Calibri" charset="0"/>
+                        <a:ea typeface="Calibri" charset="0"/>
+                        <a:cs typeface="Calibri" charset="0"/>
+                      </a:endParaRPr>
+                    </a:p>
+                  </a:txBody>
+                  <a:tcPr marL="91440" marR="91440" marT="45720" marB="45720" anchor="ctr">
+                    <a:lnL w="6350" cap="flat" cmpd="sng" algn="ctr">
+                      <a:solidFill>
+                        <a:srgbClr val="E3E8E9"/>
+                      </a:solidFill>
+                      <a:prstDash val="solid"/>
+                      <a:round/>
+                      <a:headEnd type="none" w="med" len="med"/>
+                      <a:tailEnd type="none" w="med" len="med"/>
+                    </a:lnL>
+                    <a:lnR w="6350" cap="flat" cmpd="sng" algn="ctr">
+                      <a:solidFill>
+                        <a:srgbClr val="E3E8E9"/>
+                      </a:solidFill>
+                      <a:prstDash val="solid"/>
+                      <a:round/>
+                      <a:headEnd type="none" w="med" len="med"/>
+                      <a:tailEnd type="none" w="med" len="med"/>
+                    </a:lnR>
+                    <a:lnT w="6350" cap="flat" cmpd="sng" algn="ctr">
+                      <a:solidFill>
+                        <a:srgbClr val="E3E8E9"/>
+                      </a:solidFill>
+                      <a:prstDash val="solid"/>
+                      <a:round/>
+                      <a:headEnd type="none" w="med" len="med"/>
+                      <a:tailEnd type="none" w="med" len="med"/>
+                    </a:lnT>
+                    <a:lnB w="6350" cap="flat" cmpd="sng" algn="ctr">
+                      <a:solidFill>
+                        <a:srgbClr val="E3E8E9"/>
+                      </a:solidFill>
+                      <a:prstDash val="solid"/>
+                      <a:round/>
+                      <a:headEnd type="none" w="med" len="med"/>
+                      <a:tailEnd type="none" w="med" len="med"/>
+                    </a:lnB>
+                    <a:solidFill>
+                      <a:srgbClr val="FFFFFF"/>
+                    </a:solidFill>
+                  </a:tcPr>
+                </a:tc>
+                <a:tc>
+                  <a:txBody>
+                    <a:bodyPr/>
+                    <a:lstStyle/>
+                    <a:p>
+                      <a:pPr indent="0" marL="0">
+                        <a:buNone/>
+                      </a:pPr>
+                      <a:r>
+                        <a:rPr lang="en-US" sz="950" dirty="0">
+                          <a:solidFill>
+                            <a:srgbClr val="5B6B73"/>
+                          </a:solidFill>
+                          <a:latin typeface="Calibri" pitchFamily="34" charset="0"/>
+                          <a:ea typeface="Calibri" pitchFamily="34" charset="-122"/>
+                          <a:cs typeface="Calibri" pitchFamily="34" charset="-120"/>
+                        </a:rPr>
+                        <a:t>Eficiência de Produção</a:t>
+                      </a:r>
+                      <a:endParaRPr lang="en-US" sz="950" dirty="0">
+                        <a:latin typeface="Calibri" charset="0"/>
+                        <a:ea typeface="Calibri" charset="0"/>
+                        <a:cs typeface="Calibri" charset="0"/>
+                      </a:endParaRPr>
+                    </a:p>
+                  </a:txBody>
+                  <a:tcPr marL="91440" marR="91440" marT="45720" marB="45720" anchor="ctr">
+                    <a:lnL w="6350" cap="flat" cmpd="sng" algn="ctr">
+                      <a:solidFill>
+                        <a:srgbClr val="E3E8E9"/>
+                      </a:solidFill>
+                      <a:prstDash val="solid"/>
+                      <a:round/>
+                      <a:headEnd type="none" w="med" len="med"/>
+                      <a:tailEnd type="none" w="med" len="med"/>
+                    </a:lnL>
+                    <a:lnR w="6350" cap="flat" cmpd="sng" algn="ctr">
+                      <a:solidFill>
+                        <a:srgbClr val="E3E8E9"/>
+                      </a:solidFill>
+                      <a:prstDash val="solid"/>
+                      <a:round/>
+                      <a:headEnd type="none" w="med" len="med"/>
+                      <a:tailEnd type="none" w="med" len="med"/>
+                    </a:lnR>
+                    <a:lnT w="6350" cap="flat" cmpd="sng" algn="ctr">
+                      <a:solidFill>
+                        <a:srgbClr val="E3E8E9"/>
+                      </a:solidFill>
+                      <a:prstDash val="solid"/>
+                      <a:round/>
+                      <a:headEnd type="none" w="med" len="med"/>
+                      <a:tailEnd type="none" w="med" len="med"/>
+                    </a:lnT>
+                    <a:lnB w="6350" cap="flat" cmpd="sng" algn="ctr">
+                      <a:solidFill>
+                        <a:srgbClr val="E3E8E9"/>
+                      </a:solidFill>
+                      <a:prstDash val="solid"/>
+                      <a:round/>
+                      <a:headEnd type="none" w="med" len="med"/>
+                      <a:tailEnd type="none" w="med" len="med"/>
+                    </a:lnB>
+                    <a:solidFill>
+                      <a:srgbClr val="FFFFFF"/>
+                    </a:solidFill>
+                  </a:tcPr>
+                </a:tc>
+                <a:tc>
+                  <a:txBody>
+                    <a:bodyPr/>
+                    <a:lstStyle/>
+                    <a:p>
+                      <a:pPr indent="0" marL="0">
+                        <a:buNone/>
+                      </a:pPr>
+                      <a:r>
+                        <a:rPr lang="en-US" sz="950" dirty="0">
+                          <a:solidFill>
+                            <a:srgbClr val="5B6B73"/>
+                          </a:solidFill>
+                          <a:latin typeface="Calibri" pitchFamily="34" charset="0"/>
+                          <a:ea typeface="Calibri" pitchFamily="34" charset="-122"/>
+                          <a:cs typeface="Calibri" pitchFamily="34" charset="-120"/>
+                        </a:rPr>
+                        <a:t>TA - Parada Programada</a:t>
+                      </a:r>
+                      <a:endParaRPr lang="en-US" sz="950" dirty="0">
+                        <a:latin typeface="Calibri" charset="0"/>
+                        <a:ea typeface="Calibri" charset="0"/>
+                        <a:cs typeface="Calibri" charset="0"/>
+                      </a:endParaRPr>
+                    </a:p>
+                  </a:txBody>
+                  <a:tcPr marL="91440" marR="91440" marT="45720" marB="45720" anchor="ctr">
+                    <a:lnL w="6350" cap="flat" cmpd="sng" algn="ctr">
+                      <a:solidFill>
+                        <a:srgbClr val="E3E8E9"/>
+                      </a:solidFill>
+                      <a:prstDash val="solid"/>
+                      <a:round/>
+                      <a:headEnd type="none" w="med" len="med"/>
+                      <a:tailEnd type="none" w="med" len="med"/>
+                    </a:lnL>
+                    <a:lnR w="6350" cap="flat" cmpd="sng" algn="ctr">
+                      <a:solidFill>
+                        <a:srgbClr val="E3E8E9"/>
+                      </a:solidFill>
+                      <a:prstDash val="solid"/>
+                      <a:round/>
+                      <a:headEnd type="none" w="med" len="med"/>
+                      <a:tailEnd type="none" w="med" len="med"/>
+                    </a:lnR>
+                    <a:lnT w="6350" cap="flat" cmpd="sng" algn="ctr">
+                      <a:solidFill>
+                        <a:srgbClr val="E3E8E9"/>
+                      </a:solidFill>
+                      <a:prstDash val="solid"/>
+                      <a:round/>
+                      <a:headEnd type="none" w="med" len="med"/>
+                      <a:tailEnd type="none" w="med" len="med"/>
+                    </a:lnT>
+                    <a:lnB w="6350" cap="flat" cmpd="sng" algn="ctr">
+                      <a:solidFill>
+                        <a:srgbClr val="E3E8E9"/>
+                      </a:solidFill>
+                      <a:prstDash val="solid"/>
+                      <a:round/>
+                      <a:headEnd type="none" w="med" len="med"/>
+                      <a:tailEnd type="none" w="med" len="med"/>
+                    </a:lnB>
+                    <a:solidFill>
+                      <a:srgbClr val="FFFFFF"/>
+                    </a:solidFill>
+                  </a:tcPr>
+                </a:tc>
+                <a:tc>
+                  <a:txBody>
+                    <a:bodyPr/>
+                    <a:lstStyle/>
+                    <a:p>
+                      <a:pPr algn="r" indent="0" marL="0">
+                        <a:buNone/>
+                      </a:pPr>
+                      <a:r>
+                        <a:rPr lang="en-US" sz="1000" b="1" dirty="0">
+                          <a:solidFill>
+                            <a:srgbClr val="0B2A3D"/>
+                          </a:solidFill>
+                          <a:latin typeface="Calibri" pitchFamily="34" charset="0"/>
+                          <a:ea typeface="Calibri" pitchFamily="34" charset="-122"/>
+                          <a:cs typeface="Calibri" pitchFamily="34" charset="-120"/>
+                        </a:rPr>
+                        <a:t>US$ 816,1 mil</a:t>
+                      </a:r>
+                      <a:endParaRPr lang="en-US" sz="1000" dirty="0">
+                        <a:latin typeface="Calibri" charset="0"/>
+                        <a:ea typeface="Calibri" charset="0"/>
+                        <a:cs typeface="Calibri" charset="0"/>
+                      </a:endParaRPr>
+                    </a:p>
+                  </a:txBody>
+                  <a:tcPr marL="91440" marR="91440" marT="45720" marB="45720" anchor="ctr">
+                    <a:lnL w="6350" cap="flat" cmpd="sng" algn="ctr">
+                      <a:solidFill>
+                        <a:srgbClr val="E3E8E9"/>
+                      </a:solidFill>
+                      <a:prstDash val="solid"/>
+                      <a:round/>
+                      <a:headEnd type="none" w="med" len="med"/>
+                      <a:tailEnd type="none" w="med" len="med"/>
+                    </a:lnL>
+                    <a:lnR w="6350" cap="flat" cmpd="sng" algn="ctr">
+                      <a:solidFill>
+                        <a:srgbClr val="E3E8E9"/>
+                      </a:solidFill>
+                      <a:prstDash val="solid"/>
+                      <a:round/>
+                      <a:headEnd type="none" w="med" len="med"/>
+                      <a:tailEnd type="none" w="med" len="med"/>
+                    </a:lnR>
+                    <a:lnT w="6350" cap="flat" cmpd="sng" algn="ctr">
+                      <a:solidFill>
+                        <a:srgbClr val="E3E8E9"/>
+                      </a:solidFill>
+                      <a:prstDash val="solid"/>
+                      <a:round/>
+                      <a:headEnd type="none" w="med" len="med"/>
+                      <a:tailEnd type="none" w="med" len="med"/>
+                    </a:lnT>
+                    <a:lnB w="6350" cap="flat" cmpd="sng" algn="ctr">
+                      <a:solidFill>
+                        <a:srgbClr val="E3E8E9"/>
+                      </a:solidFill>
+                      <a:prstDash val="solid"/>
+                      <a:round/>
+                      <a:headEnd type="none" w="med" len="med"/>
+                      <a:tailEnd type="none" w="med" len="med"/>
+                    </a:lnB>
+                    <a:solidFill>
+                      <a:srgbClr val="FFFFFF"/>
+                    </a:solidFill>
+                  </a:tcPr>
+                </a:tc>
+              </a:tr>
+              <a:tr h="288036">
+                <a:tc>
+                  <a:txBody>
+                    <a:bodyPr/>
+                    <a:lstStyle/>
+                    <a:p>
+                      <a:pPr indent="0" marL="0">
+                        <a:buNone/>
+                      </a:pPr>
+                      <a:r>
+                        <a:rPr lang="en-US" sz="1000" dirty="0">
+                          <a:solidFill>
+                            <a:srgbClr val="1C2B33"/>
+                          </a:solidFill>
+                          <a:latin typeface="Calibri" pitchFamily="34" charset="0"/>
+                          <a:ea typeface="Calibri" pitchFamily="34" charset="-122"/>
+                          <a:cs typeface="Calibri" pitchFamily="34" charset="-120"/>
+                        </a:rPr>
+                        <a:t>REVAMP CARGO PUMP - Nº 2</a:t>
                       </a:r>
                       <a:endParaRPr lang="en-US" sz="1000" dirty="0">
                         <a:latin typeface="Calibri" charset="0"/>
@@ -6459,1651 +7653,7 @@
                           <a:ea typeface="Calibri" pitchFamily="34" charset="-122"/>
                           <a:cs typeface="Calibri" pitchFamily="34" charset="-120"/>
                         </a:rPr>
-                        <a:t>US$ 1,7 mi</a:t>
-                      </a:r>
-                      <a:endParaRPr lang="en-US" sz="1000" dirty="0">
-                        <a:latin typeface="Calibri" charset="0"/>
-                        <a:ea typeface="Calibri" charset="0"/>
-                        <a:cs typeface="Calibri" charset="0"/>
-                      </a:endParaRPr>
-                    </a:p>
-                  </a:txBody>
-                  <a:tcPr marL="91440" marR="91440" marT="45720" marB="45720" anchor="ctr">
-                    <a:lnL w="6350" cap="flat" cmpd="sng" algn="ctr">
-                      <a:solidFill>
-                        <a:srgbClr val="E3E8E9"/>
-                      </a:solidFill>
-                      <a:prstDash val="solid"/>
-                      <a:round/>
-                      <a:headEnd type="none" w="med" len="med"/>
-                      <a:tailEnd type="none" w="med" len="med"/>
-                    </a:lnL>
-                    <a:lnR w="6350" cap="flat" cmpd="sng" algn="ctr">
-                      <a:solidFill>
-                        <a:srgbClr val="E3E8E9"/>
-                      </a:solidFill>
-                      <a:prstDash val="solid"/>
-                      <a:round/>
-                      <a:headEnd type="none" w="med" len="med"/>
-                      <a:tailEnd type="none" w="med" len="med"/>
-                    </a:lnR>
-                    <a:lnT w="6350" cap="flat" cmpd="sng" algn="ctr">
-                      <a:solidFill>
-                        <a:srgbClr val="E3E8E9"/>
-                      </a:solidFill>
-                      <a:prstDash val="solid"/>
-                      <a:round/>
-                      <a:headEnd type="none" w="med" len="med"/>
-                      <a:tailEnd type="none" w="med" len="med"/>
-                    </a:lnT>
-                    <a:lnB w="6350" cap="flat" cmpd="sng" algn="ctr">
-                      <a:solidFill>
-                        <a:srgbClr val="E3E8E9"/>
-                      </a:solidFill>
-                      <a:prstDash val="solid"/>
-                      <a:round/>
-                      <a:headEnd type="none" w="med" len="med"/>
-                      <a:tailEnd type="none" w="med" len="med"/>
-                    </a:lnB>
-                    <a:solidFill>
-                      <a:srgbClr val="F0F4F5"/>
-                    </a:solidFill>
-                  </a:tcPr>
-                </a:tc>
-              </a:tr>
-              <a:tr h="288036">
-                <a:tc>
-                  <a:txBody>
-                    <a:bodyPr/>
-                    <a:lstStyle/>
-                    <a:p>
-                      <a:pPr indent="0" marL="0">
-                        <a:buNone/>
-                      </a:pPr>
-                      <a:r>
-                        <a:rPr lang="en-US" sz="1000" dirty="0">
-                          <a:solidFill>
-                            <a:srgbClr val="1C2B33"/>
-                          </a:solidFill>
-                          <a:latin typeface="Calibri" pitchFamily="34" charset="0"/>
-                          <a:ea typeface="Calibri" pitchFamily="34" charset="-122"/>
-                          <a:cs typeface="Calibri" pitchFamily="34" charset="-120"/>
-                        </a:rPr>
-                        <a:t>TA - Mecânica</a:t>
-                      </a:r>
-                      <a:endParaRPr lang="en-US" sz="1000" dirty="0">
-                        <a:latin typeface="Calibri" charset="0"/>
-                        <a:ea typeface="Calibri" charset="0"/>
-                        <a:cs typeface="Calibri" charset="0"/>
-                      </a:endParaRPr>
-                    </a:p>
-                  </a:txBody>
-                  <a:tcPr marL="91440" marR="91440" marT="45720" marB="45720" anchor="ctr">
-                    <a:lnL w="6350" cap="flat" cmpd="sng" algn="ctr">
-                      <a:solidFill>
-                        <a:srgbClr val="E3E8E9"/>
-                      </a:solidFill>
-                      <a:prstDash val="solid"/>
-                      <a:round/>
-                      <a:headEnd type="none" w="med" len="med"/>
-                      <a:tailEnd type="none" w="med" len="med"/>
-                    </a:lnL>
-                    <a:lnR w="6350" cap="flat" cmpd="sng" algn="ctr">
-                      <a:solidFill>
-                        <a:srgbClr val="E3E8E9"/>
-                      </a:solidFill>
-                      <a:prstDash val="solid"/>
-                      <a:round/>
-                      <a:headEnd type="none" w="med" len="med"/>
-                      <a:tailEnd type="none" w="med" len="med"/>
-                    </a:lnR>
-                    <a:lnT w="6350" cap="flat" cmpd="sng" algn="ctr">
-                      <a:solidFill>
-                        <a:srgbClr val="E3E8E9"/>
-                      </a:solidFill>
-                      <a:prstDash val="solid"/>
-                      <a:round/>
-                      <a:headEnd type="none" w="med" len="med"/>
-                      <a:tailEnd type="none" w="med" len="med"/>
-                    </a:lnT>
-                    <a:lnB w="6350" cap="flat" cmpd="sng" algn="ctr">
-                      <a:solidFill>
-                        <a:srgbClr val="E3E8E9"/>
-                      </a:solidFill>
-                      <a:prstDash val="solid"/>
-                      <a:round/>
-                      <a:headEnd type="none" w="med" len="med"/>
-                      <a:tailEnd type="none" w="med" len="med"/>
-                    </a:lnB>
-                    <a:solidFill>
-                      <a:srgbClr val="FFFFFF"/>
-                    </a:solidFill>
-                  </a:tcPr>
-                </a:tc>
-                <a:tc>
-                  <a:txBody>
-                    <a:bodyPr/>
-                    <a:lstStyle/>
-                    <a:p>
-                      <a:pPr indent="0" marL="0">
-                        <a:buNone/>
-                      </a:pPr>
-                      <a:r>
-                        <a:rPr lang="en-US" sz="950" dirty="0">
-                          <a:solidFill>
-                            <a:srgbClr val="5B6B73"/>
-                          </a:solidFill>
-                          <a:latin typeface="Calibri" pitchFamily="34" charset="0"/>
-                          <a:ea typeface="Calibri" pitchFamily="34" charset="-122"/>
-                          <a:cs typeface="Calibri" pitchFamily="34" charset="-120"/>
-                        </a:rPr>
-                        <a:t>Eficiência de Produção</a:t>
-                      </a:r>
-                      <a:endParaRPr lang="en-US" sz="950" dirty="0">
-                        <a:latin typeface="Calibri" charset="0"/>
-                        <a:ea typeface="Calibri" charset="0"/>
-                        <a:cs typeface="Calibri" charset="0"/>
-                      </a:endParaRPr>
-                    </a:p>
-                  </a:txBody>
-                  <a:tcPr marL="91440" marR="91440" marT="45720" marB="45720" anchor="ctr">
-                    <a:lnL w="6350" cap="flat" cmpd="sng" algn="ctr">
-                      <a:solidFill>
-                        <a:srgbClr val="E3E8E9"/>
-                      </a:solidFill>
-                      <a:prstDash val="solid"/>
-                      <a:round/>
-                      <a:headEnd type="none" w="med" len="med"/>
-                      <a:tailEnd type="none" w="med" len="med"/>
-                    </a:lnL>
-                    <a:lnR w="6350" cap="flat" cmpd="sng" algn="ctr">
-                      <a:solidFill>
-                        <a:srgbClr val="E3E8E9"/>
-                      </a:solidFill>
-                      <a:prstDash val="solid"/>
-                      <a:round/>
-                      <a:headEnd type="none" w="med" len="med"/>
-                      <a:tailEnd type="none" w="med" len="med"/>
-                    </a:lnR>
-                    <a:lnT w="6350" cap="flat" cmpd="sng" algn="ctr">
-                      <a:solidFill>
-                        <a:srgbClr val="E3E8E9"/>
-                      </a:solidFill>
-                      <a:prstDash val="solid"/>
-                      <a:round/>
-                      <a:headEnd type="none" w="med" len="med"/>
-                      <a:tailEnd type="none" w="med" len="med"/>
-                    </a:lnT>
-                    <a:lnB w="6350" cap="flat" cmpd="sng" algn="ctr">
-                      <a:solidFill>
-                        <a:srgbClr val="E3E8E9"/>
-                      </a:solidFill>
-                      <a:prstDash val="solid"/>
-                      <a:round/>
-                      <a:headEnd type="none" w="med" len="med"/>
-                      <a:tailEnd type="none" w="med" len="med"/>
-                    </a:lnB>
-                    <a:solidFill>
-                      <a:srgbClr val="FFFFFF"/>
-                    </a:solidFill>
-                  </a:tcPr>
-                </a:tc>
-                <a:tc>
-                  <a:txBody>
-                    <a:bodyPr/>
-                    <a:lstStyle/>
-                    <a:p>
-                      <a:pPr indent="0" marL="0">
-                        <a:buNone/>
-                      </a:pPr>
-                      <a:r>
-                        <a:rPr lang="en-US" sz="950" dirty="0">
-                          <a:solidFill>
-                            <a:srgbClr val="5B6B73"/>
-                          </a:solidFill>
-                          <a:latin typeface="Calibri" pitchFamily="34" charset="0"/>
-                          <a:ea typeface="Calibri" pitchFamily="34" charset="-122"/>
-                          <a:cs typeface="Calibri" pitchFamily="34" charset="-120"/>
-                        </a:rPr>
-                        <a:t>TA - Parada Programada</a:t>
-                      </a:r>
-                      <a:endParaRPr lang="en-US" sz="950" dirty="0">
-                        <a:latin typeface="Calibri" charset="0"/>
-                        <a:ea typeface="Calibri" charset="0"/>
-                        <a:cs typeface="Calibri" charset="0"/>
-                      </a:endParaRPr>
-                    </a:p>
-                  </a:txBody>
-                  <a:tcPr marL="91440" marR="91440" marT="45720" marB="45720" anchor="ctr">
-                    <a:lnL w="6350" cap="flat" cmpd="sng" algn="ctr">
-                      <a:solidFill>
-                        <a:srgbClr val="E3E8E9"/>
-                      </a:solidFill>
-                      <a:prstDash val="solid"/>
-                      <a:round/>
-                      <a:headEnd type="none" w="med" len="med"/>
-                      <a:tailEnd type="none" w="med" len="med"/>
-                    </a:lnL>
-                    <a:lnR w="6350" cap="flat" cmpd="sng" algn="ctr">
-                      <a:solidFill>
-                        <a:srgbClr val="E3E8E9"/>
-                      </a:solidFill>
-                      <a:prstDash val="solid"/>
-                      <a:round/>
-                      <a:headEnd type="none" w="med" len="med"/>
-                      <a:tailEnd type="none" w="med" len="med"/>
-                    </a:lnR>
-                    <a:lnT w="6350" cap="flat" cmpd="sng" algn="ctr">
-                      <a:solidFill>
-                        <a:srgbClr val="E3E8E9"/>
-                      </a:solidFill>
-                      <a:prstDash val="solid"/>
-                      <a:round/>
-                      <a:headEnd type="none" w="med" len="med"/>
-                      <a:tailEnd type="none" w="med" len="med"/>
-                    </a:lnT>
-                    <a:lnB w="6350" cap="flat" cmpd="sng" algn="ctr">
-                      <a:solidFill>
-                        <a:srgbClr val="E3E8E9"/>
-                      </a:solidFill>
-                      <a:prstDash val="solid"/>
-                      <a:round/>
-                      <a:headEnd type="none" w="med" len="med"/>
-                      <a:tailEnd type="none" w="med" len="med"/>
-                    </a:lnB>
-                    <a:solidFill>
-                      <a:srgbClr val="FFFFFF"/>
-                    </a:solidFill>
-                  </a:tcPr>
-                </a:tc>
-                <a:tc>
-                  <a:txBody>
-                    <a:bodyPr/>
-                    <a:lstStyle/>
-                    <a:p>
-                      <a:pPr algn="r" indent="0" marL="0">
-                        <a:buNone/>
-                      </a:pPr>
-                      <a:r>
-                        <a:rPr lang="en-US" sz="1000" b="1" dirty="0">
-                          <a:solidFill>
-                            <a:srgbClr val="0B2A3D"/>
-                          </a:solidFill>
-                          <a:latin typeface="Calibri" pitchFamily="34" charset="0"/>
-                          <a:ea typeface="Calibri" pitchFamily="34" charset="-122"/>
-                          <a:cs typeface="Calibri" pitchFamily="34" charset="-120"/>
-                        </a:rPr>
-                        <a:t>US$ 1,5 mi</a:t>
-                      </a:r>
-                      <a:endParaRPr lang="en-US" sz="1000" dirty="0">
-                        <a:latin typeface="Calibri" charset="0"/>
-                        <a:ea typeface="Calibri" charset="0"/>
-                        <a:cs typeface="Calibri" charset="0"/>
-                      </a:endParaRPr>
-                    </a:p>
-                  </a:txBody>
-                  <a:tcPr marL="91440" marR="91440" marT="45720" marB="45720" anchor="ctr">
-                    <a:lnL w="6350" cap="flat" cmpd="sng" algn="ctr">
-                      <a:solidFill>
-                        <a:srgbClr val="E3E8E9"/>
-                      </a:solidFill>
-                      <a:prstDash val="solid"/>
-                      <a:round/>
-                      <a:headEnd type="none" w="med" len="med"/>
-                      <a:tailEnd type="none" w="med" len="med"/>
-                    </a:lnL>
-                    <a:lnR w="6350" cap="flat" cmpd="sng" algn="ctr">
-                      <a:solidFill>
-                        <a:srgbClr val="E3E8E9"/>
-                      </a:solidFill>
-                      <a:prstDash val="solid"/>
-                      <a:round/>
-                      <a:headEnd type="none" w="med" len="med"/>
-                      <a:tailEnd type="none" w="med" len="med"/>
-                    </a:lnR>
-                    <a:lnT w="6350" cap="flat" cmpd="sng" algn="ctr">
-                      <a:solidFill>
-                        <a:srgbClr val="E3E8E9"/>
-                      </a:solidFill>
-                      <a:prstDash val="solid"/>
-                      <a:round/>
-                      <a:headEnd type="none" w="med" len="med"/>
-                      <a:tailEnd type="none" w="med" len="med"/>
-                    </a:lnT>
-                    <a:lnB w="6350" cap="flat" cmpd="sng" algn="ctr">
-                      <a:solidFill>
-                        <a:srgbClr val="E3E8E9"/>
-                      </a:solidFill>
-                      <a:prstDash val="solid"/>
-                      <a:round/>
-                      <a:headEnd type="none" w="med" len="med"/>
-                      <a:tailEnd type="none" w="med" len="med"/>
-                    </a:lnB>
-                    <a:solidFill>
-                      <a:srgbClr val="FFFFFF"/>
-                    </a:solidFill>
-                  </a:tcPr>
-                </a:tc>
-              </a:tr>
-              <a:tr h="288036">
-                <a:tc>
-                  <a:txBody>
-                    <a:bodyPr/>
-                    <a:lstStyle/>
-                    <a:p>
-                      <a:pPr indent="0" marL="0">
-                        <a:buNone/>
-                      </a:pPr>
-                      <a:r>
-                        <a:rPr lang="en-US" sz="1000" dirty="0">
-                          <a:solidFill>
-                            <a:srgbClr val="1C2B33"/>
-                          </a:solidFill>
-                          <a:latin typeface="Calibri" pitchFamily="34" charset="0"/>
-                          <a:ea typeface="Calibri" pitchFamily="34" charset="-122"/>
-                          <a:cs typeface="Calibri" pitchFamily="34" charset="-120"/>
-                        </a:rPr>
-                        <a:t>TA - Swivel - Pacote Hidráulico (OneSubsea)</a:t>
-                      </a:r>
-                      <a:endParaRPr lang="en-US" sz="1000" dirty="0">
-                        <a:latin typeface="Calibri" charset="0"/>
-                        <a:ea typeface="Calibri" charset="0"/>
-                        <a:cs typeface="Calibri" charset="0"/>
-                      </a:endParaRPr>
-                    </a:p>
-                  </a:txBody>
-                  <a:tcPr marL="91440" marR="91440" marT="45720" marB="45720" anchor="ctr">
-                    <a:lnL w="6350" cap="flat" cmpd="sng" algn="ctr">
-                      <a:solidFill>
-                        <a:srgbClr val="E3E8E9"/>
-                      </a:solidFill>
-                      <a:prstDash val="solid"/>
-                      <a:round/>
-                      <a:headEnd type="none" w="med" len="med"/>
-                      <a:tailEnd type="none" w="med" len="med"/>
-                    </a:lnL>
-                    <a:lnR w="6350" cap="flat" cmpd="sng" algn="ctr">
-                      <a:solidFill>
-                        <a:srgbClr val="E3E8E9"/>
-                      </a:solidFill>
-                      <a:prstDash val="solid"/>
-                      <a:round/>
-                      <a:headEnd type="none" w="med" len="med"/>
-                      <a:tailEnd type="none" w="med" len="med"/>
-                    </a:lnR>
-                    <a:lnT w="6350" cap="flat" cmpd="sng" algn="ctr">
-                      <a:solidFill>
-                        <a:srgbClr val="E3E8E9"/>
-                      </a:solidFill>
-                      <a:prstDash val="solid"/>
-                      <a:round/>
-                      <a:headEnd type="none" w="med" len="med"/>
-                      <a:tailEnd type="none" w="med" len="med"/>
-                    </a:lnT>
-                    <a:lnB w="6350" cap="flat" cmpd="sng" algn="ctr">
-                      <a:solidFill>
-                        <a:srgbClr val="E3E8E9"/>
-                      </a:solidFill>
-                      <a:prstDash val="solid"/>
-                      <a:round/>
-                      <a:headEnd type="none" w="med" len="med"/>
-                      <a:tailEnd type="none" w="med" len="med"/>
-                    </a:lnB>
-                    <a:solidFill>
-                      <a:srgbClr val="F0F4F5"/>
-                    </a:solidFill>
-                  </a:tcPr>
-                </a:tc>
-                <a:tc>
-                  <a:txBody>
-                    <a:bodyPr/>
-                    <a:lstStyle/>
-                    <a:p>
-                      <a:pPr indent="0" marL="0">
-                        <a:buNone/>
-                      </a:pPr>
-                      <a:r>
-                        <a:rPr lang="en-US" sz="950" dirty="0">
-                          <a:solidFill>
-                            <a:srgbClr val="5B6B73"/>
-                          </a:solidFill>
-                          <a:latin typeface="Calibri" pitchFamily="34" charset="0"/>
-                          <a:ea typeface="Calibri" pitchFamily="34" charset="-122"/>
-                          <a:cs typeface="Calibri" pitchFamily="34" charset="-120"/>
-                        </a:rPr>
-                        <a:t>Integridade e Regulatório</a:t>
-                      </a:r>
-                      <a:endParaRPr lang="en-US" sz="950" dirty="0">
-                        <a:latin typeface="Calibri" charset="0"/>
-                        <a:ea typeface="Calibri" charset="0"/>
-                        <a:cs typeface="Calibri" charset="0"/>
-                      </a:endParaRPr>
-                    </a:p>
-                  </a:txBody>
-                  <a:tcPr marL="91440" marR="91440" marT="45720" marB="45720" anchor="ctr">
-                    <a:lnL w="6350" cap="flat" cmpd="sng" algn="ctr">
-                      <a:solidFill>
-                        <a:srgbClr val="E3E8E9"/>
-                      </a:solidFill>
-                      <a:prstDash val="solid"/>
-                      <a:round/>
-                      <a:headEnd type="none" w="med" len="med"/>
-                      <a:tailEnd type="none" w="med" len="med"/>
-                    </a:lnL>
-                    <a:lnR w="6350" cap="flat" cmpd="sng" algn="ctr">
-                      <a:solidFill>
-                        <a:srgbClr val="E3E8E9"/>
-                      </a:solidFill>
-                      <a:prstDash val="solid"/>
-                      <a:round/>
-                      <a:headEnd type="none" w="med" len="med"/>
-                      <a:tailEnd type="none" w="med" len="med"/>
-                    </a:lnR>
-                    <a:lnT w="6350" cap="flat" cmpd="sng" algn="ctr">
-                      <a:solidFill>
-                        <a:srgbClr val="E3E8E9"/>
-                      </a:solidFill>
-                      <a:prstDash val="solid"/>
-                      <a:round/>
-                      <a:headEnd type="none" w="med" len="med"/>
-                      <a:tailEnd type="none" w="med" len="med"/>
-                    </a:lnT>
-                    <a:lnB w="6350" cap="flat" cmpd="sng" algn="ctr">
-                      <a:solidFill>
-                        <a:srgbClr val="E3E8E9"/>
-                      </a:solidFill>
-                      <a:prstDash val="solid"/>
-                      <a:round/>
-                      <a:headEnd type="none" w="med" len="med"/>
-                      <a:tailEnd type="none" w="med" len="med"/>
-                    </a:lnB>
-                    <a:solidFill>
-                      <a:srgbClr val="F0F4F5"/>
-                    </a:solidFill>
-                  </a:tcPr>
-                </a:tc>
-                <a:tc>
-                  <a:txBody>
-                    <a:bodyPr/>
-                    <a:lstStyle/>
-                    <a:p>
-                      <a:pPr indent="0" marL="0">
-                        <a:buNone/>
-                      </a:pPr>
-                      <a:r>
-                        <a:rPr lang="en-US" sz="950" dirty="0">
-                          <a:solidFill>
-                            <a:srgbClr val="5B6B73"/>
-                          </a:solidFill>
-                          <a:latin typeface="Calibri" pitchFamily="34" charset="0"/>
-                          <a:ea typeface="Calibri" pitchFamily="34" charset="-122"/>
-                          <a:cs typeface="Calibri" pitchFamily="34" charset="-120"/>
-                        </a:rPr>
-                        <a:t>P&amp;Q - Processos</a:t>
-                      </a:r>
-                      <a:endParaRPr lang="en-US" sz="950" dirty="0">
-                        <a:latin typeface="Calibri" charset="0"/>
-                        <a:ea typeface="Calibri" charset="0"/>
-                        <a:cs typeface="Calibri" charset="0"/>
-                      </a:endParaRPr>
-                    </a:p>
-                  </a:txBody>
-                  <a:tcPr marL="91440" marR="91440" marT="45720" marB="45720" anchor="ctr">
-                    <a:lnL w="6350" cap="flat" cmpd="sng" algn="ctr">
-                      <a:solidFill>
-                        <a:srgbClr val="E3E8E9"/>
-                      </a:solidFill>
-                      <a:prstDash val="solid"/>
-                      <a:round/>
-                      <a:headEnd type="none" w="med" len="med"/>
-                      <a:tailEnd type="none" w="med" len="med"/>
-                    </a:lnL>
-                    <a:lnR w="6350" cap="flat" cmpd="sng" algn="ctr">
-                      <a:solidFill>
-                        <a:srgbClr val="E3E8E9"/>
-                      </a:solidFill>
-                      <a:prstDash val="solid"/>
-                      <a:round/>
-                      <a:headEnd type="none" w="med" len="med"/>
-                      <a:tailEnd type="none" w="med" len="med"/>
-                    </a:lnR>
-                    <a:lnT w="6350" cap="flat" cmpd="sng" algn="ctr">
-                      <a:solidFill>
-                        <a:srgbClr val="E3E8E9"/>
-                      </a:solidFill>
-                      <a:prstDash val="solid"/>
-                      <a:round/>
-                      <a:headEnd type="none" w="med" len="med"/>
-                      <a:tailEnd type="none" w="med" len="med"/>
-                    </a:lnT>
-                    <a:lnB w="6350" cap="flat" cmpd="sng" algn="ctr">
-                      <a:solidFill>
-                        <a:srgbClr val="E3E8E9"/>
-                      </a:solidFill>
-                      <a:prstDash val="solid"/>
-                      <a:round/>
-                      <a:headEnd type="none" w="med" len="med"/>
-                      <a:tailEnd type="none" w="med" len="med"/>
-                    </a:lnB>
-                    <a:solidFill>
-                      <a:srgbClr val="F0F4F5"/>
-                    </a:solidFill>
-                  </a:tcPr>
-                </a:tc>
-                <a:tc>
-                  <a:txBody>
-                    <a:bodyPr/>
-                    <a:lstStyle/>
-                    <a:p>
-                      <a:pPr algn="r" indent="0" marL="0">
-                        <a:buNone/>
-                      </a:pPr>
-                      <a:r>
-                        <a:rPr lang="en-US" sz="1000" b="1" dirty="0">
-                          <a:solidFill>
-                            <a:srgbClr val="0B2A3D"/>
-                          </a:solidFill>
-                          <a:latin typeface="Calibri" pitchFamily="34" charset="0"/>
-                          <a:ea typeface="Calibri" pitchFamily="34" charset="-122"/>
-                          <a:cs typeface="Calibri" pitchFamily="34" charset="-120"/>
-                        </a:rPr>
-                        <a:t>US$ 1,4 mi</a:t>
-                      </a:r>
-                      <a:endParaRPr lang="en-US" sz="1000" dirty="0">
-                        <a:latin typeface="Calibri" charset="0"/>
-                        <a:ea typeface="Calibri" charset="0"/>
-                        <a:cs typeface="Calibri" charset="0"/>
-                      </a:endParaRPr>
-                    </a:p>
-                  </a:txBody>
-                  <a:tcPr marL="91440" marR="91440" marT="45720" marB="45720" anchor="ctr">
-                    <a:lnL w="6350" cap="flat" cmpd="sng" algn="ctr">
-                      <a:solidFill>
-                        <a:srgbClr val="E3E8E9"/>
-                      </a:solidFill>
-                      <a:prstDash val="solid"/>
-                      <a:round/>
-                      <a:headEnd type="none" w="med" len="med"/>
-                      <a:tailEnd type="none" w="med" len="med"/>
-                    </a:lnL>
-                    <a:lnR w="6350" cap="flat" cmpd="sng" algn="ctr">
-                      <a:solidFill>
-                        <a:srgbClr val="E3E8E9"/>
-                      </a:solidFill>
-                      <a:prstDash val="solid"/>
-                      <a:round/>
-                      <a:headEnd type="none" w="med" len="med"/>
-                      <a:tailEnd type="none" w="med" len="med"/>
-                    </a:lnR>
-                    <a:lnT w="6350" cap="flat" cmpd="sng" algn="ctr">
-                      <a:solidFill>
-                        <a:srgbClr val="E3E8E9"/>
-                      </a:solidFill>
-                      <a:prstDash val="solid"/>
-                      <a:round/>
-                      <a:headEnd type="none" w="med" len="med"/>
-                      <a:tailEnd type="none" w="med" len="med"/>
-                    </a:lnT>
-                    <a:lnB w="6350" cap="flat" cmpd="sng" algn="ctr">
-                      <a:solidFill>
-                        <a:srgbClr val="E3E8E9"/>
-                      </a:solidFill>
-                      <a:prstDash val="solid"/>
-                      <a:round/>
-                      <a:headEnd type="none" w="med" len="med"/>
-                      <a:tailEnd type="none" w="med" len="med"/>
-                    </a:lnB>
-                    <a:solidFill>
-                      <a:srgbClr val="F0F4F5"/>
-                    </a:solidFill>
-                  </a:tcPr>
-                </a:tc>
-              </a:tr>
-              <a:tr h="288036">
-                <a:tc>
-                  <a:txBody>
-                    <a:bodyPr/>
-                    <a:lstStyle/>
-                    <a:p>
-                      <a:pPr indent="0" marL="0">
-                        <a:buNone/>
-                      </a:pPr>
-                      <a:r>
-                        <a:rPr lang="en-US" sz="1000" dirty="0">
-                          <a:solidFill>
-                            <a:srgbClr val="1C2B33"/>
-                          </a:solidFill>
-                          <a:latin typeface="Calibri" pitchFamily="34" charset="0"/>
-                          <a:ea typeface="Calibri" pitchFamily="34" charset="-122"/>
-                          <a:cs typeface="Calibri" pitchFamily="34" charset="-120"/>
-                        </a:rPr>
-                        <a:t>TA - Elétrica</a:t>
-                      </a:r>
-                      <a:endParaRPr lang="en-US" sz="1000" dirty="0">
-                        <a:latin typeface="Calibri" charset="0"/>
-                        <a:ea typeface="Calibri" charset="0"/>
-                        <a:cs typeface="Calibri" charset="0"/>
-                      </a:endParaRPr>
-                    </a:p>
-                  </a:txBody>
-                  <a:tcPr marL="91440" marR="91440" marT="45720" marB="45720" anchor="ctr">
-                    <a:lnL w="6350" cap="flat" cmpd="sng" algn="ctr">
-                      <a:solidFill>
-                        <a:srgbClr val="E3E8E9"/>
-                      </a:solidFill>
-                      <a:prstDash val="solid"/>
-                      <a:round/>
-                      <a:headEnd type="none" w="med" len="med"/>
-                      <a:tailEnd type="none" w="med" len="med"/>
-                    </a:lnL>
-                    <a:lnR w="6350" cap="flat" cmpd="sng" algn="ctr">
-                      <a:solidFill>
-                        <a:srgbClr val="E3E8E9"/>
-                      </a:solidFill>
-                      <a:prstDash val="solid"/>
-                      <a:round/>
-                      <a:headEnd type="none" w="med" len="med"/>
-                      <a:tailEnd type="none" w="med" len="med"/>
-                    </a:lnR>
-                    <a:lnT w="6350" cap="flat" cmpd="sng" algn="ctr">
-                      <a:solidFill>
-                        <a:srgbClr val="E3E8E9"/>
-                      </a:solidFill>
-                      <a:prstDash val="solid"/>
-                      <a:round/>
-                      <a:headEnd type="none" w="med" len="med"/>
-                      <a:tailEnd type="none" w="med" len="med"/>
-                    </a:lnT>
-                    <a:lnB w="6350" cap="flat" cmpd="sng" algn="ctr">
-                      <a:solidFill>
-                        <a:srgbClr val="E3E8E9"/>
-                      </a:solidFill>
-                      <a:prstDash val="solid"/>
-                      <a:round/>
-                      <a:headEnd type="none" w="med" len="med"/>
-                      <a:tailEnd type="none" w="med" len="med"/>
-                    </a:lnB>
-                    <a:solidFill>
-                      <a:srgbClr val="FFFFFF"/>
-                    </a:solidFill>
-                  </a:tcPr>
-                </a:tc>
-                <a:tc>
-                  <a:txBody>
-                    <a:bodyPr/>
-                    <a:lstStyle/>
-                    <a:p>
-                      <a:pPr indent="0" marL="0">
-                        <a:buNone/>
-                      </a:pPr>
-                      <a:r>
-                        <a:rPr lang="en-US" sz="950" dirty="0">
-                          <a:solidFill>
-                            <a:srgbClr val="5B6B73"/>
-                          </a:solidFill>
-                          <a:latin typeface="Calibri" pitchFamily="34" charset="0"/>
-                          <a:ea typeface="Calibri" pitchFamily="34" charset="-122"/>
-                          <a:cs typeface="Calibri" pitchFamily="34" charset="-120"/>
-                        </a:rPr>
-                        <a:t>Eficiência de Produção</a:t>
-                      </a:r>
-                      <a:endParaRPr lang="en-US" sz="950" dirty="0">
-                        <a:latin typeface="Calibri" charset="0"/>
-                        <a:ea typeface="Calibri" charset="0"/>
-                        <a:cs typeface="Calibri" charset="0"/>
-                      </a:endParaRPr>
-                    </a:p>
-                  </a:txBody>
-                  <a:tcPr marL="91440" marR="91440" marT="45720" marB="45720" anchor="ctr">
-                    <a:lnL w="6350" cap="flat" cmpd="sng" algn="ctr">
-                      <a:solidFill>
-                        <a:srgbClr val="E3E8E9"/>
-                      </a:solidFill>
-                      <a:prstDash val="solid"/>
-                      <a:round/>
-                      <a:headEnd type="none" w="med" len="med"/>
-                      <a:tailEnd type="none" w="med" len="med"/>
-                    </a:lnL>
-                    <a:lnR w="6350" cap="flat" cmpd="sng" algn="ctr">
-                      <a:solidFill>
-                        <a:srgbClr val="E3E8E9"/>
-                      </a:solidFill>
-                      <a:prstDash val="solid"/>
-                      <a:round/>
-                      <a:headEnd type="none" w="med" len="med"/>
-                      <a:tailEnd type="none" w="med" len="med"/>
-                    </a:lnR>
-                    <a:lnT w="6350" cap="flat" cmpd="sng" algn="ctr">
-                      <a:solidFill>
-                        <a:srgbClr val="E3E8E9"/>
-                      </a:solidFill>
-                      <a:prstDash val="solid"/>
-                      <a:round/>
-                      <a:headEnd type="none" w="med" len="med"/>
-                      <a:tailEnd type="none" w="med" len="med"/>
-                    </a:lnT>
-                    <a:lnB w="6350" cap="flat" cmpd="sng" algn="ctr">
-                      <a:solidFill>
-                        <a:srgbClr val="E3E8E9"/>
-                      </a:solidFill>
-                      <a:prstDash val="solid"/>
-                      <a:round/>
-                      <a:headEnd type="none" w="med" len="med"/>
-                      <a:tailEnd type="none" w="med" len="med"/>
-                    </a:lnB>
-                    <a:solidFill>
-                      <a:srgbClr val="FFFFFF"/>
-                    </a:solidFill>
-                  </a:tcPr>
-                </a:tc>
-                <a:tc>
-                  <a:txBody>
-                    <a:bodyPr/>
-                    <a:lstStyle/>
-                    <a:p>
-                      <a:pPr indent="0" marL="0">
-                        <a:buNone/>
-                      </a:pPr>
-                      <a:r>
-                        <a:rPr lang="en-US" sz="950" dirty="0">
-                          <a:solidFill>
-                            <a:srgbClr val="5B6B73"/>
-                          </a:solidFill>
-                          <a:latin typeface="Calibri" pitchFamily="34" charset="0"/>
-                          <a:ea typeface="Calibri" pitchFamily="34" charset="-122"/>
-                          <a:cs typeface="Calibri" pitchFamily="34" charset="-120"/>
-                        </a:rPr>
-                        <a:t>TA - Parada Programada</a:t>
-                      </a:r>
-                      <a:endParaRPr lang="en-US" sz="950" dirty="0">
-                        <a:latin typeface="Calibri" charset="0"/>
-                        <a:ea typeface="Calibri" charset="0"/>
-                        <a:cs typeface="Calibri" charset="0"/>
-                      </a:endParaRPr>
-                    </a:p>
-                  </a:txBody>
-                  <a:tcPr marL="91440" marR="91440" marT="45720" marB="45720" anchor="ctr">
-                    <a:lnL w="6350" cap="flat" cmpd="sng" algn="ctr">
-                      <a:solidFill>
-                        <a:srgbClr val="E3E8E9"/>
-                      </a:solidFill>
-                      <a:prstDash val="solid"/>
-                      <a:round/>
-                      <a:headEnd type="none" w="med" len="med"/>
-                      <a:tailEnd type="none" w="med" len="med"/>
-                    </a:lnL>
-                    <a:lnR w="6350" cap="flat" cmpd="sng" algn="ctr">
-                      <a:solidFill>
-                        <a:srgbClr val="E3E8E9"/>
-                      </a:solidFill>
-                      <a:prstDash val="solid"/>
-                      <a:round/>
-                      <a:headEnd type="none" w="med" len="med"/>
-                      <a:tailEnd type="none" w="med" len="med"/>
-                    </a:lnR>
-                    <a:lnT w="6350" cap="flat" cmpd="sng" algn="ctr">
-                      <a:solidFill>
-                        <a:srgbClr val="E3E8E9"/>
-                      </a:solidFill>
-                      <a:prstDash val="solid"/>
-                      <a:round/>
-                      <a:headEnd type="none" w="med" len="med"/>
-                      <a:tailEnd type="none" w="med" len="med"/>
-                    </a:lnT>
-                    <a:lnB w="6350" cap="flat" cmpd="sng" algn="ctr">
-                      <a:solidFill>
-                        <a:srgbClr val="E3E8E9"/>
-                      </a:solidFill>
-                      <a:prstDash val="solid"/>
-                      <a:round/>
-                      <a:headEnd type="none" w="med" len="med"/>
-                      <a:tailEnd type="none" w="med" len="med"/>
-                    </a:lnB>
-                    <a:solidFill>
-                      <a:srgbClr val="FFFFFF"/>
-                    </a:solidFill>
-                  </a:tcPr>
-                </a:tc>
-                <a:tc>
-                  <a:txBody>
-                    <a:bodyPr/>
-                    <a:lstStyle/>
-                    <a:p>
-                      <a:pPr algn="r" indent="0" marL="0">
-                        <a:buNone/>
-                      </a:pPr>
-                      <a:r>
-                        <a:rPr lang="en-US" sz="1000" b="1" dirty="0">
-                          <a:solidFill>
-                            <a:srgbClr val="0B2A3D"/>
-                          </a:solidFill>
-                          <a:latin typeface="Calibri" pitchFamily="34" charset="0"/>
-                          <a:ea typeface="Calibri" pitchFamily="34" charset="-122"/>
-                          <a:cs typeface="Calibri" pitchFamily="34" charset="-120"/>
-                        </a:rPr>
-                        <a:t>US$ 982,4 mil</a:t>
-                      </a:r>
-                      <a:endParaRPr lang="en-US" sz="1000" dirty="0">
-                        <a:latin typeface="Calibri" charset="0"/>
-                        <a:ea typeface="Calibri" charset="0"/>
-                        <a:cs typeface="Calibri" charset="0"/>
-                      </a:endParaRPr>
-                    </a:p>
-                  </a:txBody>
-                  <a:tcPr marL="91440" marR="91440" marT="45720" marB="45720" anchor="ctr">
-                    <a:lnL w="6350" cap="flat" cmpd="sng" algn="ctr">
-                      <a:solidFill>
-                        <a:srgbClr val="E3E8E9"/>
-                      </a:solidFill>
-                      <a:prstDash val="solid"/>
-                      <a:round/>
-                      <a:headEnd type="none" w="med" len="med"/>
-                      <a:tailEnd type="none" w="med" len="med"/>
-                    </a:lnL>
-                    <a:lnR w="6350" cap="flat" cmpd="sng" algn="ctr">
-                      <a:solidFill>
-                        <a:srgbClr val="E3E8E9"/>
-                      </a:solidFill>
-                      <a:prstDash val="solid"/>
-                      <a:round/>
-                      <a:headEnd type="none" w="med" len="med"/>
-                      <a:tailEnd type="none" w="med" len="med"/>
-                    </a:lnR>
-                    <a:lnT w="6350" cap="flat" cmpd="sng" algn="ctr">
-                      <a:solidFill>
-                        <a:srgbClr val="E3E8E9"/>
-                      </a:solidFill>
-                      <a:prstDash val="solid"/>
-                      <a:round/>
-                      <a:headEnd type="none" w="med" len="med"/>
-                      <a:tailEnd type="none" w="med" len="med"/>
-                    </a:lnT>
-                    <a:lnB w="6350" cap="flat" cmpd="sng" algn="ctr">
-                      <a:solidFill>
-                        <a:srgbClr val="E3E8E9"/>
-                      </a:solidFill>
-                      <a:prstDash val="solid"/>
-                      <a:round/>
-                      <a:headEnd type="none" w="med" len="med"/>
-                      <a:tailEnd type="none" w="med" len="med"/>
-                    </a:lnB>
-                    <a:solidFill>
-                      <a:srgbClr val="FFFFFF"/>
-                    </a:solidFill>
-                  </a:tcPr>
-                </a:tc>
-              </a:tr>
-              <a:tr h="288036">
-                <a:tc>
-                  <a:txBody>
-                    <a:bodyPr/>
-                    <a:lstStyle/>
-                    <a:p>
-                      <a:pPr indent="0" marL="0">
-                        <a:buNone/>
-                      </a:pPr>
-                      <a:r>
-                        <a:rPr lang="en-US" sz="1000" dirty="0">
-                          <a:solidFill>
-                            <a:srgbClr val="1C2B33"/>
-                          </a:solidFill>
-                          <a:latin typeface="Calibri" pitchFamily="34" charset="0"/>
-                          <a:ea typeface="Calibri" pitchFamily="34" charset="-122"/>
-                          <a:cs typeface="Calibri" pitchFamily="34" charset="-120"/>
-                        </a:rPr>
-                        <a:t>TA - Caldeiraria</a:t>
-                      </a:r>
-                      <a:endParaRPr lang="en-US" sz="1000" dirty="0">
-                        <a:latin typeface="Calibri" charset="0"/>
-                        <a:ea typeface="Calibri" charset="0"/>
-                        <a:cs typeface="Calibri" charset="0"/>
-                      </a:endParaRPr>
-                    </a:p>
-                  </a:txBody>
-                  <a:tcPr marL="91440" marR="91440" marT="45720" marB="45720" anchor="ctr">
-                    <a:lnL w="6350" cap="flat" cmpd="sng" algn="ctr">
-                      <a:solidFill>
-                        <a:srgbClr val="E3E8E9"/>
-                      </a:solidFill>
-                      <a:prstDash val="solid"/>
-                      <a:round/>
-                      <a:headEnd type="none" w="med" len="med"/>
-                      <a:tailEnd type="none" w="med" len="med"/>
-                    </a:lnL>
-                    <a:lnR w="6350" cap="flat" cmpd="sng" algn="ctr">
-                      <a:solidFill>
-                        <a:srgbClr val="E3E8E9"/>
-                      </a:solidFill>
-                      <a:prstDash val="solid"/>
-                      <a:round/>
-                      <a:headEnd type="none" w="med" len="med"/>
-                      <a:tailEnd type="none" w="med" len="med"/>
-                    </a:lnR>
-                    <a:lnT w="6350" cap="flat" cmpd="sng" algn="ctr">
-                      <a:solidFill>
-                        <a:srgbClr val="E3E8E9"/>
-                      </a:solidFill>
-                      <a:prstDash val="solid"/>
-                      <a:round/>
-                      <a:headEnd type="none" w="med" len="med"/>
-                      <a:tailEnd type="none" w="med" len="med"/>
-                    </a:lnT>
-                    <a:lnB w="6350" cap="flat" cmpd="sng" algn="ctr">
-                      <a:solidFill>
-                        <a:srgbClr val="E3E8E9"/>
-                      </a:solidFill>
-                      <a:prstDash val="solid"/>
-                      <a:round/>
-                      <a:headEnd type="none" w="med" len="med"/>
-                      <a:tailEnd type="none" w="med" len="med"/>
-                    </a:lnB>
-                    <a:solidFill>
-                      <a:srgbClr val="F0F4F5"/>
-                    </a:solidFill>
-                  </a:tcPr>
-                </a:tc>
-                <a:tc>
-                  <a:txBody>
-                    <a:bodyPr/>
-                    <a:lstStyle/>
-                    <a:p>
-                      <a:pPr indent="0" marL="0">
-                        <a:buNone/>
-                      </a:pPr>
-                      <a:r>
-                        <a:rPr lang="en-US" sz="950" dirty="0">
-                          <a:solidFill>
-                            <a:srgbClr val="5B6B73"/>
-                          </a:solidFill>
-                          <a:latin typeface="Calibri" pitchFamily="34" charset="0"/>
-                          <a:ea typeface="Calibri" pitchFamily="34" charset="-122"/>
-                          <a:cs typeface="Calibri" pitchFamily="34" charset="-120"/>
-                        </a:rPr>
-                        <a:t>Eficiência de Produção</a:t>
-                      </a:r>
-                      <a:endParaRPr lang="en-US" sz="950" dirty="0">
-                        <a:latin typeface="Calibri" charset="0"/>
-                        <a:ea typeface="Calibri" charset="0"/>
-                        <a:cs typeface="Calibri" charset="0"/>
-                      </a:endParaRPr>
-                    </a:p>
-                  </a:txBody>
-                  <a:tcPr marL="91440" marR="91440" marT="45720" marB="45720" anchor="ctr">
-                    <a:lnL w="6350" cap="flat" cmpd="sng" algn="ctr">
-                      <a:solidFill>
-                        <a:srgbClr val="E3E8E9"/>
-                      </a:solidFill>
-                      <a:prstDash val="solid"/>
-                      <a:round/>
-                      <a:headEnd type="none" w="med" len="med"/>
-                      <a:tailEnd type="none" w="med" len="med"/>
-                    </a:lnL>
-                    <a:lnR w="6350" cap="flat" cmpd="sng" algn="ctr">
-                      <a:solidFill>
-                        <a:srgbClr val="E3E8E9"/>
-                      </a:solidFill>
-                      <a:prstDash val="solid"/>
-                      <a:round/>
-                      <a:headEnd type="none" w="med" len="med"/>
-                      <a:tailEnd type="none" w="med" len="med"/>
-                    </a:lnR>
-                    <a:lnT w="6350" cap="flat" cmpd="sng" algn="ctr">
-                      <a:solidFill>
-                        <a:srgbClr val="E3E8E9"/>
-                      </a:solidFill>
-                      <a:prstDash val="solid"/>
-                      <a:round/>
-                      <a:headEnd type="none" w="med" len="med"/>
-                      <a:tailEnd type="none" w="med" len="med"/>
-                    </a:lnT>
-                    <a:lnB w="6350" cap="flat" cmpd="sng" algn="ctr">
-                      <a:solidFill>
-                        <a:srgbClr val="E3E8E9"/>
-                      </a:solidFill>
-                      <a:prstDash val="solid"/>
-                      <a:round/>
-                      <a:headEnd type="none" w="med" len="med"/>
-                      <a:tailEnd type="none" w="med" len="med"/>
-                    </a:lnB>
-                    <a:solidFill>
-                      <a:srgbClr val="F0F4F5"/>
-                    </a:solidFill>
-                  </a:tcPr>
-                </a:tc>
-                <a:tc>
-                  <a:txBody>
-                    <a:bodyPr/>
-                    <a:lstStyle/>
-                    <a:p>
-                      <a:pPr indent="0" marL="0">
-                        <a:buNone/>
-                      </a:pPr>
-                      <a:r>
-                        <a:rPr lang="en-US" sz="950" dirty="0">
-                          <a:solidFill>
-                            <a:srgbClr val="5B6B73"/>
-                          </a:solidFill>
-                          <a:latin typeface="Calibri" pitchFamily="34" charset="0"/>
-                          <a:ea typeface="Calibri" pitchFamily="34" charset="-122"/>
-                          <a:cs typeface="Calibri" pitchFamily="34" charset="-120"/>
-                        </a:rPr>
-                        <a:t>TA - Parada Programada</a:t>
-                      </a:r>
-                      <a:endParaRPr lang="en-US" sz="950" dirty="0">
-                        <a:latin typeface="Calibri" charset="0"/>
-                        <a:ea typeface="Calibri" charset="0"/>
-                        <a:cs typeface="Calibri" charset="0"/>
-                      </a:endParaRPr>
-                    </a:p>
-                  </a:txBody>
-                  <a:tcPr marL="91440" marR="91440" marT="45720" marB="45720" anchor="ctr">
-                    <a:lnL w="6350" cap="flat" cmpd="sng" algn="ctr">
-                      <a:solidFill>
-                        <a:srgbClr val="E3E8E9"/>
-                      </a:solidFill>
-                      <a:prstDash val="solid"/>
-                      <a:round/>
-                      <a:headEnd type="none" w="med" len="med"/>
-                      <a:tailEnd type="none" w="med" len="med"/>
-                    </a:lnL>
-                    <a:lnR w="6350" cap="flat" cmpd="sng" algn="ctr">
-                      <a:solidFill>
-                        <a:srgbClr val="E3E8E9"/>
-                      </a:solidFill>
-                      <a:prstDash val="solid"/>
-                      <a:round/>
-                      <a:headEnd type="none" w="med" len="med"/>
-                      <a:tailEnd type="none" w="med" len="med"/>
-                    </a:lnR>
-                    <a:lnT w="6350" cap="flat" cmpd="sng" algn="ctr">
-                      <a:solidFill>
-                        <a:srgbClr val="E3E8E9"/>
-                      </a:solidFill>
-                      <a:prstDash val="solid"/>
-                      <a:round/>
-                      <a:headEnd type="none" w="med" len="med"/>
-                      <a:tailEnd type="none" w="med" len="med"/>
-                    </a:lnT>
-                    <a:lnB w="6350" cap="flat" cmpd="sng" algn="ctr">
-                      <a:solidFill>
-                        <a:srgbClr val="E3E8E9"/>
-                      </a:solidFill>
-                      <a:prstDash val="solid"/>
-                      <a:round/>
-                      <a:headEnd type="none" w="med" len="med"/>
-                      <a:tailEnd type="none" w="med" len="med"/>
-                    </a:lnB>
-                    <a:solidFill>
-                      <a:srgbClr val="F0F4F5"/>
-                    </a:solidFill>
-                  </a:tcPr>
-                </a:tc>
-                <a:tc>
-                  <a:txBody>
-                    <a:bodyPr/>
-                    <a:lstStyle/>
-                    <a:p>
-                      <a:pPr algn="r" indent="0" marL="0">
-                        <a:buNone/>
-                      </a:pPr>
-                      <a:r>
-                        <a:rPr lang="en-US" sz="1000" b="1" dirty="0">
-                          <a:solidFill>
-                            <a:srgbClr val="0B2A3D"/>
-                          </a:solidFill>
-                          <a:latin typeface="Calibri" pitchFamily="34" charset="0"/>
-                          <a:ea typeface="Calibri" pitchFamily="34" charset="-122"/>
-                          <a:cs typeface="Calibri" pitchFamily="34" charset="-120"/>
-                        </a:rPr>
-                        <a:t>US$ 816,1 mil</a:t>
-                      </a:r>
-                      <a:endParaRPr lang="en-US" sz="1000" dirty="0">
-                        <a:latin typeface="Calibri" charset="0"/>
-                        <a:ea typeface="Calibri" charset="0"/>
-                        <a:cs typeface="Calibri" charset="0"/>
-                      </a:endParaRPr>
-                    </a:p>
-                  </a:txBody>
-                  <a:tcPr marL="91440" marR="91440" marT="45720" marB="45720" anchor="ctr">
-                    <a:lnL w="6350" cap="flat" cmpd="sng" algn="ctr">
-                      <a:solidFill>
-                        <a:srgbClr val="E3E8E9"/>
-                      </a:solidFill>
-                      <a:prstDash val="solid"/>
-                      <a:round/>
-                      <a:headEnd type="none" w="med" len="med"/>
-                      <a:tailEnd type="none" w="med" len="med"/>
-                    </a:lnL>
-                    <a:lnR w="6350" cap="flat" cmpd="sng" algn="ctr">
-                      <a:solidFill>
-                        <a:srgbClr val="E3E8E9"/>
-                      </a:solidFill>
-                      <a:prstDash val="solid"/>
-                      <a:round/>
-                      <a:headEnd type="none" w="med" len="med"/>
-                      <a:tailEnd type="none" w="med" len="med"/>
-                    </a:lnR>
-                    <a:lnT w="6350" cap="flat" cmpd="sng" algn="ctr">
-                      <a:solidFill>
-                        <a:srgbClr val="E3E8E9"/>
-                      </a:solidFill>
-                      <a:prstDash val="solid"/>
-                      <a:round/>
-                      <a:headEnd type="none" w="med" len="med"/>
-                      <a:tailEnd type="none" w="med" len="med"/>
-                    </a:lnT>
-                    <a:lnB w="6350" cap="flat" cmpd="sng" algn="ctr">
-                      <a:solidFill>
-                        <a:srgbClr val="E3E8E9"/>
-                      </a:solidFill>
-                      <a:prstDash val="solid"/>
-                      <a:round/>
-                      <a:headEnd type="none" w="med" len="med"/>
-                      <a:tailEnd type="none" w="med" len="med"/>
-                    </a:lnB>
-                    <a:solidFill>
-                      <a:srgbClr val="F0F4F5"/>
-                    </a:solidFill>
-                  </a:tcPr>
-                </a:tc>
-              </a:tr>
-              <a:tr h="288036">
-                <a:tc>
-                  <a:txBody>
-                    <a:bodyPr/>
-                    <a:lstStyle/>
-                    <a:p>
-                      <a:pPr indent="0" marL="0">
-                        <a:buNone/>
-                      </a:pPr>
-                      <a:r>
-                        <a:rPr lang="en-US" sz="1000" dirty="0">
-                          <a:solidFill>
-                            <a:srgbClr val="1C2B33"/>
-                          </a:solidFill>
-                          <a:latin typeface="Calibri" pitchFamily="34" charset="0"/>
-                          <a:ea typeface="Calibri" pitchFamily="34" charset="-122"/>
-                          <a:cs typeface="Calibri" pitchFamily="34" charset="-120"/>
-                        </a:rPr>
-                        <a:t>REVAMP CARGO PUMP - Nº 2</a:t>
-                      </a:r>
-                      <a:endParaRPr lang="en-US" sz="1000" dirty="0">
-                        <a:latin typeface="Calibri" charset="0"/>
-                        <a:ea typeface="Calibri" charset="0"/>
-                        <a:cs typeface="Calibri" charset="0"/>
-                      </a:endParaRPr>
-                    </a:p>
-                  </a:txBody>
-                  <a:tcPr marL="91440" marR="91440" marT="45720" marB="45720" anchor="ctr">
-                    <a:lnL w="6350" cap="flat" cmpd="sng" algn="ctr">
-                      <a:solidFill>
-                        <a:srgbClr val="E3E8E9"/>
-                      </a:solidFill>
-                      <a:prstDash val="solid"/>
-                      <a:round/>
-                      <a:headEnd type="none" w="med" len="med"/>
-                      <a:tailEnd type="none" w="med" len="med"/>
-                    </a:lnL>
-                    <a:lnR w="6350" cap="flat" cmpd="sng" algn="ctr">
-                      <a:solidFill>
-                        <a:srgbClr val="E3E8E9"/>
-                      </a:solidFill>
-                      <a:prstDash val="solid"/>
-                      <a:round/>
-                      <a:headEnd type="none" w="med" len="med"/>
-                      <a:tailEnd type="none" w="med" len="med"/>
-                    </a:lnR>
-                    <a:lnT w="6350" cap="flat" cmpd="sng" algn="ctr">
-                      <a:solidFill>
-                        <a:srgbClr val="E3E8E9"/>
-                      </a:solidFill>
-                      <a:prstDash val="solid"/>
-                      <a:round/>
-                      <a:headEnd type="none" w="med" len="med"/>
-                      <a:tailEnd type="none" w="med" len="med"/>
-                    </a:lnT>
-                    <a:lnB w="6350" cap="flat" cmpd="sng" algn="ctr">
-                      <a:solidFill>
-                        <a:srgbClr val="E3E8E9"/>
-                      </a:solidFill>
-                      <a:prstDash val="solid"/>
-                      <a:round/>
-                      <a:headEnd type="none" w="med" len="med"/>
-                      <a:tailEnd type="none" w="med" len="med"/>
-                    </a:lnB>
-                    <a:solidFill>
-                      <a:srgbClr val="FFFFFF"/>
-                    </a:solidFill>
-                  </a:tcPr>
-                </a:tc>
-                <a:tc>
-                  <a:txBody>
-                    <a:bodyPr/>
-                    <a:lstStyle/>
-                    <a:p>
-                      <a:pPr indent="0" marL="0">
-                        <a:buNone/>
-                      </a:pPr>
-                      <a:r>
-                        <a:rPr lang="en-US" sz="950" dirty="0">
-                          <a:solidFill>
-                            <a:srgbClr val="5B6B73"/>
-                          </a:solidFill>
-                          <a:latin typeface="Calibri" pitchFamily="34" charset="0"/>
-                          <a:ea typeface="Calibri" pitchFamily="34" charset="-122"/>
-                          <a:cs typeface="Calibri" pitchFamily="34" charset="-120"/>
-                        </a:rPr>
-                        <a:t>Rotina Operacional</a:t>
-                      </a:r>
-                      <a:endParaRPr lang="en-US" sz="950" dirty="0">
-                        <a:latin typeface="Calibri" charset="0"/>
-                        <a:ea typeface="Calibri" charset="0"/>
-                        <a:cs typeface="Calibri" charset="0"/>
-                      </a:endParaRPr>
-                    </a:p>
-                  </a:txBody>
-                  <a:tcPr marL="91440" marR="91440" marT="45720" marB="45720" anchor="ctr">
-                    <a:lnL w="6350" cap="flat" cmpd="sng" algn="ctr">
-                      <a:solidFill>
-                        <a:srgbClr val="E3E8E9"/>
-                      </a:solidFill>
-                      <a:prstDash val="solid"/>
-                      <a:round/>
-                      <a:headEnd type="none" w="med" len="med"/>
-                      <a:tailEnd type="none" w="med" len="med"/>
-                    </a:lnL>
-                    <a:lnR w="6350" cap="flat" cmpd="sng" algn="ctr">
-                      <a:solidFill>
-                        <a:srgbClr val="E3E8E9"/>
-                      </a:solidFill>
-                      <a:prstDash val="solid"/>
-                      <a:round/>
-                      <a:headEnd type="none" w="med" len="med"/>
-                      <a:tailEnd type="none" w="med" len="med"/>
-                    </a:lnR>
-                    <a:lnT w="6350" cap="flat" cmpd="sng" algn="ctr">
-                      <a:solidFill>
-                        <a:srgbClr val="E3E8E9"/>
-                      </a:solidFill>
-                      <a:prstDash val="solid"/>
-                      <a:round/>
-                      <a:headEnd type="none" w="med" len="med"/>
-                      <a:tailEnd type="none" w="med" len="med"/>
-                    </a:lnT>
-                    <a:lnB w="6350" cap="flat" cmpd="sng" algn="ctr">
-                      <a:solidFill>
-                        <a:srgbClr val="E3E8E9"/>
-                      </a:solidFill>
-                      <a:prstDash val="solid"/>
-                      <a:round/>
-                      <a:headEnd type="none" w="med" len="med"/>
-                      <a:tailEnd type="none" w="med" len="med"/>
-                    </a:lnB>
-                    <a:solidFill>
-                      <a:srgbClr val="FFFFFF"/>
-                    </a:solidFill>
-                  </a:tcPr>
-                </a:tc>
-                <a:tc>
-                  <a:txBody>
-                    <a:bodyPr/>
-                    <a:lstStyle/>
-                    <a:p>
-                      <a:pPr indent="0" marL="0">
-                        <a:buNone/>
-                      </a:pPr>
-                      <a:r>
-                        <a:rPr lang="en-US" sz="950" dirty="0">
-                          <a:solidFill>
-                            <a:srgbClr val="5B6B73"/>
-                          </a:solidFill>
-                          <a:latin typeface="Calibri" pitchFamily="34" charset="0"/>
-                          <a:ea typeface="Calibri" pitchFamily="34" charset="-122"/>
-                          <a:cs typeface="Calibri" pitchFamily="34" charset="-120"/>
-                        </a:rPr>
-                        <a:t>EIM - Manutenção &amp; Integridade</a:t>
-                      </a:r>
-                      <a:endParaRPr lang="en-US" sz="950" dirty="0">
-                        <a:latin typeface="Calibri" charset="0"/>
-                        <a:ea typeface="Calibri" charset="0"/>
-                        <a:cs typeface="Calibri" charset="0"/>
-                      </a:endParaRPr>
-                    </a:p>
-                  </a:txBody>
-                  <a:tcPr marL="91440" marR="91440" marT="45720" marB="45720" anchor="ctr">
-                    <a:lnL w="6350" cap="flat" cmpd="sng" algn="ctr">
-                      <a:solidFill>
-                        <a:srgbClr val="E3E8E9"/>
-                      </a:solidFill>
-                      <a:prstDash val="solid"/>
-                      <a:round/>
-                      <a:headEnd type="none" w="med" len="med"/>
-                      <a:tailEnd type="none" w="med" len="med"/>
-                    </a:lnL>
-                    <a:lnR w="6350" cap="flat" cmpd="sng" algn="ctr">
-                      <a:solidFill>
-                        <a:srgbClr val="E3E8E9"/>
-                      </a:solidFill>
-                      <a:prstDash val="solid"/>
-                      <a:round/>
-                      <a:headEnd type="none" w="med" len="med"/>
-                      <a:tailEnd type="none" w="med" len="med"/>
-                    </a:lnR>
-                    <a:lnT w="6350" cap="flat" cmpd="sng" algn="ctr">
-                      <a:solidFill>
-                        <a:srgbClr val="E3E8E9"/>
-                      </a:solidFill>
-                      <a:prstDash val="solid"/>
-                      <a:round/>
-                      <a:headEnd type="none" w="med" len="med"/>
-                      <a:tailEnd type="none" w="med" len="med"/>
-                    </a:lnT>
-                    <a:lnB w="6350" cap="flat" cmpd="sng" algn="ctr">
-                      <a:solidFill>
-                        <a:srgbClr val="E3E8E9"/>
-                      </a:solidFill>
-                      <a:prstDash val="solid"/>
-                      <a:round/>
-                      <a:headEnd type="none" w="med" len="med"/>
-                      <a:tailEnd type="none" w="med" len="med"/>
-                    </a:lnB>
-                    <a:solidFill>
-                      <a:srgbClr val="FFFFFF"/>
-                    </a:solidFill>
-                  </a:tcPr>
-                </a:tc>
-                <a:tc>
-                  <a:txBody>
-                    <a:bodyPr/>
-                    <a:lstStyle/>
-                    <a:p>
-                      <a:pPr algn="r" indent="0" marL="0">
-                        <a:buNone/>
-                      </a:pPr>
-                      <a:r>
-                        <a:rPr lang="en-US" sz="1000" b="1" dirty="0">
-                          <a:solidFill>
-                            <a:srgbClr val="0B2A3D"/>
-                          </a:solidFill>
-                          <a:latin typeface="Calibri" pitchFamily="34" charset="0"/>
-                          <a:ea typeface="Calibri" pitchFamily="34" charset="-122"/>
-                          <a:cs typeface="Calibri" pitchFamily="34" charset="-120"/>
-                        </a:rPr>
-                        <a:t>US$ 721,9 mil</a:t>
-                      </a:r>
-                      <a:endParaRPr lang="en-US" sz="1000" dirty="0">
-                        <a:latin typeface="Calibri" charset="0"/>
-                        <a:ea typeface="Calibri" charset="0"/>
-                        <a:cs typeface="Calibri" charset="0"/>
-                      </a:endParaRPr>
-                    </a:p>
-                  </a:txBody>
-                  <a:tcPr marL="91440" marR="91440" marT="45720" marB="45720" anchor="ctr">
-                    <a:lnL w="6350" cap="flat" cmpd="sng" algn="ctr">
-                      <a:solidFill>
-                        <a:srgbClr val="E3E8E9"/>
-                      </a:solidFill>
-                      <a:prstDash val="solid"/>
-                      <a:round/>
-                      <a:headEnd type="none" w="med" len="med"/>
-                      <a:tailEnd type="none" w="med" len="med"/>
-                    </a:lnL>
-                    <a:lnR w="6350" cap="flat" cmpd="sng" algn="ctr">
-                      <a:solidFill>
-                        <a:srgbClr val="E3E8E9"/>
-                      </a:solidFill>
-                      <a:prstDash val="solid"/>
-                      <a:round/>
-                      <a:headEnd type="none" w="med" len="med"/>
-                      <a:tailEnd type="none" w="med" len="med"/>
-                    </a:lnR>
-                    <a:lnT w="6350" cap="flat" cmpd="sng" algn="ctr">
-                      <a:solidFill>
-                        <a:srgbClr val="E3E8E9"/>
-                      </a:solidFill>
-                      <a:prstDash val="solid"/>
-                      <a:round/>
-                      <a:headEnd type="none" w="med" len="med"/>
-                      <a:tailEnd type="none" w="med" len="med"/>
-                    </a:lnT>
-                    <a:lnB w="6350" cap="flat" cmpd="sng" algn="ctr">
-                      <a:solidFill>
-                        <a:srgbClr val="E3E8E9"/>
-                      </a:solidFill>
-                      <a:prstDash val="solid"/>
-                      <a:round/>
-                      <a:headEnd type="none" w="med" len="med"/>
-                      <a:tailEnd type="none" w="med" len="med"/>
-                    </a:lnB>
-                    <a:solidFill>
-                      <a:srgbClr val="FFFFFF"/>
-                    </a:solidFill>
-                  </a:tcPr>
-                </a:tc>
-              </a:tr>
-              <a:tr h="288036">
-                <a:tc>
-                  <a:txBody>
-                    <a:bodyPr/>
-                    <a:lstStyle/>
-                    <a:p>
-                      <a:pPr indent="0" marL="0">
-                        <a:buNone/>
-                      </a:pPr>
-                      <a:r>
-                        <a:rPr lang="en-US" sz="1000" dirty="0">
-                          <a:solidFill>
-                            <a:srgbClr val="1C2B33"/>
-                          </a:solidFill>
-                          <a:latin typeface="Calibri" pitchFamily="34" charset="0"/>
-                          <a:ea typeface="Calibri" pitchFamily="34" charset="-122"/>
-                          <a:cs typeface="Calibri" pitchFamily="34" charset="-120"/>
-                        </a:rPr>
-                        <a:t>Retrofit sistema fixo de CO2 </a:t>
-                      </a:r>
-                      <a:endParaRPr lang="en-US" sz="1000" dirty="0">
-                        <a:latin typeface="Calibri" charset="0"/>
-                        <a:ea typeface="Calibri" charset="0"/>
-                        <a:cs typeface="Calibri" charset="0"/>
-                      </a:endParaRPr>
-                    </a:p>
-                  </a:txBody>
-                  <a:tcPr marL="91440" marR="91440" marT="45720" marB="45720" anchor="ctr">
-                    <a:lnL w="6350" cap="flat" cmpd="sng" algn="ctr">
-                      <a:solidFill>
-                        <a:srgbClr val="E3E8E9"/>
-                      </a:solidFill>
-                      <a:prstDash val="solid"/>
-                      <a:round/>
-                      <a:headEnd type="none" w="med" len="med"/>
-                      <a:tailEnd type="none" w="med" len="med"/>
-                    </a:lnL>
-                    <a:lnR w="6350" cap="flat" cmpd="sng" algn="ctr">
-                      <a:solidFill>
-                        <a:srgbClr val="E3E8E9"/>
-                      </a:solidFill>
-                      <a:prstDash val="solid"/>
-                      <a:round/>
-                      <a:headEnd type="none" w="med" len="med"/>
-                      <a:tailEnd type="none" w="med" len="med"/>
-                    </a:lnR>
-                    <a:lnT w="6350" cap="flat" cmpd="sng" algn="ctr">
-                      <a:solidFill>
-                        <a:srgbClr val="E3E8E9"/>
-                      </a:solidFill>
-                      <a:prstDash val="solid"/>
-                      <a:round/>
-                      <a:headEnd type="none" w="med" len="med"/>
-                      <a:tailEnd type="none" w="med" len="med"/>
-                    </a:lnT>
-                    <a:lnB w="6350" cap="flat" cmpd="sng" algn="ctr">
-                      <a:solidFill>
-                        <a:srgbClr val="E3E8E9"/>
-                      </a:solidFill>
-                      <a:prstDash val="solid"/>
-                      <a:round/>
-                      <a:headEnd type="none" w="med" len="med"/>
-                      <a:tailEnd type="none" w="med" len="med"/>
-                    </a:lnB>
-                    <a:solidFill>
-                      <a:srgbClr val="F0F4F5"/>
-                    </a:solidFill>
-                  </a:tcPr>
-                </a:tc>
-                <a:tc>
-                  <a:txBody>
-                    <a:bodyPr/>
-                    <a:lstStyle/>
-                    <a:p>
-                      <a:pPr indent="0" marL="0">
-                        <a:buNone/>
-                      </a:pPr>
-                      <a:r>
-                        <a:rPr lang="en-US" sz="950" dirty="0">
-                          <a:solidFill>
-                            <a:srgbClr val="5B6B73"/>
-                          </a:solidFill>
-                          <a:latin typeface="Calibri" pitchFamily="34" charset="0"/>
-                          <a:ea typeface="Calibri" pitchFamily="34" charset="-122"/>
-                          <a:cs typeface="Calibri" pitchFamily="34" charset="-120"/>
-                        </a:rPr>
-                        <a:t>Bem Estar/Segurança</a:t>
-                      </a:r>
-                      <a:endParaRPr lang="en-US" sz="950" dirty="0">
-                        <a:latin typeface="Calibri" charset="0"/>
-                        <a:ea typeface="Calibri" charset="0"/>
-                        <a:cs typeface="Calibri" charset="0"/>
-                      </a:endParaRPr>
-                    </a:p>
-                  </a:txBody>
-                  <a:tcPr marL="91440" marR="91440" marT="45720" marB="45720" anchor="ctr">
-                    <a:lnL w="6350" cap="flat" cmpd="sng" algn="ctr">
-                      <a:solidFill>
-                        <a:srgbClr val="E3E8E9"/>
-                      </a:solidFill>
-                      <a:prstDash val="solid"/>
-                      <a:round/>
-                      <a:headEnd type="none" w="med" len="med"/>
-                      <a:tailEnd type="none" w="med" len="med"/>
-                    </a:lnL>
-                    <a:lnR w="6350" cap="flat" cmpd="sng" algn="ctr">
-                      <a:solidFill>
-                        <a:srgbClr val="E3E8E9"/>
-                      </a:solidFill>
-                      <a:prstDash val="solid"/>
-                      <a:round/>
-                      <a:headEnd type="none" w="med" len="med"/>
-                      <a:tailEnd type="none" w="med" len="med"/>
-                    </a:lnR>
-                    <a:lnT w="6350" cap="flat" cmpd="sng" algn="ctr">
-                      <a:solidFill>
-                        <a:srgbClr val="E3E8E9"/>
-                      </a:solidFill>
-                      <a:prstDash val="solid"/>
-                      <a:round/>
-                      <a:headEnd type="none" w="med" len="med"/>
-                      <a:tailEnd type="none" w="med" len="med"/>
-                    </a:lnT>
-                    <a:lnB w="6350" cap="flat" cmpd="sng" algn="ctr">
-                      <a:solidFill>
-                        <a:srgbClr val="E3E8E9"/>
-                      </a:solidFill>
-                      <a:prstDash val="solid"/>
-                      <a:round/>
-                      <a:headEnd type="none" w="med" len="med"/>
-                      <a:tailEnd type="none" w="med" len="med"/>
-                    </a:lnB>
-                    <a:solidFill>
-                      <a:srgbClr val="F0F4F5"/>
-                    </a:solidFill>
-                  </a:tcPr>
-                </a:tc>
-                <a:tc>
-                  <a:txBody>
-                    <a:bodyPr/>
-                    <a:lstStyle/>
-                    <a:p>
-                      <a:pPr indent="0" marL="0">
-                        <a:buNone/>
-                      </a:pPr>
-                      <a:r>
-                        <a:rPr lang="en-US" sz="950" dirty="0">
-                          <a:solidFill>
-                            <a:srgbClr val="5B6B73"/>
-                          </a:solidFill>
-                          <a:latin typeface="Calibri" pitchFamily="34" charset="0"/>
-                          <a:ea typeface="Calibri" pitchFamily="34" charset="-122"/>
-                          <a:cs typeface="Calibri" pitchFamily="34" charset="-120"/>
-                        </a:rPr>
-                        <a:t>Saúde e Segurança Ocupacional</a:t>
-                      </a:r>
-                      <a:endParaRPr lang="en-US" sz="950" dirty="0">
-                        <a:latin typeface="Calibri" charset="0"/>
-                        <a:ea typeface="Calibri" charset="0"/>
-                        <a:cs typeface="Calibri" charset="0"/>
-                      </a:endParaRPr>
-                    </a:p>
-                  </a:txBody>
-                  <a:tcPr marL="91440" marR="91440" marT="45720" marB="45720" anchor="ctr">
-                    <a:lnL w="6350" cap="flat" cmpd="sng" algn="ctr">
-                      <a:solidFill>
-                        <a:srgbClr val="E3E8E9"/>
-                      </a:solidFill>
-                      <a:prstDash val="solid"/>
-                      <a:round/>
-                      <a:headEnd type="none" w="med" len="med"/>
-                      <a:tailEnd type="none" w="med" len="med"/>
-                    </a:lnL>
-                    <a:lnR w="6350" cap="flat" cmpd="sng" algn="ctr">
-                      <a:solidFill>
-                        <a:srgbClr val="E3E8E9"/>
-                      </a:solidFill>
-                      <a:prstDash val="solid"/>
-                      <a:round/>
-                      <a:headEnd type="none" w="med" len="med"/>
-                      <a:tailEnd type="none" w="med" len="med"/>
-                    </a:lnR>
-                    <a:lnT w="6350" cap="flat" cmpd="sng" algn="ctr">
-                      <a:solidFill>
-                        <a:srgbClr val="E3E8E9"/>
-                      </a:solidFill>
-                      <a:prstDash val="solid"/>
-                      <a:round/>
-                      <a:headEnd type="none" w="med" len="med"/>
-                      <a:tailEnd type="none" w="med" len="med"/>
-                    </a:lnT>
-                    <a:lnB w="6350" cap="flat" cmpd="sng" algn="ctr">
-                      <a:solidFill>
-                        <a:srgbClr val="E3E8E9"/>
-                      </a:solidFill>
-                      <a:prstDash val="solid"/>
-                      <a:round/>
-                      <a:headEnd type="none" w="med" len="med"/>
-                      <a:tailEnd type="none" w="med" len="med"/>
-                    </a:lnB>
-                    <a:solidFill>
-                      <a:srgbClr val="F0F4F5"/>
-                    </a:solidFill>
-                  </a:tcPr>
-                </a:tc>
-                <a:tc>
-                  <a:txBody>
-                    <a:bodyPr/>
-                    <a:lstStyle/>
-                    <a:p>
-                      <a:pPr algn="r" indent="0" marL="0">
-                        <a:buNone/>
-                      </a:pPr>
-                      <a:r>
-                        <a:rPr lang="en-US" sz="1000" b="1" dirty="0">
-                          <a:solidFill>
-                            <a:srgbClr val="0B2A3D"/>
-                          </a:solidFill>
-                          <a:latin typeface="Calibri" pitchFamily="34" charset="0"/>
-                          <a:ea typeface="Calibri" pitchFamily="34" charset="-122"/>
-                          <a:cs typeface="Calibri" pitchFamily="34" charset="-120"/>
-                        </a:rPr>
-                        <a:t>US$ 670,0 mil</a:t>
+                        <a:t>US$ 687,0 mil</a:t>
                       </a:r>
                       <a:endParaRPr lang="en-US" sz="1000" dirty="0">
                         <a:latin typeface="Calibri" charset="0"/>
@@ -8447,7 +7997,1103 @@
                           <a:ea typeface="Calibri" pitchFamily="34" charset="-122"/>
                           <a:cs typeface="Calibri" pitchFamily="34" charset="-120"/>
                         </a:rPr>
-                        <a:t>TA - Ignitor do Flare</a:t>
+                        <a:t>TA - Manutenção no Swivel elétrico</a:t>
+                      </a:r>
+                      <a:endParaRPr lang="en-US" sz="1000" dirty="0">
+                        <a:latin typeface="Calibri" charset="0"/>
+                        <a:ea typeface="Calibri" charset="0"/>
+                        <a:cs typeface="Calibri" charset="0"/>
+                      </a:endParaRPr>
+                    </a:p>
+                  </a:txBody>
+                  <a:tcPr marL="91440" marR="91440" marT="45720" marB="45720" anchor="ctr">
+                    <a:lnL w="6350" cap="flat" cmpd="sng" algn="ctr">
+                      <a:solidFill>
+                        <a:srgbClr val="E3E8E9"/>
+                      </a:solidFill>
+                      <a:prstDash val="solid"/>
+                      <a:round/>
+                      <a:headEnd type="none" w="med" len="med"/>
+                      <a:tailEnd type="none" w="med" len="med"/>
+                    </a:lnL>
+                    <a:lnR w="6350" cap="flat" cmpd="sng" algn="ctr">
+                      <a:solidFill>
+                        <a:srgbClr val="E3E8E9"/>
+                      </a:solidFill>
+                      <a:prstDash val="solid"/>
+                      <a:round/>
+                      <a:headEnd type="none" w="med" len="med"/>
+                      <a:tailEnd type="none" w="med" len="med"/>
+                    </a:lnR>
+                    <a:lnT w="6350" cap="flat" cmpd="sng" algn="ctr">
+                      <a:solidFill>
+                        <a:srgbClr val="E3E8E9"/>
+                      </a:solidFill>
+                      <a:prstDash val="solid"/>
+                      <a:round/>
+                      <a:headEnd type="none" w="med" len="med"/>
+                      <a:tailEnd type="none" w="med" len="med"/>
+                    </a:lnT>
+                    <a:lnB w="6350" cap="flat" cmpd="sng" algn="ctr">
+                      <a:solidFill>
+                        <a:srgbClr val="E3E8E9"/>
+                      </a:solidFill>
+                      <a:prstDash val="solid"/>
+                      <a:round/>
+                      <a:headEnd type="none" w="med" len="med"/>
+                      <a:tailEnd type="none" w="med" len="med"/>
+                    </a:lnB>
+                    <a:solidFill>
+                      <a:srgbClr val="F0F4F5"/>
+                    </a:solidFill>
+                  </a:tcPr>
+                </a:tc>
+                <a:tc>
+                  <a:txBody>
+                    <a:bodyPr/>
+                    <a:lstStyle/>
+                    <a:p>
+                      <a:pPr indent="0" marL="0">
+                        <a:buNone/>
+                      </a:pPr>
+                      <a:r>
+                        <a:rPr lang="en-US" sz="950" dirty="0">
+                          <a:solidFill>
+                            <a:srgbClr val="5B6B73"/>
+                          </a:solidFill>
+                          <a:latin typeface="Calibri" pitchFamily="34" charset="0"/>
+                          <a:ea typeface="Calibri" pitchFamily="34" charset="-122"/>
+                          <a:cs typeface="Calibri" pitchFamily="34" charset="-120"/>
+                        </a:rPr>
+                        <a:t>Rotina Operacional</a:t>
+                      </a:r>
+                      <a:endParaRPr lang="en-US" sz="950" dirty="0">
+                        <a:latin typeface="Calibri" charset="0"/>
+                        <a:ea typeface="Calibri" charset="0"/>
+                        <a:cs typeface="Calibri" charset="0"/>
+                      </a:endParaRPr>
+                    </a:p>
+                  </a:txBody>
+                  <a:tcPr marL="91440" marR="91440" marT="45720" marB="45720" anchor="ctr">
+                    <a:lnL w="6350" cap="flat" cmpd="sng" algn="ctr">
+                      <a:solidFill>
+                        <a:srgbClr val="E3E8E9"/>
+                      </a:solidFill>
+                      <a:prstDash val="solid"/>
+                      <a:round/>
+                      <a:headEnd type="none" w="med" len="med"/>
+                      <a:tailEnd type="none" w="med" len="med"/>
+                    </a:lnL>
+                    <a:lnR w="6350" cap="flat" cmpd="sng" algn="ctr">
+                      <a:solidFill>
+                        <a:srgbClr val="E3E8E9"/>
+                      </a:solidFill>
+                      <a:prstDash val="solid"/>
+                      <a:round/>
+                      <a:headEnd type="none" w="med" len="med"/>
+                      <a:tailEnd type="none" w="med" len="med"/>
+                    </a:lnR>
+                    <a:lnT w="6350" cap="flat" cmpd="sng" algn="ctr">
+                      <a:solidFill>
+                        <a:srgbClr val="E3E8E9"/>
+                      </a:solidFill>
+                      <a:prstDash val="solid"/>
+                      <a:round/>
+                      <a:headEnd type="none" w="med" len="med"/>
+                      <a:tailEnd type="none" w="med" len="med"/>
+                    </a:lnT>
+                    <a:lnB w="6350" cap="flat" cmpd="sng" algn="ctr">
+                      <a:solidFill>
+                        <a:srgbClr val="E3E8E9"/>
+                      </a:solidFill>
+                      <a:prstDash val="solid"/>
+                      <a:round/>
+                      <a:headEnd type="none" w="med" len="med"/>
+                      <a:tailEnd type="none" w="med" len="med"/>
+                    </a:lnB>
+                    <a:solidFill>
+                      <a:srgbClr val="F0F4F5"/>
+                    </a:solidFill>
+                  </a:tcPr>
+                </a:tc>
+                <a:tc>
+                  <a:txBody>
+                    <a:bodyPr/>
+                    <a:lstStyle/>
+                    <a:p>
+                      <a:pPr indent="0" marL="0">
+                        <a:buNone/>
+                      </a:pPr>
+                      <a:r>
+                        <a:rPr lang="en-US" sz="950" dirty="0">
+                          <a:solidFill>
+                            <a:srgbClr val="5B6B73"/>
+                          </a:solidFill>
+                          <a:latin typeface="Calibri" pitchFamily="34" charset="0"/>
+                          <a:ea typeface="Calibri" pitchFamily="34" charset="-122"/>
+                          <a:cs typeface="Calibri" pitchFamily="34" charset="-120"/>
+                        </a:rPr>
+                        <a:t>EIM - Manutenção &amp; Integridade</a:t>
+                      </a:r>
+                      <a:endParaRPr lang="en-US" sz="950" dirty="0">
+                        <a:latin typeface="Calibri" charset="0"/>
+                        <a:ea typeface="Calibri" charset="0"/>
+                        <a:cs typeface="Calibri" charset="0"/>
+                      </a:endParaRPr>
+                    </a:p>
+                  </a:txBody>
+                  <a:tcPr marL="91440" marR="91440" marT="45720" marB="45720" anchor="ctr">
+                    <a:lnL w="6350" cap="flat" cmpd="sng" algn="ctr">
+                      <a:solidFill>
+                        <a:srgbClr val="E3E8E9"/>
+                      </a:solidFill>
+                      <a:prstDash val="solid"/>
+                      <a:round/>
+                      <a:headEnd type="none" w="med" len="med"/>
+                      <a:tailEnd type="none" w="med" len="med"/>
+                    </a:lnL>
+                    <a:lnR w="6350" cap="flat" cmpd="sng" algn="ctr">
+                      <a:solidFill>
+                        <a:srgbClr val="E3E8E9"/>
+                      </a:solidFill>
+                      <a:prstDash val="solid"/>
+                      <a:round/>
+                      <a:headEnd type="none" w="med" len="med"/>
+                      <a:tailEnd type="none" w="med" len="med"/>
+                    </a:lnR>
+                    <a:lnT w="6350" cap="flat" cmpd="sng" algn="ctr">
+                      <a:solidFill>
+                        <a:srgbClr val="E3E8E9"/>
+                      </a:solidFill>
+                      <a:prstDash val="solid"/>
+                      <a:round/>
+                      <a:headEnd type="none" w="med" len="med"/>
+                      <a:tailEnd type="none" w="med" len="med"/>
+                    </a:lnT>
+                    <a:lnB w="6350" cap="flat" cmpd="sng" algn="ctr">
+                      <a:solidFill>
+                        <a:srgbClr val="E3E8E9"/>
+                      </a:solidFill>
+                      <a:prstDash val="solid"/>
+                      <a:round/>
+                      <a:headEnd type="none" w="med" len="med"/>
+                      <a:tailEnd type="none" w="med" len="med"/>
+                    </a:lnB>
+                    <a:solidFill>
+                      <a:srgbClr val="F0F4F5"/>
+                    </a:solidFill>
+                  </a:tcPr>
+                </a:tc>
+                <a:tc>
+                  <a:txBody>
+                    <a:bodyPr/>
+                    <a:lstStyle/>
+                    <a:p>
+                      <a:pPr algn="r" indent="0" marL="0">
+                        <a:buNone/>
+                      </a:pPr>
+                      <a:r>
+                        <a:rPr lang="en-US" sz="1000" b="1" dirty="0">
+                          <a:solidFill>
+                            <a:srgbClr val="0B2A3D"/>
+                          </a:solidFill>
+                          <a:latin typeface="Calibri" pitchFamily="34" charset="0"/>
+                          <a:ea typeface="Calibri" pitchFamily="34" charset="-122"/>
+                          <a:cs typeface="Calibri" pitchFamily="34" charset="-120"/>
+                        </a:rPr>
+                        <a:t>US$ 414,5 mil</a:t>
+                      </a:r>
+                      <a:endParaRPr lang="en-US" sz="1000" dirty="0">
+                        <a:latin typeface="Calibri" charset="0"/>
+                        <a:ea typeface="Calibri" charset="0"/>
+                        <a:cs typeface="Calibri" charset="0"/>
+                      </a:endParaRPr>
+                    </a:p>
+                  </a:txBody>
+                  <a:tcPr marL="91440" marR="91440" marT="45720" marB="45720" anchor="ctr">
+                    <a:lnL w="6350" cap="flat" cmpd="sng" algn="ctr">
+                      <a:solidFill>
+                        <a:srgbClr val="E3E8E9"/>
+                      </a:solidFill>
+                      <a:prstDash val="solid"/>
+                      <a:round/>
+                      <a:headEnd type="none" w="med" len="med"/>
+                      <a:tailEnd type="none" w="med" len="med"/>
+                    </a:lnL>
+                    <a:lnR w="6350" cap="flat" cmpd="sng" algn="ctr">
+                      <a:solidFill>
+                        <a:srgbClr val="E3E8E9"/>
+                      </a:solidFill>
+                      <a:prstDash val="solid"/>
+                      <a:round/>
+                      <a:headEnd type="none" w="med" len="med"/>
+                      <a:tailEnd type="none" w="med" len="med"/>
+                    </a:lnR>
+                    <a:lnT w="6350" cap="flat" cmpd="sng" algn="ctr">
+                      <a:solidFill>
+                        <a:srgbClr val="E3E8E9"/>
+                      </a:solidFill>
+                      <a:prstDash val="solid"/>
+                      <a:round/>
+                      <a:headEnd type="none" w="med" len="med"/>
+                      <a:tailEnd type="none" w="med" len="med"/>
+                    </a:lnT>
+                    <a:lnB w="6350" cap="flat" cmpd="sng" algn="ctr">
+                      <a:solidFill>
+                        <a:srgbClr val="E3E8E9"/>
+                      </a:solidFill>
+                      <a:prstDash val="solid"/>
+                      <a:round/>
+                      <a:headEnd type="none" w="med" len="med"/>
+                      <a:tailEnd type="none" w="med" len="med"/>
+                    </a:lnB>
+                    <a:solidFill>
+                      <a:srgbClr val="F0F4F5"/>
+                    </a:solidFill>
+                  </a:tcPr>
+                </a:tc>
+              </a:tr>
+              <a:tr h="288036">
+                <a:tc>
+                  <a:txBody>
+                    <a:bodyPr/>
+                    <a:lstStyle/>
+                    <a:p>
+                      <a:pPr indent="0" marL="0">
+                        <a:buNone/>
+                      </a:pPr>
+                      <a:r>
+                        <a:rPr lang="en-US" sz="1000" dirty="0">
+                          <a:solidFill>
+                            <a:srgbClr val="1C2B33"/>
+                          </a:solidFill>
+                          <a:latin typeface="Calibri" pitchFamily="34" charset="0"/>
+                          <a:ea typeface="Calibri" pitchFamily="34" charset="-122"/>
+                          <a:cs typeface="Calibri" pitchFamily="34" charset="-120"/>
+                        </a:rPr>
+                        <a:t>Novas Destiladoras</a:t>
+                      </a:r>
+                      <a:endParaRPr lang="en-US" sz="1000" dirty="0">
+                        <a:latin typeface="Calibri" charset="0"/>
+                        <a:ea typeface="Calibri" charset="0"/>
+                        <a:cs typeface="Calibri" charset="0"/>
+                      </a:endParaRPr>
+                    </a:p>
+                  </a:txBody>
+                  <a:tcPr marL="91440" marR="91440" marT="45720" marB="45720" anchor="ctr">
+                    <a:lnL w="6350" cap="flat" cmpd="sng" algn="ctr">
+                      <a:solidFill>
+                        <a:srgbClr val="E3E8E9"/>
+                      </a:solidFill>
+                      <a:prstDash val="solid"/>
+                      <a:round/>
+                      <a:headEnd type="none" w="med" len="med"/>
+                      <a:tailEnd type="none" w="med" len="med"/>
+                    </a:lnL>
+                    <a:lnR w="6350" cap="flat" cmpd="sng" algn="ctr">
+                      <a:solidFill>
+                        <a:srgbClr val="E3E8E9"/>
+                      </a:solidFill>
+                      <a:prstDash val="solid"/>
+                      <a:round/>
+                      <a:headEnd type="none" w="med" len="med"/>
+                      <a:tailEnd type="none" w="med" len="med"/>
+                    </a:lnR>
+                    <a:lnT w="6350" cap="flat" cmpd="sng" algn="ctr">
+                      <a:solidFill>
+                        <a:srgbClr val="E3E8E9"/>
+                      </a:solidFill>
+                      <a:prstDash val="solid"/>
+                      <a:round/>
+                      <a:headEnd type="none" w="med" len="med"/>
+                      <a:tailEnd type="none" w="med" len="med"/>
+                    </a:lnT>
+                    <a:lnB w="6350" cap="flat" cmpd="sng" algn="ctr">
+                      <a:solidFill>
+                        <a:srgbClr val="E3E8E9"/>
+                      </a:solidFill>
+                      <a:prstDash val="solid"/>
+                      <a:round/>
+                      <a:headEnd type="none" w="med" len="med"/>
+                      <a:tailEnd type="none" w="med" len="med"/>
+                    </a:lnB>
+                    <a:solidFill>
+                      <a:srgbClr val="FFFFFF"/>
+                    </a:solidFill>
+                  </a:tcPr>
+                </a:tc>
+                <a:tc>
+                  <a:txBody>
+                    <a:bodyPr/>
+                    <a:lstStyle/>
+                    <a:p>
+                      <a:pPr indent="0" marL="0">
+                        <a:buNone/>
+                      </a:pPr>
+                      <a:r>
+                        <a:rPr lang="en-US" sz="950" dirty="0">
+                          <a:solidFill>
+                            <a:srgbClr val="5B6B73"/>
+                          </a:solidFill>
+                          <a:latin typeface="Calibri" pitchFamily="34" charset="0"/>
+                          <a:ea typeface="Calibri" pitchFamily="34" charset="-122"/>
+                          <a:cs typeface="Calibri" pitchFamily="34" charset="-120"/>
+                        </a:rPr>
+                        <a:t>Eficiência de Produção</a:t>
+                      </a:r>
+                      <a:endParaRPr lang="en-US" sz="950" dirty="0">
+                        <a:latin typeface="Calibri" charset="0"/>
+                        <a:ea typeface="Calibri" charset="0"/>
+                        <a:cs typeface="Calibri" charset="0"/>
+                      </a:endParaRPr>
+                    </a:p>
+                  </a:txBody>
+                  <a:tcPr marL="91440" marR="91440" marT="45720" marB="45720" anchor="ctr">
+                    <a:lnL w="6350" cap="flat" cmpd="sng" algn="ctr">
+                      <a:solidFill>
+                        <a:srgbClr val="E3E8E9"/>
+                      </a:solidFill>
+                      <a:prstDash val="solid"/>
+                      <a:round/>
+                      <a:headEnd type="none" w="med" len="med"/>
+                      <a:tailEnd type="none" w="med" len="med"/>
+                    </a:lnL>
+                    <a:lnR w="6350" cap="flat" cmpd="sng" algn="ctr">
+                      <a:solidFill>
+                        <a:srgbClr val="E3E8E9"/>
+                      </a:solidFill>
+                      <a:prstDash val="solid"/>
+                      <a:round/>
+                      <a:headEnd type="none" w="med" len="med"/>
+                      <a:tailEnd type="none" w="med" len="med"/>
+                    </a:lnR>
+                    <a:lnT w="6350" cap="flat" cmpd="sng" algn="ctr">
+                      <a:solidFill>
+                        <a:srgbClr val="E3E8E9"/>
+                      </a:solidFill>
+                      <a:prstDash val="solid"/>
+                      <a:round/>
+                      <a:headEnd type="none" w="med" len="med"/>
+                      <a:tailEnd type="none" w="med" len="med"/>
+                    </a:lnT>
+                    <a:lnB w="6350" cap="flat" cmpd="sng" algn="ctr">
+                      <a:solidFill>
+                        <a:srgbClr val="E3E8E9"/>
+                      </a:solidFill>
+                      <a:prstDash val="solid"/>
+                      <a:round/>
+                      <a:headEnd type="none" w="med" len="med"/>
+                      <a:tailEnd type="none" w="med" len="med"/>
+                    </a:lnB>
+                    <a:solidFill>
+                      <a:srgbClr val="FFFFFF"/>
+                    </a:solidFill>
+                  </a:tcPr>
+                </a:tc>
+                <a:tc>
+                  <a:txBody>
+                    <a:bodyPr/>
+                    <a:lstStyle/>
+                    <a:p>
+                      <a:pPr indent="0" marL="0">
+                        <a:buNone/>
+                      </a:pPr>
+                      <a:r>
+                        <a:rPr lang="en-US" sz="950" dirty="0">
+                          <a:solidFill>
+                            <a:srgbClr val="5B6B73"/>
+                          </a:solidFill>
+                          <a:latin typeface="Calibri" pitchFamily="34" charset="0"/>
+                          <a:ea typeface="Calibri" pitchFamily="34" charset="-122"/>
+                          <a:cs typeface="Calibri" pitchFamily="34" charset="-120"/>
+                        </a:rPr>
+                        <a:t>Projetos</a:t>
+                      </a:r>
+                      <a:endParaRPr lang="en-US" sz="950" dirty="0">
+                        <a:latin typeface="Calibri" charset="0"/>
+                        <a:ea typeface="Calibri" charset="0"/>
+                        <a:cs typeface="Calibri" charset="0"/>
+                      </a:endParaRPr>
+                    </a:p>
+                  </a:txBody>
+                  <a:tcPr marL="91440" marR="91440" marT="45720" marB="45720" anchor="ctr">
+                    <a:lnL w="6350" cap="flat" cmpd="sng" algn="ctr">
+                      <a:solidFill>
+                        <a:srgbClr val="E3E8E9"/>
+                      </a:solidFill>
+                      <a:prstDash val="solid"/>
+                      <a:round/>
+                      <a:headEnd type="none" w="med" len="med"/>
+                      <a:tailEnd type="none" w="med" len="med"/>
+                    </a:lnL>
+                    <a:lnR w="6350" cap="flat" cmpd="sng" algn="ctr">
+                      <a:solidFill>
+                        <a:srgbClr val="E3E8E9"/>
+                      </a:solidFill>
+                      <a:prstDash val="solid"/>
+                      <a:round/>
+                      <a:headEnd type="none" w="med" len="med"/>
+                      <a:tailEnd type="none" w="med" len="med"/>
+                    </a:lnR>
+                    <a:lnT w="6350" cap="flat" cmpd="sng" algn="ctr">
+                      <a:solidFill>
+                        <a:srgbClr val="E3E8E9"/>
+                      </a:solidFill>
+                      <a:prstDash val="solid"/>
+                      <a:round/>
+                      <a:headEnd type="none" w="med" len="med"/>
+                      <a:tailEnd type="none" w="med" len="med"/>
+                    </a:lnT>
+                    <a:lnB w="6350" cap="flat" cmpd="sng" algn="ctr">
+                      <a:solidFill>
+                        <a:srgbClr val="E3E8E9"/>
+                      </a:solidFill>
+                      <a:prstDash val="solid"/>
+                      <a:round/>
+                      <a:headEnd type="none" w="med" len="med"/>
+                      <a:tailEnd type="none" w="med" len="med"/>
+                    </a:lnB>
+                    <a:solidFill>
+                      <a:srgbClr val="FFFFFF"/>
+                    </a:solidFill>
+                  </a:tcPr>
+                </a:tc>
+                <a:tc>
+                  <a:txBody>
+                    <a:bodyPr/>
+                    <a:lstStyle/>
+                    <a:p>
+                      <a:pPr algn="r" indent="0" marL="0">
+                        <a:buNone/>
+                      </a:pPr>
+                      <a:r>
+                        <a:rPr lang="en-US" sz="1000" b="1" dirty="0">
+                          <a:solidFill>
+                            <a:srgbClr val="0B2A3D"/>
+                          </a:solidFill>
+                          <a:latin typeface="Calibri" pitchFamily="34" charset="0"/>
+                          <a:ea typeface="Calibri" pitchFamily="34" charset="-122"/>
+                          <a:cs typeface="Calibri" pitchFamily="34" charset="-120"/>
+                        </a:rPr>
+                        <a:t>US$ 411,9 mil</a:t>
+                      </a:r>
+                      <a:endParaRPr lang="en-US" sz="1000" dirty="0">
+                        <a:latin typeface="Calibri" charset="0"/>
+                        <a:ea typeface="Calibri" charset="0"/>
+                        <a:cs typeface="Calibri" charset="0"/>
+                      </a:endParaRPr>
+                    </a:p>
+                  </a:txBody>
+                  <a:tcPr marL="91440" marR="91440" marT="45720" marB="45720" anchor="ctr">
+                    <a:lnL w="6350" cap="flat" cmpd="sng" algn="ctr">
+                      <a:solidFill>
+                        <a:srgbClr val="E3E8E9"/>
+                      </a:solidFill>
+                      <a:prstDash val="solid"/>
+                      <a:round/>
+                      <a:headEnd type="none" w="med" len="med"/>
+                      <a:tailEnd type="none" w="med" len="med"/>
+                    </a:lnL>
+                    <a:lnR w="6350" cap="flat" cmpd="sng" algn="ctr">
+                      <a:solidFill>
+                        <a:srgbClr val="E3E8E9"/>
+                      </a:solidFill>
+                      <a:prstDash val="solid"/>
+                      <a:round/>
+                      <a:headEnd type="none" w="med" len="med"/>
+                      <a:tailEnd type="none" w="med" len="med"/>
+                    </a:lnR>
+                    <a:lnT w="6350" cap="flat" cmpd="sng" algn="ctr">
+                      <a:solidFill>
+                        <a:srgbClr val="E3E8E9"/>
+                      </a:solidFill>
+                      <a:prstDash val="solid"/>
+                      <a:round/>
+                      <a:headEnd type="none" w="med" len="med"/>
+                      <a:tailEnd type="none" w="med" len="med"/>
+                    </a:lnT>
+                    <a:lnB w="6350" cap="flat" cmpd="sng" algn="ctr">
+                      <a:solidFill>
+                        <a:srgbClr val="E3E8E9"/>
+                      </a:solidFill>
+                      <a:prstDash val="solid"/>
+                      <a:round/>
+                      <a:headEnd type="none" w="med" len="med"/>
+                      <a:tailEnd type="none" w="med" len="med"/>
+                    </a:lnB>
+                    <a:solidFill>
+                      <a:srgbClr val="FFFFFF"/>
+                    </a:solidFill>
+                  </a:tcPr>
+                </a:tc>
+              </a:tr>
+              <a:tr h="288036">
+                <a:tc>
+                  <a:txBody>
+                    <a:bodyPr/>
+                    <a:lstStyle/>
+                    <a:p>
+                      <a:pPr indent="0" marL="0">
+                        <a:buNone/>
+                      </a:pPr>
+                      <a:r>
+                        <a:rPr lang="en-US" sz="1000" dirty="0">
+                          <a:solidFill>
+                            <a:srgbClr val="1C2B33"/>
+                          </a:solidFill>
+                          <a:latin typeface="Calibri" pitchFamily="34" charset="0"/>
+                          <a:ea typeface="Calibri" pitchFamily="34" charset="-122"/>
+                          <a:cs typeface="Calibri" pitchFamily="34" charset="-120"/>
+                        </a:rPr>
+                        <a:t>Retrofit sistema fixo de CO2</a:t>
+                      </a:r>
+                      <a:endParaRPr lang="en-US" sz="1000" dirty="0">
+                        <a:latin typeface="Calibri" charset="0"/>
+                        <a:ea typeface="Calibri" charset="0"/>
+                        <a:cs typeface="Calibri" charset="0"/>
+                      </a:endParaRPr>
+                    </a:p>
+                  </a:txBody>
+                  <a:tcPr marL="91440" marR="91440" marT="45720" marB="45720" anchor="ctr">
+                    <a:lnL w="6350" cap="flat" cmpd="sng" algn="ctr">
+                      <a:solidFill>
+                        <a:srgbClr val="E3E8E9"/>
+                      </a:solidFill>
+                      <a:prstDash val="solid"/>
+                      <a:round/>
+                      <a:headEnd type="none" w="med" len="med"/>
+                      <a:tailEnd type="none" w="med" len="med"/>
+                    </a:lnL>
+                    <a:lnR w="6350" cap="flat" cmpd="sng" algn="ctr">
+                      <a:solidFill>
+                        <a:srgbClr val="E3E8E9"/>
+                      </a:solidFill>
+                      <a:prstDash val="solid"/>
+                      <a:round/>
+                      <a:headEnd type="none" w="med" len="med"/>
+                      <a:tailEnd type="none" w="med" len="med"/>
+                    </a:lnR>
+                    <a:lnT w="6350" cap="flat" cmpd="sng" algn="ctr">
+                      <a:solidFill>
+                        <a:srgbClr val="E3E8E9"/>
+                      </a:solidFill>
+                      <a:prstDash val="solid"/>
+                      <a:round/>
+                      <a:headEnd type="none" w="med" len="med"/>
+                      <a:tailEnd type="none" w="med" len="med"/>
+                    </a:lnT>
+                    <a:lnB w="6350" cap="flat" cmpd="sng" algn="ctr">
+                      <a:solidFill>
+                        <a:srgbClr val="E3E8E9"/>
+                      </a:solidFill>
+                      <a:prstDash val="solid"/>
+                      <a:round/>
+                      <a:headEnd type="none" w="med" len="med"/>
+                      <a:tailEnd type="none" w="med" len="med"/>
+                    </a:lnB>
+                    <a:solidFill>
+                      <a:srgbClr val="F0F4F5"/>
+                    </a:solidFill>
+                  </a:tcPr>
+                </a:tc>
+                <a:tc>
+                  <a:txBody>
+                    <a:bodyPr/>
+                    <a:lstStyle/>
+                    <a:p>
+                      <a:pPr indent="0" marL="0">
+                        <a:buNone/>
+                      </a:pPr>
+                      <a:r>
+                        <a:rPr lang="en-US" sz="950" dirty="0">
+                          <a:solidFill>
+                            <a:srgbClr val="5B6B73"/>
+                          </a:solidFill>
+                          <a:latin typeface="Calibri" pitchFamily="34" charset="0"/>
+                          <a:ea typeface="Calibri" pitchFamily="34" charset="-122"/>
+                          <a:cs typeface="Calibri" pitchFamily="34" charset="-120"/>
+                        </a:rPr>
+                        <a:t>Bem Estar/Segurança</a:t>
+                      </a:r>
+                      <a:endParaRPr lang="en-US" sz="950" dirty="0">
+                        <a:latin typeface="Calibri" charset="0"/>
+                        <a:ea typeface="Calibri" charset="0"/>
+                        <a:cs typeface="Calibri" charset="0"/>
+                      </a:endParaRPr>
+                    </a:p>
+                  </a:txBody>
+                  <a:tcPr marL="91440" marR="91440" marT="45720" marB="45720" anchor="ctr">
+                    <a:lnL w="6350" cap="flat" cmpd="sng" algn="ctr">
+                      <a:solidFill>
+                        <a:srgbClr val="E3E8E9"/>
+                      </a:solidFill>
+                      <a:prstDash val="solid"/>
+                      <a:round/>
+                      <a:headEnd type="none" w="med" len="med"/>
+                      <a:tailEnd type="none" w="med" len="med"/>
+                    </a:lnL>
+                    <a:lnR w="6350" cap="flat" cmpd="sng" algn="ctr">
+                      <a:solidFill>
+                        <a:srgbClr val="E3E8E9"/>
+                      </a:solidFill>
+                      <a:prstDash val="solid"/>
+                      <a:round/>
+                      <a:headEnd type="none" w="med" len="med"/>
+                      <a:tailEnd type="none" w="med" len="med"/>
+                    </a:lnR>
+                    <a:lnT w="6350" cap="flat" cmpd="sng" algn="ctr">
+                      <a:solidFill>
+                        <a:srgbClr val="E3E8E9"/>
+                      </a:solidFill>
+                      <a:prstDash val="solid"/>
+                      <a:round/>
+                      <a:headEnd type="none" w="med" len="med"/>
+                      <a:tailEnd type="none" w="med" len="med"/>
+                    </a:lnT>
+                    <a:lnB w="6350" cap="flat" cmpd="sng" algn="ctr">
+                      <a:solidFill>
+                        <a:srgbClr val="E3E8E9"/>
+                      </a:solidFill>
+                      <a:prstDash val="solid"/>
+                      <a:round/>
+                      <a:headEnd type="none" w="med" len="med"/>
+                      <a:tailEnd type="none" w="med" len="med"/>
+                    </a:lnB>
+                    <a:solidFill>
+                      <a:srgbClr val="F0F4F5"/>
+                    </a:solidFill>
+                  </a:tcPr>
+                </a:tc>
+                <a:tc>
+                  <a:txBody>
+                    <a:bodyPr/>
+                    <a:lstStyle/>
+                    <a:p>
+                      <a:pPr indent="0" marL="0">
+                        <a:buNone/>
+                      </a:pPr>
+                      <a:r>
+                        <a:rPr lang="en-US" sz="950" dirty="0">
+                          <a:solidFill>
+                            <a:srgbClr val="5B6B73"/>
+                          </a:solidFill>
+                          <a:latin typeface="Calibri" pitchFamily="34" charset="0"/>
+                          <a:ea typeface="Calibri" pitchFamily="34" charset="-122"/>
+                          <a:cs typeface="Calibri" pitchFamily="34" charset="-120"/>
+                        </a:rPr>
+                        <a:t>Saúde e Segurança Ocupacional</a:t>
+                      </a:r>
+                      <a:endParaRPr lang="en-US" sz="950" dirty="0">
+                        <a:latin typeface="Calibri" charset="0"/>
+                        <a:ea typeface="Calibri" charset="0"/>
+                        <a:cs typeface="Calibri" charset="0"/>
+                      </a:endParaRPr>
+                    </a:p>
+                  </a:txBody>
+                  <a:tcPr marL="91440" marR="91440" marT="45720" marB="45720" anchor="ctr">
+                    <a:lnL w="6350" cap="flat" cmpd="sng" algn="ctr">
+                      <a:solidFill>
+                        <a:srgbClr val="E3E8E9"/>
+                      </a:solidFill>
+                      <a:prstDash val="solid"/>
+                      <a:round/>
+                      <a:headEnd type="none" w="med" len="med"/>
+                      <a:tailEnd type="none" w="med" len="med"/>
+                    </a:lnL>
+                    <a:lnR w="6350" cap="flat" cmpd="sng" algn="ctr">
+                      <a:solidFill>
+                        <a:srgbClr val="E3E8E9"/>
+                      </a:solidFill>
+                      <a:prstDash val="solid"/>
+                      <a:round/>
+                      <a:headEnd type="none" w="med" len="med"/>
+                      <a:tailEnd type="none" w="med" len="med"/>
+                    </a:lnR>
+                    <a:lnT w="6350" cap="flat" cmpd="sng" algn="ctr">
+                      <a:solidFill>
+                        <a:srgbClr val="E3E8E9"/>
+                      </a:solidFill>
+                      <a:prstDash val="solid"/>
+                      <a:round/>
+                      <a:headEnd type="none" w="med" len="med"/>
+                      <a:tailEnd type="none" w="med" len="med"/>
+                    </a:lnT>
+                    <a:lnB w="6350" cap="flat" cmpd="sng" algn="ctr">
+                      <a:solidFill>
+                        <a:srgbClr val="E3E8E9"/>
+                      </a:solidFill>
+                      <a:prstDash val="solid"/>
+                      <a:round/>
+                      <a:headEnd type="none" w="med" len="med"/>
+                      <a:tailEnd type="none" w="med" len="med"/>
+                    </a:lnB>
+                    <a:solidFill>
+                      <a:srgbClr val="F0F4F5"/>
+                    </a:solidFill>
+                  </a:tcPr>
+                </a:tc>
+                <a:tc>
+                  <a:txBody>
+                    <a:bodyPr/>
+                    <a:lstStyle/>
+                    <a:p>
+                      <a:pPr algn="r" indent="0" marL="0">
+                        <a:buNone/>
+                      </a:pPr>
+                      <a:r>
+                        <a:rPr lang="en-US" sz="1000" b="1" dirty="0">
+                          <a:solidFill>
+                            <a:srgbClr val="0B2A3D"/>
+                          </a:solidFill>
+                          <a:latin typeface="Calibri" pitchFamily="34" charset="0"/>
+                          <a:ea typeface="Calibri" pitchFamily="34" charset="-122"/>
+                          <a:cs typeface="Calibri" pitchFamily="34" charset="-120"/>
+                        </a:rPr>
+                        <a:t>US$ 380,0 mil</a:t>
+                      </a:r>
+                      <a:endParaRPr lang="en-US" sz="1000" dirty="0">
+                        <a:latin typeface="Calibri" charset="0"/>
+                        <a:ea typeface="Calibri" charset="0"/>
+                        <a:cs typeface="Calibri" charset="0"/>
+                      </a:endParaRPr>
+                    </a:p>
+                  </a:txBody>
+                  <a:tcPr marL="91440" marR="91440" marT="45720" marB="45720" anchor="ctr">
+                    <a:lnL w="6350" cap="flat" cmpd="sng" algn="ctr">
+                      <a:solidFill>
+                        <a:srgbClr val="E3E8E9"/>
+                      </a:solidFill>
+                      <a:prstDash val="solid"/>
+                      <a:round/>
+                      <a:headEnd type="none" w="med" len="med"/>
+                      <a:tailEnd type="none" w="med" len="med"/>
+                    </a:lnL>
+                    <a:lnR w="6350" cap="flat" cmpd="sng" algn="ctr">
+                      <a:solidFill>
+                        <a:srgbClr val="E3E8E9"/>
+                      </a:solidFill>
+                      <a:prstDash val="solid"/>
+                      <a:round/>
+                      <a:headEnd type="none" w="med" len="med"/>
+                      <a:tailEnd type="none" w="med" len="med"/>
+                    </a:lnR>
+                    <a:lnT w="6350" cap="flat" cmpd="sng" algn="ctr">
+                      <a:solidFill>
+                        <a:srgbClr val="E3E8E9"/>
+                      </a:solidFill>
+                      <a:prstDash val="solid"/>
+                      <a:round/>
+                      <a:headEnd type="none" w="med" len="med"/>
+                      <a:tailEnd type="none" w="med" len="med"/>
+                    </a:lnT>
+                    <a:lnB w="6350" cap="flat" cmpd="sng" algn="ctr">
+                      <a:solidFill>
+                        <a:srgbClr val="E3E8E9"/>
+                      </a:solidFill>
+                      <a:prstDash val="solid"/>
+                      <a:round/>
+                      <a:headEnd type="none" w="med" len="med"/>
+                      <a:tailEnd type="none" w="med" len="med"/>
+                    </a:lnB>
+                    <a:solidFill>
+                      <a:srgbClr val="F0F4F5"/>
+                    </a:solidFill>
+                  </a:tcPr>
+                </a:tc>
+              </a:tr>
+              <a:tr h="288036">
+                <a:tc>
+                  <a:txBody>
+                    <a:bodyPr/>
+                    <a:lstStyle/>
+                    <a:p>
+                      <a:pPr indent="0" marL="0">
+                        <a:buNone/>
+                      </a:pPr>
+                      <a:r>
+                        <a:rPr lang="en-US" sz="1000" dirty="0">
+                          <a:solidFill>
+                            <a:srgbClr val="1C2B33"/>
+                          </a:solidFill>
+                          <a:latin typeface="Calibri" pitchFamily="34" charset="0"/>
+                          <a:ea typeface="Calibri" pitchFamily="34" charset="-122"/>
+                          <a:cs typeface="Calibri" pitchFamily="34" charset="-120"/>
+                        </a:rPr>
+                        <a:t>Redundância do Sistema de Compressão de Gás - Trem Alfa + Trem Bravo</a:t>
+                      </a:r>
+                      <a:endParaRPr lang="en-US" sz="1000" dirty="0">
+                        <a:latin typeface="Calibri" charset="0"/>
+                        <a:ea typeface="Calibri" charset="0"/>
+                        <a:cs typeface="Calibri" charset="0"/>
+                      </a:endParaRPr>
+                    </a:p>
+                  </a:txBody>
+                  <a:tcPr marL="91440" marR="91440" marT="45720" marB="45720" anchor="ctr">
+                    <a:lnL w="6350" cap="flat" cmpd="sng" algn="ctr">
+                      <a:solidFill>
+                        <a:srgbClr val="E3E8E9"/>
+                      </a:solidFill>
+                      <a:prstDash val="solid"/>
+                      <a:round/>
+                      <a:headEnd type="none" w="med" len="med"/>
+                      <a:tailEnd type="none" w="med" len="med"/>
+                    </a:lnL>
+                    <a:lnR w="6350" cap="flat" cmpd="sng" algn="ctr">
+                      <a:solidFill>
+                        <a:srgbClr val="E3E8E9"/>
+                      </a:solidFill>
+                      <a:prstDash val="solid"/>
+                      <a:round/>
+                      <a:headEnd type="none" w="med" len="med"/>
+                      <a:tailEnd type="none" w="med" len="med"/>
+                    </a:lnR>
+                    <a:lnT w="6350" cap="flat" cmpd="sng" algn="ctr">
+                      <a:solidFill>
+                        <a:srgbClr val="E3E8E9"/>
+                      </a:solidFill>
+                      <a:prstDash val="solid"/>
+                      <a:round/>
+                      <a:headEnd type="none" w="med" len="med"/>
+                      <a:tailEnd type="none" w="med" len="med"/>
+                    </a:lnT>
+                    <a:lnB w="6350" cap="flat" cmpd="sng" algn="ctr">
+                      <a:solidFill>
+                        <a:srgbClr val="E3E8E9"/>
+                      </a:solidFill>
+                      <a:prstDash val="solid"/>
+                      <a:round/>
+                      <a:headEnd type="none" w="med" len="med"/>
+                      <a:tailEnd type="none" w="med" len="med"/>
+                    </a:lnB>
+                    <a:solidFill>
+                      <a:srgbClr val="FFFFFF"/>
+                    </a:solidFill>
+                  </a:tcPr>
+                </a:tc>
+                <a:tc>
+                  <a:txBody>
+                    <a:bodyPr/>
+                    <a:lstStyle/>
+                    <a:p>
+                      <a:pPr indent="0" marL="0">
+                        <a:buNone/>
+                      </a:pPr>
+                      <a:r>
+                        <a:rPr lang="en-US" sz="950" dirty="0">
+                          <a:solidFill>
+                            <a:srgbClr val="5B6B73"/>
+                          </a:solidFill>
+                          <a:latin typeface="Calibri" pitchFamily="34" charset="0"/>
+                          <a:ea typeface="Calibri" pitchFamily="34" charset="-122"/>
+                          <a:cs typeface="Calibri" pitchFamily="34" charset="-120"/>
+                        </a:rPr>
+                        <a:t>Eficiência de Produção</a:t>
+                      </a:r>
+                      <a:endParaRPr lang="en-US" sz="950" dirty="0">
+                        <a:latin typeface="Calibri" charset="0"/>
+                        <a:ea typeface="Calibri" charset="0"/>
+                        <a:cs typeface="Calibri" charset="0"/>
+                      </a:endParaRPr>
+                    </a:p>
+                  </a:txBody>
+                  <a:tcPr marL="91440" marR="91440" marT="45720" marB="45720" anchor="ctr">
+                    <a:lnL w="6350" cap="flat" cmpd="sng" algn="ctr">
+                      <a:solidFill>
+                        <a:srgbClr val="E3E8E9"/>
+                      </a:solidFill>
+                      <a:prstDash val="solid"/>
+                      <a:round/>
+                      <a:headEnd type="none" w="med" len="med"/>
+                      <a:tailEnd type="none" w="med" len="med"/>
+                    </a:lnL>
+                    <a:lnR w="6350" cap="flat" cmpd="sng" algn="ctr">
+                      <a:solidFill>
+                        <a:srgbClr val="E3E8E9"/>
+                      </a:solidFill>
+                      <a:prstDash val="solid"/>
+                      <a:round/>
+                      <a:headEnd type="none" w="med" len="med"/>
+                      <a:tailEnd type="none" w="med" len="med"/>
+                    </a:lnR>
+                    <a:lnT w="6350" cap="flat" cmpd="sng" algn="ctr">
+                      <a:solidFill>
+                        <a:srgbClr val="E3E8E9"/>
+                      </a:solidFill>
+                      <a:prstDash val="solid"/>
+                      <a:round/>
+                      <a:headEnd type="none" w="med" len="med"/>
+                      <a:tailEnd type="none" w="med" len="med"/>
+                    </a:lnT>
+                    <a:lnB w="6350" cap="flat" cmpd="sng" algn="ctr">
+                      <a:solidFill>
+                        <a:srgbClr val="E3E8E9"/>
+                      </a:solidFill>
+                      <a:prstDash val="solid"/>
+                      <a:round/>
+                      <a:headEnd type="none" w="med" len="med"/>
+                      <a:tailEnd type="none" w="med" len="med"/>
+                    </a:lnB>
+                    <a:solidFill>
+                      <a:srgbClr val="FFFFFF"/>
+                    </a:solidFill>
+                  </a:tcPr>
+                </a:tc>
+                <a:tc>
+                  <a:txBody>
+                    <a:bodyPr/>
+                    <a:lstStyle/>
+                    <a:p>
+                      <a:pPr indent="0" marL="0">
+                        <a:buNone/>
+                      </a:pPr>
+                      <a:r>
+                        <a:rPr lang="en-US" sz="950" dirty="0">
+                          <a:solidFill>
+                            <a:srgbClr val="5B6B73"/>
+                          </a:solidFill>
+                          <a:latin typeface="Calibri" pitchFamily="34" charset="0"/>
+                          <a:ea typeface="Calibri" pitchFamily="34" charset="-122"/>
+                          <a:cs typeface="Calibri" pitchFamily="34" charset="-120"/>
+                        </a:rPr>
+                        <a:t>P&amp;Q - Processos</a:t>
+                      </a:r>
+                      <a:endParaRPr lang="en-US" sz="950" dirty="0">
+                        <a:latin typeface="Calibri" charset="0"/>
+                        <a:ea typeface="Calibri" charset="0"/>
+                        <a:cs typeface="Calibri" charset="0"/>
+                      </a:endParaRPr>
+                    </a:p>
+                  </a:txBody>
+                  <a:tcPr marL="91440" marR="91440" marT="45720" marB="45720" anchor="ctr">
+                    <a:lnL w="6350" cap="flat" cmpd="sng" algn="ctr">
+                      <a:solidFill>
+                        <a:srgbClr val="E3E8E9"/>
+                      </a:solidFill>
+                      <a:prstDash val="solid"/>
+                      <a:round/>
+                      <a:headEnd type="none" w="med" len="med"/>
+                      <a:tailEnd type="none" w="med" len="med"/>
+                    </a:lnL>
+                    <a:lnR w="6350" cap="flat" cmpd="sng" algn="ctr">
+                      <a:solidFill>
+                        <a:srgbClr val="E3E8E9"/>
+                      </a:solidFill>
+                      <a:prstDash val="solid"/>
+                      <a:round/>
+                      <a:headEnd type="none" w="med" len="med"/>
+                      <a:tailEnd type="none" w="med" len="med"/>
+                    </a:lnR>
+                    <a:lnT w="6350" cap="flat" cmpd="sng" algn="ctr">
+                      <a:solidFill>
+                        <a:srgbClr val="E3E8E9"/>
+                      </a:solidFill>
+                      <a:prstDash val="solid"/>
+                      <a:round/>
+                      <a:headEnd type="none" w="med" len="med"/>
+                      <a:tailEnd type="none" w="med" len="med"/>
+                    </a:lnT>
+                    <a:lnB w="6350" cap="flat" cmpd="sng" algn="ctr">
+                      <a:solidFill>
+                        <a:srgbClr val="E3E8E9"/>
+                      </a:solidFill>
+                      <a:prstDash val="solid"/>
+                      <a:round/>
+                      <a:headEnd type="none" w="med" len="med"/>
+                      <a:tailEnd type="none" w="med" len="med"/>
+                    </a:lnB>
+                    <a:solidFill>
+                      <a:srgbClr val="FFFFFF"/>
+                    </a:solidFill>
+                  </a:tcPr>
+                </a:tc>
+                <a:tc>
+                  <a:txBody>
+                    <a:bodyPr/>
+                    <a:lstStyle/>
+                    <a:p>
+                      <a:pPr algn="r" indent="0" marL="0">
+                        <a:buNone/>
+                      </a:pPr>
+                      <a:r>
+                        <a:rPr lang="en-US" sz="1000" b="1" dirty="0">
+                          <a:solidFill>
+                            <a:srgbClr val="0B2A3D"/>
+                          </a:solidFill>
+                          <a:latin typeface="Calibri" pitchFamily="34" charset="0"/>
+                          <a:ea typeface="Calibri" pitchFamily="34" charset="-122"/>
+                          <a:cs typeface="Calibri" pitchFamily="34" charset="-120"/>
+                        </a:rPr>
+                        <a:t>US$ 360,0 mil</a:t>
+                      </a:r>
+                      <a:endParaRPr lang="en-US" sz="1000" dirty="0">
+                        <a:latin typeface="Calibri" charset="0"/>
+                        <a:ea typeface="Calibri" charset="0"/>
+                        <a:cs typeface="Calibri" charset="0"/>
+                      </a:endParaRPr>
+                    </a:p>
+                  </a:txBody>
+                  <a:tcPr marL="91440" marR="91440" marT="45720" marB="45720" anchor="ctr">
+                    <a:lnL w="6350" cap="flat" cmpd="sng" algn="ctr">
+                      <a:solidFill>
+                        <a:srgbClr val="E3E8E9"/>
+                      </a:solidFill>
+                      <a:prstDash val="solid"/>
+                      <a:round/>
+                      <a:headEnd type="none" w="med" len="med"/>
+                      <a:tailEnd type="none" w="med" len="med"/>
+                    </a:lnL>
+                    <a:lnR w="6350" cap="flat" cmpd="sng" algn="ctr">
+                      <a:solidFill>
+                        <a:srgbClr val="E3E8E9"/>
+                      </a:solidFill>
+                      <a:prstDash val="solid"/>
+                      <a:round/>
+                      <a:headEnd type="none" w="med" len="med"/>
+                      <a:tailEnd type="none" w="med" len="med"/>
+                    </a:lnR>
+                    <a:lnT w="6350" cap="flat" cmpd="sng" algn="ctr">
+                      <a:solidFill>
+                        <a:srgbClr val="E3E8E9"/>
+                      </a:solidFill>
+                      <a:prstDash val="solid"/>
+                      <a:round/>
+                      <a:headEnd type="none" w="med" len="med"/>
+                      <a:tailEnd type="none" w="med" len="med"/>
+                    </a:lnT>
+                    <a:lnB w="6350" cap="flat" cmpd="sng" algn="ctr">
+                      <a:solidFill>
+                        <a:srgbClr val="E3E8E9"/>
+                      </a:solidFill>
+                      <a:prstDash val="solid"/>
+                      <a:round/>
+                      <a:headEnd type="none" w="med" len="med"/>
+                      <a:tailEnd type="none" w="med" len="med"/>
+                    </a:lnB>
+                    <a:solidFill>
+                      <a:srgbClr val="FFFFFF"/>
+                    </a:solidFill>
+                  </a:tcPr>
+                </a:tc>
+              </a:tr>
+              <a:tr h="288036">
+                <a:tc>
+                  <a:txBody>
+                    <a:bodyPr/>
+                    <a:lstStyle/>
+                    <a:p>
+                      <a:pPr indent="0" marL="0">
+                        <a:buNone/>
+                      </a:pPr>
+                      <a:r>
+                        <a:rPr lang="en-US" sz="1000" dirty="0">
+                          <a:solidFill>
+                            <a:srgbClr val="1C2B33"/>
+                          </a:solidFill>
+                          <a:latin typeface="Calibri" pitchFamily="34" charset="0"/>
+                          <a:ea typeface="Calibri" pitchFamily="34" charset="-122"/>
+                          <a:cs typeface="Calibri" pitchFamily="34" charset="-120"/>
+                        </a:rPr>
+                        <a:t>Instalação de Sensores de Hidrogênio nas Salas de Baterias</a:t>
                       </a:r>
                       <a:endParaRPr lang="en-US" sz="1000" dirty="0">
                         <a:latin typeface="Calibri" charset="0"/>
@@ -8583,7 +9229,7 @@
                           <a:ea typeface="Calibri" pitchFamily="34" charset="-122"/>
                           <a:cs typeface="Calibri" pitchFamily="34" charset="-120"/>
                         </a:rPr>
-                        <a:t>P&amp;Q - Processos</a:t>
+                        <a:t>Projetos</a:t>
                       </a:r>
                       <a:endParaRPr lang="en-US" sz="950" dirty="0">
                         <a:latin typeface="Calibri" charset="0"/>
@@ -8651,555 +9297,7 @@
                           <a:ea typeface="Calibri" pitchFamily="34" charset="-122"/>
                           <a:cs typeface="Calibri" pitchFamily="34" charset="-120"/>
                         </a:rPr>
-                        <a:t>US$ 616,8 mil</a:t>
-                      </a:r>
-                      <a:endParaRPr lang="en-US" sz="1000" dirty="0">
-                        <a:latin typeface="Calibri" charset="0"/>
-                        <a:ea typeface="Calibri" charset="0"/>
-                        <a:cs typeface="Calibri" charset="0"/>
-                      </a:endParaRPr>
-                    </a:p>
-                  </a:txBody>
-                  <a:tcPr marL="91440" marR="91440" marT="45720" marB="45720" anchor="ctr">
-                    <a:lnL w="6350" cap="flat" cmpd="sng" algn="ctr">
-                      <a:solidFill>
-                        <a:srgbClr val="E3E8E9"/>
-                      </a:solidFill>
-                      <a:prstDash val="solid"/>
-                      <a:round/>
-                      <a:headEnd type="none" w="med" len="med"/>
-                      <a:tailEnd type="none" w="med" len="med"/>
-                    </a:lnL>
-                    <a:lnR w="6350" cap="flat" cmpd="sng" algn="ctr">
-                      <a:solidFill>
-                        <a:srgbClr val="E3E8E9"/>
-                      </a:solidFill>
-                      <a:prstDash val="solid"/>
-                      <a:round/>
-                      <a:headEnd type="none" w="med" len="med"/>
-                      <a:tailEnd type="none" w="med" len="med"/>
-                    </a:lnR>
-                    <a:lnT w="6350" cap="flat" cmpd="sng" algn="ctr">
-                      <a:solidFill>
-                        <a:srgbClr val="E3E8E9"/>
-                      </a:solidFill>
-                      <a:prstDash val="solid"/>
-                      <a:round/>
-                      <a:headEnd type="none" w="med" len="med"/>
-                      <a:tailEnd type="none" w="med" len="med"/>
-                    </a:lnT>
-                    <a:lnB w="6350" cap="flat" cmpd="sng" algn="ctr">
-                      <a:solidFill>
-                        <a:srgbClr val="E3E8E9"/>
-                      </a:solidFill>
-                      <a:prstDash val="solid"/>
-                      <a:round/>
-                      <a:headEnd type="none" w="med" len="med"/>
-                      <a:tailEnd type="none" w="med" len="med"/>
-                    </a:lnB>
-                    <a:solidFill>
-                      <a:srgbClr val="F0F4F5"/>
-                    </a:solidFill>
-                  </a:tcPr>
-                </a:tc>
-              </a:tr>
-              <a:tr h="288036">
-                <a:tc>
-                  <a:txBody>
-                    <a:bodyPr/>
-                    <a:lstStyle/>
-                    <a:p>
-                      <a:pPr indent="0" marL="0">
-                        <a:buNone/>
-                      </a:pPr>
-                      <a:r>
-                        <a:rPr lang="en-US" sz="1000" dirty="0">
-                          <a:solidFill>
-                            <a:srgbClr val="1C2B33"/>
-                          </a:solidFill>
-                          <a:latin typeface="Calibri" pitchFamily="34" charset="0"/>
-                          <a:ea typeface="Calibri" pitchFamily="34" charset="-122"/>
-                          <a:cs typeface="Calibri" pitchFamily="34" charset="-120"/>
-                        </a:rPr>
-                        <a:t>TA - Manutenção no Swivel elétrico</a:t>
-                      </a:r>
-                      <a:endParaRPr lang="en-US" sz="1000" dirty="0">
-                        <a:latin typeface="Calibri" charset="0"/>
-                        <a:ea typeface="Calibri" charset="0"/>
-                        <a:cs typeface="Calibri" charset="0"/>
-                      </a:endParaRPr>
-                    </a:p>
-                  </a:txBody>
-                  <a:tcPr marL="91440" marR="91440" marT="45720" marB="45720" anchor="ctr">
-                    <a:lnL w="6350" cap="flat" cmpd="sng" algn="ctr">
-                      <a:solidFill>
-                        <a:srgbClr val="E3E8E9"/>
-                      </a:solidFill>
-                      <a:prstDash val="solid"/>
-                      <a:round/>
-                      <a:headEnd type="none" w="med" len="med"/>
-                      <a:tailEnd type="none" w="med" len="med"/>
-                    </a:lnL>
-                    <a:lnR w="6350" cap="flat" cmpd="sng" algn="ctr">
-                      <a:solidFill>
-                        <a:srgbClr val="E3E8E9"/>
-                      </a:solidFill>
-                      <a:prstDash val="solid"/>
-                      <a:round/>
-                      <a:headEnd type="none" w="med" len="med"/>
-                      <a:tailEnd type="none" w="med" len="med"/>
-                    </a:lnR>
-                    <a:lnT w="6350" cap="flat" cmpd="sng" algn="ctr">
-                      <a:solidFill>
-                        <a:srgbClr val="E3E8E9"/>
-                      </a:solidFill>
-                      <a:prstDash val="solid"/>
-                      <a:round/>
-                      <a:headEnd type="none" w="med" len="med"/>
-                      <a:tailEnd type="none" w="med" len="med"/>
-                    </a:lnT>
-                    <a:lnB w="6350" cap="flat" cmpd="sng" algn="ctr">
-                      <a:solidFill>
-                        <a:srgbClr val="E3E8E9"/>
-                      </a:solidFill>
-                      <a:prstDash val="solid"/>
-                      <a:round/>
-                      <a:headEnd type="none" w="med" len="med"/>
-                      <a:tailEnd type="none" w="med" len="med"/>
-                    </a:lnB>
-                    <a:solidFill>
-                      <a:srgbClr val="FFFFFF"/>
-                    </a:solidFill>
-                  </a:tcPr>
-                </a:tc>
-                <a:tc>
-                  <a:txBody>
-                    <a:bodyPr/>
-                    <a:lstStyle/>
-                    <a:p>
-                      <a:pPr indent="0" marL="0">
-                        <a:buNone/>
-                      </a:pPr>
-                      <a:r>
-                        <a:rPr lang="en-US" sz="950" dirty="0">
-                          <a:solidFill>
-                            <a:srgbClr val="5B6B73"/>
-                          </a:solidFill>
-                          <a:latin typeface="Calibri" pitchFamily="34" charset="0"/>
-                          <a:ea typeface="Calibri" pitchFamily="34" charset="-122"/>
-                          <a:cs typeface="Calibri" pitchFamily="34" charset="-120"/>
-                        </a:rPr>
-                        <a:t>Rotina Operacional</a:t>
-                      </a:r>
-                      <a:endParaRPr lang="en-US" sz="950" dirty="0">
-                        <a:latin typeface="Calibri" charset="0"/>
-                        <a:ea typeface="Calibri" charset="0"/>
-                        <a:cs typeface="Calibri" charset="0"/>
-                      </a:endParaRPr>
-                    </a:p>
-                  </a:txBody>
-                  <a:tcPr marL="91440" marR="91440" marT="45720" marB="45720" anchor="ctr">
-                    <a:lnL w="6350" cap="flat" cmpd="sng" algn="ctr">
-                      <a:solidFill>
-                        <a:srgbClr val="E3E8E9"/>
-                      </a:solidFill>
-                      <a:prstDash val="solid"/>
-                      <a:round/>
-                      <a:headEnd type="none" w="med" len="med"/>
-                      <a:tailEnd type="none" w="med" len="med"/>
-                    </a:lnL>
-                    <a:lnR w="6350" cap="flat" cmpd="sng" algn="ctr">
-                      <a:solidFill>
-                        <a:srgbClr val="E3E8E9"/>
-                      </a:solidFill>
-                      <a:prstDash val="solid"/>
-                      <a:round/>
-                      <a:headEnd type="none" w="med" len="med"/>
-                      <a:tailEnd type="none" w="med" len="med"/>
-                    </a:lnR>
-                    <a:lnT w="6350" cap="flat" cmpd="sng" algn="ctr">
-                      <a:solidFill>
-                        <a:srgbClr val="E3E8E9"/>
-                      </a:solidFill>
-                      <a:prstDash val="solid"/>
-                      <a:round/>
-                      <a:headEnd type="none" w="med" len="med"/>
-                      <a:tailEnd type="none" w="med" len="med"/>
-                    </a:lnT>
-                    <a:lnB w="6350" cap="flat" cmpd="sng" algn="ctr">
-                      <a:solidFill>
-                        <a:srgbClr val="E3E8E9"/>
-                      </a:solidFill>
-                      <a:prstDash val="solid"/>
-                      <a:round/>
-                      <a:headEnd type="none" w="med" len="med"/>
-                      <a:tailEnd type="none" w="med" len="med"/>
-                    </a:lnB>
-                    <a:solidFill>
-                      <a:srgbClr val="FFFFFF"/>
-                    </a:solidFill>
-                  </a:tcPr>
-                </a:tc>
-                <a:tc>
-                  <a:txBody>
-                    <a:bodyPr/>
-                    <a:lstStyle/>
-                    <a:p>
-                      <a:pPr indent="0" marL="0">
-                        <a:buNone/>
-                      </a:pPr>
-                      <a:r>
-                        <a:rPr lang="en-US" sz="950" dirty="0">
-                          <a:solidFill>
-                            <a:srgbClr val="5B6B73"/>
-                          </a:solidFill>
-                          <a:latin typeface="Calibri" pitchFamily="34" charset="0"/>
-                          <a:ea typeface="Calibri" pitchFamily="34" charset="-122"/>
-                          <a:cs typeface="Calibri" pitchFamily="34" charset="-120"/>
-                        </a:rPr>
-                        <a:t>EIM - Manutenção &amp; Integridade</a:t>
-                      </a:r>
-                      <a:endParaRPr lang="en-US" sz="950" dirty="0">
-                        <a:latin typeface="Calibri" charset="0"/>
-                        <a:ea typeface="Calibri" charset="0"/>
-                        <a:cs typeface="Calibri" charset="0"/>
-                      </a:endParaRPr>
-                    </a:p>
-                  </a:txBody>
-                  <a:tcPr marL="91440" marR="91440" marT="45720" marB="45720" anchor="ctr">
-                    <a:lnL w="6350" cap="flat" cmpd="sng" algn="ctr">
-                      <a:solidFill>
-                        <a:srgbClr val="E3E8E9"/>
-                      </a:solidFill>
-                      <a:prstDash val="solid"/>
-                      <a:round/>
-                      <a:headEnd type="none" w="med" len="med"/>
-                      <a:tailEnd type="none" w="med" len="med"/>
-                    </a:lnL>
-                    <a:lnR w="6350" cap="flat" cmpd="sng" algn="ctr">
-                      <a:solidFill>
-                        <a:srgbClr val="E3E8E9"/>
-                      </a:solidFill>
-                      <a:prstDash val="solid"/>
-                      <a:round/>
-                      <a:headEnd type="none" w="med" len="med"/>
-                      <a:tailEnd type="none" w="med" len="med"/>
-                    </a:lnR>
-                    <a:lnT w="6350" cap="flat" cmpd="sng" algn="ctr">
-                      <a:solidFill>
-                        <a:srgbClr val="E3E8E9"/>
-                      </a:solidFill>
-                      <a:prstDash val="solid"/>
-                      <a:round/>
-                      <a:headEnd type="none" w="med" len="med"/>
-                      <a:tailEnd type="none" w="med" len="med"/>
-                    </a:lnT>
-                    <a:lnB w="6350" cap="flat" cmpd="sng" algn="ctr">
-                      <a:solidFill>
-                        <a:srgbClr val="E3E8E9"/>
-                      </a:solidFill>
-                      <a:prstDash val="solid"/>
-                      <a:round/>
-                      <a:headEnd type="none" w="med" len="med"/>
-                      <a:tailEnd type="none" w="med" len="med"/>
-                    </a:lnB>
-                    <a:solidFill>
-                      <a:srgbClr val="FFFFFF"/>
-                    </a:solidFill>
-                  </a:tcPr>
-                </a:tc>
-                <a:tc>
-                  <a:txBody>
-                    <a:bodyPr/>
-                    <a:lstStyle/>
-                    <a:p>
-                      <a:pPr algn="r" indent="0" marL="0">
-                        <a:buNone/>
-                      </a:pPr>
-                      <a:r>
-                        <a:rPr lang="en-US" sz="1000" b="1" dirty="0">
-                          <a:solidFill>
-                            <a:srgbClr val="0B2A3D"/>
-                          </a:solidFill>
-                          <a:latin typeface="Calibri" pitchFamily="34" charset="0"/>
-                          <a:ea typeface="Calibri" pitchFamily="34" charset="-122"/>
-                          <a:cs typeface="Calibri" pitchFamily="34" charset="-120"/>
-                        </a:rPr>
-                        <a:t>US$ 414,5 mil</a:t>
-                      </a:r>
-                      <a:endParaRPr lang="en-US" sz="1000" dirty="0">
-                        <a:latin typeface="Calibri" charset="0"/>
-                        <a:ea typeface="Calibri" charset="0"/>
-                        <a:cs typeface="Calibri" charset="0"/>
-                      </a:endParaRPr>
-                    </a:p>
-                  </a:txBody>
-                  <a:tcPr marL="91440" marR="91440" marT="45720" marB="45720" anchor="ctr">
-                    <a:lnL w="6350" cap="flat" cmpd="sng" algn="ctr">
-                      <a:solidFill>
-                        <a:srgbClr val="E3E8E9"/>
-                      </a:solidFill>
-                      <a:prstDash val="solid"/>
-                      <a:round/>
-                      <a:headEnd type="none" w="med" len="med"/>
-                      <a:tailEnd type="none" w="med" len="med"/>
-                    </a:lnL>
-                    <a:lnR w="6350" cap="flat" cmpd="sng" algn="ctr">
-                      <a:solidFill>
-                        <a:srgbClr val="E3E8E9"/>
-                      </a:solidFill>
-                      <a:prstDash val="solid"/>
-                      <a:round/>
-                      <a:headEnd type="none" w="med" len="med"/>
-                      <a:tailEnd type="none" w="med" len="med"/>
-                    </a:lnR>
-                    <a:lnT w="6350" cap="flat" cmpd="sng" algn="ctr">
-                      <a:solidFill>
-                        <a:srgbClr val="E3E8E9"/>
-                      </a:solidFill>
-                      <a:prstDash val="solid"/>
-                      <a:round/>
-                      <a:headEnd type="none" w="med" len="med"/>
-                      <a:tailEnd type="none" w="med" len="med"/>
-                    </a:lnT>
-                    <a:lnB w="6350" cap="flat" cmpd="sng" algn="ctr">
-                      <a:solidFill>
-                        <a:srgbClr val="E3E8E9"/>
-                      </a:solidFill>
-                      <a:prstDash val="solid"/>
-                      <a:round/>
-                      <a:headEnd type="none" w="med" len="med"/>
-                      <a:tailEnd type="none" w="med" len="med"/>
-                    </a:lnB>
-                    <a:solidFill>
-                      <a:srgbClr val="FFFFFF"/>
-                    </a:solidFill>
-                  </a:tcPr>
-                </a:tc>
-              </a:tr>
-              <a:tr h="288036">
-                <a:tc>
-                  <a:txBody>
-                    <a:bodyPr/>
-                    <a:lstStyle/>
-                    <a:p>
-                      <a:pPr indent="0" marL="0">
-                        <a:buNone/>
-                      </a:pPr>
-                      <a:r>
-                        <a:rPr lang="en-US" sz="1000" dirty="0">
-                          <a:solidFill>
-                            <a:srgbClr val="1C2B33"/>
-                          </a:solidFill>
-                          <a:latin typeface="Calibri" pitchFamily="34" charset="0"/>
-                          <a:ea typeface="Calibri" pitchFamily="34" charset="-122"/>
-                          <a:cs typeface="Calibri" pitchFamily="34" charset="-120"/>
-                        </a:rPr>
-                        <a:t>Novas Destiladoras</a:t>
-                      </a:r>
-                      <a:endParaRPr lang="en-US" sz="1000" dirty="0">
-                        <a:latin typeface="Calibri" charset="0"/>
-                        <a:ea typeface="Calibri" charset="0"/>
-                        <a:cs typeface="Calibri" charset="0"/>
-                      </a:endParaRPr>
-                    </a:p>
-                  </a:txBody>
-                  <a:tcPr marL="91440" marR="91440" marT="45720" marB="45720" anchor="ctr">
-                    <a:lnL w="6350" cap="flat" cmpd="sng" algn="ctr">
-                      <a:solidFill>
-                        <a:srgbClr val="E3E8E9"/>
-                      </a:solidFill>
-                      <a:prstDash val="solid"/>
-                      <a:round/>
-                      <a:headEnd type="none" w="med" len="med"/>
-                      <a:tailEnd type="none" w="med" len="med"/>
-                    </a:lnL>
-                    <a:lnR w="6350" cap="flat" cmpd="sng" algn="ctr">
-                      <a:solidFill>
-                        <a:srgbClr val="E3E8E9"/>
-                      </a:solidFill>
-                      <a:prstDash val="solid"/>
-                      <a:round/>
-                      <a:headEnd type="none" w="med" len="med"/>
-                      <a:tailEnd type="none" w="med" len="med"/>
-                    </a:lnR>
-                    <a:lnT w="6350" cap="flat" cmpd="sng" algn="ctr">
-                      <a:solidFill>
-                        <a:srgbClr val="E3E8E9"/>
-                      </a:solidFill>
-                      <a:prstDash val="solid"/>
-                      <a:round/>
-                      <a:headEnd type="none" w="med" len="med"/>
-                      <a:tailEnd type="none" w="med" len="med"/>
-                    </a:lnT>
-                    <a:lnB w="6350" cap="flat" cmpd="sng" algn="ctr">
-                      <a:solidFill>
-                        <a:srgbClr val="E3E8E9"/>
-                      </a:solidFill>
-                      <a:prstDash val="solid"/>
-                      <a:round/>
-                      <a:headEnd type="none" w="med" len="med"/>
-                      <a:tailEnd type="none" w="med" len="med"/>
-                    </a:lnB>
-                    <a:solidFill>
-                      <a:srgbClr val="F0F4F5"/>
-                    </a:solidFill>
-                  </a:tcPr>
-                </a:tc>
-                <a:tc>
-                  <a:txBody>
-                    <a:bodyPr/>
-                    <a:lstStyle/>
-                    <a:p>
-                      <a:pPr indent="0" marL="0">
-                        <a:buNone/>
-                      </a:pPr>
-                      <a:r>
-                        <a:rPr lang="en-US" sz="950" dirty="0">
-                          <a:solidFill>
-                            <a:srgbClr val="5B6B73"/>
-                          </a:solidFill>
-                          <a:latin typeface="Calibri" pitchFamily="34" charset="0"/>
-                          <a:ea typeface="Calibri" pitchFamily="34" charset="-122"/>
-                          <a:cs typeface="Calibri" pitchFamily="34" charset="-120"/>
-                        </a:rPr>
-                        <a:t>Eficiência de Produção</a:t>
-                      </a:r>
-                      <a:endParaRPr lang="en-US" sz="950" dirty="0">
-                        <a:latin typeface="Calibri" charset="0"/>
-                        <a:ea typeface="Calibri" charset="0"/>
-                        <a:cs typeface="Calibri" charset="0"/>
-                      </a:endParaRPr>
-                    </a:p>
-                  </a:txBody>
-                  <a:tcPr marL="91440" marR="91440" marT="45720" marB="45720" anchor="ctr">
-                    <a:lnL w="6350" cap="flat" cmpd="sng" algn="ctr">
-                      <a:solidFill>
-                        <a:srgbClr val="E3E8E9"/>
-                      </a:solidFill>
-                      <a:prstDash val="solid"/>
-                      <a:round/>
-                      <a:headEnd type="none" w="med" len="med"/>
-                      <a:tailEnd type="none" w="med" len="med"/>
-                    </a:lnL>
-                    <a:lnR w="6350" cap="flat" cmpd="sng" algn="ctr">
-                      <a:solidFill>
-                        <a:srgbClr val="E3E8E9"/>
-                      </a:solidFill>
-                      <a:prstDash val="solid"/>
-                      <a:round/>
-                      <a:headEnd type="none" w="med" len="med"/>
-                      <a:tailEnd type="none" w="med" len="med"/>
-                    </a:lnR>
-                    <a:lnT w="6350" cap="flat" cmpd="sng" algn="ctr">
-                      <a:solidFill>
-                        <a:srgbClr val="E3E8E9"/>
-                      </a:solidFill>
-                      <a:prstDash val="solid"/>
-                      <a:round/>
-                      <a:headEnd type="none" w="med" len="med"/>
-                      <a:tailEnd type="none" w="med" len="med"/>
-                    </a:lnT>
-                    <a:lnB w="6350" cap="flat" cmpd="sng" algn="ctr">
-                      <a:solidFill>
-                        <a:srgbClr val="E3E8E9"/>
-                      </a:solidFill>
-                      <a:prstDash val="solid"/>
-                      <a:round/>
-                      <a:headEnd type="none" w="med" len="med"/>
-                      <a:tailEnd type="none" w="med" len="med"/>
-                    </a:lnB>
-                    <a:solidFill>
-                      <a:srgbClr val="F0F4F5"/>
-                    </a:solidFill>
-                  </a:tcPr>
-                </a:tc>
-                <a:tc>
-                  <a:txBody>
-                    <a:bodyPr/>
-                    <a:lstStyle/>
-                    <a:p>
-                      <a:pPr indent="0" marL="0">
-                        <a:buNone/>
-                      </a:pPr>
-                      <a:r>
-                        <a:rPr lang="en-US" sz="950" dirty="0">
-                          <a:solidFill>
-                            <a:srgbClr val="5B6B73"/>
-                          </a:solidFill>
-                          <a:latin typeface="Calibri" pitchFamily="34" charset="0"/>
-                          <a:ea typeface="Calibri" pitchFamily="34" charset="-122"/>
-                          <a:cs typeface="Calibri" pitchFamily="34" charset="-120"/>
-                        </a:rPr>
-                        <a:t>Projetos</a:t>
-                      </a:r>
-                      <a:endParaRPr lang="en-US" sz="950" dirty="0">
-                        <a:latin typeface="Calibri" charset="0"/>
-                        <a:ea typeface="Calibri" charset="0"/>
-                        <a:cs typeface="Calibri" charset="0"/>
-                      </a:endParaRPr>
-                    </a:p>
-                  </a:txBody>
-                  <a:tcPr marL="91440" marR="91440" marT="45720" marB="45720" anchor="ctr">
-                    <a:lnL w="6350" cap="flat" cmpd="sng" algn="ctr">
-                      <a:solidFill>
-                        <a:srgbClr val="E3E8E9"/>
-                      </a:solidFill>
-                      <a:prstDash val="solid"/>
-                      <a:round/>
-                      <a:headEnd type="none" w="med" len="med"/>
-                      <a:tailEnd type="none" w="med" len="med"/>
-                    </a:lnL>
-                    <a:lnR w="6350" cap="flat" cmpd="sng" algn="ctr">
-                      <a:solidFill>
-                        <a:srgbClr val="E3E8E9"/>
-                      </a:solidFill>
-                      <a:prstDash val="solid"/>
-                      <a:round/>
-                      <a:headEnd type="none" w="med" len="med"/>
-                      <a:tailEnd type="none" w="med" len="med"/>
-                    </a:lnR>
-                    <a:lnT w="6350" cap="flat" cmpd="sng" algn="ctr">
-                      <a:solidFill>
-                        <a:srgbClr val="E3E8E9"/>
-                      </a:solidFill>
-                      <a:prstDash val="solid"/>
-                      <a:round/>
-                      <a:headEnd type="none" w="med" len="med"/>
-                      <a:tailEnd type="none" w="med" len="med"/>
-                    </a:lnT>
-                    <a:lnB w="6350" cap="flat" cmpd="sng" algn="ctr">
-                      <a:solidFill>
-                        <a:srgbClr val="E3E8E9"/>
-                      </a:solidFill>
-                      <a:prstDash val="solid"/>
-                      <a:round/>
-                      <a:headEnd type="none" w="med" len="med"/>
-                      <a:tailEnd type="none" w="med" len="med"/>
-                    </a:lnB>
-                    <a:solidFill>
-                      <a:srgbClr val="F0F4F5"/>
-                    </a:solidFill>
-                  </a:tcPr>
-                </a:tc>
-                <a:tc>
-                  <a:txBody>
-                    <a:bodyPr/>
-                    <a:lstStyle/>
-                    <a:p>
-                      <a:pPr algn="r" indent="0" marL="0">
-                        <a:buNone/>
-                      </a:pPr>
-                      <a:r>
-                        <a:rPr lang="en-US" sz="1000" b="1" dirty="0">
-                          <a:solidFill>
-                            <a:srgbClr val="0B2A3D"/>
-                          </a:solidFill>
-                          <a:latin typeface="Calibri" pitchFamily="34" charset="0"/>
-                          <a:ea typeface="Calibri" pitchFamily="34" charset="-122"/>
-                          <a:cs typeface="Calibri" pitchFamily="34" charset="-120"/>
-                        </a:rPr>
-                        <a:t>US$ 411,9 mil</a:t>
+                        <a:t>US$ 281,8 mil</a:t>
                       </a:r>
                       <a:endParaRPr lang="en-US" sz="1000" dirty="0">
                         <a:latin typeface="Calibri" charset="0"/>
@@ -9269,7 +9367,7 @@
                           <a:ea typeface="Calibri" pitchFamily="34" charset="-122"/>
                           <a:cs typeface="Calibri" pitchFamily="34" charset="-120"/>
                         </a:rPr>
-                        <a:t>Outros 57 escopos (itens de menor valor individual)</a:t>
+                        <a:t>Outros 51 escopos (itens de menor valor individual)</a:t>
                       </a:r>
                       <a:endParaRPr lang="en-US" sz="950" dirty="0">
                         <a:latin typeface="Calibri" charset="0"/>
@@ -9343,7 +9441,7 @@
                           <a:ea typeface="Calibri" pitchFamily="34" charset="-122"/>
                           <a:cs typeface="Calibri" pitchFamily="34" charset="-120"/>
                         </a:rPr>
-                        <a:t>US$ 4,1 mi</a:t>
+                        <a:t>US$ 3,3 mi</a:t>
                       </a:r>
                       <a:endParaRPr lang="en-US" sz="1000" dirty="0">
                         <a:latin typeface="Calibri" charset="0"/>
@@ -9919,7 +10017,7 @@
                 <a:ea typeface="Cambria" pitchFamily="34" charset="-122"/>
                 <a:cs typeface="Cambria" pitchFamily="34" charset="-120"/>
               </a:rPr>
-              <a:t>US$ 5,1 mi</a:t>
+              <a:t>US$ 5,9 mi</a:t>
             </a:r>
             <a:endParaRPr lang="en-US" sz="3300" dirty="0"/>
           </a:p>
@@ -10058,7 +10156,7 @@
                 <a:ea typeface="Cambria" pitchFamily="34" charset="-122"/>
                 <a:cs typeface="Cambria" pitchFamily="34" charset="-120"/>
               </a:rPr>
-              <a:t>US$ 3,5 mi</a:t>
+              <a:t>US$ 4,3 mi</a:t>
             </a:r>
             <a:endParaRPr lang="en-US" sz="1800" dirty="0"/>
           </a:p>
@@ -10258,7 +10356,7 @@
                 <a:ea typeface="Cambria" pitchFamily="34" charset="-122"/>
                 <a:cs typeface="Cambria" pitchFamily="34" charset="-120"/>
               </a:rPr>
-              <a:t>US$ 3,1 mi</a:t>
+              <a:t>US$ 3,2 mi</a:t>
             </a:r>
             <a:endParaRPr lang="en-US" sz="1800" dirty="0"/>
           </a:p>
@@ -10358,7 +10456,7 @@
                 <a:ea typeface="Cambria" pitchFamily="34" charset="-122"/>
                 <a:cs typeface="Cambria" pitchFamily="34" charset="-120"/>
               </a:rPr>
-              <a:t>US$ 2,0 mi</a:t>
+              <a:t>US$ 2,7 mi</a:t>
             </a:r>
             <a:endParaRPr lang="en-US" sz="1800" dirty="0"/>
           </a:p>
@@ -10713,7 +10811,7 @@
                 <a:ea typeface="Calibri" pitchFamily="34" charset="-122"/>
                 <a:cs typeface="Calibri" pitchFamily="34" charset="-120"/>
               </a:rPr>
-              <a:t>US$ 634,0 mil</a:t>
+              <a:t>US$ 1,2 mi</a:t>
             </a:r>
             <a:endParaRPr lang="en-US" sz="1100" dirty="0"/>
           </a:p>
@@ -10748,6 +10846,84 @@
         <p:spPr>
           <a:xfrm>
             <a:off x="566928" y="4498848"/>
+            <a:ext cx="3316529" cy="365760"/>
+          </a:xfrm>
+          <a:prstGeom prst="rect">
+            <a:avLst/>
+          </a:prstGeom>
+          <a:noFill/>
+          <a:ln/>
+        </p:spPr>
+        <p:txBody>
+          <a:bodyPr wrap="square" lIns="0" tIns="0" rIns="0" bIns="0" rtlCol="0" anchor="ctr"/>
+          <a:lstStyle/>
+          <a:p>
+            <a:pPr indent="0" marL="0">
+              <a:buNone/>
+            </a:pPr>
+            <a:r>
+              <a:rPr lang="en-US" sz="1100" dirty="0">
+                <a:solidFill>
+                  <a:srgbClr val="1C2B33"/>
+                </a:solidFill>
+                <a:latin typeface="Calibri" pitchFamily="34" charset="0"/>
+                <a:ea typeface="Calibri" pitchFamily="34" charset="-122"/>
+                <a:cs typeface="Calibri" pitchFamily="34" charset="-120"/>
+              </a:rPr>
+              <a:t>ADM - Administrativo</a:t>
+            </a:r>
+            <a:endParaRPr lang="en-US" sz="1100" dirty="0"/>
+          </a:p>
+        </p:txBody>
+      </p:sp>
+      <p:sp>
+        <p:nvSpPr>
+          <p:cNvPr id="33" name="Text 31"/>
+          <p:cNvSpPr txBox="1"/>
+          <p:nvPr/>
+        </p:nvSpPr>
+        <p:spPr>
+          <a:xfrm>
+            <a:off x="3773729" y="4498848"/>
+            <a:ext cx="1815998" cy="365760"/>
+          </a:xfrm>
+          <a:prstGeom prst="rect">
+            <a:avLst/>
+          </a:prstGeom>
+          <a:noFill/>
+          <a:ln/>
+        </p:spPr>
+        <p:txBody>
+          <a:bodyPr wrap="square" lIns="0" tIns="0" rIns="0" bIns="0" rtlCol="0" anchor="ctr"/>
+          <a:lstStyle/>
+          <a:p>
+            <a:pPr algn="r" indent="0" marL="0">
+              <a:buNone/>
+            </a:pPr>
+            <a:r>
+              <a:rPr lang="en-US" sz="1100" b="1" dirty="0">
+                <a:solidFill>
+                  <a:srgbClr val="0B2A3D"/>
+                </a:solidFill>
+                <a:latin typeface="Calibri" pitchFamily="34" charset="0"/>
+                <a:ea typeface="Calibri" pitchFamily="34" charset="-122"/>
+                <a:cs typeface="Calibri" pitchFamily="34" charset="-120"/>
+              </a:rPr>
+              <a:t>US$ 298,0 mil</a:t>
+            </a:r>
+            <a:endParaRPr lang="en-US" sz="1100" dirty="0"/>
+          </a:p>
+        </p:txBody>
+      </p:sp>
+      <p:sp>
+        <p:nvSpPr>
+          <p:cNvPr id="34" name="Text 32"/>
+          <p:cNvSpPr txBox="1"/>
+          <p:nvPr/>
+        </p:nvSpPr>
+        <p:spPr>
+          <a:xfrm>
+            <a:off x="566928" y="4864608"/>
             <a:ext cx="3316529" cy="365760"/>
           </a:xfrm>
           <a:prstGeom prst="rect">
@@ -10780,13 +10956,13 @@
       </p:sp>
       <p:sp>
         <p:nvSpPr>
-          <p:cNvPr id="33" name="Text 31"/>
+          <p:cNvPr id="35" name="Text 33"/>
           <p:cNvSpPr txBox="1"/>
           <p:nvPr/>
         </p:nvSpPr>
         <p:spPr>
           <a:xfrm>
-            <a:off x="3773729" y="4498848"/>
+            <a:off x="3773729" y="4864608"/>
             <a:ext cx="1815998" cy="365760"/>
           </a:xfrm>
           <a:prstGeom prst="rect">
@@ -10819,13 +10995,33 @@
       </p:sp>
       <p:sp>
         <p:nvSpPr>
-          <p:cNvPr id="34" name="Text 32"/>
+          <p:cNvPr id="36" name="Shape 34"/>
+          <p:cNvSpPr/>
+          <p:nvPr/>
+        </p:nvSpPr>
+        <p:spPr>
+          <a:xfrm>
+            <a:off x="457200" y="5230368"/>
+            <a:ext cx="5349240" cy="365760"/>
+          </a:xfrm>
+          <a:prstGeom prst="rect">
+            <a:avLst/>
+          </a:prstGeom>
+          <a:solidFill>
+            <a:srgbClr val="F0F4F5"/>
+          </a:solidFill>
+          <a:ln/>
+        </p:spPr>
+      </p:sp>
+      <p:sp>
+        <p:nvSpPr>
+          <p:cNvPr id="37" name="Text 35"/>
           <p:cNvSpPr txBox="1"/>
           <p:nvPr/>
         </p:nvSpPr>
         <p:spPr>
           <a:xfrm>
-            <a:off x="566928" y="4864608"/>
+            <a:off x="566928" y="5230368"/>
             <a:ext cx="3316529" cy="365760"/>
           </a:xfrm>
           <a:prstGeom prst="rect">
@@ -10858,13 +11054,13 @@
       </p:sp>
       <p:sp>
         <p:nvSpPr>
-          <p:cNvPr id="35" name="Text 33"/>
+          <p:cNvPr id="38" name="Text 36"/>
           <p:cNvSpPr txBox="1"/>
           <p:nvPr/>
         </p:nvSpPr>
         <p:spPr>
           <a:xfrm>
-            <a:off x="3773729" y="4864608"/>
+            <a:off x="3773729" y="5230368"/>
             <a:ext cx="1815998" cy="365760"/>
           </a:xfrm>
           <a:prstGeom prst="rect">
@@ -10897,33 +11093,13 @@
       </p:sp>
       <p:sp>
         <p:nvSpPr>
-          <p:cNvPr id="36" name="Shape 34"/>
-          <p:cNvSpPr/>
+          <p:cNvPr id="39" name="Text 37"/>
+          <p:cNvSpPr txBox="1"/>
           <p:nvPr/>
         </p:nvSpPr>
         <p:spPr>
           <a:xfrm>
-            <a:off x="457200" y="5230368"/>
-            <a:ext cx="5349240" cy="365760"/>
-          </a:xfrm>
-          <a:prstGeom prst="rect">
-            <a:avLst/>
-          </a:prstGeom>
-          <a:solidFill>
-            <a:srgbClr val="F0F4F5"/>
-          </a:solidFill>
-          <a:ln/>
-        </p:spPr>
-      </p:sp>
-      <p:sp>
-        <p:nvSpPr>
-          <p:cNvPr id="37" name="Text 35"/>
-          <p:cNvSpPr txBox="1"/>
-          <p:nvPr/>
-        </p:nvSpPr>
-        <p:spPr>
-          <a:xfrm>
-            <a:off x="566928" y="5230368"/>
+            <a:off x="566928" y="5596128"/>
             <a:ext cx="3316529" cy="365760"/>
           </a:xfrm>
           <a:prstGeom prst="rect">
@@ -10956,13 +11132,13 @@
       </p:sp>
       <p:sp>
         <p:nvSpPr>
-          <p:cNvPr id="38" name="Text 36"/>
+          <p:cNvPr id="40" name="Text 38"/>
           <p:cNvSpPr txBox="1"/>
           <p:nvPr/>
         </p:nvSpPr>
         <p:spPr>
           <a:xfrm>
-            <a:off x="3773729" y="5230368"/>
+            <a:off x="3773729" y="5596128"/>
             <a:ext cx="1815998" cy="365760"/>
           </a:xfrm>
           <a:prstGeom prst="rect">
@@ -10987,7 +11163,7 @@
                 <a:ea typeface="Calibri" pitchFamily="34" charset="-122"/>
                 <a:cs typeface="Calibri" pitchFamily="34" charset="-120"/>
               </a:rPr>
-              <a:t>US$ 81,3 mil</a:t>
+              <a:t>US$ 38,2 mil</a:t>
             </a:r>
             <a:endParaRPr lang="en-US" sz="1100" dirty="0"/>
           </a:p>
@@ -10995,7 +11171,7 @@
       </p:sp>
       <p:sp>
         <p:nvSpPr>
-          <p:cNvPr id="39" name="Text 37"/>
+          <p:cNvPr id="41" name="Text 39"/>
           <p:cNvSpPr txBox="1"/>
           <p:nvPr/>
         </p:nvSpPr>
@@ -11034,7 +11210,7 @@
       </p:sp>
       <p:sp>
         <p:nvSpPr>
-          <p:cNvPr id="40" name="Shape 38"/>
+          <p:cNvPr id="42" name="Shape 40"/>
           <p:cNvSpPr/>
           <p:nvPr/>
         </p:nvSpPr>
@@ -11057,7 +11233,7 @@
       </p:sp>
       <p:sp>
         <p:nvSpPr>
-          <p:cNvPr id="41" name="Text 39"/>
+          <p:cNvPr id="43" name="Text 41"/>
           <p:cNvSpPr txBox="1"/>
           <p:nvPr/>
         </p:nvSpPr>
@@ -11096,7 +11272,7 @@
       </p:sp>
       <p:sp>
         <p:nvSpPr>
-          <p:cNvPr id="42" name="Text 40"/>
+          <p:cNvPr id="44" name="Text 42"/>
           <p:cNvSpPr txBox="1"/>
           <p:nvPr/>
         </p:nvSpPr>
@@ -11135,7 +11311,7 @@
       </p:sp>
       <p:sp>
         <p:nvSpPr>
-          <p:cNvPr id="43" name="Shape 41"/>
+          <p:cNvPr id="45" name="Shape 43"/>
           <p:cNvSpPr/>
           <p:nvPr/>
         </p:nvSpPr>
@@ -11155,7 +11331,7 @@
       </p:sp>
       <p:sp>
         <p:nvSpPr>
-          <p:cNvPr id="44" name="Text 42"/>
+          <p:cNvPr id="46" name="Text 44"/>
           <p:cNvSpPr txBox="1"/>
           <p:nvPr/>
         </p:nvSpPr>
@@ -11194,7 +11370,7 @@
       </p:sp>
       <p:sp>
         <p:nvSpPr>
-          <p:cNvPr id="45" name="Text 43"/>
+          <p:cNvPr id="47" name="Text 45"/>
           <p:cNvSpPr txBox="1"/>
           <p:nvPr/>
         </p:nvSpPr>
@@ -11233,7 +11409,7 @@
       </p:sp>
       <p:sp>
         <p:nvSpPr>
-          <p:cNvPr id="46" name="Text 44"/>
+          <p:cNvPr id="48" name="Text 46"/>
           <p:cNvSpPr txBox="1"/>
           <p:nvPr/>
         </p:nvSpPr>
@@ -11272,7 +11448,7 @@
       </p:sp>
       <p:sp>
         <p:nvSpPr>
-          <p:cNvPr id="47" name="Text 45"/>
+          <p:cNvPr id="49" name="Text 47"/>
           <p:cNvSpPr txBox="1"/>
           <p:nvPr/>
         </p:nvSpPr>
@@ -11303,7 +11479,7 @@
                 <a:ea typeface="Calibri" pitchFamily="34" charset="-122"/>
                 <a:cs typeface="Calibri" pitchFamily="34" charset="-120"/>
               </a:rPr>
-              <a:t>US$ 634,0 mil</a:t>
+              <a:t>US$ 1,5 mi</a:t>
             </a:r>
             <a:endParaRPr lang="en-US" sz="1100" dirty="0"/>
           </a:p>
@@ -11311,7 +11487,7 @@
       </p:sp>
       <p:sp>
         <p:nvSpPr>
-          <p:cNvPr id="48" name="Shape 46"/>
+          <p:cNvPr id="50" name="Shape 48"/>
           <p:cNvSpPr/>
           <p:nvPr/>
         </p:nvSpPr>
@@ -11331,7 +11507,7 @@
       </p:sp>
       <p:sp>
         <p:nvSpPr>
-          <p:cNvPr id="49" name="Text 47"/>
+          <p:cNvPr id="51" name="Text 49"/>
           <p:cNvSpPr txBox="1"/>
           <p:nvPr/>
         </p:nvSpPr>
@@ -11370,7 +11546,7 @@
       </p:sp>
       <p:sp>
         <p:nvSpPr>
-          <p:cNvPr id="50" name="Text 48"/>
+          <p:cNvPr id="52" name="Text 50"/>
           <p:cNvSpPr txBox="1"/>
           <p:nvPr/>
         </p:nvSpPr>
@@ -11409,7 +11585,7 @@
       </p:sp>
       <p:sp>
         <p:nvSpPr>
-          <p:cNvPr id="51" name="Text 49"/>
+          <p:cNvPr id="53" name="Text 51"/>
           <p:cNvSpPr txBox="1"/>
           <p:nvPr/>
         </p:nvSpPr>
@@ -11602,7 +11778,7 @@
                 <a:ea typeface="Calibri" pitchFamily="34" charset="-122"/>
                 <a:cs typeface="Calibri" pitchFamily="34" charset="-120"/>
               </a:rPr>
-              <a:t>Principais escopos por valor · 38 itens no total</a:t>
+              <a:t>Principais escopos por valor · 37 itens no total</a:t>
             </a:r>
             <a:endParaRPr lang="en-US" sz="1250" dirty="0"/>
           </a:p>
@@ -12476,7 +12652,7 @@
                           <a:ea typeface="Calibri" pitchFamily="34" charset="-122"/>
                           <a:cs typeface="Calibri" pitchFamily="34" charset="-120"/>
                         </a:rPr>
-                        <a:t>MPP - Adequação do sistema de Selagem Multifásica</a:t>
+                        <a:t>TA - Compra de Placas de controle dos VFDs Rockwell</a:t>
                       </a:r>
                       <a:endParaRPr lang="en-US" sz="1000" dirty="0">
                         <a:latin typeface="Calibri" charset="0"/>
@@ -12680,6 +12856,280 @@
                           <a:ea typeface="Calibri" pitchFamily="34" charset="-122"/>
                           <a:cs typeface="Calibri" pitchFamily="34" charset="-120"/>
                         </a:rPr>
+                        <a:t>US$ 526,1 mil</a:t>
+                      </a:r>
+                      <a:endParaRPr lang="en-US" sz="1000" dirty="0">
+                        <a:latin typeface="Calibri" charset="0"/>
+                        <a:ea typeface="Calibri" charset="0"/>
+                        <a:cs typeface="Calibri" charset="0"/>
+                      </a:endParaRPr>
+                    </a:p>
+                  </a:txBody>
+                  <a:tcPr marL="91440" marR="91440" marT="45720" marB="45720" anchor="ctr">
+                    <a:lnL w="6350" cap="flat" cmpd="sng" algn="ctr">
+                      <a:solidFill>
+                        <a:srgbClr val="E3E8E9"/>
+                      </a:solidFill>
+                      <a:prstDash val="solid"/>
+                      <a:round/>
+                      <a:headEnd type="none" w="med" len="med"/>
+                      <a:tailEnd type="none" w="med" len="med"/>
+                    </a:lnL>
+                    <a:lnR w="6350" cap="flat" cmpd="sng" algn="ctr">
+                      <a:solidFill>
+                        <a:srgbClr val="E3E8E9"/>
+                      </a:solidFill>
+                      <a:prstDash val="solid"/>
+                      <a:round/>
+                      <a:headEnd type="none" w="med" len="med"/>
+                      <a:tailEnd type="none" w="med" len="med"/>
+                    </a:lnR>
+                    <a:lnT w="6350" cap="flat" cmpd="sng" algn="ctr">
+                      <a:solidFill>
+                        <a:srgbClr val="E3E8E9"/>
+                      </a:solidFill>
+                      <a:prstDash val="solid"/>
+                      <a:round/>
+                      <a:headEnd type="none" w="med" len="med"/>
+                      <a:tailEnd type="none" w="med" len="med"/>
+                    </a:lnT>
+                    <a:lnB w="6350" cap="flat" cmpd="sng" algn="ctr">
+                      <a:solidFill>
+                        <a:srgbClr val="E3E8E9"/>
+                      </a:solidFill>
+                      <a:prstDash val="solid"/>
+                      <a:round/>
+                      <a:headEnd type="none" w="med" len="med"/>
+                      <a:tailEnd type="none" w="med" len="med"/>
+                    </a:lnB>
+                    <a:solidFill>
+                      <a:srgbClr val="FFFFFF"/>
+                    </a:solidFill>
+                  </a:tcPr>
+                </a:tc>
+              </a:tr>
+              <a:tr h="288036">
+                <a:tc>
+                  <a:txBody>
+                    <a:bodyPr/>
+                    <a:lstStyle/>
+                    <a:p>
+                      <a:pPr indent="0" marL="0">
+                        <a:buNone/>
+                      </a:pPr>
+                      <a:r>
+                        <a:rPr lang="en-US" sz="1000" dirty="0">
+                          <a:solidFill>
+                            <a:srgbClr val="1C2B33"/>
+                          </a:solidFill>
+                          <a:latin typeface="Calibri" pitchFamily="34" charset="0"/>
+                          <a:ea typeface="Calibri" pitchFamily="34" charset="-122"/>
+                          <a:cs typeface="Calibri" pitchFamily="34" charset="-120"/>
+                        </a:rPr>
+                        <a:t>MPP - Adequação do sistema de Selagem Multifásica</a:t>
+                      </a:r>
+                      <a:endParaRPr lang="en-US" sz="1000" dirty="0">
+                        <a:latin typeface="Calibri" charset="0"/>
+                        <a:ea typeface="Calibri" charset="0"/>
+                        <a:cs typeface="Calibri" charset="0"/>
+                      </a:endParaRPr>
+                    </a:p>
+                  </a:txBody>
+                  <a:tcPr marL="91440" marR="91440" marT="45720" marB="45720" anchor="ctr">
+                    <a:lnL w="6350" cap="flat" cmpd="sng" algn="ctr">
+                      <a:solidFill>
+                        <a:srgbClr val="E3E8E9"/>
+                      </a:solidFill>
+                      <a:prstDash val="solid"/>
+                      <a:round/>
+                      <a:headEnd type="none" w="med" len="med"/>
+                      <a:tailEnd type="none" w="med" len="med"/>
+                    </a:lnL>
+                    <a:lnR w="6350" cap="flat" cmpd="sng" algn="ctr">
+                      <a:solidFill>
+                        <a:srgbClr val="E3E8E9"/>
+                      </a:solidFill>
+                      <a:prstDash val="solid"/>
+                      <a:round/>
+                      <a:headEnd type="none" w="med" len="med"/>
+                      <a:tailEnd type="none" w="med" len="med"/>
+                    </a:lnR>
+                    <a:lnT w="6350" cap="flat" cmpd="sng" algn="ctr">
+                      <a:solidFill>
+                        <a:srgbClr val="E3E8E9"/>
+                      </a:solidFill>
+                      <a:prstDash val="solid"/>
+                      <a:round/>
+                      <a:headEnd type="none" w="med" len="med"/>
+                      <a:tailEnd type="none" w="med" len="med"/>
+                    </a:lnT>
+                    <a:lnB w="6350" cap="flat" cmpd="sng" algn="ctr">
+                      <a:solidFill>
+                        <a:srgbClr val="E3E8E9"/>
+                      </a:solidFill>
+                      <a:prstDash val="solid"/>
+                      <a:round/>
+                      <a:headEnd type="none" w="med" len="med"/>
+                      <a:tailEnd type="none" w="med" len="med"/>
+                    </a:lnB>
+                    <a:solidFill>
+                      <a:srgbClr val="F0F4F5"/>
+                    </a:solidFill>
+                  </a:tcPr>
+                </a:tc>
+                <a:tc>
+                  <a:txBody>
+                    <a:bodyPr/>
+                    <a:lstStyle/>
+                    <a:p>
+                      <a:pPr indent="0" marL="0">
+                        <a:buNone/>
+                      </a:pPr>
+                      <a:r>
+                        <a:rPr lang="en-US" sz="950" dirty="0">
+                          <a:solidFill>
+                            <a:srgbClr val="5B6B73"/>
+                          </a:solidFill>
+                          <a:latin typeface="Calibri" pitchFamily="34" charset="0"/>
+                          <a:ea typeface="Calibri" pitchFamily="34" charset="-122"/>
+                          <a:cs typeface="Calibri" pitchFamily="34" charset="-120"/>
+                        </a:rPr>
+                        <a:t>Rotina Operacional</a:t>
+                      </a:r>
+                      <a:endParaRPr lang="en-US" sz="950" dirty="0">
+                        <a:latin typeface="Calibri" charset="0"/>
+                        <a:ea typeface="Calibri" charset="0"/>
+                        <a:cs typeface="Calibri" charset="0"/>
+                      </a:endParaRPr>
+                    </a:p>
+                  </a:txBody>
+                  <a:tcPr marL="91440" marR="91440" marT="45720" marB="45720" anchor="ctr">
+                    <a:lnL w="6350" cap="flat" cmpd="sng" algn="ctr">
+                      <a:solidFill>
+                        <a:srgbClr val="E3E8E9"/>
+                      </a:solidFill>
+                      <a:prstDash val="solid"/>
+                      <a:round/>
+                      <a:headEnd type="none" w="med" len="med"/>
+                      <a:tailEnd type="none" w="med" len="med"/>
+                    </a:lnL>
+                    <a:lnR w="6350" cap="flat" cmpd="sng" algn="ctr">
+                      <a:solidFill>
+                        <a:srgbClr val="E3E8E9"/>
+                      </a:solidFill>
+                      <a:prstDash val="solid"/>
+                      <a:round/>
+                      <a:headEnd type="none" w="med" len="med"/>
+                      <a:tailEnd type="none" w="med" len="med"/>
+                    </a:lnR>
+                    <a:lnT w="6350" cap="flat" cmpd="sng" algn="ctr">
+                      <a:solidFill>
+                        <a:srgbClr val="E3E8E9"/>
+                      </a:solidFill>
+                      <a:prstDash val="solid"/>
+                      <a:round/>
+                      <a:headEnd type="none" w="med" len="med"/>
+                      <a:tailEnd type="none" w="med" len="med"/>
+                    </a:lnT>
+                    <a:lnB w="6350" cap="flat" cmpd="sng" algn="ctr">
+                      <a:solidFill>
+                        <a:srgbClr val="E3E8E9"/>
+                      </a:solidFill>
+                      <a:prstDash val="solid"/>
+                      <a:round/>
+                      <a:headEnd type="none" w="med" len="med"/>
+                      <a:tailEnd type="none" w="med" len="med"/>
+                    </a:lnB>
+                    <a:solidFill>
+                      <a:srgbClr val="F0F4F5"/>
+                    </a:solidFill>
+                  </a:tcPr>
+                </a:tc>
+                <a:tc>
+                  <a:txBody>
+                    <a:bodyPr/>
+                    <a:lstStyle/>
+                    <a:p>
+                      <a:pPr indent="0" marL="0">
+                        <a:buNone/>
+                      </a:pPr>
+                      <a:r>
+                        <a:rPr lang="en-US" sz="950" dirty="0">
+                          <a:solidFill>
+                            <a:srgbClr val="5B6B73"/>
+                          </a:solidFill>
+                          <a:latin typeface="Calibri" pitchFamily="34" charset="0"/>
+                          <a:ea typeface="Calibri" pitchFamily="34" charset="-122"/>
+                          <a:cs typeface="Calibri" pitchFamily="34" charset="-120"/>
+                        </a:rPr>
+                        <a:t>EIM - Manutenção &amp; Integridade</a:t>
+                      </a:r>
+                      <a:endParaRPr lang="en-US" sz="950" dirty="0">
+                        <a:latin typeface="Calibri" charset="0"/>
+                        <a:ea typeface="Calibri" charset="0"/>
+                        <a:cs typeface="Calibri" charset="0"/>
+                      </a:endParaRPr>
+                    </a:p>
+                  </a:txBody>
+                  <a:tcPr marL="91440" marR="91440" marT="45720" marB="45720" anchor="ctr">
+                    <a:lnL w="6350" cap="flat" cmpd="sng" algn="ctr">
+                      <a:solidFill>
+                        <a:srgbClr val="E3E8E9"/>
+                      </a:solidFill>
+                      <a:prstDash val="solid"/>
+                      <a:round/>
+                      <a:headEnd type="none" w="med" len="med"/>
+                      <a:tailEnd type="none" w="med" len="med"/>
+                    </a:lnL>
+                    <a:lnR w="6350" cap="flat" cmpd="sng" algn="ctr">
+                      <a:solidFill>
+                        <a:srgbClr val="E3E8E9"/>
+                      </a:solidFill>
+                      <a:prstDash val="solid"/>
+                      <a:round/>
+                      <a:headEnd type="none" w="med" len="med"/>
+                      <a:tailEnd type="none" w="med" len="med"/>
+                    </a:lnR>
+                    <a:lnT w="6350" cap="flat" cmpd="sng" algn="ctr">
+                      <a:solidFill>
+                        <a:srgbClr val="E3E8E9"/>
+                      </a:solidFill>
+                      <a:prstDash val="solid"/>
+                      <a:round/>
+                      <a:headEnd type="none" w="med" len="med"/>
+                      <a:tailEnd type="none" w="med" len="med"/>
+                    </a:lnT>
+                    <a:lnB w="6350" cap="flat" cmpd="sng" algn="ctr">
+                      <a:solidFill>
+                        <a:srgbClr val="E3E8E9"/>
+                      </a:solidFill>
+                      <a:prstDash val="solid"/>
+                      <a:round/>
+                      <a:headEnd type="none" w="med" len="med"/>
+                      <a:tailEnd type="none" w="med" len="med"/>
+                    </a:lnB>
+                    <a:solidFill>
+                      <a:srgbClr val="F0F4F5"/>
+                    </a:solidFill>
+                  </a:tcPr>
+                </a:tc>
+                <a:tc>
+                  <a:txBody>
+                    <a:bodyPr/>
+                    <a:lstStyle/>
+                    <a:p>
+                      <a:pPr algn="r" indent="0" marL="0">
+                        <a:buNone/>
+                      </a:pPr>
+                      <a:r>
+                        <a:rPr lang="en-US" sz="1000" b="1" dirty="0">
+                          <a:solidFill>
+                            <a:srgbClr val="0B2A3D"/>
+                          </a:solidFill>
+                          <a:latin typeface="Calibri" pitchFamily="34" charset="0"/>
+                          <a:ea typeface="Calibri" pitchFamily="34" charset="-122"/>
+                          <a:cs typeface="Calibri" pitchFamily="34" charset="-120"/>
+                        </a:rPr>
                         <a:t>US$ 519,2 mil</a:t>
                       </a:r>
                       <a:endParaRPr lang="en-US" sz="1000" dirty="0">
@@ -12727,7 +13177,7 @@
                       <a:tailEnd type="none" w="med" len="med"/>
                     </a:lnB>
                     <a:solidFill>
-                      <a:srgbClr val="FFFFFF"/>
+                      <a:srgbClr val="F0F4F5"/>
                     </a:solidFill>
                   </a:tcPr>
                 </a:tc>
@@ -12797,7 +13247,7 @@
                       <a:tailEnd type="none" w="med" len="med"/>
                     </a:lnB>
                     <a:solidFill>
-                      <a:srgbClr val="F0F4F5"/>
+                      <a:srgbClr val="FFFFFF"/>
                     </a:solidFill>
                   </a:tcPr>
                 </a:tc>
@@ -12865,7 +13315,7 @@
                       <a:tailEnd type="none" w="med" len="med"/>
                     </a:lnB>
                     <a:solidFill>
-                      <a:srgbClr val="F0F4F5"/>
+                      <a:srgbClr val="FFFFFF"/>
                     </a:solidFill>
                   </a:tcPr>
                 </a:tc>
@@ -12933,7 +13383,7 @@
                       <a:tailEnd type="none" w="med" len="med"/>
                     </a:lnB>
                     <a:solidFill>
-                      <a:srgbClr val="F0F4F5"/>
+                      <a:srgbClr val="FFFFFF"/>
                     </a:solidFill>
                   </a:tcPr>
                 </a:tc>
@@ -13001,7 +13451,7 @@
                       <a:tailEnd type="none" w="med" len="med"/>
                     </a:lnB>
                     <a:solidFill>
-                      <a:srgbClr val="F0F4F5"/>
+                      <a:srgbClr val="FFFFFF"/>
                     </a:solidFill>
                   </a:tcPr>
                 </a:tc>
@@ -13071,7 +13521,7 @@
                       <a:tailEnd type="none" w="med" len="med"/>
                     </a:lnB>
                     <a:solidFill>
-                      <a:srgbClr val="FFFFFF"/>
+                      <a:srgbClr val="F0F4F5"/>
                     </a:solidFill>
                   </a:tcPr>
                 </a:tc>
@@ -13139,7 +13589,7 @@
                       <a:tailEnd type="none" w="med" len="med"/>
                     </a:lnB>
                     <a:solidFill>
-                      <a:srgbClr val="FFFFFF"/>
+                      <a:srgbClr val="F0F4F5"/>
                     </a:solidFill>
                   </a:tcPr>
                 </a:tc>
@@ -13207,6 +13657,280 @@
                       <a:tailEnd type="none" w="med" len="med"/>
                     </a:lnB>
                     <a:solidFill>
+                      <a:srgbClr val="F0F4F5"/>
+                    </a:solidFill>
+                  </a:tcPr>
+                </a:tc>
+                <a:tc>
+                  <a:txBody>
+                    <a:bodyPr/>
+                    <a:lstStyle/>
+                    <a:p>
+                      <a:pPr algn="r" indent="0" marL="0">
+                        <a:buNone/>
+                      </a:pPr>
+                      <a:r>
+                        <a:rPr lang="en-US" sz="1000" b="1" dirty="0">
+                          <a:solidFill>
+                            <a:srgbClr val="0B2A3D"/>
+                          </a:solidFill>
+                          <a:latin typeface="Calibri" pitchFamily="34" charset="0"/>
+                          <a:ea typeface="Calibri" pitchFamily="34" charset="-122"/>
+                          <a:cs typeface="Calibri" pitchFamily="34" charset="-120"/>
+                        </a:rPr>
+                        <a:t>US$ 447,3 mil</a:t>
+                      </a:r>
+                      <a:endParaRPr lang="en-US" sz="1000" dirty="0">
+                        <a:latin typeface="Calibri" charset="0"/>
+                        <a:ea typeface="Calibri" charset="0"/>
+                        <a:cs typeface="Calibri" charset="0"/>
+                      </a:endParaRPr>
+                    </a:p>
+                  </a:txBody>
+                  <a:tcPr marL="91440" marR="91440" marT="45720" marB="45720" anchor="ctr">
+                    <a:lnL w="6350" cap="flat" cmpd="sng" algn="ctr">
+                      <a:solidFill>
+                        <a:srgbClr val="E3E8E9"/>
+                      </a:solidFill>
+                      <a:prstDash val="solid"/>
+                      <a:round/>
+                      <a:headEnd type="none" w="med" len="med"/>
+                      <a:tailEnd type="none" w="med" len="med"/>
+                    </a:lnL>
+                    <a:lnR w="6350" cap="flat" cmpd="sng" algn="ctr">
+                      <a:solidFill>
+                        <a:srgbClr val="E3E8E9"/>
+                      </a:solidFill>
+                      <a:prstDash val="solid"/>
+                      <a:round/>
+                      <a:headEnd type="none" w="med" len="med"/>
+                      <a:tailEnd type="none" w="med" len="med"/>
+                    </a:lnR>
+                    <a:lnT w="6350" cap="flat" cmpd="sng" algn="ctr">
+                      <a:solidFill>
+                        <a:srgbClr val="E3E8E9"/>
+                      </a:solidFill>
+                      <a:prstDash val="solid"/>
+                      <a:round/>
+                      <a:headEnd type="none" w="med" len="med"/>
+                      <a:tailEnd type="none" w="med" len="med"/>
+                    </a:lnT>
+                    <a:lnB w="6350" cap="flat" cmpd="sng" algn="ctr">
+                      <a:solidFill>
+                        <a:srgbClr val="E3E8E9"/>
+                      </a:solidFill>
+                      <a:prstDash val="solid"/>
+                      <a:round/>
+                      <a:headEnd type="none" w="med" len="med"/>
+                      <a:tailEnd type="none" w="med" len="med"/>
+                    </a:lnB>
+                    <a:solidFill>
+                      <a:srgbClr val="F0F4F5"/>
+                    </a:solidFill>
+                  </a:tcPr>
+                </a:tc>
+              </a:tr>
+              <a:tr h="288036">
+                <a:tc>
+                  <a:txBody>
+                    <a:bodyPr/>
+                    <a:lstStyle/>
+                    <a:p>
+                      <a:pPr indent="0" marL="0">
+                        <a:buNone/>
+                      </a:pPr>
+                      <a:r>
+                        <a:rPr lang="en-US" sz="1000" dirty="0">
+                          <a:solidFill>
+                            <a:srgbClr val="1C2B33"/>
+                          </a:solidFill>
+                          <a:latin typeface="Calibri" pitchFamily="34" charset="0"/>
+                          <a:ea typeface="Calibri" pitchFamily="34" charset="-122"/>
+                          <a:cs typeface="Calibri" pitchFamily="34" charset="-120"/>
+                        </a:rPr>
+                        <a:t>Reforma dos banheiros dos camarotes de POLVO A</a:t>
+                      </a:r>
+                      <a:endParaRPr lang="en-US" sz="1000" dirty="0">
+                        <a:latin typeface="Calibri" charset="0"/>
+                        <a:ea typeface="Calibri" charset="0"/>
+                        <a:cs typeface="Calibri" charset="0"/>
+                      </a:endParaRPr>
+                    </a:p>
+                  </a:txBody>
+                  <a:tcPr marL="91440" marR="91440" marT="45720" marB="45720" anchor="ctr">
+                    <a:lnL w="6350" cap="flat" cmpd="sng" algn="ctr">
+                      <a:solidFill>
+                        <a:srgbClr val="E3E8E9"/>
+                      </a:solidFill>
+                      <a:prstDash val="solid"/>
+                      <a:round/>
+                      <a:headEnd type="none" w="med" len="med"/>
+                      <a:tailEnd type="none" w="med" len="med"/>
+                    </a:lnL>
+                    <a:lnR w="6350" cap="flat" cmpd="sng" algn="ctr">
+                      <a:solidFill>
+                        <a:srgbClr val="E3E8E9"/>
+                      </a:solidFill>
+                      <a:prstDash val="solid"/>
+                      <a:round/>
+                      <a:headEnd type="none" w="med" len="med"/>
+                      <a:tailEnd type="none" w="med" len="med"/>
+                    </a:lnR>
+                    <a:lnT w="6350" cap="flat" cmpd="sng" algn="ctr">
+                      <a:solidFill>
+                        <a:srgbClr val="E3E8E9"/>
+                      </a:solidFill>
+                      <a:prstDash val="solid"/>
+                      <a:round/>
+                      <a:headEnd type="none" w="med" len="med"/>
+                      <a:tailEnd type="none" w="med" len="med"/>
+                    </a:lnT>
+                    <a:lnB w="6350" cap="flat" cmpd="sng" algn="ctr">
+                      <a:solidFill>
+                        <a:srgbClr val="E3E8E9"/>
+                      </a:solidFill>
+                      <a:prstDash val="solid"/>
+                      <a:round/>
+                      <a:headEnd type="none" w="med" len="med"/>
+                      <a:tailEnd type="none" w="med" len="med"/>
+                    </a:lnB>
+                    <a:solidFill>
+                      <a:srgbClr val="FFFFFF"/>
+                    </a:solidFill>
+                  </a:tcPr>
+                </a:tc>
+                <a:tc>
+                  <a:txBody>
+                    <a:bodyPr/>
+                    <a:lstStyle/>
+                    <a:p>
+                      <a:pPr indent="0" marL="0">
+                        <a:buNone/>
+                      </a:pPr>
+                      <a:r>
+                        <a:rPr lang="en-US" sz="950" dirty="0">
+                          <a:solidFill>
+                            <a:srgbClr val="5B6B73"/>
+                          </a:solidFill>
+                          <a:latin typeface="Calibri" pitchFamily="34" charset="0"/>
+                          <a:ea typeface="Calibri" pitchFamily="34" charset="-122"/>
+                          <a:cs typeface="Calibri" pitchFamily="34" charset="-120"/>
+                        </a:rPr>
+                        <a:t>Rotina Operacional</a:t>
+                      </a:r>
+                      <a:endParaRPr lang="en-US" sz="950" dirty="0">
+                        <a:latin typeface="Calibri" charset="0"/>
+                        <a:ea typeface="Calibri" charset="0"/>
+                        <a:cs typeface="Calibri" charset="0"/>
+                      </a:endParaRPr>
+                    </a:p>
+                  </a:txBody>
+                  <a:tcPr marL="91440" marR="91440" marT="45720" marB="45720" anchor="ctr">
+                    <a:lnL w="6350" cap="flat" cmpd="sng" algn="ctr">
+                      <a:solidFill>
+                        <a:srgbClr val="E3E8E9"/>
+                      </a:solidFill>
+                      <a:prstDash val="solid"/>
+                      <a:round/>
+                      <a:headEnd type="none" w="med" len="med"/>
+                      <a:tailEnd type="none" w="med" len="med"/>
+                    </a:lnL>
+                    <a:lnR w="6350" cap="flat" cmpd="sng" algn="ctr">
+                      <a:solidFill>
+                        <a:srgbClr val="E3E8E9"/>
+                      </a:solidFill>
+                      <a:prstDash val="solid"/>
+                      <a:round/>
+                      <a:headEnd type="none" w="med" len="med"/>
+                      <a:tailEnd type="none" w="med" len="med"/>
+                    </a:lnR>
+                    <a:lnT w="6350" cap="flat" cmpd="sng" algn="ctr">
+                      <a:solidFill>
+                        <a:srgbClr val="E3E8E9"/>
+                      </a:solidFill>
+                      <a:prstDash val="solid"/>
+                      <a:round/>
+                      <a:headEnd type="none" w="med" len="med"/>
+                      <a:tailEnd type="none" w="med" len="med"/>
+                    </a:lnT>
+                    <a:lnB w="6350" cap="flat" cmpd="sng" algn="ctr">
+                      <a:solidFill>
+                        <a:srgbClr val="E3E8E9"/>
+                      </a:solidFill>
+                      <a:prstDash val="solid"/>
+                      <a:round/>
+                      <a:headEnd type="none" w="med" len="med"/>
+                      <a:tailEnd type="none" w="med" len="med"/>
+                    </a:lnB>
+                    <a:solidFill>
+                      <a:srgbClr val="FFFFFF"/>
+                    </a:solidFill>
+                  </a:tcPr>
+                </a:tc>
+                <a:tc>
+                  <a:txBody>
+                    <a:bodyPr/>
+                    <a:lstStyle/>
+                    <a:p>
+                      <a:pPr indent="0" marL="0">
+                        <a:buNone/>
+                      </a:pPr>
+                      <a:r>
+                        <a:rPr lang="en-US" sz="950" dirty="0">
+                          <a:solidFill>
+                            <a:srgbClr val="5B6B73"/>
+                          </a:solidFill>
+                          <a:latin typeface="Calibri" pitchFamily="34" charset="0"/>
+                          <a:ea typeface="Calibri" pitchFamily="34" charset="-122"/>
+                          <a:cs typeface="Calibri" pitchFamily="34" charset="-120"/>
+                        </a:rPr>
+                        <a:t>ADM - Administrativo</a:t>
+                      </a:r>
+                      <a:endParaRPr lang="en-US" sz="950" dirty="0">
+                        <a:latin typeface="Calibri" charset="0"/>
+                        <a:ea typeface="Calibri" charset="0"/>
+                        <a:cs typeface="Calibri" charset="0"/>
+                      </a:endParaRPr>
+                    </a:p>
+                  </a:txBody>
+                  <a:tcPr marL="91440" marR="91440" marT="45720" marB="45720" anchor="ctr">
+                    <a:lnL w="6350" cap="flat" cmpd="sng" algn="ctr">
+                      <a:solidFill>
+                        <a:srgbClr val="E3E8E9"/>
+                      </a:solidFill>
+                      <a:prstDash val="solid"/>
+                      <a:round/>
+                      <a:headEnd type="none" w="med" len="med"/>
+                      <a:tailEnd type="none" w="med" len="med"/>
+                    </a:lnL>
+                    <a:lnR w="6350" cap="flat" cmpd="sng" algn="ctr">
+                      <a:solidFill>
+                        <a:srgbClr val="E3E8E9"/>
+                      </a:solidFill>
+                      <a:prstDash val="solid"/>
+                      <a:round/>
+                      <a:headEnd type="none" w="med" len="med"/>
+                      <a:tailEnd type="none" w="med" len="med"/>
+                    </a:lnR>
+                    <a:lnT w="6350" cap="flat" cmpd="sng" algn="ctr">
+                      <a:solidFill>
+                        <a:srgbClr val="E3E8E9"/>
+                      </a:solidFill>
+                      <a:prstDash val="solid"/>
+                      <a:round/>
+                      <a:headEnd type="none" w="med" len="med"/>
+                      <a:tailEnd type="none" w="med" len="med"/>
+                    </a:lnT>
+                    <a:lnB w="6350" cap="flat" cmpd="sng" algn="ctr">
+                      <a:solidFill>
+                        <a:srgbClr val="E3E8E9"/>
+                      </a:solidFill>
+                      <a:prstDash val="solid"/>
+                      <a:round/>
+                      <a:headEnd type="none" w="med" len="med"/>
+                      <a:tailEnd type="none" w="med" len="med"/>
+                    </a:lnB>
+                    <a:solidFill>
                       <a:srgbClr val="FFFFFF"/>
                     </a:solidFill>
                   </a:tcPr>
@@ -13228,7 +13952,7 @@
                           <a:ea typeface="Calibri" pitchFamily="34" charset="-122"/>
                           <a:cs typeface="Calibri" pitchFamily="34" charset="-120"/>
                         </a:rPr>
-                        <a:t>US$ 447,3 mil</a:t>
+                        <a:t>US$ 298,0 mil</a:t>
                       </a:r>
                       <a:endParaRPr lang="en-US" sz="1000" dirty="0">
                         <a:latin typeface="Calibri" charset="0"/>
@@ -14651,554 +15375,6 @@
                 </a:tc>
               </a:tr>
               <a:tr h="288036">
-                <a:tc>
-                  <a:txBody>
-                    <a:bodyPr/>
-                    <a:lstStyle/>
-                    <a:p>
-                      <a:pPr indent="0" marL="0">
-                        <a:buNone/>
-                      </a:pPr>
-                      <a:r>
-                        <a:rPr lang="en-US" sz="1000" dirty="0">
-                          <a:solidFill>
-                            <a:srgbClr val="1C2B33"/>
-                          </a:solidFill>
-                          <a:latin typeface="Calibri" pitchFamily="34" charset="0"/>
-                          <a:ea typeface="Calibri" pitchFamily="34" charset="-122"/>
-                          <a:cs typeface="Calibri" pitchFamily="34" charset="-120"/>
-                        </a:rPr>
-                        <a:t>TA - Desmobilização</a:t>
-                      </a:r>
-                      <a:endParaRPr lang="en-US" sz="1000" dirty="0">
-                        <a:latin typeface="Calibri" charset="0"/>
-                        <a:ea typeface="Calibri" charset="0"/>
-                        <a:cs typeface="Calibri" charset="0"/>
-                      </a:endParaRPr>
-                    </a:p>
-                  </a:txBody>
-                  <a:tcPr marL="91440" marR="91440" marT="45720" marB="45720" anchor="ctr">
-                    <a:lnL w="6350" cap="flat" cmpd="sng" algn="ctr">
-                      <a:solidFill>
-                        <a:srgbClr val="E3E8E9"/>
-                      </a:solidFill>
-                      <a:prstDash val="solid"/>
-                      <a:round/>
-                      <a:headEnd type="none" w="med" len="med"/>
-                      <a:tailEnd type="none" w="med" len="med"/>
-                    </a:lnL>
-                    <a:lnR w="6350" cap="flat" cmpd="sng" algn="ctr">
-                      <a:solidFill>
-                        <a:srgbClr val="E3E8E9"/>
-                      </a:solidFill>
-                      <a:prstDash val="solid"/>
-                      <a:round/>
-                      <a:headEnd type="none" w="med" len="med"/>
-                      <a:tailEnd type="none" w="med" len="med"/>
-                    </a:lnR>
-                    <a:lnT w="6350" cap="flat" cmpd="sng" algn="ctr">
-                      <a:solidFill>
-                        <a:srgbClr val="E3E8E9"/>
-                      </a:solidFill>
-                      <a:prstDash val="solid"/>
-                      <a:round/>
-                      <a:headEnd type="none" w="med" len="med"/>
-                      <a:tailEnd type="none" w="med" len="med"/>
-                    </a:lnT>
-                    <a:lnB w="6350" cap="flat" cmpd="sng" algn="ctr">
-                      <a:solidFill>
-                        <a:srgbClr val="E3E8E9"/>
-                      </a:solidFill>
-                      <a:prstDash val="solid"/>
-                      <a:round/>
-                      <a:headEnd type="none" w="med" len="med"/>
-                      <a:tailEnd type="none" w="med" len="med"/>
-                    </a:lnB>
-                    <a:solidFill>
-                      <a:srgbClr val="FFFFFF"/>
-                    </a:solidFill>
-                  </a:tcPr>
-                </a:tc>
-                <a:tc>
-                  <a:txBody>
-                    <a:bodyPr/>
-                    <a:lstStyle/>
-                    <a:p>
-                      <a:pPr indent="0" marL="0">
-                        <a:buNone/>
-                      </a:pPr>
-                      <a:r>
-                        <a:rPr lang="en-US" sz="950" dirty="0">
-                          <a:solidFill>
-                            <a:srgbClr val="5B6B73"/>
-                          </a:solidFill>
-                          <a:latin typeface="Calibri" pitchFamily="34" charset="0"/>
-                          <a:ea typeface="Calibri" pitchFamily="34" charset="-122"/>
-                          <a:cs typeface="Calibri" pitchFamily="34" charset="-120"/>
-                        </a:rPr>
-                        <a:t>Eficiência de Produção</a:t>
-                      </a:r>
-                      <a:endParaRPr lang="en-US" sz="950" dirty="0">
-                        <a:latin typeface="Calibri" charset="0"/>
-                        <a:ea typeface="Calibri" charset="0"/>
-                        <a:cs typeface="Calibri" charset="0"/>
-                      </a:endParaRPr>
-                    </a:p>
-                  </a:txBody>
-                  <a:tcPr marL="91440" marR="91440" marT="45720" marB="45720" anchor="ctr">
-                    <a:lnL w="6350" cap="flat" cmpd="sng" algn="ctr">
-                      <a:solidFill>
-                        <a:srgbClr val="E3E8E9"/>
-                      </a:solidFill>
-                      <a:prstDash val="solid"/>
-                      <a:round/>
-                      <a:headEnd type="none" w="med" len="med"/>
-                      <a:tailEnd type="none" w="med" len="med"/>
-                    </a:lnL>
-                    <a:lnR w="6350" cap="flat" cmpd="sng" algn="ctr">
-                      <a:solidFill>
-                        <a:srgbClr val="E3E8E9"/>
-                      </a:solidFill>
-                      <a:prstDash val="solid"/>
-                      <a:round/>
-                      <a:headEnd type="none" w="med" len="med"/>
-                      <a:tailEnd type="none" w="med" len="med"/>
-                    </a:lnR>
-                    <a:lnT w="6350" cap="flat" cmpd="sng" algn="ctr">
-                      <a:solidFill>
-                        <a:srgbClr val="E3E8E9"/>
-                      </a:solidFill>
-                      <a:prstDash val="solid"/>
-                      <a:round/>
-                      <a:headEnd type="none" w="med" len="med"/>
-                      <a:tailEnd type="none" w="med" len="med"/>
-                    </a:lnT>
-                    <a:lnB w="6350" cap="flat" cmpd="sng" algn="ctr">
-                      <a:solidFill>
-                        <a:srgbClr val="E3E8E9"/>
-                      </a:solidFill>
-                      <a:prstDash val="solid"/>
-                      <a:round/>
-                      <a:headEnd type="none" w="med" len="med"/>
-                      <a:tailEnd type="none" w="med" len="med"/>
-                    </a:lnB>
-                    <a:solidFill>
-                      <a:srgbClr val="FFFFFF"/>
-                    </a:solidFill>
-                  </a:tcPr>
-                </a:tc>
-                <a:tc>
-                  <a:txBody>
-                    <a:bodyPr/>
-                    <a:lstStyle/>
-                    <a:p>
-                      <a:pPr indent="0" marL="0">
-                        <a:buNone/>
-                      </a:pPr>
-                      <a:r>
-                        <a:rPr lang="en-US" sz="950" dirty="0">
-                          <a:solidFill>
-                            <a:srgbClr val="5B6B73"/>
-                          </a:solidFill>
-                          <a:latin typeface="Calibri" pitchFamily="34" charset="0"/>
-                          <a:ea typeface="Calibri" pitchFamily="34" charset="-122"/>
-                          <a:cs typeface="Calibri" pitchFamily="34" charset="-120"/>
-                        </a:rPr>
-                        <a:t>TA - Parada Programada</a:t>
-                      </a:r>
-                      <a:endParaRPr lang="en-US" sz="950" dirty="0">
-                        <a:latin typeface="Calibri" charset="0"/>
-                        <a:ea typeface="Calibri" charset="0"/>
-                        <a:cs typeface="Calibri" charset="0"/>
-                      </a:endParaRPr>
-                    </a:p>
-                  </a:txBody>
-                  <a:tcPr marL="91440" marR="91440" marT="45720" marB="45720" anchor="ctr">
-                    <a:lnL w="6350" cap="flat" cmpd="sng" algn="ctr">
-                      <a:solidFill>
-                        <a:srgbClr val="E3E8E9"/>
-                      </a:solidFill>
-                      <a:prstDash val="solid"/>
-                      <a:round/>
-                      <a:headEnd type="none" w="med" len="med"/>
-                      <a:tailEnd type="none" w="med" len="med"/>
-                    </a:lnL>
-                    <a:lnR w="6350" cap="flat" cmpd="sng" algn="ctr">
-                      <a:solidFill>
-                        <a:srgbClr val="E3E8E9"/>
-                      </a:solidFill>
-                      <a:prstDash val="solid"/>
-                      <a:round/>
-                      <a:headEnd type="none" w="med" len="med"/>
-                      <a:tailEnd type="none" w="med" len="med"/>
-                    </a:lnR>
-                    <a:lnT w="6350" cap="flat" cmpd="sng" algn="ctr">
-                      <a:solidFill>
-                        <a:srgbClr val="E3E8E9"/>
-                      </a:solidFill>
-                      <a:prstDash val="solid"/>
-                      <a:round/>
-                      <a:headEnd type="none" w="med" len="med"/>
-                      <a:tailEnd type="none" w="med" len="med"/>
-                    </a:lnT>
-                    <a:lnB w="6350" cap="flat" cmpd="sng" algn="ctr">
-                      <a:solidFill>
-                        <a:srgbClr val="E3E8E9"/>
-                      </a:solidFill>
-                      <a:prstDash val="solid"/>
-                      <a:round/>
-                      <a:headEnd type="none" w="med" len="med"/>
-                      <a:tailEnd type="none" w="med" len="med"/>
-                    </a:lnB>
-                    <a:solidFill>
-                      <a:srgbClr val="FFFFFF"/>
-                    </a:solidFill>
-                  </a:tcPr>
-                </a:tc>
-                <a:tc>
-                  <a:txBody>
-                    <a:bodyPr/>
-                    <a:lstStyle/>
-                    <a:p>
-                      <a:pPr algn="r" indent="0" marL="0">
-                        <a:buNone/>
-                      </a:pPr>
-                      <a:r>
-                        <a:rPr lang="en-US" sz="1000" b="1" dirty="0">
-                          <a:solidFill>
-                            <a:srgbClr val="0B2A3D"/>
-                          </a:solidFill>
-                          <a:latin typeface="Calibri" pitchFamily="34" charset="0"/>
-                          <a:ea typeface="Calibri" pitchFamily="34" charset="-122"/>
-                          <a:cs typeface="Calibri" pitchFamily="34" charset="-120"/>
-                        </a:rPr>
-                        <a:t>US$ 162,1 mil</a:t>
-                      </a:r>
-                      <a:endParaRPr lang="en-US" sz="1000" dirty="0">
-                        <a:latin typeface="Calibri" charset="0"/>
-                        <a:ea typeface="Calibri" charset="0"/>
-                        <a:cs typeface="Calibri" charset="0"/>
-                      </a:endParaRPr>
-                    </a:p>
-                  </a:txBody>
-                  <a:tcPr marL="91440" marR="91440" marT="45720" marB="45720" anchor="ctr">
-                    <a:lnL w="6350" cap="flat" cmpd="sng" algn="ctr">
-                      <a:solidFill>
-                        <a:srgbClr val="E3E8E9"/>
-                      </a:solidFill>
-                      <a:prstDash val="solid"/>
-                      <a:round/>
-                      <a:headEnd type="none" w="med" len="med"/>
-                      <a:tailEnd type="none" w="med" len="med"/>
-                    </a:lnL>
-                    <a:lnR w="6350" cap="flat" cmpd="sng" algn="ctr">
-                      <a:solidFill>
-                        <a:srgbClr val="E3E8E9"/>
-                      </a:solidFill>
-                      <a:prstDash val="solid"/>
-                      <a:round/>
-                      <a:headEnd type="none" w="med" len="med"/>
-                      <a:tailEnd type="none" w="med" len="med"/>
-                    </a:lnR>
-                    <a:lnT w="6350" cap="flat" cmpd="sng" algn="ctr">
-                      <a:solidFill>
-                        <a:srgbClr val="E3E8E9"/>
-                      </a:solidFill>
-                      <a:prstDash val="solid"/>
-                      <a:round/>
-                      <a:headEnd type="none" w="med" len="med"/>
-                      <a:tailEnd type="none" w="med" len="med"/>
-                    </a:lnT>
-                    <a:lnB w="6350" cap="flat" cmpd="sng" algn="ctr">
-                      <a:solidFill>
-                        <a:srgbClr val="E3E8E9"/>
-                      </a:solidFill>
-                      <a:prstDash val="solid"/>
-                      <a:round/>
-                      <a:headEnd type="none" w="med" len="med"/>
-                      <a:tailEnd type="none" w="med" len="med"/>
-                    </a:lnB>
-                    <a:solidFill>
-                      <a:srgbClr val="FFFFFF"/>
-                    </a:solidFill>
-                  </a:tcPr>
-                </a:tc>
-              </a:tr>
-              <a:tr h="288036">
-                <a:tc>
-                  <a:txBody>
-                    <a:bodyPr/>
-                    <a:lstStyle/>
-                    <a:p>
-                      <a:pPr indent="0" marL="0">
-                        <a:buNone/>
-                      </a:pPr>
-                      <a:r>
-                        <a:rPr lang="en-US" sz="1000" dirty="0">
-                          <a:solidFill>
-                            <a:srgbClr val="1C2B33"/>
-                          </a:solidFill>
-                          <a:latin typeface="Calibri" pitchFamily="34" charset="0"/>
-                          <a:ea typeface="Calibri" pitchFamily="34" charset="-122"/>
-                          <a:cs typeface="Calibri" pitchFamily="34" charset="-120"/>
-                        </a:rPr>
-                        <a:t>Implantação do projeto 'Muster Digital'</a:t>
-                      </a:r>
-                      <a:endParaRPr lang="en-US" sz="1000" dirty="0">
-                        <a:latin typeface="Calibri" charset="0"/>
-                        <a:ea typeface="Calibri" charset="0"/>
-                        <a:cs typeface="Calibri" charset="0"/>
-                      </a:endParaRPr>
-                    </a:p>
-                  </a:txBody>
-                  <a:tcPr marL="91440" marR="91440" marT="45720" marB="45720" anchor="ctr">
-                    <a:lnL w="6350" cap="flat" cmpd="sng" algn="ctr">
-                      <a:solidFill>
-                        <a:srgbClr val="E3E8E9"/>
-                      </a:solidFill>
-                      <a:prstDash val="solid"/>
-                      <a:round/>
-                      <a:headEnd type="none" w="med" len="med"/>
-                      <a:tailEnd type="none" w="med" len="med"/>
-                    </a:lnL>
-                    <a:lnR w="6350" cap="flat" cmpd="sng" algn="ctr">
-                      <a:solidFill>
-                        <a:srgbClr val="E3E8E9"/>
-                      </a:solidFill>
-                      <a:prstDash val="solid"/>
-                      <a:round/>
-                      <a:headEnd type="none" w="med" len="med"/>
-                      <a:tailEnd type="none" w="med" len="med"/>
-                    </a:lnR>
-                    <a:lnT w="6350" cap="flat" cmpd="sng" algn="ctr">
-                      <a:solidFill>
-                        <a:srgbClr val="E3E8E9"/>
-                      </a:solidFill>
-                      <a:prstDash val="solid"/>
-                      <a:round/>
-                      <a:headEnd type="none" w="med" len="med"/>
-                      <a:tailEnd type="none" w="med" len="med"/>
-                    </a:lnT>
-                    <a:lnB w="6350" cap="flat" cmpd="sng" algn="ctr">
-                      <a:solidFill>
-                        <a:srgbClr val="E3E8E9"/>
-                      </a:solidFill>
-                      <a:prstDash val="solid"/>
-                      <a:round/>
-                      <a:headEnd type="none" w="med" len="med"/>
-                      <a:tailEnd type="none" w="med" len="med"/>
-                    </a:lnB>
-                    <a:solidFill>
-                      <a:srgbClr val="F0F4F5"/>
-                    </a:solidFill>
-                  </a:tcPr>
-                </a:tc>
-                <a:tc>
-                  <a:txBody>
-                    <a:bodyPr/>
-                    <a:lstStyle/>
-                    <a:p>
-                      <a:pPr indent="0" marL="0">
-                        <a:buNone/>
-                      </a:pPr>
-                      <a:r>
-                        <a:rPr lang="en-US" sz="950" dirty="0">
-                          <a:solidFill>
-                            <a:srgbClr val="5B6B73"/>
-                          </a:solidFill>
-                          <a:latin typeface="Calibri" pitchFamily="34" charset="0"/>
-                          <a:ea typeface="Calibri" pitchFamily="34" charset="-122"/>
-                          <a:cs typeface="Calibri" pitchFamily="34" charset="-120"/>
-                        </a:rPr>
-                        <a:t>Bem Estar/Segurança</a:t>
-                      </a:r>
-                      <a:endParaRPr lang="en-US" sz="950" dirty="0">
-                        <a:latin typeface="Calibri" charset="0"/>
-                        <a:ea typeface="Calibri" charset="0"/>
-                        <a:cs typeface="Calibri" charset="0"/>
-                      </a:endParaRPr>
-                    </a:p>
-                  </a:txBody>
-                  <a:tcPr marL="91440" marR="91440" marT="45720" marB="45720" anchor="ctr">
-                    <a:lnL w="6350" cap="flat" cmpd="sng" algn="ctr">
-                      <a:solidFill>
-                        <a:srgbClr val="E3E8E9"/>
-                      </a:solidFill>
-                      <a:prstDash val="solid"/>
-                      <a:round/>
-                      <a:headEnd type="none" w="med" len="med"/>
-                      <a:tailEnd type="none" w="med" len="med"/>
-                    </a:lnL>
-                    <a:lnR w="6350" cap="flat" cmpd="sng" algn="ctr">
-                      <a:solidFill>
-                        <a:srgbClr val="E3E8E9"/>
-                      </a:solidFill>
-                      <a:prstDash val="solid"/>
-                      <a:round/>
-                      <a:headEnd type="none" w="med" len="med"/>
-                      <a:tailEnd type="none" w="med" len="med"/>
-                    </a:lnR>
-                    <a:lnT w="6350" cap="flat" cmpd="sng" algn="ctr">
-                      <a:solidFill>
-                        <a:srgbClr val="E3E8E9"/>
-                      </a:solidFill>
-                      <a:prstDash val="solid"/>
-                      <a:round/>
-                      <a:headEnd type="none" w="med" len="med"/>
-                      <a:tailEnd type="none" w="med" len="med"/>
-                    </a:lnT>
-                    <a:lnB w="6350" cap="flat" cmpd="sng" algn="ctr">
-                      <a:solidFill>
-                        <a:srgbClr val="E3E8E9"/>
-                      </a:solidFill>
-                      <a:prstDash val="solid"/>
-                      <a:round/>
-                      <a:headEnd type="none" w="med" len="med"/>
-                      <a:tailEnd type="none" w="med" len="med"/>
-                    </a:lnB>
-                    <a:solidFill>
-                      <a:srgbClr val="F0F4F5"/>
-                    </a:solidFill>
-                  </a:tcPr>
-                </a:tc>
-                <a:tc>
-                  <a:txBody>
-                    <a:bodyPr/>
-                    <a:lstStyle/>
-                    <a:p>
-                      <a:pPr indent="0" marL="0">
-                        <a:buNone/>
-                      </a:pPr>
-                      <a:r>
-                        <a:rPr lang="en-US" sz="950" dirty="0">
-                          <a:solidFill>
-                            <a:srgbClr val="5B6B73"/>
-                          </a:solidFill>
-                          <a:latin typeface="Calibri" pitchFamily="34" charset="0"/>
-                          <a:ea typeface="Calibri" pitchFamily="34" charset="-122"/>
-                          <a:cs typeface="Calibri" pitchFamily="34" charset="-120"/>
-                        </a:rPr>
-                        <a:t>Saúde e Segurança Ocupacional</a:t>
-                      </a:r>
-                      <a:endParaRPr lang="en-US" sz="950" dirty="0">
-                        <a:latin typeface="Calibri" charset="0"/>
-                        <a:ea typeface="Calibri" charset="0"/>
-                        <a:cs typeface="Calibri" charset="0"/>
-                      </a:endParaRPr>
-                    </a:p>
-                  </a:txBody>
-                  <a:tcPr marL="91440" marR="91440" marT="45720" marB="45720" anchor="ctr">
-                    <a:lnL w="6350" cap="flat" cmpd="sng" algn="ctr">
-                      <a:solidFill>
-                        <a:srgbClr val="E3E8E9"/>
-                      </a:solidFill>
-                      <a:prstDash val="solid"/>
-                      <a:round/>
-                      <a:headEnd type="none" w="med" len="med"/>
-                      <a:tailEnd type="none" w="med" len="med"/>
-                    </a:lnL>
-                    <a:lnR w="6350" cap="flat" cmpd="sng" algn="ctr">
-                      <a:solidFill>
-                        <a:srgbClr val="E3E8E9"/>
-                      </a:solidFill>
-                      <a:prstDash val="solid"/>
-                      <a:round/>
-                      <a:headEnd type="none" w="med" len="med"/>
-                      <a:tailEnd type="none" w="med" len="med"/>
-                    </a:lnR>
-                    <a:lnT w="6350" cap="flat" cmpd="sng" algn="ctr">
-                      <a:solidFill>
-                        <a:srgbClr val="E3E8E9"/>
-                      </a:solidFill>
-                      <a:prstDash val="solid"/>
-                      <a:round/>
-                      <a:headEnd type="none" w="med" len="med"/>
-                      <a:tailEnd type="none" w="med" len="med"/>
-                    </a:lnT>
-                    <a:lnB w="6350" cap="flat" cmpd="sng" algn="ctr">
-                      <a:solidFill>
-                        <a:srgbClr val="E3E8E9"/>
-                      </a:solidFill>
-                      <a:prstDash val="solid"/>
-                      <a:round/>
-                      <a:headEnd type="none" w="med" len="med"/>
-                      <a:tailEnd type="none" w="med" len="med"/>
-                    </a:lnB>
-                    <a:solidFill>
-                      <a:srgbClr val="F0F4F5"/>
-                    </a:solidFill>
-                  </a:tcPr>
-                </a:tc>
-                <a:tc>
-                  <a:txBody>
-                    <a:bodyPr/>
-                    <a:lstStyle/>
-                    <a:p>
-                      <a:pPr algn="r" indent="0" marL="0">
-                        <a:buNone/>
-                      </a:pPr>
-                      <a:r>
-                        <a:rPr lang="en-US" sz="1000" b="1" dirty="0">
-                          <a:solidFill>
-                            <a:srgbClr val="0B2A3D"/>
-                          </a:solidFill>
-                          <a:latin typeface="Calibri" pitchFamily="34" charset="0"/>
-                          <a:ea typeface="Calibri" pitchFamily="34" charset="-122"/>
-                          <a:cs typeface="Calibri" pitchFamily="34" charset="-120"/>
-                        </a:rPr>
-                        <a:t>US$ 150,0 mil</a:t>
-                      </a:r>
-                      <a:endParaRPr lang="en-US" sz="1000" dirty="0">
-                        <a:latin typeface="Calibri" charset="0"/>
-                        <a:ea typeface="Calibri" charset="0"/>
-                        <a:cs typeface="Calibri" charset="0"/>
-                      </a:endParaRPr>
-                    </a:p>
-                  </a:txBody>
-                  <a:tcPr marL="91440" marR="91440" marT="45720" marB="45720" anchor="ctr">
-                    <a:lnL w="6350" cap="flat" cmpd="sng" algn="ctr">
-                      <a:solidFill>
-                        <a:srgbClr val="E3E8E9"/>
-                      </a:solidFill>
-                      <a:prstDash val="solid"/>
-                      <a:round/>
-                      <a:headEnd type="none" w="med" len="med"/>
-                      <a:tailEnd type="none" w="med" len="med"/>
-                    </a:lnL>
-                    <a:lnR w="6350" cap="flat" cmpd="sng" algn="ctr">
-                      <a:solidFill>
-                        <a:srgbClr val="E3E8E9"/>
-                      </a:solidFill>
-                      <a:prstDash val="solid"/>
-                      <a:round/>
-                      <a:headEnd type="none" w="med" len="med"/>
-                      <a:tailEnd type="none" w="med" len="med"/>
-                    </a:lnR>
-                    <a:lnT w="6350" cap="flat" cmpd="sng" algn="ctr">
-                      <a:solidFill>
-                        <a:srgbClr val="E3E8E9"/>
-                      </a:solidFill>
-                      <a:prstDash val="solid"/>
-                      <a:round/>
-                      <a:headEnd type="none" w="med" len="med"/>
-                      <a:tailEnd type="none" w="med" len="med"/>
-                    </a:lnT>
-                    <a:lnB w="6350" cap="flat" cmpd="sng" algn="ctr">
-                      <a:solidFill>
-                        <a:srgbClr val="E3E8E9"/>
-                      </a:solidFill>
-                      <a:prstDash val="solid"/>
-                      <a:round/>
-                      <a:headEnd type="none" w="med" len="med"/>
-                      <a:tailEnd type="none" w="med" len="med"/>
-                    </a:lnB>
-                    <a:solidFill>
-                      <a:srgbClr val="F0F4F5"/>
-                    </a:solidFill>
-                  </a:tcPr>
-                </a:tc>
-              </a:tr>
-              <a:tr h="288036">
                 <a:tc gridSpan="3">
                   <a:txBody>
                     <a:bodyPr/>
@@ -15216,7 +15392,7 @@
                           <a:ea typeface="Calibri" pitchFamily="34" charset="-122"/>
                           <a:cs typeface="Calibri" pitchFamily="34" charset="-120"/>
                         </a:rPr>
-                        <a:t>Outros 26 escopos (itens de menor valor individual)</a:t>
+                        <a:t>Outros 25 escopos (itens de menor valor individual)</a:t>
                       </a:r>
                       <a:endParaRPr lang="en-US" sz="950" dirty="0">
                         <a:latin typeface="Calibri" charset="0"/>
@@ -15290,7 +15466,7 @@
                           <a:ea typeface="Calibri" pitchFamily="34" charset="-122"/>
                           <a:cs typeface="Calibri" pitchFamily="34" charset="-120"/>
                         </a:rPr>
-                        <a:t>US$ 1,0 mi</a:t>
+                        <a:t>US$ 1,3 mi</a:t>
                       </a:r>
                       <a:endParaRPr lang="en-US" sz="1000" dirty="0">
                         <a:latin typeface="Calibri" charset="0"/>
